--- a/Research2.pptx
+++ b/Research2.pptx
@@ -199,7 +199,7 @@
           <a:p>
             <a:fld id="{CB883E1A-24A0-4B05-AA4C-56243B89A804}" type="datetimeFigureOut">
               <a:rPr lang="zh-CN" altLang="en-US" smtClean="0"/>
-              <a:t>2025/4/1</a:t>
+              <a:t>2025/4/2</a:t>
             </a:fld>
             <a:endParaRPr lang="zh-CN" altLang="en-US"/>
           </a:p>
@@ -637,7 +637,7 @@
           <a:p>
             <a:fld id="{3800F3C6-200C-4F82-8057-425A24E0A80A}" type="datetimeFigureOut">
               <a:rPr lang="zh-CN" altLang="en-US" smtClean="0"/>
-              <a:t>2025/4/1</a:t>
+              <a:t>2025/4/2</a:t>
             </a:fld>
             <a:endParaRPr lang="zh-CN" altLang="en-US"/>
           </a:p>
@@ -952,7 +952,7 @@
           <a:p>
             <a:fld id="{3800F3C6-200C-4F82-8057-425A24E0A80A}" type="datetimeFigureOut">
               <a:rPr lang="zh-CN" altLang="en-US" smtClean="0"/>
-              <a:t>2025/4/1</a:t>
+              <a:t>2025/4/2</a:t>
             </a:fld>
             <a:endParaRPr lang="zh-CN" altLang="en-US"/>
           </a:p>
@@ -1174,7 +1174,7 @@
           <a:p>
             <a:fld id="{3800F3C6-200C-4F82-8057-425A24E0A80A}" type="datetimeFigureOut">
               <a:rPr lang="zh-CN" altLang="en-US" smtClean="0"/>
-              <a:t>2025/4/1</a:t>
+              <a:t>2025/4/2</a:t>
             </a:fld>
             <a:endParaRPr lang="zh-CN" altLang="en-US"/>
           </a:p>
@@ -1465,7 +1465,7 @@
           <a:p>
             <a:fld id="{3800F3C6-200C-4F82-8057-425A24E0A80A}" type="datetimeFigureOut">
               <a:rPr lang="zh-CN" altLang="en-US" smtClean="0"/>
-              <a:t>2025/4/1</a:t>
+              <a:t>2025/4/2</a:t>
             </a:fld>
             <a:endParaRPr lang="zh-CN" altLang="en-US"/>
           </a:p>
@@ -1919,7 +1919,7 @@
           <a:p>
             <a:fld id="{3800F3C6-200C-4F82-8057-425A24E0A80A}" type="datetimeFigureOut">
               <a:rPr lang="zh-CN" altLang="en-US" smtClean="0"/>
-              <a:t>2025/4/1</a:t>
+              <a:t>2025/4/2</a:t>
             </a:fld>
             <a:endParaRPr lang="zh-CN" altLang="en-US"/>
           </a:p>
@@ -2495,7 +2495,7 @@
           <a:p>
             <a:fld id="{3800F3C6-200C-4F82-8057-425A24E0A80A}" type="datetimeFigureOut">
               <a:rPr lang="zh-CN" altLang="en-US" smtClean="0"/>
-              <a:t>2025/4/1</a:t>
+              <a:t>2025/4/2</a:t>
             </a:fld>
             <a:endParaRPr lang="zh-CN" altLang="en-US"/>
           </a:p>
@@ -3356,7 +3356,7 @@
           <a:p>
             <a:fld id="{3800F3C6-200C-4F82-8057-425A24E0A80A}" type="datetimeFigureOut">
               <a:rPr lang="zh-CN" altLang="en-US" smtClean="0"/>
-              <a:t>2025/4/1</a:t>
+              <a:t>2025/4/2</a:t>
             </a:fld>
             <a:endParaRPr lang="zh-CN" altLang="en-US"/>
           </a:p>
@@ -3561,7 +3561,7 @@
           <a:p>
             <a:fld id="{3800F3C6-200C-4F82-8057-425A24E0A80A}" type="datetimeFigureOut">
               <a:rPr lang="zh-CN" altLang="en-US" smtClean="0"/>
-              <a:t>2025/4/1</a:t>
+              <a:t>2025/4/2</a:t>
             </a:fld>
             <a:endParaRPr lang="zh-CN" altLang="en-US"/>
           </a:p>
@@ -3775,7 +3775,7 @@
           <a:p>
             <a:fld id="{3800F3C6-200C-4F82-8057-425A24E0A80A}" type="datetimeFigureOut">
               <a:rPr lang="zh-CN" altLang="en-US" smtClean="0"/>
-              <a:t>2025/4/1</a:t>
+              <a:t>2025/4/2</a:t>
             </a:fld>
             <a:endParaRPr lang="zh-CN" altLang="en-US"/>
           </a:p>
@@ -3980,7 +3980,7 @@
           <a:p>
             <a:fld id="{3800F3C6-200C-4F82-8057-425A24E0A80A}" type="datetimeFigureOut">
               <a:rPr lang="zh-CN" altLang="en-US" smtClean="0"/>
-              <a:t>2025/4/1</a:t>
+              <a:t>2025/4/2</a:t>
             </a:fld>
             <a:endParaRPr lang="zh-CN" altLang="en-US"/>
           </a:p>
@@ -4260,7 +4260,7 @@
           <a:p>
             <a:fld id="{3800F3C6-200C-4F82-8057-425A24E0A80A}" type="datetimeFigureOut">
               <a:rPr lang="zh-CN" altLang="en-US" smtClean="0"/>
-              <a:t>2025/4/1</a:t>
+              <a:t>2025/4/2</a:t>
             </a:fld>
             <a:endParaRPr lang="zh-CN" altLang="en-US"/>
           </a:p>
@@ -4527,7 +4527,7 @@
           <a:p>
             <a:fld id="{3800F3C6-200C-4F82-8057-425A24E0A80A}" type="datetimeFigureOut">
               <a:rPr lang="zh-CN" altLang="en-US" smtClean="0"/>
-              <a:t>2025/4/1</a:t>
+              <a:t>2025/4/2</a:t>
             </a:fld>
             <a:endParaRPr lang="zh-CN" altLang="en-US"/>
           </a:p>
@@ -4942,7 +4942,7 @@
           <a:p>
             <a:fld id="{3800F3C6-200C-4F82-8057-425A24E0A80A}" type="datetimeFigureOut">
               <a:rPr lang="zh-CN" altLang="en-US" smtClean="0"/>
-              <a:t>2025/4/1</a:t>
+              <a:t>2025/4/2</a:t>
             </a:fld>
             <a:endParaRPr lang="zh-CN" altLang="en-US"/>
           </a:p>
@@ -5090,7 +5090,7 @@
           <a:p>
             <a:fld id="{3800F3C6-200C-4F82-8057-425A24E0A80A}" type="datetimeFigureOut">
               <a:rPr lang="zh-CN" altLang="en-US" smtClean="0"/>
-              <a:t>2025/4/1</a:t>
+              <a:t>2025/4/2</a:t>
             </a:fld>
             <a:endParaRPr lang="zh-CN" altLang="en-US"/>
           </a:p>
@@ -5215,7 +5215,7 @@
           <a:p>
             <a:fld id="{3800F3C6-200C-4F82-8057-425A24E0A80A}" type="datetimeFigureOut">
               <a:rPr lang="zh-CN" altLang="en-US" smtClean="0"/>
-              <a:t>2025/4/1</a:t>
+              <a:t>2025/4/2</a:t>
             </a:fld>
             <a:endParaRPr lang="zh-CN" altLang="en-US"/>
           </a:p>
@@ -5494,7 +5494,7 @@
           <a:p>
             <a:fld id="{3800F3C6-200C-4F82-8057-425A24E0A80A}" type="datetimeFigureOut">
               <a:rPr lang="zh-CN" altLang="en-US" smtClean="0"/>
-              <a:t>2025/4/1</a:t>
+              <a:t>2025/4/2</a:t>
             </a:fld>
             <a:endParaRPr lang="zh-CN" altLang="en-US"/>
           </a:p>
@@ -5809,7 +5809,7 @@
           <a:p>
             <a:fld id="{3800F3C6-200C-4F82-8057-425A24E0A80A}" type="datetimeFigureOut">
               <a:rPr lang="zh-CN" altLang="en-US" smtClean="0"/>
-              <a:t>2025/4/1</a:t>
+              <a:t>2025/4/2</a:t>
             </a:fld>
             <a:endParaRPr lang="zh-CN" altLang="en-US"/>
           </a:p>
@@ -6062,7 +6062,7 @@
           <a:p>
             <a:fld id="{3800F3C6-200C-4F82-8057-425A24E0A80A}" type="datetimeFigureOut">
               <a:rPr lang="zh-CN" altLang="en-US" smtClean="0"/>
-              <a:t>2025/4/1</a:t>
+              <a:t>2025/4/2</a:t>
             </a:fld>
             <a:endParaRPr lang="zh-CN" altLang="en-US"/>
           </a:p>
@@ -6932,18 +6932,11 @@
               <a:buChar char="•"/>
             </a:pPr>
             <a:r>
-              <a:rPr lang="en-US" altLang="ja-JP" dirty="0">
-                <a:latin typeface="Arial" panose="020B0604020202020204" pitchFamily="34" charset="0"/>
-                <a:cs typeface="Arial" panose="020B0604020202020204" pitchFamily="34" charset="0"/>
-              </a:rPr>
-              <a:t>OLAP</a:t>
-            </a:r>
-            <a:r>
               <a:rPr lang="ja-JP" altLang="en-US" dirty="0">
                 <a:latin typeface="Arial" panose="020B0604020202020204" pitchFamily="34" charset="0"/>
                 <a:cs typeface="Arial" panose="020B0604020202020204" pitchFamily="34" charset="0"/>
               </a:rPr>
-              <a:t>分析</a:t>
+              <a:t>統合データ分析システム</a:t>
             </a:r>
             <a:endParaRPr lang="en-US" altLang="ja-JP" dirty="0">
               <a:latin typeface="Arial" panose="020B0604020202020204" pitchFamily="34" charset="0"/>
@@ -7646,7 +7639,13 @@
               <a:rPr lang="ja-JP" altLang="en-US" sz="1600" dirty="0">
                 <a:latin typeface="Arial" panose="020B0604020202020204" pitchFamily="34" charset="0"/>
                 <a:cs typeface="Arial" panose="020B0604020202020204" pitchFamily="34" charset="0"/>
-                <a:hlinkClick r:id="rId3"/>
+                <a:hlinkClick r:id="rId3">
+                  <a:extLst>
+                    <a:ext uri="{A12FA001-AC4F-418D-AE19-62706E023703}">
+                      <ahyp:hlinkClr xmlns:ahyp="http://schemas.microsoft.com/office/drawing/2018/hyperlinkcolor" val="tx"/>
+                    </a:ext>
+                  </a:extLst>
+                </a:hlinkClick>
               </a:rPr>
               <a:t>価格</a:t>
             </a:r>
@@ -7656,7 +7655,7 @@
                 <a:cs typeface="Arial" panose="020B0604020202020204" pitchFamily="34" charset="0"/>
                 <a:sym typeface="Wingdings" panose="05000000000000000000" pitchFamily="2" charset="2"/>
               </a:rPr>
-              <a:t>（一番小さい）：</a:t>
+              <a:t>：</a:t>
             </a:r>
             <a:r>
               <a:rPr lang="en-US" altLang="ja-JP" sz="1600" dirty="0">
@@ -7696,7 +7695,7 @@
                 <a:cs typeface="Arial" panose="020B0604020202020204" pitchFamily="34" charset="0"/>
                 <a:sym typeface="Wingdings" panose="05000000000000000000" pitchFamily="2" charset="2"/>
               </a:rPr>
-              <a:t>- </a:t>
+              <a:t>- DW200c</a:t>
             </a:r>
             <a:r>
               <a:rPr lang="ja-JP" altLang="en-US" sz="1600" dirty="0">
@@ -7704,7 +7703,23 @@
                 <a:cs typeface="Arial" panose="020B0604020202020204" pitchFamily="34" charset="0"/>
                 <a:sym typeface="Wingdings" panose="05000000000000000000" pitchFamily="2" charset="2"/>
               </a:rPr>
-              <a:t>従量課金制</a:t>
+              <a:t>　</a:t>
+            </a:r>
+            <a:r>
+              <a:rPr lang="en-US" altLang="ja-JP" sz="1600" dirty="0">
+                <a:latin typeface="Arial" panose="020B0604020202020204" pitchFamily="34" charset="0"/>
+                <a:cs typeface="Arial" panose="020B0604020202020204" pitchFamily="34" charset="0"/>
+                <a:sym typeface="Wingdings" panose="05000000000000000000" pitchFamily="2" charset="2"/>
+              </a:rPr>
+              <a:t>¥399,006.172/</a:t>
+            </a:r>
+            <a:r>
+              <a:rPr lang="ja-JP" altLang="en-US" sz="1600" dirty="0">
+                <a:latin typeface="Arial" panose="020B0604020202020204" pitchFamily="34" charset="0"/>
+                <a:cs typeface="Arial" panose="020B0604020202020204" pitchFamily="34" charset="0"/>
+                <a:sym typeface="Wingdings" panose="05000000000000000000" pitchFamily="2" charset="2"/>
+              </a:rPr>
+              <a:t>月 </a:t>
             </a:r>
             <a:endParaRPr lang="zh-CN" altLang="en-US" sz="1600" dirty="0">
               <a:latin typeface="Arial" panose="020B0604020202020204" pitchFamily="34" charset="0"/>
@@ -7851,7 +7866,7 @@
         <p:spPr>
           <a:xfrm>
             <a:off x="575036" y="1459348"/>
-            <a:ext cx="10595728" cy="2062103"/>
+            <a:ext cx="10595728" cy="2308324"/>
           </a:xfrm>
           <a:prstGeom prst="rect">
             <a:avLst/>
@@ -8081,12 +8096,519 @@
                 <a:latin typeface="Arial" panose="020B0604020202020204" pitchFamily="34" charset="0"/>
                 <a:cs typeface="Arial" panose="020B0604020202020204" pitchFamily="34" charset="0"/>
               </a:rPr>
-              <a:t>からデータのインデックスを作成すれば？</a:t>
+              <a:t>から</a:t>
+            </a:r>
+            <a:r>
+              <a:rPr lang="en-US" altLang="ja-JP" sz="1600" dirty="0">
+                <a:latin typeface="Arial" panose="020B0604020202020204" pitchFamily="34" charset="0"/>
+                <a:cs typeface="Arial" panose="020B0604020202020204" pitchFamily="34" charset="0"/>
+              </a:rPr>
+              <a:t>AB</a:t>
+            </a:r>
+            <a:r>
+              <a:rPr lang="ja-JP" altLang="en-US" sz="1600" dirty="0">
+                <a:latin typeface="Arial" panose="020B0604020202020204" pitchFamily="34" charset="0"/>
+                <a:cs typeface="Arial" panose="020B0604020202020204" pitchFamily="34" charset="0"/>
+              </a:rPr>
+              <a:t>、</a:t>
+            </a:r>
+            <a:r>
+              <a:rPr lang="en-US" altLang="ja-JP" sz="1600" dirty="0">
+                <a:latin typeface="Arial" panose="020B0604020202020204" pitchFamily="34" charset="0"/>
+                <a:cs typeface="Arial" panose="020B0604020202020204" pitchFamily="34" charset="0"/>
+              </a:rPr>
+              <a:t>CL</a:t>
+            </a:r>
+            <a:r>
+              <a:rPr lang="ja-JP" altLang="en-US" sz="1600" dirty="0">
+                <a:latin typeface="Arial" panose="020B0604020202020204" pitchFamily="34" charset="0"/>
+                <a:cs typeface="Arial" panose="020B0604020202020204" pitchFamily="34" charset="0"/>
+              </a:rPr>
+              <a:t>データだけのインデックスを作成すれば？</a:t>
+            </a:r>
+            <a:endParaRPr lang="en-US" altLang="ja-JP" sz="1600" dirty="0">
+              <a:latin typeface="Arial" panose="020B0604020202020204" pitchFamily="34" charset="0"/>
+              <a:cs typeface="Arial" panose="020B0604020202020204" pitchFamily="34" charset="0"/>
+            </a:endParaRPr>
+          </a:p>
+          <a:p>
+            <a:r>
+              <a:rPr lang="en-US" altLang="zh-CN" sz="1600" dirty="0">
+                <a:latin typeface="Arial" panose="020B0604020202020204" pitchFamily="34" charset="0"/>
+                <a:cs typeface="Arial" panose="020B0604020202020204" pitchFamily="34" charset="0"/>
+              </a:rPr>
+              <a:t>	(</a:t>
+            </a:r>
+            <a:r>
+              <a:rPr lang="ja-JP" altLang="en-US" sz="1600" dirty="0">
+                <a:latin typeface="Arial" panose="020B0604020202020204" pitchFamily="34" charset="0"/>
+                <a:cs typeface="Arial" panose="020B0604020202020204" pitchFamily="34" charset="0"/>
+                <a:hlinkClick r:id="rId2">
+                  <a:extLst>
+                    <a:ext uri="{A12FA001-AC4F-418D-AE19-62706E023703}">
+                      <ahyp:hlinkClr xmlns:ahyp="http://schemas.microsoft.com/office/drawing/2018/hyperlinkcolor" val="tx"/>
+                    </a:ext>
+                  </a:extLst>
+                </a:hlinkClick>
+              </a:rPr>
+              <a:t>標準</a:t>
+            </a:r>
+            <a:r>
+              <a:rPr lang="en-US" altLang="ja-JP" sz="1600" dirty="0">
+                <a:latin typeface="Arial" panose="020B0604020202020204" pitchFamily="34" charset="0"/>
+                <a:cs typeface="Arial" panose="020B0604020202020204" pitchFamily="34" charset="0"/>
+                <a:hlinkClick r:id="rId2">
+                  <a:extLst>
+                    <a:ext uri="{A12FA001-AC4F-418D-AE19-62706E023703}">
+                      <ahyp:hlinkClr xmlns:ahyp="http://schemas.microsoft.com/office/drawing/2018/hyperlinkcolor" val="tx"/>
+                    </a:ext>
+                  </a:extLst>
+                </a:hlinkClick>
+              </a:rPr>
+              <a:t>S</a:t>
+            </a:r>
+            <a:r>
+              <a:rPr lang="ja-JP" altLang="en-US" sz="1600" dirty="0">
+                <a:latin typeface="Arial" panose="020B0604020202020204" pitchFamily="34" charset="0"/>
+                <a:cs typeface="Arial" panose="020B0604020202020204" pitchFamily="34" charset="0"/>
+                <a:hlinkClick r:id="rId2">
+                  <a:extLst>
+                    <a:ext uri="{A12FA001-AC4F-418D-AE19-62706E023703}">
+                      <ahyp:hlinkClr xmlns:ahyp="http://schemas.microsoft.com/office/drawing/2018/hyperlinkcolor" val="tx"/>
+                    </a:ext>
+                  </a:extLst>
+                </a:hlinkClick>
+              </a:rPr>
+              <a:t>１</a:t>
+            </a:r>
+            <a:r>
+              <a:rPr lang="ja-JP" altLang="en-US" sz="1600" dirty="0">
+                <a:latin typeface="Arial" panose="020B0604020202020204" pitchFamily="34" charset="0"/>
+                <a:cs typeface="Arial" panose="020B0604020202020204" pitchFamily="34" charset="0"/>
+              </a:rPr>
+              <a:t>の場合：</a:t>
+            </a:r>
+            <a:r>
+              <a:rPr lang="en-US" altLang="ja-JP" sz="1600" dirty="0">
+                <a:latin typeface="Arial" panose="020B0604020202020204" pitchFamily="34" charset="0"/>
+                <a:cs typeface="Arial" panose="020B0604020202020204" pitchFamily="34" charset="0"/>
+              </a:rPr>
+              <a:t>¥48,938.88/</a:t>
+            </a:r>
+            <a:r>
+              <a:rPr lang="ja-JP" altLang="en-US" sz="1600" dirty="0">
+                <a:latin typeface="Arial" panose="020B0604020202020204" pitchFamily="34" charset="0"/>
+                <a:cs typeface="Arial" panose="020B0604020202020204" pitchFamily="34" charset="0"/>
+              </a:rPr>
+              <a:t>月 </a:t>
+            </a:r>
+            <a:r>
+              <a:rPr lang="en-US" altLang="ja-JP" sz="1600" dirty="0">
+                <a:latin typeface="Arial" panose="020B0604020202020204" pitchFamily="34" charset="0"/>
+                <a:cs typeface="Arial" panose="020B0604020202020204" pitchFamily="34" charset="0"/>
+              </a:rPr>
+              <a:t>- 160 GB</a:t>
+            </a:r>
+            <a:r>
+              <a:rPr lang="ja-JP" altLang="en-US" sz="1600" dirty="0">
+                <a:latin typeface="Arial" panose="020B0604020202020204" pitchFamily="34" charset="0"/>
+                <a:cs typeface="Arial" panose="020B0604020202020204" pitchFamily="34" charset="0"/>
+              </a:rPr>
+              <a:t>ストレージ　</a:t>
+            </a:r>
+            <a:r>
+              <a:rPr lang="en-US" altLang="ja-JP" sz="1600" dirty="0">
+                <a:latin typeface="Arial" panose="020B0604020202020204" pitchFamily="34" charset="0"/>
+                <a:cs typeface="Arial" panose="020B0604020202020204" pitchFamily="34" charset="0"/>
+              </a:rPr>
+              <a:t>MAX</a:t>
+            </a:r>
+            <a:r>
+              <a:rPr lang="ja-JP" altLang="en-US" sz="1600" dirty="0">
+                <a:latin typeface="Arial" panose="020B0604020202020204" pitchFamily="34" charset="0"/>
+                <a:cs typeface="Arial" panose="020B0604020202020204" pitchFamily="34" charset="0"/>
+              </a:rPr>
+              <a:t> </a:t>
+            </a:r>
+            <a:r>
+              <a:rPr lang="en-US" altLang="ja-JP" sz="1600" dirty="0">
+                <a:latin typeface="Arial" panose="020B0604020202020204" pitchFamily="34" charset="0"/>
+                <a:cs typeface="Arial" panose="020B0604020202020204" pitchFamily="34" charset="0"/>
+              </a:rPr>
+              <a:t>50</a:t>
+            </a:r>
+            <a:r>
+              <a:rPr lang="ja-JP" altLang="en-US" sz="1600" dirty="0">
+                <a:latin typeface="Arial" panose="020B0604020202020204" pitchFamily="34" charset="0"/>
+                <a:cs typeface="Arial" panose="020B0604020202020204" pitchFamily="34" charset="0"/>
+              </a:rPr>
+              <a:t>インデックス）</a:t>
             </a:r>
             <a:endParaRPr lang="zh-CN" altLang="en-US" sz="1600" dirty="0">
               <a:latin typeface="Arial" panose="020B0604020202020204" pitchFamily="34" charset="0"/>
               <a:cs typeface="Arial" panose="020B0604020202020204" pitchFamily="34" charset="0"/>
             </a:endParaRPr>
+          </a:p>
+        </p:txBody>
+      </p:sp>
+      <p:sp>
+        <p:nvSpPr>
+          <p:cNvPr id="5" name="矩形 4">
+            <a:extLst>
+              <a:ext uri="{FF2B5EF4-FFF2-40B4-BE49-F238E27FC236}">
+                <a16:creationId xmlns:a16="http://schemas.microsoft.com/office/drawing/2014/main" id="{8276F97A-B00D-6C47-DF75-D006C7FA0045}"/>
+              </a:ext>
+            </a:extLst>
+          </p:cNvPr>
+          <p:cNvSpPr/>
+          <p:nvPr/>
+        </p:nvSpPr>
+        <p:spPr>
+          <a:xfrm>
+            <a:off x="5429840" y="4099403"/>
+            <a:ext cx="1809946" cy="490194"/>
+          </a:xfrm>
+          <a:prstGeom prst="rect">
+            <a:avLst/>
+          </a:prstGeom>
+          <a:noFill/>
+          <a:ln>
+            <a:solidFill>
+              <a:schemeClr val="accent1"/>
+            </a:solidFill>
+          </a:ln>
+        </p:spPr>
+        <p:style>
+          <a:lnRef idx="2">
+            <a:schemeClr val="accent1">
+              <a:shade val="15000"/>
+            </a:schemeClr>
+          </a:lnRef>
+          <a:fillRef idx="1">
+            <a:schemeClr val="accent1"/>
+          </a:fillRef>
+          <a:effectRef idx="0">
+            <a:schemeClr val="accent1"/>
+          </a:effectRef>
+          <a:fontRef idx="minor">
+            <a:schemeClr val="lt1"/>
+          </a:fontRef>
+        </p:style>
+        <p:txBody>
+          <a:bodyPr rtlCol="0" anchor="ctr"/>
+          <a:lstStyle/>
+          <a:p>
+            <a:pPr algn="ctr"/>
+            <a:r>
+              <a:rPr lang="en-US" altLang="zh-CN" dirty="0">
+                <a:solidFill>
+                  <a:sysClr val="windowText" lastClr="000000"/>
+                </a:solidFill>
+              </a:rPr>
+              <a:t>Cosmos DB</a:t>
+            </a:r>
+          </a:p>
+        </p:txBody>
+      </p:sp>
+      <p:sp>
+        <p:nvSpPr>
+          <p:cNvPr id="7" name="矩形 6">
+            <a:extLst>
+              <a:ext uri="{FF2B5EF4-FFF2-40B4-BE49-F238E27FC236}">
+                <a16:creationId xmlns:a16="http://schemas.microsoft.com/office/drawing/2014/main" id="{2AF670B7-D4AB-6175-5C3F-23BA76232E40}"/>
+              </a:ext>
+            </a:extLst>
+          </p:cNvPr>
+          <p:cNvSpPr/>
+          <p:nvPr/>
+        </p:nvSpPr>
+        <p:spPr>
+          <a:xfrm>
+            <a:off x="5425127" y="5111684"/>
+            <a:ext cx="1809946" cy="490194"/>
+          </a:xfrm>
+          <a:prstGeom prst="rect">
+            <a:avLst/>
+          </a:prstGeom>
+          <a:noFill/>
+          <a:ln>
+            <a:solidFill>
+              <a:schemeClr val="accent1"/>
+            </a:solidFill>
+          </a:ln>
+        </p:spPr>
+        <p:style>
+          <a:lnRef idx="2">
+            <a:schemeClr val="accent1">
+              <a:shade val="15000"/>
+            </a:schemeClr>
+          </a:lnRef>
+          <a:fillRef idx="1">
+            <a:schemeClr val="accent1"/>
+          </a:fillRef>
+          <a:effectRef idx="0">
+            <a:schemeClr val="accent1"/>
+          </a:effectRef>
+          <a:fontRef idx="minor">
+            <a:schemeClr val="lt1"/>
+          </a:fontRef>
+        </p:style>
+        <p:txBody>
+          <a:bodyPr rtlCol="0" anchor="ctr"/>
+          <a:lstStyle/>
+          <a:p>
+            <a:pPr algn="ctr"/>
+            <a:r>
+              <a:rPr lang="en-US" altLang="ja-JP" sz="1800" dirty="0">
+                <a:solidFill>
+                  <a:sysClr val="windowText" lastClr="000000"/>
+                </a:solidFill>
+                <a:latin typeface="Arial" panose="020B0604020202020204" pitchFamily="34" charset="0"/>
+                <a:cs typeface="Arial" panose="020B0604020202020204" pitchFamily="34" charset="0"/>
+              </a:rPr>
+              <a:t>AI Search</a:t>
+            </a:r>
+            <a:endParaRPr lang="en-US" altLang="zh-CN" dirty="0">
+              <a:solidFill>
+                <a:sysClr val="windowText" lastClr="000000"/>
+              </a:solidFill>
+            </a:endParaRPr>
+          </a:p>
+        </p:txBody>
+      </p:sp>
+      <p:cxnSp>
+        <p:nvCxnSpPr>
+          <p:cNvPr id="9" name="直接箭头连接符 8">
+            <a:extLst>
+              <a:ext uri="{FF2B5EF4-FFF2-40B4-BE49-F238E27FC236}">
+                <a16:creationId xmlns:a16="http://schemas.microsoft.com/office/drawing/2014/main" id="{B3D33765-A17E-1658-7423-EBAA679FCC85}"/>
+              </a:ext>
+            </a:extLst>
+          </p:cNvPr>
+          <p:cNvCxnSpPr>
+            <a:stCxn id="7" idx="0"/>
+            <a:endCxn id="5" idx="2"/>
+          </p:cNvCxnSpPr>
+          <p:nvPr/>
+        </p:nvCxnSpPr>
+        <p:spPr>
+          <a:xfrm flipV="1">
+            <a:off x="6330100" y="4589597"/>
+            <a:ext cx="4713" cy="522087"/>
+          </a:xfrm>
+          <a:prstGeom prst="straightConnector1">
+            <a:avLst/>
+          </a:prstGeom>
+          <a:ln>
+            <a:tailEnd type="triangle"/>
+          </a:ln>
+        </p:spPr>
+        <p:style>
+          <a:lnRef idx="1">
+            <a:schemeClr val="accent1"/>
+          </a:lnRef>
+          <a:fillRef idx="0">
+            <a:schemeClr val="accent1"/>
+          </a:fillRef>
+          <a:effectRef idx="0">
+            <a:schemeClr val="accent1"/>
+          </a:effectRef>
+          <a:fontRef idx="minor">
+            <a:schemeClr val="tx1"/>
+          </a:fontRef>
+        </p:style>
+      </p:cxnSp>
+      <p:sp>
+        <p:nvSpPr>
+          <p:cNvPr id="10" name="文本框 9">
+            <a:extLst>
+              <a:ext uri="{FF2B5EF4-FFF2-40B4-BE49-F238E27FC236}">
+                <a16:creationId xmlns:a16="http://schemas.microsoft.com/office/drawing/2014/main" id="{1C99C9C2-D78A-443E-F726-82BDBE8BC0F2}"/>
+              </a:ext>
+            </a:extLst>
+          </p:cNvPr>
+          <p:cNvSpPr txBox="1"/>
+          <p:nvPr/>
+        </p:nvSpPr>
+        <p:spPr>
+          <a:xfrm>
+            <a:off x="6410226" y="4681363"/>
+            <a:ext cx="2031477" cy="338554"/>
+          </a:xfrm>
+          <a:prstGeom prst="rect">
+            <a:avLst/>
+          </a:prstGeom>
+          <a:noFill/>
+        </p:spPr>
+        <p:txBody>
+          <a:bodyPr wrap="square" rtlCol="0">
+            <a:spAutoFit/>
+          </a:bodyPr>
+          <a:lstStyle/>
+          <a:p>
+            <a:r>
+              <a:rPr lang="ja-JP" altLang="en-US" sz="1600" dirty="0"/>
+              <a:t>テキスト索引を作成</a:t>
+            </a:r>
+            <a:endParaRPr lang="zh-CN" altLang="en-US" sz="1600" dirty="0"/>
+          </a:p>
+        </p:txBody>
+      </p:sp>
+      <p:cxnSp>
+        <p:nvCxnSpPr>
+          <p:cNvPr id="12" name="连接符: 肘形 11">
+            <a:extLst>
+              <a:ext uri="{FF2B5EF4-FFF2-40B4-BE49-F238E27FC236}">
+                <a16:creationId xmlns:a16="http://schemas.microsoft.com/office/drawing/2014/main" id="{295F327E-A04B-4AED-B522-E7F6BC0C1844}"/>
+              </a:ext>
+            </a:extLst>
+          </p:cNvPr>
+          <p:cNvCxnSpPr>
+            <a:cxnSpLocks/>
+            <a:endCxn id="7" idx="1"/>
+          </p:cNvCxnSpPr>
+          <p:nvPr/>
+        </p:nvCxnSpPr>
+        <p:spPr>
+          <a:xfrm>
+            <a:off x="2578232" y="4850640"/>
+            <a:ext cx="2846895" cy="506141"/>
+          </a:xfrm>
+          <a:prstGeom prst="bentConnector3">
+            <a:avLst/>
+          </a:prstGeom>
+          <a:ln>
+            <a:tailEnd type="triangle"/>
+          </a:ln>
+        </p:spPr>
+        <p:style>
+          <a:lnRef idx="1">
+            <a:schemeClr val="accent1"/>
+          </a:lnRef>
+          <a:fillRef idx="0">
+            <a:schemeClr val="accent1"/>
+          </a:fillRef>
+          <a:effectRef idx="0">
+            <a:schemeClr val="accent1"/>
+          </a:effectRef>
+          <a:fontRef idx="minor">
+            <a:schemeClr val="tx1"/>
+          </a:fontRef>
+        </p:style>
+      </p:cxnSp>
+      <p:cxnSp>
+        <p:nvCxnSpPr>
+          <p:cNvPr id="13" name="连接符: 肘形 12">
+            <a:extLst>
+              <a:ext uri="{FF2B5EF4-FFF2-40B4-BE49-F238E27FC236}">
+                <a16:creationId xmlns:a16="http://schemas.microsoft.com/office/drawing/2014/main" id="{C978F787-DAE2-F441-CC31-D9C5D377672C}"/>
+              </a:ext>
+            </a:extLst>
+          </p:cNvPr>
+          <p:cNvCxnSpPr>
+            <a:cxnSpLocks/>
+            <a:endCxn id="5" idx="1"/>
+          </p:cNvCxnSpPr>
+          <p:nvPr/>
+        </p:nvCxnSpPr>
+        <p:spPr>
+          <a:xfrm flipV="1">
+            <a:off x="2578232" y="4344500"/>
+            <a:ext cx="2851608" cy="506140"/>
+          </a:xfrm>
+          <a:prstGeom prst="bentConnector3">
+            <a:avLst>
+              <a:gd name="adj1" fmla="val 50000"/>
+            </a:avLst>
+          </a:prstGeom>
+          <a:ln>
+            <a:tailEnd type="triangle"/>
+          </a:ln>
+        </p:spPr>
+        <p:style>
+          <a:lnRef idx="1">
+            <a:schemeClr val="accent1"/>
+          </a:lnRef>
+          <a:fillRef idx="0">
+            <a:schemeClr val="accent1"/>
+          </a:fillRef>
+          <a:effectRef idx="0">
+            <a:schemeClr val="accent1"/>
+          </a:effectRef>
+          <a:fontRef idx="minor">
+            <a:schemeClr val="tx1"/>
+          </a:fontRef>
+        </p:style>
+      </p:cxnSp>
+      <p:sp>
+        <p:nvSpPr>
+          <p:cNvPr id="20" name="文本框 19">
+            <a:extLst>
+              <a:ext uri="{FF2B5EF4-FFF2-40B4-BE49-F238E27FC236}">
+                <a16:creationId xmlns:a16="http://schemas.microsoft.com/office/drawing/2014/main" id="{EDC6D402-CE62-B0C8-BAC1-E379C0D01B69}"/>
+              </a:ext>
+            </a:extLst>
+          </p:cNvPr>
+          <p:cNvSpPr txBox="1"/>
+          <p:nvPr/>
+        </p:nvSpPr>
+        <p:spPr>
+          <a:xfrm>
+            <a:off x="4001679" y="4045388"/>
+            <a:ext cx="1318182" cy="338554"/>
+          </a:xfrm>
+          <a:prstGeom prst="rect">
+            <a:avLst/>
+          </a:prstGeom>
+          <a:noFill/>
+        </p:spPr>
+        <p:txBody>
+          <a:bodyPr wrap="square" rtlCol="0">
+            <a:spAutoFit/>
+          </a:bodyPr>
+          <a:lstStyle/>
+          <a:p>
+            <a:r>
+              <a:rPr lang="en-US" altLang="ja-JP" sz="1600" dirty="0"/>
+              <a:t>Vector Search</a:t>
+            </a:r>
+            <a:endParaRPr lang="zh-CN" altLang="en-US" sz="1600" dirty="0"/>
+          </a:p>
+        </p:txBody>
+      </p:sp>
+      <p:sp>
+        <p:nvSpPr>
+          <p:cNvPr id="21" name="文本框 20">
+            <a:extLst>
+              <a:ext uri="{FF2B5EF4-FFF2-40B4-BE49-F238E27FC236}">
+                <a16:creationId xmlns:a16="http://schemas.microsoft.com/office/drawing/2014/main" id="{EF5994D6-C537-D210-7217-417556C30735}"/>
+              </a:ext>
+            </a:extLst>
+          </p:cNvPr>
+          <p:cNvSpPr txBox="1"/>
+          <p:nvPr/>
+        </p:nvSpPr>
+        <p:spPr>
+          <a:xfrm>
+            <a:off x="4102232" y="5355091"/>
+            <a:ext cx="1318182" cy="338554"/>
+          </a:xfrm>
+          <a:prstGeom prst="rect">
+            <a:avLst/>
+          </a:prstGeom>
+          <a:noFill/>
+        </p:spPr>
+        <p:txBody>
+          <a:bodyPr wrap="square" rtlCol="0">
+            <a:spAutoFit/>
+          </a:bodyPr>
+          <a:lstStyle/>
+          <a:p>
+            <a:r>
+              <a:rPr lang="en-US" altLang="ja-JP" sz="1600" dirty="0"/>
+              <a:t>Text Search</a:t>
+            </a:r>
+            <a:endParaRPr lang="zh-CN" altLang="en-US" sz="1600" dirty="0"/>
           </a:p>
         </p:txBody>
       </p:sp>

--- a/Research2.pptx
+++ b/Research2.pptx
@@ -5,12 +5,13 @@
     <p:sldMasterId id="2147483714" r:id="rId1"/>
   </p:sldMasterIdLst>
   <p:notesMasterIdLst>
-    <p:notesMasterId r:id="rId5"/>
+    <p:notesMasterId r:id="rId6"/>
   </p:notesMasterIdLst>
   <p:sldIdLst>
     <p:sldId id="257" r:id="rId2"/>
     <p:sldId id="258" r:id="rId3"/>
     <p:sldId id="259" r:id="rId4"/>
+    <p:sldId id="260" r:id="rId5"/>
   </p:sldIdLst>
   <p:sldSz cx="12192000" cy="6858000"/>
   <p:notesSz cx="6858000" cy="9144000"/>
@@ -199,7 +200,7 @@
           <a:p>
             <a:fld id="{CB883E1A-24A0-4B05-AA4C-56243B89A804}" type="datetimeFigureOut">
               <a:rPr lang="zh-CN" altLang="en-US" smtClean="0"/>
-              <a:t>2025/4/2</a:t>
+              <a:t>2025/4/3</a:t>
             </a:fld>
             <a:endParaRPr lang="zh-CN" altLang="en-US"/>
           </a:p>
@@ -637,7 +638,7 @@
           <a:p>
             <a:fld id="{3800F3C6-200C-4F82-8057-425A24E0A80A}" type="datetimeFigureOut">
               <a:rPr lang="zh-CN" altLang="en-US" smtClean="0"/>
-              <a:t>2025/4/2</a:t>
+              <a:t>2025/4/3</a:t>
             </a:fld>
             <a:endParaRPr lang="zh-CN" altLang="en-US"/>
           </a:p>
@@ -952,7 +953,7 @@
           <a:p>
             <a:fld id="{3800F3C6-200C-4F82-8057-425A24E0A80A}" type="datetimeFigureOut">
               <a:rPr lang="zh-CN" altLang="en-US" smtClean="0"/>
-              <a:t>2025/4/2</a:t>
+              <a:t>2025/4/3</a:t>
             </a:fld>
             <a:endParaRPr lang="zh-CN" altLang="en-US"/>
           </a:p>
@@ -1174,7 +1175,7 @@
           <a:p>
             <a:fld id="{3800F3C6-200C-4F82-8057-425A24E0A80A}" type="datetimeFigureOut">
               <a:rPr lang="zh-CN" altLang="en-US" smtClean="0"/>
-              <a:t>2025/4/2</a:t>
+              <a:t>2025/4/3</a:t>
             </a:fld>
             <a:endParaRPr lang="zh-CN" altLang="en-US"/>
           </a:p>
@@ -1465,7 +1466,7 @@
           <a:p>
             <a:fld id="{3800F3C6-200C-4F82-8057-425A24E0A80A}" type="datetimeFigureOut">
               <a:rPr lang="zh-CN" altLang="en-US" smtClean="0"/>
-              <a:t>2025/4/2</a:t>
+              <a:t>2025/4/3</a:t>
             </a:fld>
             <a:endParaRPr lang="zh-CN" altLang="en-US"/>
           </a:p>
@@ -1919,7 +1920,7 @@
           <a:p>
             <a:fld id="{3800F3C6-200C-4F82-8057-425A24E0A80A}" type="datetimeFigureOut">
               <a:rPr lang="zh-CN" altLang="en-US" smtClean="0"/>
-              <a:t>2025/4/2</a:t>
+              <a:t>2025/4/3</a:t>
             </a:fld>
             <a:endParaRPr lang="zh-CN" altLang="en-US"/>
           </a:p>
@@ -2495,7 +2496,7 @@
           <a:p>
             <a:fld id="{3800F3C6-200C-4F82-8057-425A24E0A80A}" type="datetimeFigureOut">
               <a:rPr lang="zh-CN" altLang="en-US" smtClean="0"/>
-              <a:t>2025/4/2</a:t>
+              <a:t>2025/4/3</a:t>
             </a:fld>
             <a:endParaRPr lang="zh-CN" altLang="en-US"/>
           </a:p>
@@ -3356,7 +3357,7 @@
           <a:p>
             <a:fld id="{3800F3C6-200C-4F82-8057-425A24E0A80A}" type="datetimeFigureOut">
               <a:rPr lang="zh-CN" altLang="en-US" smtClean="0"/>
-              <a:t>2025/4/2</a:t>
+              <a:t>2025/4/3</a:t>
             </a:fld>
             <a:endParaRPr lang="zh-CN" altLang="en-US"/>
           </a:p>
@@ -3561,7 +3562,7 @@
           <a:p>
             <a:fld id="{3800F3C6-200C-4F82-8057-425A24E0A80A}" type="datetimeFigureOut">
               <a:rPr lang="zh-CN" altLang="en-US" smtClean="0"/>
-              <a:t>2025/4/2</a:t>
+              <a:t>2025/4/3</a:t>
             </a:fld>
             <a:endParaRPr lang="zh-CN" altLang="en-US"/>
           </a:p>
@@ -3775,7 +3776,7 @@
           <a:p>
             <a:fld id="{3800F3C6-200C-4F82-8057-425A24E0A80A}" type="datetimeFigureOut">
               <a:rPr lang="zh-CN" altLang="en-US" smtClean="0"/>
-              <a:t>2025/4/2</a:t>
+              <a:t>2025/4/3</a:t>
             </a:fld>
             <a:endParaRPr lang="zh-CN" altLang="en-US"/>
           </a:p>
@@ -3980,7 +3981,7 @@
           <a:p>
             <a:fld id="{3800F3C6-200C-4F82-8057-425A24E0A80A}" type="datetimeFigureOut">
               <a:rPr lang="zh-CN" altLang="en-US" smtClean="0"/>
-              <a:t>2025/4/2</a:t>
+              <a:t>2025/4/3</a:t>
             </a:fld>
             <a:endParaRPr lang="zh-CN" altLang="en-US"/>
           </a:p>
@@ -4260,7 +4261,7 @@
           <a:p>
             <a:fld id="{3800F3C6-200C-4F82-8057-425A24E0A80A}" type="datetimeFigureOut">
               <a:rPr lang="zh-CN" altLang="en-US" smtClean="0"/>
-              <a:t>2025/4/2</a:t>
+              <a:t>2025/4/3</a:t>
             </a:fld>
             <a:endParaRPr lang="zh-CN" altLang="en-US"/>
           </a:p>
@@ -4527,7 +4528,7 @@
           <a:p>
             <a:fld id="{3800F3C6-200C-4F82-8057-425A24E0A80A}" type="datetimeFigureOut">
               <a:rPr lang="zh-CN" altLang="en-US" smtClean="0"/>
-              <a:t>2025/4/2</a:t>
+              <a:t>2025/4/3</a:t>
             </a:fld>
             <a:endParaRPr lang="zh-CN" altLang="en-US"/>
           </a:p>
@@ -4942,7 +4943,7 @@
           <a:p>
             <a:fld id="{3800F3C6-200C-4F82-8057-425A24E0A80A}" type="datetimeFigureOut">
               <a:rPr lang="zh-CN" altLang="en-US" smtClean="0"/>
-              <a:t>2025/4/2</a:t>
+              <a:t>2025/4/3</a:t>
             </a:fld>
             <a:endParaRPr lang="zh-CN" altLang="en-US"/>
           </a:p>
@@ -5090,7 +5091,7 @@
           <a:p>
             <a:fld id="{3800F3C6-200C-4F82-8057-425A24E0A80A}" type="datetimeFigureOut">
               <a:rPr lang="zh-CN" altLang="en-US" smtClean="0"/>
-              <a:t>2025/4/2</a:t>
+              <a:t>2025/4/3</a:t>
             </a:fld>
             <a:endParaRPr lang="zh-CN" altLang="en-US"/>
           </a:p>
@@ -5215,7 +5216,7 @@
           <a:p>
             <a:fld id="{3800F3C6-200C-4F82-8057-425A24E0A80A}" type="datetimeFigureOut">
               <a:rPr lang="zh-CN" altLang="en-US" smtClean="0"/>
-              <a:t>2025/4/2</a:t>
+              <a:t>2025/4/3</a:t>
             </a:fld>
             <a:endParaRPr lang="zh-CN" altLang="en-US"/>
           </a:p>
@@ -5494,7 +5495,7 @@
           <a:p>
             <a:fld id="{3800F3C6-200C-4F82-8057-425A24E0A80A}" type="datetimeFigureOut">
               <a:rPr lang="zh-CN" altLang="en-US" smtClean="0"/>
-              <a:t>2025/4/2</a:t>
+              <a:t>2025/4/3</a:t>
             </a:fld>
             <a:endParaRPr lang="zh-CN" altLang="en-US"/>
           </a:p>
@@ -5809,7 +5810,7 @@
           <a:p>
             <a:fld id="{3800F3C6-200C-4F82-8057-425A24E0A80A}" type="datetimeFigureOut">
               <a:rPr lang="zh-CN" altLang="en-US" smtClean="0"/>
-              <a:t>2025/4/2</a:t>
+              <a:t>2025/4/3</a:t>
             </a:fld>
             <a:endParaRPr lang="zh-CN" altLang="en-US"/>
           </a:p>
@@ -6062,7 +6063,7 @@
           <a:p>
             <a:fld id="{3800F3C6-200C-4F82-8057-425A24E0A80A}" type="datetimeFigureOut">
               <a:rPr lang="zh-CN" altLang="en-US" smtClean="0"/>
-              <a:t>2025/4/2</a:t>
+              <a:t>2025/4/3</a:t>
             </a:fld>
             <a:endParaRPr lang="zh-CN" altLang="en-US"/>
           </a:p>
@@ -7866,7 +7867,7 @@
         <p:spPr>
           <a:xfrm>
             <a:off x="575036" y="1459348"/>
-            <a:ext cx="10595728" cy="2308324"/>
+            <a:ext cx="10595728" cy="2062103"/>
           </a:xfrm>
           <a:prstGeom prst="rect">
             <a:avLst/>
@@ -8039,7 +8040,7 @@
               <a:buFont typeface="Arial" panose="020B0604020202020204" pitchFamily="34" charset="0"/>
               <a:buChar char="•"/>
             </a:pPr>
-            <a:endParaRPr lang="en-US" altLang="zh-CN" sz="1600" dirty="0">
+            <a:endParaRPr lang="en-US" altLang="ja-JP" sz="1600" dirty="0">
               <a:latin typeface="Arial" panose="020B0604020202020204" pitchFamily="34" charset="0"/>
               <a:cs typeface="Arial" panose="020B0604020202020204" pitchFamily="34" charset="0"/>
             </a:endParaRPr>
@@ -8054,90 +8055,314 @@
                 <a:latin typeface="Arial" panose="020B0604020202020204" pitchFamily="34" charset="0"/>
                 <a:cs typeface="Arial" panose="020B0604020202020204" pitchFamily="34" charset="0"/>
               </a:rPr>
-              <a:t>他に、調査によると、</a:t>
+              <a:t>総論としては、 </a:t>
             </a:r>
             <a:r>
               <a:rPr lang="en-US" altLang="ja-JP" sz="1600" dirty="0">
                 <a:latin typeface="Arial" panose="020B0604020202020204" pitchFamily="34" charset="0"/>
                 <a:cs typeface="Arial" panose="020B0604020202020204" pitchFamily="34" charset="0"/>
               </a:rPr>
-              <a:t>Azure AI Search</a:t>
+              <a:t>Azure Synapse Analytics</a:t>
             </a:r>
             <a:r>
               <a:rPr lang="ja-JP" altLang="en-US" sz="1600" dirty="0">
                 <a:latin typeface="Arial" panose="020B0604020202020204" pitchFamily="34" charset="0"/>
                 <a:cs typeface="Arial" panose="020B0604020202020204" pitchFamily="34" charset="0"/>
               </a:rPr>
-              <a:t>は近傍検索機能が強力であり、かつベクトル検索も可能です。</a:t>
+              <a:t>はデータ分析向けの</a:t>
             </a:r>
             <a:r>
               <a:rPr lang="en-US" altLang="ja-JP" sz="1600" dirty="0">
                 <a:latin typeface="Arial" panose="020B0604020202020204" pitchFamily="34" charset="0"/>
                 <a:cs typeface="Arial" panose="020B0604020202020204" pitchFamily="34" charset="0"/>
               </a:rPr>
-              <a:t>Azure AI Search</a:t>
+              <a:t>Azure</a:t>
             </a:r>
             <a:r>
               <a:rPr lang="ja-JP" altLang="en-US" sz="1600" dirty="0">
                 <a:latin typeface="Arial" panose="020B0604020202020204" pitchFamily="34" charset="0"/>
                 <a:cs typeface="Arial" panose="020B0604020202020204" pitchFamily="34" charset="0"/>
               </a:rPr>
-              <a:t>でクエリを実行するために、</a:t>
-            </a:r>
-            <a:r>
-              <a:rPr lang="en-US" altLang="ja-JP" sz="1600" dirty="0">
-                <a:latin typeface="Arial" panose="020B0604020202020204" pitchFamily="34" charset="0"/>
-                <a:cs typeface="Arial" panose="020B0604020202020204" pitchFamily="34" charset="0"/>
-              </a:rPr>
-              <a:t>Cosmos DB</a:t>
-            </a:r>
-            <a:r>
-              <a:rPr lang="ja-JP" altLang="en-US" sz="1600" dirty="0">
-                <a:latin typeface="Arial" panose="020B0604020202020204" pitchFamily="34" charset="0"/>
-                <a:cs typeface="Arial" panose="020B0604020202020204" pitchFamily="34" charset="0"/>
-              </a:rPr>
-              <a:t>から</a:t>
-            </a:r>
-            <a:r>
-              <a:rPr lang="en-US" altLang="ja-JP" sz="1600" dirty="0">
-                <a:latin typeface="Arial" panose="020B0604020202020204" pitchFamily="34" charset="0"/>
-                <a:cs typeface="Arial" panose="020B0604020202020204" pitchFamily="34" charset="0"/>
-              </a:rPr>
-              <a:t>AB</a:t>
-            </a:r>
-            <a:r>
-              <a:rPr lang="ja-JP" altLang="en-US" sz="1600" dirty="0">
-                <a:latin typeface="Arial" panose="020B0604020202020204" pitchFamily="34" charset="0"/>
-                <a:cs typeface="Arial" panose="020B0604020202020204" pitchFamily="34" charset="0"/>
-              </a:rPr>
-              <a:t>、</a:t>
-            </a:r>
-            <a:r>
-              <a:rPr lang="en-US" altLang="ja-JP" sz="1600" dirty="0">
-                <a:latin typeface="Arial" panose="020B0604020202020204" pitchFamily="34" charset="0"/>
-                <a:cs typeface="Arial" panose="020B0604020202020204" pitchFamily="34" charset="0"/>
-              </a:rPr>
-              <a:t>CL</a:t>
-            </a:r>
-            <a:r>
-              <a:rPr lang="ja-JP" altLang="en-US" sz="1600" dirty="0">
-                <a:latin typeface="Arial" panose="020B0604020202020204" pitchFamily="34" charset="0"/>
-                <a:cs typeface="Arial" panose="020B0604020202020204" pitchFamily="34" charset="0"/>
-              </a:rPr>
-              <a:t>データだけのインデックスを作成すれば？</a:t>
+              <a:t>ツールであり、リアルタイムのベクトル検索や近傍検索には向かないと考えられます。</a:t>
             </a:r>
             <a:endParaRPr lang="en-US" altLang="ja-JP" sz="1600" dirty="0">
               <a:latin typeface="Arial" panose="020B0604020202020204" pitchFamily="34" charset="0"/>
               <a:cs typeface="Arial" panose="020B0604020202020204" pitchFamily="34" charset="0"/>
             </a:endParaRPr>
           </a:p>
+        </p:txBody>
+      </p:sp>
+    </p:spTree>
+    <p:extLst>
+      <p:ext uri="{BB962C8B-B14F-4D97-AF65-F5344CB8AC3E}">
+        <p14:creationId xmlns:p14="http://schemas.microsoft.com/office/powerpoint/2010/main" val="3999093955"/>
+      </p:ext>
+    </p:extLst>
+  </p:cSld>
+  <p:clrMapOvr>
+    <a:masterClrMapping/>
+  </p:clrMapOvr>
+</p:sld>
+</file>
+
+<file path=ppt/slides/slide4.xml><?xml version="1.0" encoding="utf-8"?>
+<p:sld xmlns:a="http://schemas.openxmlformats.org/drawingml/2006/main" xmlns:r="http://schemas.openxmlformats.org/officeDocument/2006/relationships" xmlns:p="http://schemas.openxmlformats.org/presentationml/2006/main">
+  <p:cSld>
+    <p:spTree>
+      <p:nvGrpSpPr>
+        <p:cNvPr id="1" name="">
+          <a:extLst>
+            <a:ext uri="{FF2B5EF4-FFF2-40B4-BE49-F238E27FC236}">
+              <a16:creationId xmlns:a16="http://schemas.microsoft.com/office/drawing/2014/main" id="{8AF68E7C-54F4-58F9-D796-F4117E8EBA19}"/>
+            </a:ext>
+          </a:extLst>
+        </p:cNvPr>
+        <p:cNvGrpSpPr/>
+        <p:nvPr/>
+      </p:nvGrpSpPr>
+      <p:grpSpPr>
+        <a:xfrm>
+          <a:off x="0" y="0"/>
+          <a:ext cx="0" cy="0"/>
+          <a:chOff x="0" y="0"/>
+          <a:chExt cx="0" cy="0"/>
+        </a:xfrm>
+      </p:grpSpPr>
+      <p:sp>
+        <p:nvSpPr>
+          <p:cNvPr id="4" name="文本框 3">
+            <a:extLst>
+              <a:ext uri="{FF2B5EF4-FFF2-40B4-BE49-F238E27FC236}">
+                <a16:creationId xmlns:a16="http://schemas.microsoft.com/office/drawing/2014/main" id="{4152D51D-CBC8-6C0D-EFA1-7B56D2CD8935}"/>
+              </a:ext>
+            </a:extLst>
+          </p:cNvPr>
+          <p:cNvSpPr txBox="1"/>
+          <p:nvPr/>
+        </p:nvSpPr>
+        <p:spPr>
+          <a:xfrm>
+            <a:off x="575036" y="707011"/>
+            <a:ext cx="10246936" cy="369332"/>
+          </a:xfrm>
+          <a:prstGeom prst="rect">
+            <a:avLst/>
+          </a:prstGeom>
+          <a:noFill/>
+        </p:spPr>
+        <p:txBody>
+          <a:bodyPr wrap="square" rtlCol="0">
+            <a:spAutoFit/>
+          </a:bodyPr>
+          <a:lstStyle/>
+          <a:p>
+            <a:r>
+              <a:rPr lang="ja-JP" altLang="en-US" dirty="0">
+                <a:latin typeface="Arial" panose="020B0604020202020204" pitchFamily="34" charset="0"/>
+                <a:cs typeface="Arial" panose="020B0604020202020204" pitchFamily="34" charset="0"/>
+              </a:rPr>
+              <a:t>ベクトル検索、近傍検索と全文データのストレージ</a:t>
+            </a:r>
+            <a:endParaRPr lang="zh-CN" altLang="en-US" dirty="0">
+              <a:latin typeface="Arial" panose="020B0604020202020204" pitchFamily="34" charset="0"/>
+              <a:cs typeface="Arial" panose="020B0604020202020204" pitchFamily="34" charset="0"/>
+            </a:endParaRPr>
+          </a:p>
+        </p:txBody>
+      </p:sp>
+      <p:cxnSp>
+        <p:nvCxnSpPr>
+          <p:cNvPr id="6" name="直接连接符 5">
+            <a:extLst>
+              <a:ext uri="{FF2B5EF4-FFF2-40B4-BE49-F238E27FC236}">
+                <a16:creationId xmlns:a16="http://schemas.microsoft.com/office/drawing/2014/main" id="{8FBFE9D3-F26E-F0B1-C05F-DB87A7F497E6}"/>
+              </a:ext>
+            </a:extLst>
+          </p:cNvPr>
+          <p:cNvCxnSpPr>
+            <a:cxnSpLocks/>
+          </p:cNvCxnSpPr>
+          <p:nvPr/>
+        </p:nvCxnSpPr>
+        <p:spPr>
+          <a:xfrm>
+            <a:off x="480767" y="1216058"/>
+            <a:ext cx="11019934" cy="0"/>
+          </a:xfrm>
+          <a:prstGeom prst="line">
+            <a:avLst/>
+          </a:prstGeom>
+        </p:spPr>
+        <p:style>
+          <a:lnRef idx="1">
+            <a:schemeClr val="accent1"/>
+          </a:lnRef>
+          <a:fillRef idx="0">
+            <a:schemeClr val="accent1"/>
+          </a:fillRef>
+          <a:effectRef idx="0">
+            <a:schemeClr val="accent1"/>
+          </a:effectRef>
+          <a:fontRef idx="minor">
+            <a:schemeClr val="tx1"/>
+          </a:fontRef>
+        </p:style>
+      </p:cxnSp>
+      <p:sp>
+        <p:nvSpPr>
+          <p:cNvPr id="2" name="文本框 1">
+            <a:extLst>
+              <a:ext uri="{FF2B5EF4-FFF2-40B4-BE49-F238E27FC236}">
+                <a16:creationId xmlns:a16="http://schemas.microsoft.com/office/drawing/2014/main" id="{F7256BF6-E8D9-6E15-4AE4-79F2B8298AA8}"/>
+              </a:ext>
+            </a:extLst>
+          </p:cNvPr>
+          <p:cNvSpPr txBox="1"/>
+          <p:nvPr/>
+        </p:nvSpPr>
+        <p:spPr>
+          <a:xfrm>
+            <a:off x="575036" y="1459348"/>
+            <a:ext cx="10595728" cy="3293209"/>
+          </a:xfrm>
+          <a:prstGeom prst="rect">
+            <a:avLst/>
+          </a:prstGeom>
+          <a:noFill/>
+        </p:spPr>
+        <p:txBody>
+          <a:bodyPr wrap="square" rtlCol="0">
+            <a:spAutoFit/>
+          </a:bodyPr>
+          <a:lstStyle/>
+          <a:p>
+            <a:pPr marL="285750" indent="-285750">
+              <a:buFont typeface="Arial" panose="020B0604020202020204" pitchFamily="34" charset="0"/>
+              <a:buChar char="•"/>
+            </a:pPr>
+            <a:r>
+              <a:rPr lang="ja-JP" altLang="en-US" sz="1600" dirty="0">
+                <a:latin typeface="Arial" panose="020B0604020202020204" pitchFamily="34" charset="0"/>
+                <a:cs typeface="Arial" panose="020B0604020202020204" pitchFamily="34" charset="0"/>
+              </a:rPr>
+              <a:t>調査によると、</a:t>
+            </a:r>
+            <a:r>
+              <a:rPr lang="en-US" altLang="ja-JP" sz="1600" dirty="0">
+                <a:latin typeface="Arial" panose="020B0604020202020204" pitchFamily="34" charset="0"/>
+                <a:cs typeface="Arial" panose="020B0604020202020204" pitchFamily="34" charset="0"/>
+              </a:rPr>
+              <a:t>Azure AI Search</a:t>
+            </a:r>
+            <a:r>
+              <a:rPr lang="ja-JP" altLang="en-US" sz="1600" dirty="0">
+                <a:latin typeface="Arial" panose="020B0604020202020204" pitchFamily="34" charset="0"/>
+                <a:cs typeface="Arial" panose="020B0604020202020204" pitchFamily="34" charset="0"/>
+              </a:rPr>
+              <a:t>は近傍検索機能が強力であり、ベクトル検索も可能です。近傍検索を実装するために、</a:t>
+            </a:r>
+            <a:r>
+              <a:rPr lang="en-US" altLang="ja-JP" sz="1600" dirty="0">
+                <a:latin typeface="Arial" panose="020B0604020202020204" pitchFamily="34" charset="0"/>
+                <a:cs typeface="Arial" panose="020B0604020202020204" pitchFamily="34" charset="0"/>
+              </a:rPr>
+              <a:t>Azure AI Search</a:t>
+            </a:r>
+            <a:r>
+              <a:rPr lang="ja-JP" altLang="en-US" sz="1600" dirty="0">
+                <a:latin typeface="Arial" panose="020B0604020202020204" pitchFamily="34" charset="0"/>
+                <a:cs typeface="Arial" panose="020B0604020202020204" pitchFamily="34" charset="0"/>
+              </a:rPr>
+              <a:t>でクエリを実行できるよう、</a:t>
+            </a:r>
+            <a:r>
+              <a:rPr lang="en-US" altLang="ja-JP" sz="1600" dirty="0">
+                <a:latin typeface="Arial" panose="020B0604020202020204" pitchFamily="34" charset="0"/>
+                <a:cs typeface="Arial" panose="020B0604020202020204" pitchFamily="34" charset="0"/>
+              </a:rPr>
+              <a:t>Cosmos DB</a:t>
+            </a:r>
+            <a:r>
+              <a:rPr lang="ja-JP" altLang="en-US" sz="1600" dirty="0">
+                <a:latin typeface="Arial" panose="020B0604020202020204" pitchFamily="34" charset="0"/>
+                <a:cs typeface="Arial" panose="020B0604020202020204" pitchFamily="34" charset="0"/>
+              </a:rPr>
+              <a:t>から</a:t>
+            </a:r>
+            <a:r>
+              <a:rPr lang="en-US" altLang="ja-JP" sz="1600" dirty="0">
+                <a:latin typeface="Arial" panose="020B0604020202020204" pitchFamily="34" charset="0"/>
+                <a:cs typeface="Arial" panose="020B0604020202020204" pitchFamily="34" charset="0"/>
+              </a:rPr>
+              <a:t>AB</a:t>
+            </a:r>
+            <a:r>
+              <a:rPr lang="ja-JP" altLang="en-US" sz="1600" dirty="0">
+                <a:latin typeface="Arial" panose="020B0604020202020204" pitchFamily="34" charset="0"/>
+                <a:cs typeface="Arial" panose="020B0604020202020204" pitchFamily="34" charset="0"/>
+              </a:rPr>
+              <a:t>データと</a:t>
+            </a:r>
+            <a:r>
+              <a:rPr lang="en-US" altLang="ja-JP" sz="1600" dirty="0">
+                <a:latin typeface="Arial" panose="020B0604020202020204" pitchFamily="34" charset="0"/>
+                <a:cs typeface="Arial" panose="020B0604020202020204" pitchFamily="34" charset="0"/>
+              </a:rPr>
+              <a:t>CL</a:t>
+            </a:r>
+            <a:r>
+              <a:rPr lang="ja-JP" altLang="en-US" sz="1600" dirty="0">
+                <a:latin typeface="Arial" panose="020B0604020202020204" pitchFamily="34" charset="0"/>
+                <a:cs typeface="Arial" panose="020B0604020202020204" pitchFamily="34" charset="0"/>
+              </a:rPr>
+              <a:t>データのみのインデックスを作成します。</a:t>
+            </a:r>
+            <a:endParaRPr lang="en-US" altLang="ja-JP" sz="1600" dirty="0">
+              <a:latin typeface="Arial" panose="020B0604020202020204" pitchFamily="34" charset="0"/>
+              <a:cs typeface="Arial" panose="020B0604020202020204" pitchFamily="34" charset="0"/>
+            </a:endParaRPr>
+          </a:p>
+          <a:p>
+            <a:pPr marL="285750" indent="-285750">
+              <a:buFont typeface="Arial" panose="020B0604020202020204" pitchFamily="34" charset="0"/>
+              <a:buChar char="•"/>
+            </a:pPr>
+            <a:endParaRPr lang="en-US" altLang="ja-JP" sz="1600" dirty="0">
+              <a:latin typeface="Arial" panose="020B0604020202020204" pitchFamily="34" charset="0"/>
+              <a:cs typeface="Arial" panose="020B0604020202020204" pitchFamily="34" charset="0"/>
+            </a:endParaRPr>
+          </a:p>
+          <a:p>
+            <a:pPr marL="285750" indent="-285750">
+              <a:buFont typeface="Arial" panose="020B0604020202020204" pitchFamily="34" charset="0"/>
+              <a:buChar char="•"/>
+            </a:pPr>
+            <a:r>
+              <a:rPr lang="en-US" altLang="ja-JP" sz="1600" dirty="0">
+                <a:latin typeface="Arial" panose="020B0604020202020204" pitchFamily="34" charset="0"/>
+                <a:cs typeface="Arial" panose="020B0604020202020204" pitchFamily="34" charset="0"/>
+              </a:rPr>
+              <a:t>Azure AI Search</a:t>
+            </a:r>
+            <a:r>
+              <a:rPr lang="ja-JP" altLang="en-US" sz="1600" dirty="0">
+                <a:latin typeface="Arial" panose="020B0604020202020204" pitchFamily="34" charset="0"/>
+                <a:cs typeface="Arial" panose="020B0604020202020204" pitchFamily="34" charset="0"/>
+              </a:rPr>
+              <a:t>の価格：</a:t>
+            </a:r>
+            <a:endParaRPr lang="en-US" altLang="ja-JP" sz="1600" dirty="0">
+              <a:latin typeface="Arial" panose="020B0604020202020204" pitchFamily="34" charset="0"/>
+              <a:cs typeface="Arial" panose="020B0604020202020204" pitchFamily="34" charset="0"/>
+            </a:endParaRPr>
+          </a:p>
           <a:p>
             <a:r>
               <a:rPr lang="en-US" altLang="zh-CN" sz="1600" dirty="0">
                 <a:latin typeface="Arial" panose="020B0604020202020204" pitchFamily="34" charset="0"/>
                 <a:cs typeface="Arial" panose="020B0604020202020204" pitchFamily="34" charset="0"/>
               </a:rPr>
-              <a:t>	(</a:t>
+              <a:t>	</a:t>
             </a:r>
             <a:r>
               <a:rPr lang="ja-JP" altLang="en-US" sz="1600" dirty="0">
@@ -8193,7 +8418,21 @@
                 <a:latin typeface="Arial" panose="020B0604020202020204" pitchFamily="34" charset="0"/>
                 <a:cs typeface="Arial" panose="020B0604020202020204" pitchFamily="34" charset="0"/>
               </a:rPr>
-              <a:t>¥48,938.88/</a:t>
+              <a:t>¥48,938.88</a:t>
+            </a:r>
+            <a:r>
+              <a:rPr lang="en-US" altLang="zh-CN" sz="1600" dirty="0">
+                <a:latin typeface="Arial" panose="020B0604020202020204" pitchFamily="34" charset="0"/>
+                <a:cs typeface="Arial" panose="020B0604020202020204" pitchFamily="34" charset="0"/>
+              </a:rPr>
+              <a:t>/SU</a:t>
+            </a:r>
+            <a:r>
+              <a:rPr lang="en-US" altLang="ja-JP" sz="1600" dirty="0">
+                <a:latin typeface="Arial" panose="020B0604020202020204" pitchFamily="34" charset="0"/>
+                <a:cs typeface="Arial" panose="020B0604020202020204" pitchFamily="34" charset="0"/>
+              </a:rPr>
+              <a:t>/</a:t>
             </a:r>
             <a:r>
               <a:rPr lang="ja-JP" altLang="en-US" sz="1600" dirty="0">
@@ -8207,48 +8446,322 @@
                 <a:latin typeface="Arial" panose="020B0604020202020204" pitchFamily="34" charset="0"/>
                 <a:cs typeface="Arial" panose="020B0604020202020204" pitchFamily="34" charset="0"/>
               </a:rPr>
-              <a:t>- 160 GB</a:t>
+              <a:t>- 160 GB/SU</a:t>
             </a:r>
             <a:r>
               <a:rPr lang="ja-JP" altLang="en-US" sz="1600" dirty="0">
                 <a:latin typeface="Arial" panose="020B0604020202020204" pitchFamily="34" charset="0"/>
                 <a:cs typeface="Arial" panose="020B0604020202020204" pitchFamily="34" charset="0"/>
               </a:rPr>
-              <a:t>ストレージ　</a:t>
+              <a:t>　</a:t>
             </a:r>
             <a:r>
               <a:rPr lang="en-US" altLang="ja-JP" sz="1600" dirty="0">
                 <a:latin typeface="Arial" panose="020B0604020202020204" pitchFamily="34" charset="0"/>
                 <a:cs typeface="Arial" panose="020B0604020202020204" pitchFamily="34" charset="0"/>
               </a:rPr>
-              <a:t>MAX</a:t>
+              <a:t>Service Unit,</a:t>
             </a:r>
             <a:r>
               <a:rPr lang="ja-JP" altLang="en-US" sz="1600" dirty="0">
                 <a:latin typeface="Arial" panose="020B0604020202020204" pitchFamily="34" charset="0"/>
                 <a:cs typeface="Arial" panose="020B0604020202020204" pitchFamily="34" charset="0"/>
               </a:rPr>
-              <a:t> </a:t>
+              <a:t> 最大１２ユニット </a:t>
             </a:r>
             <a:r>
               <a:rPr lang="en-US" altLang="ja-JP" sz="1600" dirty="0">
                 <a:latin typeface="Arial" panose="020B0604020202020204" pitchFamily="34" charset="0"/>
                 <a:cs typeface="Arial" panose="020B0604020202020204" pitchFamily="34" charset="0"/>
               </a:rPr>
-              <a:t>50</a:t>
+              <a:t>= 160*12 = 1.9TB</a:t>
+            </a:r>
+          </a:p>
+          <a:p>
+            <a:r>
+              <a:rPr lang="en-US" altLang="zh-CN" sz="1600" dirty="0">
+                <a:latin typeface="Arial" panose="020B0604020202020204" pitchFamily="34" charset="0"/>
+                <a:cs typeface="Arial" panose="020B0604020202020204" pitchFamily="34" charset="0"/>
+              </a:rPr>
+              <a:t>	</a:t>
             </a:r>
             <a:r>
               <a:rPr lang="ja-JP" altLang="en-US" sz="1600" dirty="0">
                 <a:latin typeface="Arial" panose="020B0604020202020204" pitchFamily="34" charset="0"/>
                 <a:cs typeface="Arial" panose="020B0604020202020204" pitchFamily="34" charset="0"/>
               </a:rPr>
-              <a:t>インデックス）</a:t>
-            </a:r>
-            <a:endParaRPr lang="zh-CN" altLang="en-US" sz="1600" dirty="0">
+              <a:t>標準</a:t>
+            </a:r>
+            <a:r>
+              <a:rPr lang="en-US" altLang="ja-JP" sz="1600" dirty="0">
+                <a:latin typeface="Arial" panose="020B0604020202020204" pitchFamily="34" charset="0"/>
+                <a:cs typeface="Arial" panose="020B0604020202020204" pitchFamily="34" charset="0"/>
+              </a:rPr>
+              <a:t>S</a:t>
+            </a:r>
+            <a:r>
+              <a:rPr lang="ja-JP" altLang="en-US" sz="1600" dirty="0">
+                <a:latin typeface="Arial" panose="020B0604020202020204" pitchFamily="34" charset="0"/>
+                <a:cs typeface="Arial" panose="020B0604020202020204" pitchFamily="34" charset="0"/>
+              </a:rPr>
+              <a:t>２の場合：</a:t>
+            </a:r>
+            <a:r>
+              <a:rPr lang="en-US" altLang="ja-JP" sz="1600" dirty="0">
+                <a:latin typeface="Arial" panose="020B0604020202020204" pitchFamily="34" charset="0"/>
+                <a:cs typeface="Arial" panose="020B0604020202020204" pitchFamily="34" charset="0"/>
+              </a:rPr>
+              <a:t>¥195,535.07</a:t>
+            </a:r>
+            <a:r>
+              <a:rPr lang="en-US" altLang="zh-CN" sz="1600" dirty="0">
+                <a:latin typeface="Arial" panose="020B0604020202020204" pitchFamily="34" charset="0"/>
+                <a:cs typeface="Arial" panose="020B0604020202020204" pitchFamily="34" charset="0"/>
+              </a:rPr>
+              <a:t>/SU </a:t>
+            </a:r>
+            <a:r>
+              <a:rPr lang="en-US" altLang="ja-JP" sz="1600" dirty="0">
+                <a:latin typeface="Arial" panose="020B0604020202020204" pitchFamily="34" charset="0"/>
+                <a:cs typeface="Arial" panose="020B0604020202020204" pitchFamily="34" charset="0"/>
+              </a:rPr>
+              <a:t>/</a:t>
+            </a:r>
+            <a:r>
+              <a:rPr lang="ja-JP" altLang="en-US" sz="1600" dirty="0">
+                <a:latin typeface="Arial" panose="020B0604020202020204" pitchFamily="34" charset="0"/>
+                <a:cs typeface="Arial" panose="020B0604020202020204" pitchFamily="34" charset="0"/>
+              </a:rPr>
+              <a:t>月 </a:t>
+            </a:r>
+            <a:r>
+              <a:rPr lang="en-US" altLang="ja-JP" sz="1600" dirty="0">
+                <a:latin typeface="Arial" panose="020B0604020202020204" pitchFamily="34" charset="0"/>
+                <a:cs typeface="Arial" panose="020B0604020202020204" pitchFamily="34" charset="0"/>
+              </a:rPr>
+              <a:t>- 512 GB/SU</a:t>
+            </a:r>
+            <a:r>
+              <a:rPr lang="ja-JP" altLang="en-US" sz="1600" dirty="0">
+                <a:latin typeface="Arial" panose="020B0604020202020204" pitchFamily="34" charset="0"/>
+                <a:cs typeface="Arial" panose="020B0604020202020204" pitchFamily="34" charset="0"/>
+              </a:rPr>
+              <a:t>　</a:t>
+            </a:r>
+            <a:r>
+              <a:rPr lang="en-US" altLang="ja-JP" sz="1600" dirty="0">
+                <a:latin typeface="Arial" panose="020B0604020202020204" pitchFamily="34" charset="0"/>
+                <a:cs typeface="Arial" panose="020B0604020202020204" pitchFamily="34" charset="0"/>
+              </a:rPr>
+              <a:t>Service Unit,</a:t>
+            </a:r>
+            <a:r>
+              <a:rPr lang="ja-JP" altLang="en-US" sz="1600" dirty="0">
+                <a:latin typeface="Arial" panose="020B0604020202020204" pitchFamily="34" charset="0"/>
+                <a:cs typeface="Arial" panose="020B0604020202020204" pitchFamily="34" charset="0"/>
+              </a:rPr>
+              <a:t> 最大１２ユニット </a:t>
+            </a:r>
+            <a:r>
+              <a:rPr lang="en-US" altLang="ja-JP" sz="1600" dirty="0">
+                <a:latin typeface="Arial" panose="020B0604020202020204" pitchFamily="34" charset="0"/>
+                <a:cs typeface="Arial" panose="020B0604020202020204" pitchFamily="34" charset="0"/>
+              </a:rPr>
+              <a:t>= 512*12 = 6TB</a:t>
+            </a:r>
+          </a:p>
+          <a:p>
+            <a:endParaRPr lang="en-US" altLang="ja-JP" sz="1600" dirty="0">
               <a:latin typeface="Arial" panose="020B0604020202020204" pitchFamily="34" charset="0"/>
               <a:cs typeface="Arial" panose="020B0604020202020204" pitchFamily="34" charset="0"/>
             </a:endParaRPr>
           </a:p>
+          <a:p>
+            <a:pPr marL="285750" indent="-285750">
+              <a:buFont typeface="Arial" panose="020B0604020202020204" pitchFamily="34" charset="0"/>
+              <a:buChar char="•"/>
+            </a:pPr>
+            <a:r>
+              <a:rPr lang="ja-JP" altLang="en-US" sz="1600" dirty="0">
+                <a:latin typeface="Arial" panose="020B0604020202020204" pitchFamily="34" charset="0"/>
+                <a:cs typeface="Arial" panose="020B0604020202020204" pitchFamily="34" charset="0"/>
+              </a:rPr>
+              <a:t>他に、全文データのストレージのために、前述の</a:t>
+            </a:r>
+            <a:r>
+              <a:rPr lang="en-US" altLang="ja-JP" sz="1600" dirty="0">
+                <a:latin typeface="Arial" panose="020B0604020202020204" pitchFamily="34" charset="0"/>
+                <a:cs typeface="Arial" panose="020B0604020202020204" pitchFamily="34" charset="0"/>
+              </a:rPr>
+              <a:t>Azure Data Lake Storage</a:t>
+            </a:r>
+            <a:r>
+              <a:rPr lang="ja-JP" altLang="en-US" sz="1600" dirty="0">
+                <a:latin typeface="Arial" panose="020B0604020202020204" pitchFamily="34" charset="0"/>
+                <a:cs typeface="Arial" panose="020B0604020202020204" pitchFamily="34" charset="0"/>
+              </a:rPr>
+              <a:t>を活用し、特許データの全文は</a:t>
+            </a:r>
+            <a:r>
+              <a:rPr lang="en-US" altLang="ja-JP" sz="1600" dirty="0">
+                <a:latin typeface="Arial" panose="020B0604020202020204" pitchFamily="34" charset="0"/>
+                <a:cs typeface="Arial" panose="020B0604020202020204" pitchFamily="34" charset="0"/>
+              </a:rPr>
+              <a:t>Data Lake Storage</a:t>
+            </a:r>
+            <a:r>
+              <a:rPr lang="ja-JP" altLang="en-US" sz="1600" dirty="0">
+                <a:latin typeface="Arial" panose="020B0604020202020204" pitchFamily="34" charset="0"/>
+                <a:cs typeface="Arial" panose="020B0604020202020204" pitchFamily="34" charset="0"/>
+              </a:rPr>
+              <a:t>に保存することで、万が一必要な時に全文</a:t>
+            </a:r>
+            <a:r>
+              <a:rPr lang="en-US" altLang="ja-JP" sz="1600" dirty="0">
+                <a:latin typeface="Arial" panose="020B0604020202020204" pitchFamily="34" charset="0"/>
+                <a:cs typeface="Arial" panose="020B0604020202020204" pitchFamily="34" charset="0"/>
+              </a:rPr>
+              <a:t>JSON</a:t>
+            </a:r>
+            <a:r>
+              <a:rPr lang="ja-JP" altLang="en-US" sz="1600" dirty="0">
+                <a:latin typeface="Arial" panose="020B0604020202020204" pitchFamily="34" charset="0"/>
+                <a:cs typeface="Arial" panose="020B0604020202020204" pitchFamily="34" charset="0"/>
+              </a:rPr>
+              <a:t>も迅速に検索できそうです。</a:t>
+            </a:r>
+            <a:r>
+              <a:rPr lang="en-US" altLang="ja-JP" sz="1600" dirty="0">
+                <a:latin typeface="Arial" panose="020B0604020202020204" pitchFamily="34" charset="0"/>
+                <a:cs typeface="Arial" panose="020B0604020202020204" pitchFamily="34" charset="0"/>
+              </a:rPr>
+              <a:t>(</a:t>
+            </a:r>
+            <a:r>
+              <a:rPr lang="ja-JP" altLang="en-US" sz="1600" dirty="0">
+                <a:latin typeface="Arial" panose="020B0604020202020204" pitchFamily="34" charset="0"/>
+                <a:cs typeface="Arial" panose="020B0604020202020204" pitchFamily="34" charset="0"/>
+              </a:rPr>
+              <a:t>以下は</a:t>
+            </a:r>
+            <a:r>
+              <a:rPr lang="en-US" altLang="ja-JP" sz="1600" dirty="0">
+                <a:latin typeface="Arial" panose="020B0604020202020204" pitchFamily="34" charset="0"/>
+                <a:cs typeface="Arial" panose="020B0604020202020204" pitchFamily="34" charset="0"/>
+              </a:rPr>
+              <a:t>Ho</a:t>
+            </a:r>
+            <a:r>
+              <a:rPr lang="ja-JP" altLang="en-US" sz="1600" dirty="0">
+                <a:latin typeface="Arial" panose="020B0604020202020204" pitchFamily="34" charset="0"/>
+                <a:cs typeface="Arial" panose="020B0604020202020204" pitchFamily="34" charset="0"/>
+              </a:rPr>
+              <a:t>ｔの</a:t>
+            </a:r>
+            <a:r>
+              <a:rPr lang="ja-JP" altLang="en-US" sz="1600" dirty="0">
+                <a:latin typeface="Arial" panose="020B0604020202020204" pitchFamily="34" charset="0"/>
+                <a:cs typeface="Arial" panose="020B0604020202020204" pitchFamily="34" charset="0"/>
+                <a:hlinkClick r:id="rId3">
+                  <a:extLst>
+                    <a:ext uri="{A12FA001-AC4F-418D-AE19-62706E023703}">
+                      <ahyp:hlinkClr xmlns:ahyp="http://schemas.microsoft.com/office/drawing/2018/hyperlinkcolor" val="tx"/>
+                    </a:ext>
+                  </a:extLst>
+                </a:hlinkClick>
+              </a:rPr>
+              <a:t>サンプル</a:t>
+            </a:r>
+            <a:r>
+              <a:rPr lang="ja-JP" altLang="en-US" sz="1600" dirty="0">
+                <a:latin typeface="Arial" panose="020B0604020202020204" pitchFamily="34" charset="0"/>
+                <a:cs typeface="Arial" panose="020B0604020202020204" pitchFamily="34" charset="0"/>
+              </a:rPr>
+              <a:t>）</a:t>
+            </a:r>
+            <a:endParaRPr lang="en-US" altLang="ja-JP" sz="1600" dirty="0">
+              <a:latin typeface="Arial" panose="020B0604020202020204" pitchFamily="34" charset="0"/>
+              <a:cs typeface="Arial" panose="020B0604020202020204" pitchFamily="34" charset="0"/>
+            </a:endParaRPr>
+          </a:p>
+          <a:p>
+            <a:r>
+              <a:rPr lang="en-US" altLang="ja-JP" sz="1600" dirty="0">
+                <a:latin typeface="Arial" panose="020B0604020202020204" pitchFamily="34" charset="0"/>
+                <a:cs typeface="Arial" panose="020B0604020202020204" pitchFamily="34" charset="0"/>
+              </a:rPr>
+              <a:t>	Data Storage: max 51,200 GB / month - ¥3.020 per GB</a:t>
+            </a:r>
+          </a:p>
+          <a:p>
+            <a:r>
+              <a:rPr lang="en-US" altLang="ja-JP" sz="1600" dirty="0">
+                <a:latin typeface="Arial" panose="020B0604020202020204" pitchFamily="34" charset="0"/>
+                <a:cs typeface="Arial" panose="020B0604020202020204" pitchFamily="34" charset="0"/>
+              </a:rPr>
+              <a:t>	Transaction: Write Operations* (every 4 MB, per 10,000)</a:t>
+            </a:r>
+            <a:r>
+              <a:rPr lang="ja-JP" altLang="en-US" sz="1600" dirty="0">
+                <a:latin typeface="Arial" panose="020B0604020202020204" pitchFamily="34" charset="0"/>
+                <a:cs typeface="Arial" panose="020B0604020202020204" pitchFamily="34" charset="0"/>
+              </a:rPr>
+              <a:t>　</a:t>
+            </a:r>
+            <a:r>
+              <a:rPr lang="en-US" altLang="ja-JP" sz="1600" dirty="0">
+                <a:latin typeface="Arial" panose="020B0604020202020204" pitchFamily="34" charset="0"/>
+                <a:cs typeface="Arial" panose="020B0604020202020204" pitchFamily="34" charset="0"/>
+              </a:rPr>
+              <a:t>¥9.81435</a:t>
+            </a:r>
+          </a:p>
+          <a:p>
+            <a:r>
+              <a:rPr lang="en-US" altLang="ja-JP" sz="1600" dirty="0">
+                <a:latin typeface="Arial" panose="020B0604020202020204" pitchFamily="34" charset="0"/>
+                <a:cs typeface="Arial" panose="020B0604020202020204" pitchFamily="34" charset="0"/>
+              </a:rPr>
+              <a:t>			</a:t>
+            </a:r>
+            <a:r>
+              <a:rPr lang="ja-JP" altLang="en-US" sz="1600" dirty="0">
+                <a:latin typeface="Arial" panose="020B0604020202020204" pitchFamily="34" charset="0"/>
+                <a:cs typeface="Arial" panose="020B0604020202020204" pitchFamily="34" charset="0"/>
+              </a:rPr>
+              <a:t>　　</a:t>
+            </a:r>
+            <a:r>
+              <a:rPr lang="en-US" altLang="ja-JP" sz="1600" dirty="0">
+                <a:latin typeface="Arial" panose="020B0604020202020204" pitchFamily="34" charset="0"/>
+                <a:cs typeface="Arial" panose="020B0604020202020204" pitchFamily="34" charset="0"/>
+              </a:rPr>
+              <a:t>Read Operations** (every 4 MB, per 10,000)</a:t>
+            </a:r>
+            <a:r>
+              <a:rPr lang="ja-JP" altLang="en-US" sz="1600" dirty="0">
+                <a:latin typeface="Arial" panose="020B0604020202020204" pitchFamily="34" charset="0"/>
+                <a:cs typeface="Arial" panose="020B0604020202020204" pitchFamily="34" charset="0"/>
+              </a:rPr>
+              <a:t>　</a:t>
+            </a:r>
+            <a:r>
+              <a:rPr lang="en-US" altLang="ja-JP" sz="1600" dirty="0">
+                <a:latin typeface="Arial" panose="020B0604020202020204" pitchFamily="34" charset="0"/>
+                <a:cs typeface="Arial" panose="020B0604020202020204" pitchFamily="34" charset="0"/>
+              </a:rPr>
+              <a:t>¥0.78515</a:t>
+            </a:r>
+          </a:p>
+          <a:p>
+            <a:r>
+              <a:rPr lang="en-US" altLang="ja-JP" sz="1600" dirty="0">
+                <a:latin typeface="Arial" panose="020B0604020202020204" pitchFamily="34" charset="0"/>
+                <a:cs typeface="Arial" panose="020B0604020202020204" pitchFamily="34" charset="0"/>
+              </a:rPr>
+              <a:t>	</a:t>
+            </a:r>
+          </a:p>
         </p:txBody>
       </p:sp>
       <p:sp>
@@ -8256,7 +8769,7 @@
           <p:cNvPr id="5" name="矩形 4">
             <a:extLst>
               <a:ext uri="{FF2B5EF4-FFF2-40B4-BE49-F238E27FC236}">
-                <a16:creationId xmlns:a16="http://schemas.microsoft.com/office/drawing/2014/main" id="{8276F97A-B00D-6C47-DF75-D006C7FA0045}"/>
+                <a16:creationId xmlns:a16="http://schemas.microsoft.com/office/drawing/2014/main" id="{F097F366-F3C9-BC92-3E0C-23A9F7A36928}"/>
               </a:ext>
             </a:extLst>
           </p:cNvPr>
@@ -8265,7 +8778,7 @@
         </p:nvSpPr>
         <p:spPr>
           <a:xfrm>
-            <a:off x="5429840" y="4099403"/>
+            <a:off x="5344999" y="4752557"/>
             <a:ext cx="1809946" cy="490194"/>
           </a:xfrm>
           <a:prstGeom prst="rect">
@@ -8315,7 +8828,7 @@
           <p:cNvPr id="7" name="矩形 6">
             <a:extLst>
               <a:ext uri="{FF2B5EF4-FFF2-40B4-BE49-F238E27FC236}">
-                <a16:creationId xmlns:a16="http://schemas.microsoft.com/office/drawing/2014/main" id="{2AF670B7-D4AB-6175-5C3F-23BA76232E40}"/>
+                <a16:creationId xmlns:a16="http://schemas.microsoft.com/office/drawing/2014/main" id="{6D293704-5F39-864B-CA0E-28491AA5A4AC}"/>
               </a:ext>
             </a:extLst>
           </p:cNvPr>
@@ -8324,7 +8837,7 @@
         </p:nvSpPr>
         <p:spPr>
           <a:xfrm>
-            <a:off x="5425127" y="5111684"/>
+            <a:off x="5340286" y="5764838"/>
             <a:ext cx="1809946" cy="490194"/>
           </a:xfrm>
           <a:prstGeom prst="rect">
@@ -8381,7 +8894,7 @@
           <p:cNvPr id="9" name="直接箭头连接符 8">
             <a:extLst>
               <a:ext uri="{FF2B5EF4-FFF2-40B4-BE49-F238E27FC236}">
-                <a16:creationId xmlns:a16="http://schemas.microsoft.com/office/drawing/2014/main" id="{B3D33765-A17E-1658-7423-EBAA679FCC85}"/>
+                <a16:creationId xmlns:a16="http://schemas.microsoft.com/office/drawing/2014/main" id="{B536402A-A470-2A4A-E8EC-6F2FB40D4C82}"/>
               </a:ext>
             </a:extLst>
           </p:cNvPr>
@@ -8393,7 +8906,7 @@
         </p:nvCxnSpPr>
         <p:spPr>
           <a:xfrm flipV="1">
-            <a:off x="6330100" y="4589597"/>
+            <a:off x="6245259" y="5242751"/>
             <a:ext cx="4713" cy="522087"/>
           </a:xfrm>
           <a:prstGeom prst="straightConnector1">
@@ -8423,7 +8936,7 @@
           <p:cNvPr id="10" name="文本框 9">
             <a:extLst>
               <a:ext uri="{FF2B5EF4-FFF2-40B4-BE49-F238E27FC236}">
-                <a16:creationId xmlns:a16="http://schemas.microsoft.com/office/drawing/2014/main" id="{1C99C9C2-D78A-443E-F726-82BDBE8BC0F2}"/>
+                <a16:creationId xmlns:a16="http://schemas.microsoft.com/office/drawing/2014/main" id="{0CF4B003-4AF8-3F7B-26CB-F2C2FD10BC3A}"/>
               </a:ext>
             </a:extLst>
           </p:cNvPr>
@@ -8432,7 +8945,7 @@
         </p:nvSpPr>
         <p:spPr>
           <a:xfrm>
-            <a:off x="6410226" y="4681363"/>
+            <a:off x="6325385" y="5334517"/>
             <a:ext cx="2031477" cy="338554"/>
           </a:xfrm>
           <a:prstGeom prst="rect">
@@ -8459,7 +8972,7 @@
           <p:cNvPr id="12" name="连接符: 肘形 11">
             <a:extLst>
               <a:ext uri="{FF2B5EF4-FFF2-40B4-BE49-F238E27FC236}">
-                <a16:creationId xmlns:a16="http://schemas.microsoft.com/office/drawing/2014/main" id="{295F327E-A04B-4AED-B522-E7F6BC0C1844}"/>
+                <a16:creationId xmlns:a16="http://schemas.microsoft.com/office/drawing/2014/main" id="{650708FF-C951-D4DC-B1DD-D4177F4BBB3B}"/>
               </a:ext>
             </a:extLst>
           </p:cNvPr>
@@ -8471,7 +8984,7 @@
         </p:nvCxnSpPr>
         <p:spPr>
           <a:xfrm>
-            <a:off x="2578232" y="4850640"/>
+            <a:off x="2493391" y="5503794"/>
             <a:ext cx="2846895" cy="506141"/>
           </a:xfrm>
           <a:prstGeom prst="bentConnector3">
@@ -8501,7 +9014,7 @@
           <p:cNvPr id="13" name="连接符: 肘形 12">
             <a:extLst>
               <a:ext uri="{FF2B5EF4-FFF2-40B4-BE49-F238E27FC236}">
-                <a16:creationId xmlns:a16="http://schemas.microsoft.com/office/drawing/2014/main" id="{C978F787-DAE2-F441-CC31-D9C5D377672C}"/>
+                <a16:creationId xmlns:a16="http://schemas.microsoft.com/office/drawing/2014/main" id="{2DEA0962-BAE4-5540-D7E2-8A9F3E97F99C}"/>
               </a:ext>
             </a:extLst>
           </p:cNvPr>
@@ -8513,7 +9026,7 @@
         </p:nvCxnSpPr>
         <p:spPr>
           <a:xfrm flipV="1">
-            <a:off x="2578232" y="4344500"/>
+            <a:off x="2493391" y="4997654"/>
             <a:ext cx="2851608" cy="506140"/>
           </a:xfrm>
           <a:prstGeom prst="bentConnector3">
@@ -8545,7 +9058,7 @@
           <p:cNvPr id="20" name="文本框 19">
             <a:extLst>
               <a:ext uri="{FF2B5EF4-FFF2-40B4-BE49-F238E27FC236}">
-                <a16:creationId xmlns:a16="http://schemas.microsoft.com/office/drawing/2014/main" id="{EDC6D402-CE62-B0C8-BAC1-E379C0D01B69}"/>
+                <a16:creationId xmlns:a16="http://schemas.microsoft.com/office/drawing/2014/main" id="{C7E1C07E-96C6-C369-DDBA-ACF30A2D04A1}"/>
               </a:ext>
             </a:extLst>
           </p:cNvPr>
@@ -8554,7 +9067,7 @@
         </p:nvSpPr>
         <p:spPr>
           <a:xfrm>
-            <a:off x="4001679" y="4045388"/>
+            <a:off x="3916838" y="4698542"/>
             <a:ext cx="1318182" cy="338554"/>
           </a:xfrm>
           <a:prstGeom prst="rect">
@@ -8581,7 +9094,7 @@
           <p:cNvPr id="21" name="文本框 20">
             <a:extLst>
               <a:ext uri="{FF2B5EF4-FFF2-40B4-BE49-F238E27FC236}">
-                <a16:creationId xmlns:a16="http://schemas.microsoft.com/office/drawing/2014/main" id="{EF5994D6-C537-D210-7217-417556C30735}"/>
+                <a16:creationId xmlns:a16="http://schemas.microsoft.com/office/drawing/2014/main" id="{A0015C62-FECA-6B55-CF72-F185AECE9DBF}"/>
               </a:ext>
             </a:extLst>
           </p:cNvPr>
@@ -8590,7 +9103,7 @@
         </p:nvSpPr>
         <p:spPr>
           <a:xfrm>
-            <a:off x="4102232" y="5355091"/>
+            <a:off x="4017391" y="6008245"/>
             <a:ext cx="1318182" cy="338554"/>
           </a:xfrm>
           <a:prstGeom prst="rect">
@@ -8615,7 +9128,7 @@
     </p:spTree>
     <p:extLst>
       <p:ext uri="{BB962C8B-B14F-4D97-AF65-F5344CB8AC3E}">
-        <p14:creationId xmlns:p14="http://schemas.microsoft.com/office/powerpoint/2010/main" val="3999093955"/>
+        <p14:creationId xmlns:p14="http://schemas.microsoft.com/office/powerpoint/2010/main" val="255531923"/>
       </p:ext>
     </p:extLst>
   </p:cSld>

--- a/Research2.pptx
+++ b/Research2.pptx
@@ -5,13 +5,16 @@
     <p:sldMasterId id="2147483714" r:id="rId1"/>
   </p:sldMasterIdLst>
   <p:notesMasterIdLst>
-    <p:notesMasterId r:id="rId6"/>
+    <p:notesMasterId r:id="rId9"/>
   </p:notesMasterIdLst>
   <p:sldIdLst>
     <p:sldId id="257" r:id="rId2"/>
     <p:sldId id="258" r:id="rId3"/>
     <p:sldId id="259" r:id="rId4"/>
     <p:sldId id="260" r:id="rId5"/>
+    <p:sldId id="261" r:id="rId6"/>
+    <p:sldId id="262" r:id="rId7"/>
+    <p:sldId id="263" r:id="rId8"/>
   </p:sldIdLst>
   <p:sldSz cx="12192000" cy="6858000"/>
   <p:notesSz cx="6858000" cy="9144000"/>
@@ -118,6 +121,5750 @@
 </p:presentation>
 </file>
 
+<file path=ppt/diagrams/colors1.xml><?xml version="1.0" encoding="utf-8"?>
+<dgm:colorsDef xmlns:dgm="http://schemas.openxmlformats.org/drawingml/2006/diagram" xmlns:a="http://schemas.openxmlformats.org/drawingml/2006/main" uniqueId="urn:microsoft.com/office/officeart/2005/8/colors/accent1_2">
+  <dgm:title val=""/>
+  <dgm:desc val=""/>
+  <dgm:catLst>
+    <dgm:cat type="accent1" pri="11200"/>
+  </dgm:catLst>
+  <dgm:styleLbl name="node0">
+    <dgm:fillClrLst meth="repeat">
+      <a:schemeClr val="accent1"/>
+    </dgm:fillClrLst>
+    <dgm:linClrLst meth="repeat">
+      <a:schemeClr val="lt1"/>
+    </dgm:linClrLst>
+    <dgm:effectClrLst/>
+    <dgm:txLinClrLst/>
+    <dgm:txFillClrLst/>
+    <dgm:txEffectClrLst/>
+  </dgm:styleLbl>
+  <dgm:styleLbl name="alignNode1">
+    <dgm:fillClrLst meth="repeat">
+      <a:schemeClr val="accent1"/>
+    </dgm:fillClrLst>
+    <dgm:linClrLst meth="repeat">
+      <a:schemeClr val="accent1"/>
+    </dgm:linClrLst>
+    <dgm:effectClrLst/>
+    <dgm:txLinClrLst/>
+    <dgm:txFillClrLst/>
+    <dgm:txEffectClrLst/>
+  </dgm:styleLbl>
+  <dgm:styleLbl name="node1">
+    <dgm:fillClrLst meth="repeat">
+      <a:schemeClr val="accent1"/>
+    </dgm:fillClrLst>
+    <dgm:linClrLst meth="repeat">
+      <a:schemeClr val="lt1"/>
+    </dgm:linClrLst>
+    <dgm:effectClrLst/>
+    <dgm:txLinClrLst/>
+    <dgm:txFillClrLst/>
+    <dgm:txEffectClrLst/>
+  </dgm:styleLbl>
+  <dgm:styleLbl name="lnNode1">
+    <dgm:fillClrLst meth="repeat">
+      <a:schemeClr val="accent1"/>
+    </dgm:fillClrLst>
+    <dgm:linClrLst meth="repeat">
+      <a:schemeClr val="lt1"/>
+    </dgm:linClrLst>
+    <dgm:effectClrLst/>
+    <dgm:txLinClrLst/>
+    <dgm:txFillClrLst/>
+    <dgm:txEffectClrLst/>
+  </dgm:styleLbl>
+  <dgm:styleLbl name="vennNode1">
+    <dgm:fillClrLst meth="repeat">
+      <a:schemeClr val="accent1">
+        <a:alpha val="50000"/>
+      </a:schemeClr>
+    </dgm:fillClrLst>
+    <dgm:linClrLst meth="repeat">
+      <a:schemeClr val="lt1"/>
+    </dgm:linClrLst>
+    <dgm:effectClrLst/>
+    <dgm:txLinClrLst/>
+    <dgm:txFillClrLst/>
+    <dgm:txEffectClrLst/>
+  </dgm:styleLbl>
+  <dgm:styleLbl name="node2">
+    <dgm:fillClrLst meth="repeat">
+      <a:schemeClr val="accent1"/>
+    </dgm:fillClrLst>
+    <dgm:linClrLst meth="repeat">
+      <a:schemeClr val="lt1"/>
+    </dgm:linClrLst>
+    <dgm:effectClrLst/>
+    <dgm:txLinClrLst/>
+    <dgm:txFillClrLst/>
+    <dgm:txEffectClrLst/>
+  </dgm:styleLbl>
+  <dgm:styleLbl name="node3">
+    <dgm:fillClrLst meth="repeat">
+      <a:schemeClr val="accent1"/>
+    </dgm:fillClrLst>
+    <dgm:linClrLst meth="repeat">
+      <a:schemeClr val="lt1"/>
+    </dgm:linClrLst>
+    <dgm:effectClrLst/>
+    <dgm:txLinClrLst/>
+    <dgm:txFillClrLst/>
+    <dgm:txEffectClrLst/>
+  </dgm:styleLbl>
+  <dgm:styleLbl name="node4">
+    <dgm:fillClrLst meth="repeat">
+      <a:schemeClr val="accent1"/>
+    </dgm:fillClrLst>
+    <dgm:linClrLst meth="repeat">
+      <a:schemeClr val="lt1"/>
+    </dgm:linClrLst>
+    <dgm:effectClrLst/>
+    <dgm:txLinClrLst/>
+    <dgm:txFillClrLst/>
+    <dgm:txEffectClrLst/>
+  </dgm:styleLbl>
+  <dgm:styleLbl name="fgImgPlace1">
+    <dgm:fillClrLst meth="repeat">
+      <a:schemeClr val="accent1">
+        <a:tint val="50000"/>
+      </a:schemeClr>
+    </dgm:fillClrLst>
+    <dgm:linClrLst meth="repeat">
+      <a:schemeClr val="lt1"/>
+    </dgm:linClrLst>
+    <dgm:effectClrLst/>
+    <dgm:txLinClrLst/>
+    <dgm:txFillClrLst meth="repeat">
+      <a:schemeClr val="lt1"/>
+    </dgm:txFillClrLst>
+    <dgm:txEffectClrLst/>
+  </dgm:styleLbl>
+  <dgm:styleLbl name="alignImgPlace1">
+    <dgm:fillClrLst meth="repeat">
+      <a:schemeClr val="accent1">
+        <a:tint val="50000"/>
+      </a:schemeClr>
+    </dgm:fillClrLst>
+    <dgm:linClrLst meth="repeat">
+      <a:schemeClr val="lt1"/>
+    </dgm:linClrLst>
+    <dgm:effectClrLst/>
+    <dgm:txLinClrLst/>
+    <dgm:txFillClrLst meth="repeat">
+      <a:schemeClr val="lt1"/>
+    </dgm:txFillClrLst>
+    <dgm:txEffectClrLst/>
+  </dgm:styleLbl>
+  <dgm:styleLbl name="bgImgPlace1">
+    <dgm:fillClrLst meth="repeat">
+      <a:schemeClr val="accent1">
+        <a:tint val="50000"/>
+      </a:schemeClr>
+    </dgm:fillClrLst>
+    <dgm:linClrLst meth="repeat">
+      <a:schemeClr val="lt1"/>
+    </dgm:linClrLst>
+    <dgm:effectClrLst/>
+    <dgm:txLinClrLst/>
+    <dgm:txFillClrLst meth="repeat">
+      <a:schemeClr val="lt1"/>
+    </dgm:txFillClrLst>
+    <dgm:txEffectClrLst/>
+  </dgm:styleLbl>
+  <dgm:styleLbl name="sibTrans2D1">
+    <dgm:fillClrLst meth="repeat">
+      <a:schemeClr val="accent1">
+        <a:tint val="60000"/>
+      </a:schemeClr>
+    </dgm:fillClrLst>
+    <dgm:linClrLst meth="repeat">
+      <a:schemeClr val="accent1">
+        <a:tint val="60000"/>
+      </a:schemeClr>
+    </dgm:linClrLst>
+    <dgm:effectClrLst/>
+    <dgm:txLinClrLst/>
+    <dgm:txFillClrLst/>
+    <dgm:txEffectClrLst/>
+  </dgm:styleLbl>
+  <dgm:styleLbl name="fgSibTrans2D1">
+    <dgm:fillClrLst meth="repeat">
+      <a:schemeClr val="accent1">
+        <a:tint val="60000"/>
+      </a:schemeClr>
+    </dgm:fillClrLst>
+    <dgm:linClrLst meth="repeat">
+      <a:schemeClr val="accent1">
+        <a:tint val="60000"/>
+      </a:schemeClr>
+    </dgm:linClrLst>
+    <dgm:effectClrLst/>
+    <dgm:txLinClrLst/>
+    <dgm:txFillClrLst/>
+    <dgm:txEffectClrLst/>
+  </dgm:styleLbl>
+  <dgm:styleLbl name="bgSibTrans2D1">
+    <dgm:fillClrLst meth="repeat">
+      <a:schemeClr val="accent1">
+        <a:tint val="60000"/>
+      </a:schemeClr>
+    </dgm:fillClrLst>
+    <dgm:linClrLst meth="repeat">
+      <a:schemeClr val="accent1">
+        <a:tint val="60000"/>
+      </a:schemeClr>
+    </dgm:linClrLst>
+    <dgm:effectClrLst/>
+    <dgm:txLinClrLst/>
+    <dgm:txFillClrLst/>
+    <dgm:txEffectClrLst/>
+  </dgm:styleLbl>
+  <dgm:styleLbl name="sibTrans1D1">
+    <dgm:fillClrLst meth="repeat">
+      <a:schemeClr val="accent1"/>
+    </dgm:fillClrLst>
+    <dgm:linClrLst meth="repeat">
+      <a:schemeClr val="accent1"/>
+    </dgm:linClrLst>
+    <dgm:effectClrLst/>
+    <dgm:txLinClrLst/>
+    <dgm:txFillClrLst meth="repeat">
+      <a:schemeClr val="tx1"/>
+    </dgm:txFillClrLst>
+    <dgm:txEffectClrLst/>
+  </dgm:styleLbl>
+  <dgm:styleLbl name="callout">
+    <dgm:fillClrLst meth="repeat">
+      <a:schemeClr val="accent1"/>
+    </dgm:fillClrLst>
+    <dgm:linClrLst meth="repeat">
+      <a:schemeClr val="accent1">
+        <a:tint val="50000"/>
+      </a:schemeClr>
+    </dgm:linClrLst>
+    <dgm:effectClrLst/>
+    <dgm:txLinClrLst/>
+    <dgm:txFillClrLst meth="repeat">
+      <a:schemeClr val="tx1"/>
+    </dgm:txFillClrLst>
+    <dgm:txEffectClrLst/>
+  </dgm:styleLbl>
+  <dgm:styleLbl name="asst0">
+    <dgm:fillClrLst meth="repeat">
+      <a:schemeClr val="accent1"/>
+    </dgm:fillClrLst>
+    <dgm:linClrLst meth="repeat">
+      <a:schemeClr val="lt1"/>
+    </dgm:linClrLst>
+    <dgm:effectClrLst/>
+    <dgm:txLinClrLst/>
+    <dgm:txFillClrLst/>
+    <dgm:txEffectClrLst/>
+  </dgm:styleLbl>
+  <dgm:styleLbl name="asst1">
+    <dgm:fillClrLst meth="repeat">
+      <a:schemeClr val="accent1"/>
+    </dgm:fillClrLst>
+    <dgm:linClrLst meth="repeat">
+      <a:schemeClr val="lt1"/>
+    </dgm:linClrLst>
+    <dgm:effectClrLst/>
+    <dgm:txLinClrLst/>
+    <dgm:txFillClrLst/>
+    <dgm:txEffectClrLst/>
+  </dgm:styleLbl>
+  <dgm:styleLbl name="asst2">
+    <dgm:fillClrLst meth="repeat">
+      <a:schemeClr val="accent1"/>
+    </dgm:fillClrLst>
+    <dgm:linClrLst meth="repeat">
+      <a:schemeClr val="lt1"/>
+    </dgm:linClrLst>
+    <dgm:effectClrLst/>
+    <dgm:txLinClrLst/>
+    <dgm:txFillClrLst/>
+    <dgm:txEffectClrLst/>
+  </dgm:styleLbl>
+  <dgm:styleLbl name="asst3">
+    <dgm:fillClrLst meth="repeat">
+      <a:schemeClr val="accent1"/>
+    </dgm:fillClrLst>
+    <dgm:linClrLst meth="repeat">
+      <a:schemeClr val="lt1"/>
+    </dgm:linClrLst>
+    <dgm:effectClrLst/>
+    <dgm:txLinClrLst/>
+    <dgm:txFillClrLst/>
+    <dgm:txEffectClrLst/>
+  </dgm:styleLbl>
+  <dgm:styleLbl name="asst4">
+    <dgm:fillClrLst meth="repeat">
+      <a:schemeClr val="accent1"/>
+    </dgm:fillClrLst>
+    <dgm:linClrLst meth="repeat">
+      <a:schemeClr val="lt1"/>
+    </dgm:linClrLst>
+    <dgm:effectClrLst/>
+    <dgm:txLinClrLst/>
+    <dgm:txFillClrLst/>
+    <dgm:txEffectClrLst/>
+  </dgm:styleLbl>
+  <dgm:styleLbl name="parChTrans2D1">
+    <dgm:fillClrLst meth="repeat">
+      <a:schemeClr val="accent1">
+        <a:tint val="60000"/>
+      </a:schemeClr>
+    </dgm:fillClrLst>
+    <dgm:linClrLst meth="repeat">
+      <a:schemeClr val="accent1">
+        <a:tint val="60000"/>
+      </a:schemeClr>
+    </dgm:linClrLst>
+    <dgm:effectClrLst/>
+    <dgm:txLinClrLst/>
+    <dgm:txFillClrLst meth="repeat">
+      <a:schemeClr val="lt1"/>
+    </dgm:txFillClrLst>
+    <dgm:txEffectClrLst/>
+  </dgm:styleLbl>
+  <dgm:styleLbl name="parChTrans2D2">
+    <dgm:fillClrLst meth="repeat">
+      <a:schemeClr val="accent1"/>
+    </dgm:fillClrLst>
+    <dgm:linClrLst meth="repeat">
+      <a:schemeClr val="accent1"/>
+    </dgm:linClrLst>
+    <dgm:effectClrLst/>
+    <dgm:txLinClrLst/>
+    <dgm:txFillClrLst meth="repeat">
+      <a:schemeClr val="lt1"/>
+    </dgm:txFillClrLst>
+    <dgm:txEffectClrLst/>
+  </dgm:styleLbl>
+  <dgm:styleLbl name="parChTrans2D3">
+    <dgm:fillClrLst meth="repeat">
+      <a:schemeClr val="accent1"/>
+    </dgm:fillClrLst>
+    <dgm:linClrLst meth="repeat">
+      <a:schemeClr val="accent1"/>
+    </dgm:linClrLst>
+    <dgm:effectClrLst/>
+    <dgm:txLinClrLst/>
+    <dgm:txFillClrLst meth="repeat">
+      <a:schemeClr val="lt1"/>
+    </dgm:txFillClrLst>
+    <dgm:txEffectClrLst/>
+  </dgm:styleLbl>
+  <dgm:styleLbl name="parChTrans2D4">
+    <dgm:fillClrLst meth="repeat">
+      <a:schemeClr val="accent1"/>
+    </dgm:fillClrLst>
+    <dgm:linClrLst meth="repeat">
+      <a:schemeClr val="accent1"/>
+    </dgm:linClrLst>
+    <dgm:effectClrLst/>
+    <dgm:txLinClrLst/>
+    <dgm:txFillClrLst meth="repeat">
+      <a:schemeClr val="lt1"/>
+    </dgm:txFillClrLst>
+    <dgm:txEffectClrLst/>
+  </dgm:styleLbl>
+  <dgm:styleLbl name="parChTrans1D1">
+    <dgm:fillClrLst meth="repeat">
+      <a:schemeClr val="accent1"/>
+    </dgm:fillClrLst>
+    <dgm:linClrLst meth="repeat">
+      <a:schemeClr val="accent1">
+        <a:shade val="60000"/>
+      </a:schemeClr>
+    </dgm:linClrLst>
+    <dgm:effectClrLst/>
+    <dgm:txLinClrLst/>
+    <dgm:txFillClrLst meth="repeat">
+      <a:schemeClr val="tx1"/>
+    </dgm:txFillClrLst>
+    <dgm:txEffectClrLst/>
+  </dgm:styleLbl>
+  <dgm:styleLbl name="parChTrans1D2">
+    <dgm:fillClrLst meth="repeat">
+      <a:schemeClr val="accent1"/>
+    </dgm:fillClrLst>
+    <dgm:linClrLst meth="repeat">
+      <a:schemeClr val="accent1">
+        <a:shade val="60000"/>
+      </a:schemeClr>
+    </dgm:linClrLst>
+    <dgm:effectClrLst/>
+    <dgm:txLinClrLst/>
+    <dgm:txFillClrLst meth="repeat">
+      <a:schemeClr val="tx1"/>
+    </dgm:txFillClrLst>
+    <dgm:txEffectClrLst/>
+  </dgm:styleLbl>
+  <dgm:styleLbl name="parChTrans1D3">
+    <dgm:fillClrLst meth="repeat">
+      <a:schemeClr val="accent1"/>
+    </dgm:fillClrLst>
+    <dgm:linClrLst meth="repeat">
+      <a:schemeClr val="accent1">
+        <a:shade val="80000"/>
+      </a:schemeClr>
+    </dgm:linClrLst>
+    <dgm:effectClrLst/>
+    <dgm:txLinClrLst/>
+    <dgm:txFillClrLst meth="repeat">
+      <a:schemeClr val="tx1"/>
+    </dgm:txFillClrLst>
+    <dgm:txEffectClrLst/>
+  </dgm:styleLbl>
+  <dgm:styleLbl name="parChTrans1D4">
+    <dgm:fillClrLst meth="repeat">
+      <a:schemeClr val="accent1"/>
+    </dgm:fillClrLst>
+    <dgm:linClrLst meth="repeat">
+      <a:schemeClr val="accent1">
+        <a:shade val="80000"/>
+      </a:schemeClr>
+    </dgm:linClrLst>
+    <dgm:effectClrLst/>
+    <dgm:txLinClrLst/>
+    <dgm:txFillClrLst meth="repeat">
+      <a:schemeClr val="tx1"/>
+    </dgm:txFillClrLst>
+    <dgm:txEffectClrLst/>
+  </dgm:styleLbl>
+  <dgm:styleLbl name="fgAcc1">
+    <dgm:fillClrLst meth="repeat">
+      <a:schemeClr val="lt1">
+        <a:alpha val="90000"/>
+      </a:schemeClr>
+    </dgm:fillClrLst>
+    <dgm:linClrLst meth="repeat">
+      <a:schemeClr val="accent1"/>
+    </dgm:linClrLst>
+    <dgm:effectClrLst/>
+    <dgm:txLinClrLst/>
+    <dgm:txFillClrLst meth="repeat">
+      <a:schemeClr val="dk1"/>
+    </dgm:txFillClrLst>
+    <dgm:txEffectClrLst/>
+  </dgm:styleLbl>
+  <dgm:styleLbl name="conFgAcc1">
+    <dgm:fillClrLst meth="repeat">
+      <a:schemeClr val="lt1">
+        <a:alpha val="90000"/>
+      </a:schemeClr>
+    </dgm:fillClrLst>
+    <dgm:linClrLst meth="repeat">
+      <a:schemeClr val="accent1"/>
+    </dgm:linClrLst>
+    <dgm:effectClrLst/>
+    <dgm:txLinClrLst/>
+    <dgm:txFillClrLst meth="repeat">
+      <a:schemeClr val="dk1"/>
+    </dgm:txFillClrLst>
+    <dgm:txEffectClrLst/>
+  </dgm:styleLbl>
+  <dgm:styleLbl name="alignAcc1">
+    <dgm:fillClrLst meth="repeat">
+      <a:schemeClr val="lt1">
+        <a:alpha val="90000"/>
+      </a:schemeClr>
+    </dgm:fillClrLst>
+    <dgm:linClrLst meth="repeat">
+      <a:schemeClr val="accent1"/>
+    </dgm:linClrLst>
+    <dgm:effectClrLst/>
+    <dgm:txLinClrLst/>
+    <dgm:txFillClrLst meth="repeat">
+      <a:schemeClr val="dk1"/>
+    </dgm:txFillClrLst>
+    <dgm:txEffectClrLst/>
+  </dgm:styleLbl>
+  <dgm:styleLbl name="trAlignAcc1">
+    <dgm:fillClrLst meth="repeat">
+      <a:schemeClr val="lt1">
+        <a:alpha val="40000"/>
+      </a:schemeClr>
+    </dgm:fillClrLst>
+    <dgm:linClrLst meth="repeat">
+      <a:schemeClr val="accent1"/>
+    </dgm:linClrLst>
+    <dgm:effectClrLst/>
+    <dgm:txLinClrLst/>
+    <dgm:txFillClrLst meth="repeat">
+      <a:schemeClr val="dk1"/>
+    </dgm:txFillClrLst>
+    <dgm:txEffectClrLst/>
+  </dgm:styleLbl>
+  <dgm:styleLbl name="bgAcc1">
+    <dgm:fillClrLst meth="repeat">
+      <a:schemeClr val="lt1">
+        <a:alpha val="90000"/>
+      </a:schemeClr>
+    </dgm:fillClrLst>
+    <dgm:linClrLst meth="repeat">
+      <a:schemeClr val="accent1"/>
+    </dgm:linClrLst>
+    <dgm:effectClrLst/>
+    <dgm:txLinClrLst/>
+    <dgm:txFillClrLst meth="repeat">
+      <a:schemeClr val="dk1"/>
+    </dgm:txFillClrLst>
+    <dgm:txEffectClrLst/>
+  </dgm:styleLbl>
+  <dgm:styleLbl name="solidFgAcc1">
+    <dgm:fillClrLst meth="repeat">
+      <a:schemeClr val="lt1"/>
+    </dgm:fillClrLst>
+    <dgm:linClrLst meth="repeat">
+      <a:schemeClr val="accent1"/>
+    </dgm:linClrLst>
+    <dgm:effectClrLst/>
+    <dgm:txLinClrLst/>
+    <dgm:txFillClrLst meth="repeat">
+      <a:schemeClr val="dk1"/>
+    </dgm:txFillClrLst>
+    <dgm:txEffectClrLst/>
+  </dgm:styleLbl>
+  <dgm:styleLbl name="solidAlignAcc1">
+    <dgm:fillClrLst meth="repeat">
+      <a:schemeClr val="lt1"/>
+    </dgm:fillClrLst>
+    <dgm:linClrLst meth="repeat">
+      <a:schemeClr val="accent1"/>
+    </dgm:linClrLst>
+    <dgm:effectClrLst/>
+    <dgm:txLinClrLst/>
+    <dgm:txFillClrLst meth="repeat">
+      <a:schemeClr val="dk1"/>
+    </dgm:txFillClrLst>
+    <dgm:txEffectClrLst/>
+  </dgm:styleLbl>
+  <dgm:styleLbl name="solidBgAcc1">
+    <dgm:fillClrLst meth="repeat">
+      <a:schemeClr val="lt1"/>
+    </dgm:fillClrLst>
+    <dgm:linClrLst meth="repeat">
+      <a:schemeClr val="accent1"/>
+    </dgm:linClrLst>
+    <dgm:effectClrLst/>
+    <dgm:txLinClrLst/>
+    <dgm:txFillClrLst meth="repeat">
+      <a:schemeClr val="dk1"/>
+    </dgm:txFillClrLst>
+    <dgm:txEffectClrLst/>
+  </dgm:styleLbl>
+  <dgm:styleLbl name="fgAccFollowNode1">
+    <dgm:fillClrLst meth="repeat">
+      <a:schemeClr val="accent1">
+        <a:alpha val="90000"/>
+        <a:tint val="40000"/>
+      </a:schemeClr>
+    </dgm:fillClrLst>
+    <dgm:linClrLst meth="repeat">
+      <a:schemeClr val="accent1">
+        <a:alpha val="90000"/>
+        <a:tint val="40000"/>
+      </a:schemeClr>
+    </dgm:linClrLst>
+    <dgm:effectClrLst/>
+    <dgm:txLinClrLst/>
+    <dgm:txFillClrLst meth="repeat">
+      <a:schemeClr val="dk1"/>
+    </dgm:txFillClrLst>
+    <dgm:txEffectClrLst/>
+  </dgm:styleLbl>
+  <dgm:styleLbl name="alignAccFollowNode1">
+    <dgm:fillClrLst meth="repeat">
+      <a:schemeClr val="accent1">
+        <a:alpha val="90000"/>
+        <a:tint val="40000"/>
+      </a:schemeClr>
+    </dgm:fillClrLst>
+    <dgm:linClrLst meth="repeat">
+      <a:schemeClr val="accent1">
+        <a:alpha val="90000"/>
+        <a:tint val="40000"/>
+      </a:schemeClr>
+    </dgm:linClrLst>
+    <dgm:effectClrLst/>
+    <dgm:txLinClrLst/>
+    <dgm:txFillClrLst meth="repeat">
+      <a:schemeClr val="dk1"/>
+    </dgm:txFillClrLst>
+    <dgm:txEffectClrLst/>
+  </dgm:styleLbl>
+  <dgm:styleLbl name="bgAccFollowNode1">
+    <dgm:fillClrLst meth="repeat">
+      <a:schemeClr val="accent1">
+        <a:alpha val="90000"/>
+        <a:tint val="40000"/>
+      </a:schemeClr>
+    </dgm:fillClrLst>
+    <dgm:linClrLst meth="repeat">
+      <a:schemeClr val="accent1">
+        <a:alpha val="90000"/>
+        <a:tint val="40000"/>
+      </a:schemeClr>
+    </dgm:linClrLst>
+    <dgm:effectClrLst/>
+    <dgm:txLinClrLst/>
+    <dgm:txFillClrLst meth="repeat">
+      <a:schemeClr val="dk1"/>
+    </dgm:txFillClrLst>
+    <dgm:txEffectClrLst/>
+  </dgm:styleLbl>
+  <dgm:styleLbl name="fgAcc0">
+    <dgm:fillClrLst meth="repeat">
+      <a:schemeClr val="lt1">
+        <a:alpha val="90000"/>
+      </a:schemeClr>
+    </dgm:fillClrLst>
+    <dgm:linClrLst meth="repeat">
+      <a:schemeClr val="accent1"/>
+    </dgm:linClrLst>
+    <dgm:effectClrLst/>
+    <dgm:txLinClrLst/>
+    <dgm:txFillClrLst meth="repeat">
+      <a:schemeClr val="dk1"/>
+    </dgm:txFillClrLst>
+    <dgm:txEffectClrLst/>
+  </dgm:styleLbl>
+  <dgm:styleLbl name="fgAcc2">
+    <dgm:fillClrLst meth="repeat">
+      <a:schemeClr val="lt1">
+        <a:alpha val="90000"/>
+      </a:schemeClr>
+    </dgm:fillClrLst>
+    <dgm:linClrLst meth="repeat">
+      <a:schemeClr val="accent1"/>
+    </dgm:linClrLst>
+    <dgm:effectClrLst/>
+    <dgm:txLinClrLst/>
+    <dgm:txFillClrLst meth="repeat">
+      <a:schemeClr val="dk1"/>
+    </dgm:txFillClrLst>
+    <dgm:txEffectClrLst/>
+  </dgm:styleLbl>
+  <dgm:styleLbl name="fgAcc3">
+    <dgm:fillClrLst meth="repeat">
+      <a:schemeClr val="lt1">
+        <a:alpha val="90000"/>
+      </a:schemeClr>
+    </dgm:fillClrLst>
+    <dgm:linClrLst meth="repeat">
+      <a:schemeClr val="accent1"/>
+    </dgm:linClrLst>
+    <dgm:effectClrLst/>
+    <dgm:txLinClrLst/>
+    <dgm:txFillClrLst meth="repeat">
+      <a:schemeClr val="dk1"/>
+    </dgm:txFillClrLst>
+    <dgm:txEffectClrLst/>
+  </dgm:styleLbl>
+  <dgm:styleLbl name="fgAcc4">
+    <dgm:fillClrLst meth="repeat">
+      <a:schemeClr val="lt1">
+        <a:alpha val="90000"/>
+      </a:schemeClr>
+    </dgm:fillClrLst>
+    <dgm:linClrLst meth="repeat">
+      <a:schemeClr val="accent1"/>
+    </dgm:linClrLst>
+    <dgm:effectClrLst/>
+    <dgm:txLinClrLst/>
+    <dgm:txFillClrLst meth="repeat">
+      <a:schemeClr val="dk1"/>
+    </dgm:txFillClrLst>
+    <dgm:txEffectClrLst/>
+  </dgm:styleLbl>
+  <dgm:styleLbl name="bgShp">
+    <dgm:fillClrLst meth="repeat">
+      <a:schemeClr val="accent1">
+        <a:tint val="40000"/>
+      </a:schemeClr>
+    </dgm:fillClrLst>
+    <dgm:linClrLst meth="repeat">
+      <a:schemeClr val="accent1"/>
+    </dgm:linClrLst>
+    <dgm:effectClrLst/>
+    <dgm:txLinClrLst/>
+    <dgm:txFillClrLst meth="repeat">
+      <a:schemeClr val="dk1"/>
+    </dgm:txFillClrLst>
+    <dgm:txEffectClrLst/>
+  </dgm:styleLbl>
+  <dgm:styleLbl name="dkBgShp">
+    <dgm:fillClrLst meth="repeat">
+      <a:schemeClr val="accent1">
+        <a:shade val="80000"/>
+      </a:schemeClr>
+    </dgm:fillClrLst>
+    <dgm:linClrLst meth="repeat">
+      <a:schemeClr val="accent1"/>
+    </dgm:linClrLst>
+    <dgm:effectClrLst/>
+    <dgm:txLinClrLst/>
+    <dgm:txFillClrLst meth="repeat">
+      <a:schemeClr val="lt1"/>
+    </dgm:txFillClrLst>
+    <dgm:txEffectClrLst/>
+  </dgm:styleLbl>
+  <dgm:styleLbl name="trBgShp">
+    <dgm:fillClrLst meth="repeat">
+      <a:schemeClr val="accent1">
+        <a:tint val="50000"/>
+        <a:alpha val="40000"/>
+      </a:schemeClr>
+    </dgm:fillClrLst>
+    <dgm:linClrLst meth="repeat">
+      <a:schemeClr val="accent1"/>
+    </dgm:linClrLst>
+    <dgm:effectClrLst/>
+    <dgm:txLinClrLst/>
+    <dgm:txFillClrLst meth="repeat">
+      <a:schemeClr val="lt1"/>
+    </dgm:txFillClrLst>
+    <dgm:txEffectClrLst/>
+  </dgm:styleLbl>
+  <dgm:styleLbl name="fgShp">
+    <dgm:fillClrLst meth="repeat">
+      <a:schemeClr val="accent1">
+        <a:tint val="60000"/>
+      </a:schemeClr>
+    </dgm:fillClrLst>
+    <dgm:linClrLst meth="repeat">
+      <a:schemeClr val="lt1"/>
+    </dgm:linClrLst>
+    <dgm:effectClrLst/>
+    <dgm:txLinClrLst/>
+    <dgm:txFillClrLst meth="repeat">
+      <a:schemeClr val="dk1"/>
+    </dgm:txFillClrLst>
+    <dgm:txEffectClrLst/>
+  </dgm:styleLbl>
+  <dgm:styleLbl name="revTx">
+    <dgm:fillClrLst meth="repeat">
+      <a:schemeClr val="lt1">
+        <a:alpha val="0"/>
+      </a:schemeClr>
+    </dgm:fillClrLst>
+    <dgm:linClrLst meth="repeat">
+      <a:schemeClr val="dk1">
+        <a:alpha val="0"/>
+      </a:schemeClr>
+    </dgm:linClrLst>
+    <dgm:effectClrLst/>
+    <dgm:txLinClrLst/>
+    <dgm:txFillClrLst meth="repeat">
+      <a:schemeClr val="tx1"/>
+    </dgm:txFillClrLst>
+    <dgm:txEffectClrLst/>
+  </dgm:styleLbl>
+</dgm:colorsDef>
+</file>
+
+<file path=ppt/diagrams/colors2.xml><?xml version="1.0" encoding="utf-8"?>
+<dgm:colorsDef xmlns:dgm="http://schemas.openxmlformats.org/drawingml/2006/diagram" xmlns:a="http://schemas.openxmlformats.org/drawingml/2006/main" uniqueId="urn:microsoft.com/office/officeart/2005/8/colors/accent1_2">
+  <dgm:title val=""/>
+  <dgm:desc val=""/>
+  <dgm:catLst>
+    <dgm:cat type="accent1" pri="11200"/>
+  </dgm:catLst>
+  <dgm:styleLbl name="node0">
+    <dgm:fillClrLst meth="repeat">
+      <a:schemeClr val="accent1"/>
+    </dgm:fillClrLst>
+    <dgm:linClrLst meth="repeat">
+      <a:schemeClr val="lt1"/>
+    </dgm:linClrLst>
+    <dgm:effectClrLst/>
+    <dgm:txLinClrLst/>
+    <dgm:txFillClrLst/>
+    <dgm:txEffectClrLst/>
+  </dgm:styleLbl>
+  <dgm:styleLbl name="alignNode1">
+    <dgm:fillClrLst meth="repeat">
+      <a:schemeClr val="accent1"/>
+    </dgm:fillClrLst>
+    <dgm:linClrLst meth="repeat">
+      <a:schemeClr val="accent1"/>
+    </dgm:linClrLst>
+    <dgm:effectClrLst/>
+    <dgm:txLinClrLst/>
+    <dgm:txFillClrLst/>
+    <dgm:txEffectClrLst/>
+  </dgm:styleLbl>
+  <dgm:styleLbl name="node1">
+    <dgm:fillClrLst meth="repeat">
+      <a:schemeClr val="accent1"/>
+    </dgm:fillClrLst>
+    <dgm:linClrLst meth="repeat">
+      <a:schemeClr val="lt1"/>
+    </dgm:linClrLst>
+    <dgm:effectClrLst/>
+    <dgm:txLinClrLst/>
+    <dgm:txFillClrLst/>
+    <dgm:txEffectClrLst/>
+  </dgm:styleLbl>
+  <dgm:styleLbl name="lnNode1">
+    <dgm:fillClrLst meth="repeat">
+      <a:schemeClr val="accent1"/>
+    </dgm:fillClrLst>
+    <dgm:linClrLst meth="repeat">
+      <a:schemeClr val="lt1"/>
+    </dgm:linClrLst>
+    <dgm:effectClrLst/>
+    <dgm:txLinClrLst/>
+    <dgm:txFillClrLst/>
+    <dgm:txEffectClrLst/>
+  </dgm:styleLbl>
+  <dgm:styleLbl name="vennNode1">
+    <dgm:fillClrLst meth="repeat">
+      <a:schemeClr val="accent1">
+        <a:alpha val="50000"/>
+      </a:schemeClr>
+    </dgm:fillClrLst>
+    <dgm:linClrLst meth="repeat">
+      <a:schemeClr val="lt1"/>
+    </dgm:linClrLst>
+    <dgm:effectClrLst/>
+    <dgm:txLinClrLst/>
+    <dgm:txFillClrLst/>
+    <dgm:txEffectClrLst/>
+  </dgm:styleLbl>
+  <dgm:styleLbl name="node2">
+    <dgm:fillClrLst meth="repeat">
+      <a:schemeClr val="accent1"/>
+    </dgm:fillClrLst>
+    <dgm:linClrLst meth="repeat">
+      <a:schemeClr val="lt1"/>
+    </dgm:linClrLst>
+    <dgm:effectClrLst/>
+    <dgm:txLinClrLst/>
+    <dgm:txFillClrLst/>
+    <dgm:txEffectClrLst/>
+  </dgm:styleLbl>
+  <dgm:styleLbl name="node3">
+    <dgm:fillClrLst meth="repeat">
+      <a:schemeClr val="accent1"/>
+    </dgm:fillClrLst>
+    <dgm:linClrLst meth="repeat">
+      <a:schemeClr val="lt1"/>
+    </dgm:linClrLst>
+    <dgm:effectClrLst/>
+    <dgm:txLinClrLst/>
+    <dgm:txFillClrLst/>
+    <dgm:txEffectClrLst/>
+  </dgm:styleLbl>
+  <dgm:styleLbl name="node4">
+    <dgm:fillClrLst meth="repeat">
+      <a:schemeClr val="accent1"/>
+    </dgm:fillClrLst>
+    <dgm:linClrLst meth="repeat">
+      <a:schemeClr val="lt1"/>
+    </dgm:linClrLst>
+    <dgm:effectClrLst/>
+    <dgm:txLinClrLst/>
+    <dgm:txFillClrLst/>
+    <dgm:txEffectClrLst/>
+  </dgm:styleLbl>
+  <dgm:styleLbl name="fgImgPlace1">
+    <dgm:fillClrLst meth="repeat">
+      <a:schemeClr val="accent1">
+        <a:tint val="50000"/>
+      </a:schemeClr>
+    </dgm:fillClrLst>
+    <dgm:linClrLst meth="repeat">
+      <a:schemeClr val="lt1"/>
+    </dgm:linClrLst>
+    <dgm:effectClrLst/>
+    <dgm:txLinClrLst/>
+    <dgm:txFillClrLst meth="repeat">
+      <a:schemeClr val="lt1"/>
+    </dgm:txFillClrLst>
+    <dgm:txEffectClrLst/>
+  </dgm:styleLbl>
+  <dgm:styleLbl name="alignImgPlace1">
+    <dgm:fillClrLst meth="repeat">
+      <a:schemeClr val="accent1">
+        <a:tint val="50000"/>
+      </a:schemeClr>
+    </dgm:fillClrLst>
+    <dgm:linClrLst meth="repeat">
+      <a:schemeClr val="lt1"/>
+    </dgm:linClrLst>
+    <dgm:effectClrLst/>
+    <dgm:txLinClrLst/>
+    <dgm:txFillClrLst meth="repeat">
+      <a:schemeClr val="lt1"/>
+    </dgm:txFillClrLst>
+    <dgm:txEffectClrLst/>
+  </dgm:styleLbl>
+  <dgm:styleLbl name="bgImgPlace1">
+    <dgm:fillClrLst meth="repeat">
+      <a:schemeClr val="accent1">
+        <a:tint val="50000"/>
+      </a:schemeClr>
+    </dgm:fillClrLst>
+    <dgm:linClrLst meth="repeat">
+      <a:schemeClr val="lt1"/>
+    </dgm:linClrLst>
+    <dgm:effectClrLst/>
+    <dgm:txLinClrLst/>
+    <dgm:txFillClrLst meth="repeat">
+      <a:schemeClr val="lt1"/>
+    </dgm:txFillClrLst>
+    <dgm:txEffectClrLst/>
+  </dgm:styleLbl>
+  <dgm:styleLbl name="sibTrans2D1">
+    <dgm:fillClrLst meth="repeat">
+      <a:schemeClr val="accent1">
+        <a:tint val="60000"/>
+      </a:schemeClr>
+    </dgm:fillClrLst>
+    <dgm:linClrLst meth="repeat">
+      <a:schemeClr val="accent1">
+        <a:tint val="60000"/>
+      </a:schemeClr>
+    </dgm:linClrLst>
+    <dgm:effectClrLst/>
+    <dgm:txLinClrLst/>
+    <dgm:txFillClrLst/>
+    <dgm:txEffectClrLst/>
+  </dgm:styleLbl>
+  <dgm:styleLbl name="fgSibTrans2D1">
+    <dgm:fillClrLst meth="repeat">
+      <a:schemeClr val="accent1">
+        <a:tint val="60000"/>
+      </a:schemeClr>
+    </dgm:fillClrLst>
+    <dgm:linClrLst meth="repeat">
+      <a:schemeClr val="accent1">
+        <a:tint val="60000"/>
+      </a:schemeClr>
+    </dgm:linClrLst>
+    <dgm:effectClrLst/>
+    <dgm:txLinClrLst/>
+    <dgm:txFillClrLst/>
+    <dgm:txEffectClrLst/>
+  </dgm:styleLbl>
+  <dgm:styleLbl name="bgSibTrans2D1">
+    <dgm:fillClrLst meth="repeat">
+      <a:schemeClr val="accent1">
+        <a:tint val="60000"/>
+      </a:schemeClr>
+    </dgm:fillClrLst>
+    <dgm:linClrLst meth="repeat">
+      <a:schemeClr val="accent1">
+        <a:tint val="60000"/>
+      </a:schemeClr>
+    </dgm:linClrLst>
+    <dgm:effectClrLst/>
+    <dgm:txLinClrLst/>
+    <dgm:txFillClrLst/>
+    <dgm:txEffectClrLst/>
+  </dgm:styleLbl>
+  <dgm:styleLbl name="sibTrans1D1">
+    <dgm:fillClrLst meth="repeat">
+      <a:schemeClr val="accent1"/>
+    </dgm:fillClrLst>
+    <dgm:linClrLst meth="repeat">
+      <a:schemeClr val="accent1"/>
+    </dgm:linClrLst>
+    <dgm:effectClrLst/>
+    <dgm:txLinClrLst/>
+    <dgm:txFillClrLst meth="repeat">
+      <a:schemeClr val="tx1"/>
+    </dgm:txFillClrLst>
+    <dgm:txEffectClrLst/>
+  </dgm:styleLbl>
+  <dgm:styleLbl name="callout">
+    <dgm:fillClrLst meth="repeat">
+      <a:schemeClr val="accent1"/>
+    </dgm:fillClrLst>
+    <dgm:linClrLst meth="repeat">
+      <a:schemeClr val="accent1">
+        <a:tint val="50000"/>
+      </a:schemeClr>
+    </dgm:linClrLst>
+    <dgm:effectClrLst/>
+    <dgm:txLinClrLst/>
+    <dgm:txFillClrLst meth="repeat">
+      <a:schemeClr val="tx1"/>
+    </dgm:txFillClrLst>
+    <dgm:txEffectClrLst/>
+  </dgm:styleLbl>
+  <dgm:styleLbl name="asst0">
+    <dgm:fillClrLst meth="repeat">
+      <a:schemeClr val="accent1"/>
+    </dgm:fillClrLst>
+    <dgm:linClrLst meth="repeat">
+      <a:schemeClr val="lt1"/>
+    </dgm:linClrLst>
+    <dgm:effectClrLst/>
+    <dgm:txLinClrLst/>
+    <dgm:txFillClrLst/>
+    <dgm:txEffectClrLst/>
+  </dgm:styleLbl>
+  <dgm:styleLbl name="asst1">
+    <dgm:fillClrLst meth="repeat">
+      <a:schemeClr val="accent1"/>
+    </dgm:fillClrLst>
+    <dgm:linClrLst meth="repeat">
+      <a:schemeClr val="lt1"/>
+    </dgm:linClrLst>
+    <dgm:effectClrLst/>
+    <dgm:txLinClrLst/>
+    <dgm:txFillClrLst/>
+    <dgm:txEffectClrLst/>
+  </dgm:styleLbl>
+  <dgm:styleLbl name="asst2">
+    <dgm:fillClrLst meth="repeat">
+      <a:schemeClr val="accent1"/>
+    </dgm:fillClrLst>
+    <dgm:linClrLst meth="repeat">
+      <a:schemeClr val="lt1"/>
+    </dgm:linClrLst>
+    <dgm:effectClrLst/>
+    <dgm:txLinClrLst/>
+    <dgm:txFillClrLst/>
+    <dgm:txEffectClrLst/>
+  </dgm:styleLbl>
+  <dgm:styleLbl name="asst3">
+    <dgm:fillClrLst meth="repeat">
+      <a:schemeClr val="accent1"/>
+    </dgm:fillClrLst>
+    <dgm:linClrLst meth="repeat">
+      <a:schemeClr val="lt1"/>
+    </dgm:linClrLst>
+    <dgm:effectClrLst/>
+    <dgm:txLinClrLst/>
+    <dgm:txFillClrLst/>
+    <dgm:txEffectClrLst/>
+  </dgm:styleLbl>
+  <dgm:styleLbl name="asst4">
+    <dgm:fillClrLst meth="repeat">
+      <a:schemeClr val="accent1"/>
+    </dgm:fillClrLst>
+    <dgm:linClrLst meth="repeat">
+      <a:schemeClr val="lt1"/>
+    </dgm:linClrLst>
+    <dgm:effectClrLst/>
+    <dgm:txLinClrLst/>
+    <dgm:txFillClrLst/>
+    <dgm:txEffectClrLst/>
+  </dgm:styleLbl>
+  <dgm:styleLbl name="parChTrans2D1">
+    <dgm:fillClrLst meth="repeat">
+      <a:schemeClr val="accent1">
+        <a:tint val="60000"/>
+      </a:schemeClr>
+    </dgm:fillClrLst>
+    <dgm:linClrLst meth="repeat">
+      <a:schemeClr val="accent1">
+        <a:tint val="60000"/>
+      </a:schemeClr>
+    </dgm:linClrLst>
+    <dgm:effectClrLst/>
+    <dgm:txLinClrLst/>
+    <dgm:txFillClrLst meth="repeat">
+      <a:schemeClr val="lt1"/>
+    </dgm:txFillClrLst>
+    <dgm:txEffectClrLst/>
+  </dgm:styleLbl>
+  <dgm:styleLbl name="parChTrans2D2">
+    <dgm:fillClrLst meth="repeat">
+      <a:schemeClr val="accent1"/>
+    </dgm:fillClrLst>
+    <dgm:linClrLst meth="repeat">
+      <a:schemeClr val="accent1"/>
+    </dgm:linClrLst>
+    <dgm:effectClrLst/>
+    <dgm:txLinClrLst/>
+    <dgm:txFillClrLst meth="repeat">
+      <a:schemeClr val="lt1"/>
+    </dgm:txFillClrLst>
+    <dgm:txEffectClrLst/>
+  </dgm:styleLbl>
+  <dgm:styleLbl name="parChTrans2D3">
+    <dgm:fillClrLst meth="repeat">
+      <a:schemeClr val="accent1"/>
+    </dgm:fillClrLst>
+    <dgm:linClrLst meth="repeat">
+      <a:schemeClr val="accent1"/>
+    </dgm:linClrLst>
+    <dgm:effectClrLst/>
+    <dgm:txLinClrLst/>
+    <dgm:txFillClrLst meth="repeat">
+      <a:schemeClr val="lt1"/>
+    </dgm:txFillClrLst>
+    <dgm:txEffectClrLst/>
+  </dgm:styleLbl>
+  <dgm:styleLbl name="parChTrans2D4">
+    <dgm:fillClrLst meth="repeat">
+      <a:schemeClr val="accent1"/>
+    </dgm:fillClrLst>
+    <dgm:linClrLst meth="repeat">
+      <a:schemeClr val="accent1"/>
+    </dgm:linClrLst>
+    <dgm:effectClrLst/>
+    <dgm:txLinClrLst/>
+    <dgm:txFillClrLst meth="repeat">
+      <a:schemeClr val="lt1"/>
+    </dgm:txFillClrLst>
+    <dgm:txEffectClrLst/>
+  </dgm:styleLbl>
+  <dgm:styleLbl name="parChTrans1D1">
+    <dgm:fillClrLst meth="repeat">
+      <a:schemeClr val="accent1"/>
+    </dgm:fillClrLst>
+    <dgm:linClrLst meth="repeat">
+      <a:schemeClr val="accent1">
+        <a:shade val="60000"/>
+      </a:schemeClr>
+    </dgm:linClrLst>
+    <dgm:effectClrLst/>
+    <dgm:txLinClrLst/>
+    <dgm:txFillClrLst meth="repeat">
+      <a:schemeClr val="tx1"/>
+    </dgm:txFillClrLst>
+    <dgm:txEffectClrLst/>
+  </dgm:styleLbl>
+  <dgm:styleLbl name="parChTrans1D2">
+    <dgm:fillClrLst meth="repeat">
+      <a:schemeClr val="accent1"/>
+    </dgm:fillClrLst>
+    <dgm:linClrLst meth="repeat">
+      <a:schemeClr val="accent1">
+        <a:shade val="60000"/>
+      </a:schemeClr>
+    </dgm:linClrLst>
+    <dgm:effectClrLst/>
+    <dgm:txLinClrLst/>
+    <dgm:txFillClrLst meth="repeat">
+      <a:schemeClr val="tx1"/>
+    </dgm:txFillClrLst>
+    <dgm:txEffectClrLst/>
+  </dgm:styleLbl>
+  <dgm:styleLbl name="parChTrans1D3">
+    <dgm:fillClrLst meth="repeat">
+      <a:schemeClr val="accent1"/>
+    </dgm:fillClrLst>
+    <dgm:linClrLst meth="repeat">
+      <a:schemeClr val="accent1">
+        <a:shade val="80000"/>
+      </a:schemeClr>
+    </dgm:linClrLst>
+    <dgm:effectClrLst/>
+    <dgm:txLinClrLst/>
+    <dgm:txFillClrLst meth="repeat">
+      <a:schemeClr val="tx1"/>
+    </dgm:txFillClrLst>
+    <dgm:txEffectClrLst/>
+  </dgm:styleLbl>
+  <dgm:styleLbl name="parChTrans1D4">
+    <dgm:fillClrLst meth="repeat">
+      <a:schemeClr val="accent1"/>
+    </dgm:fillClrLst>
+    <dgm:linClrLst meth="repeat">
+      <a:schemeClr val="accent1">
+        <a:shade val="80000"/>
+      </a:schemeClr>
+    </dgm:linClrLst>
+    <dgm:effectClrLst/>
+    <dgm:txLinClrLst/>
+    <dgm:txFillClrLst meth="repeat">
+      <a:schemeClr val="tx1"/>
+    </dgm:txFillClrLst>
+    <dgm:txEffectClrLst/>
+  </dgm:styleLbl>
+  <dgm:styleLbl name="fgAcc1">
+    <dgm:fillClrLst meth="repeat">
+      <a:schemeClr val="lt1">
+        <a:alpha val="90000"/>
+      </a:schemeClr>
+    </dgm:fillClrLst>
+    <dgm:linClrLst meth="repeat">
+      <a:schemeClr val="accent1"/>
+    </dgm:linClrLst>
+    <dgm:effectClrLst/>
+    <dgm:txLinClrLst/>
+    <dgm:txFillClrLst meth="repeat">
+      <a:schemeClr val="dk1"/>
+    </dgm:txFillClrLst>
+    <dgm:txEffectClrLst/>
+  </dgm:styleLbl>
+  <dgm:styleLbl name="conFgAcc1">
+    <dgm:fillClrLst meth="repeat">
+      <a:schemeClr val="lt1">
+        <a:alpha val="90000"/>
+      </a:schemeClr>
+    </dgm:fillClrLst>
+    <dgm:linClrLst meth="repeat">
+      <a:schemeClr val="accent1"/>
+    </dgm:linClrLst>
+    <dgm:effectClrLst/>
+    <dgm:txLinClrLst/>
+    <dgm:txFillClrLst meth="repeat">
+      <a:schemeClr val="dk1"/>
+    </dgm:txFillClrLst>
+    <dgm:txEffectClrLst/>
+  </dgm:styleLbl>
+  <dgm:styleLbl name="alignAcc1">
+    <dgm:fillClrLst meth="repeat">
+      <a:schemeClr val="lt1">
+        <a:alpha val="90000"/>
+      </a:schemeClr>
+    </dgm:fillClrLst>
+    <dgm:linClrLst meth="repeat">
+      <a:schemeClr val="accent1"/>
+    </dgm:linClrLst>
+    <dgm:effectClrLst/>
+    <dgm:txLinClrLst/>
+    <dgm:txFillClrLst meth="repeat">
+      <a:schemeClr val="dk1"/>
+    </dgm:txFillClrLst>
+    <dgm:txEffectClrLst/>
+  </dgm:styleLbl>
+  <dgm:styleLbl name="trAlignAcc1">
+    <dgm:fillClrLst meth="repeat">
+      <a:schemeClr val="lt1">
+        <a:alpha val="40000"/>
+      </a:schemeClr>
+    </dgm:fillClrLst>
+    <dgm:linClrLst meth="repeat">
+      <a:schemeClr val="accent1"/>
+    </dgm:linClrLst>
+    <dgm:effectClrLst/>
+    <dgm:txLinClrLst/>
+    <dgm:txFillClrLst meth="repeat">
+      <a:schemeClr val="dk1"/>
+    </dgm:txFillClrLst>
+    <dgm:txEffectClrLst/>
+  </dgm:styleLbl>
+  <dgm:styleLbl name="bgAcc1">
+    <dgm:fillClrLst meth="repeat">
+      <a:schemeClr val="lt1">
+        <a:alpha val="90000"/>
+      </a:schemeClr>
+    </dgm:fillClrLst>
+    <dgm:linClrLst meth="repeat">
+      <a:schemeClr val="accent1"/>
+    </dgm:linClrLst>
+    <dgm:effectClrLst/>
+    <dgm:txLinClrLst/>
+    <dgm:txFillClrLst meth="repeat">
+      <a:schemeClr val="dk1"/>
+    </dgm:txFillClrLst>
+    <dgm:txEffectClrLst/>
+  </dgm:styleLbl>
+  <dgm:styleLbl name="solidFgAcc1">
+    <dgm:fillClrLst meth="repeat">
+      <a:schemeClr val="lt1"/>
+    </dgm:fillClrLst>
+    <dgm:linClrLst meth="repeat">
+      <a:schemeClr val="accent1"/>
+    </dgm:linClrLst>
+    <dgm:effectClrLst/>
+    <dgm:txLinClrLst/>
+    <dgm:txFillClrLst meth="repeat">
+      <a:schemeClr val="dk1"/>
+    </dgm:txFillClrLst>
+    <dgm:txEffectClrLst/>
+  </dgm:styleLbl>
+  <dgm:styleLbl name="solidAlignAcc1">
+    <dgm:fillClrLst meth="repeat">
+      <a:schemeClr val="lt1"/>
+    </dgm:fillClrLst>
+    <dgm:linClrLst meth="repeat">
+      <a:schemeClr val="accent1"/>
+    </dgm:linClrLst>
+    <dgm:effectClrLst/>
+    <dgm:txLinClrLst/>
+    <dgm:txFillClrLst meth="repeat">
+      <a:schemeClr val="dk1"/>
+    </dgm:txFillClrLst>
+    <dgm:txEffectClrLst/>
+  </dgm:styleLbl>
+  <dgm:styleLbl name="solidBgAcc1">
+    <dgm:fillClrLst meth="repeat">
+      <a:schemeClr val="lt1"/>
+    </dgm:fillClrLst>
+    <dgm:linClrLst meth="repeat">
+      <a:schemeClr val="accent1"/>
+    </dgm:linClrLst>
+    <dgm:effectClrLst/>
+    <dgm:txLinClrLst/>
+    <dgm:txFillClrLst meth="repeat">
+      <a:schemeClr val="dk1"/>
+    </dgm:txFillClrLst>
+    <dgm:txEffectClrLst/>
+  </dgm:styleLbl>
+  <dgm:styleLbl name="fgAccFollowNode1">
+    <dgm:fillClrLst meth="repeat">
+      <a:schemeClr val="accent1">
+        <a:alpha val="90000"/>
+        <a:tint val="40000"/>
+      </a:schemeClr>
+    </dgm:fillClrLst>
+    <dgm:linClrLst meth="repeat">
+      <a:schemeClr val="accent1">
+        <a:alpha val="90000"/>
+        <a:tint val="40000"/>
+      </a:schemeClr>
+    </dgm:linClrLst>
+    <dgm:effectClrLst/>
+    <dgm:txLinClrLst/>
+    <dgm:txFillClrLst meth="repeat">
+      <a:schemeClr val="dk1"/>
+    </dgm:txFillClrLst>
+    <dgm:txEffectClrLst/>
+  </dgm:styleLbl>
+  <dgm:styleLbl name="alignAccFollowNode1">
+    <dgm:fillClrLst meth="repeat">
+      <a:schemeClr val="accent1">
+        <a:alpha val="90000"/>
+        <a:tint val="40000"/>
+      </a:schemeClr>
+    </dgm:fillClrLst>
+    <dgm:linClrLst meth="repeat">
+      <a:schemeClr val="accent1">
+        <a:alpha val="90000"/>
+        <a:tint val="40000"/>
+      </a:schemeClr>
+    </dgm:linClrLst>
+    <dgm:effectClrLst/>
+    <dgm:txLinClrLst/>
+    <dgm:txFillClrLst meth="repeat">
+      <a:schemeClr val="dk1"/>
+    </dgm:txFillClrLst>
+    <dgm:txEffectClrLst/>
+  </dgm:styleLbl>
+  <dgm:styleLbl name="bgAccFollowNode1">
+    <dgm:fillClrLst meth="repeat">
+      <a:schemeClr val="accent1">
+        <a:alpha val="90000"/>
+        <a:tint val="40000"/>
+      </a:schemeClr>
+    </dgm:fillClrLst>
+    <dgm:linClrLst meth="repeat">
+      <a:schemeClr val="accent1">
+        <a:alpha val="90000"/>
+        <a:tint val="40000"/>
+      </a:schemeClr>
+    </dgm:linClrLst>
+    <dgm:effectClrLst/>
+    <dgm:txLinClrLst/>
+    <dgm:txFillClrLst meth="repeat">
+      <a:schemeClr val="dk1"/>
+    </dgm:txFillClrLst>
+    <dgm:txEffectClrLst/>
+  </dgm:styleLbl>
+  <dgm:styleLbl name="fgAcc0">
+    <dgm:fillClrLst meth="repeat">
+      <a:schemeClr val="lt1">
+        <a:alpha val="90000"/>
+      </a:schemeClr>
+    </dgm:fillClrLst>
+    <dgm:linClrLst meth="repeat">
+      <a:schemeClr val="accent1"/>
+    </dgm:linClrLst>
+    <dgm:effectClrLst/>
+    <dgm:txLinClrLst/>
+    <dgm:txFillClrLst meth="repeat">
+      <a:schemeClr val="dk1"/>
+    </dgm:txFillClrLst>
+    <dgm:txEffectClrLst/>
+  </dgm:styleLbl>
+  <dgm:styleLbl name="fgAcc2">
+    <dgm:fillClrLst meth="repeat">
+      <a:schemeClr val="lt1">
+        <a:alpha val="90000"/>
+      </a:schemeClr>
+    </dgm:fillClrLst>
+    <dgm:linClrLst meth="repeat">
+      <a:schemeClr val="accent1"/>
+    </dgm:linClrLst>
+    <dgm:effectClrLst/>
+    <dgm:txLinClrLst/>
+    <dgm:txFillClrLst meth="repeat">
+      <a:schemeClr val="dk1"/>
+    </dgm:txFillClrLst>
+    <dgm:txEffectClrLst/>
+  </dgm:styleLbl>
+  <dgm:styleLbl name="fgAcc3">
+    <dgm:fillClrLst meth="repeat">
+      <a:schemeClr val="lt1">
+        <a:alpha val="90000"/>
+      </a:schemeClr>
+    </dgm:fillClrLst>
+    <dgm:linClrLst meth="repeat">
+      <a:schemeClr val="accent1"/>
+    </dgm:linClrLst>
+    <dgm:effectClrLst/>
+    <dgm:txLinClrLst/>
+    <dgm:txFillClrLst meth="repeat">
+      <a:schemeClr val="dk1"/>
+    </dgm:txFillClrLst>
+    <dgm:txEffectClrLst/>
+  </dgm:styleLbl>
+  <dgm:styleLbl name="fgAcc4">
+    <dgm:fillClrLst meth="repeat">
+      <a:schemeClr val="lt1">
+        <a:alpha val="90000"/>
+      </a:schemeClr>
+    </dgm:fillClrLst>
+    <dgm:linClrLst meth="repeat">
+      <a:schemeClr val="accent1"/>
+    </dgm:linClrLst>
+    <dgm:effectClrLst/>
+    <dgm:txLinClrLst/>
+    <dgm:txFillClrLst meth="repeat">
+      <a:schemeClr val="dk1"/>
+    </dgm:txFillClrLst>
+    <dgm:txEffectClrLst/>
+  </dgm:styleLbl>
+  <dgm:styleLbl name="bgShp">
+    <dgm:fillClrLst meth="repeat">
+      <a:schemeClr val="accent1">
+        <a:tint val="40000"/>
+      </a:schemeClr>
+    </dgm:fillClrLst>
+    <dgm:linClrLst meth="repeat">
+      <a:schemeClr val="accent1"/>
+    </dgm:linClrLst>
+    <dgm:effectClrLst/>
+    <dgm:txLinClrLst/>
+    <dgm:txFillClrLst meth="repeat">
+      <a:schemeClr val="dk1"/>
+    </dgm:txFillClrLst>
+    <dgm:txEffectClrLst/>
+  </dgm:styleLbl>
+  <dgm:styleLbl name="dkBgShp">
+    <dgm:fillClrLst meth="repeat">
+      <a:schemeClr val="accent1">
+        <a:shade val="80000"/>
+      </a:schemeClr>
+    </dgm:fillClrLst>
+    <dgm:linClrLst meth="repeat">
+      <a:schemeClr val="accent1"/>
+    </dgm:linClrLst>
+    <dgm:effectClrLst/>
+    <dgm:txLinClrLst/>
+    <dgm:txFillClrLst meth="repeat">
+      <a:schemeClr val="lt1"/>
+    </dgm:txFillClrLst>
+    <dgm:txEffectClrLst/>
+  </dgm:styleLbl>
+  <dgm:styleLbl name="trBgShp">
+    <dgm:fillClrLst meth="repeat">
+      <a:schemeClr val="accent1">
+        <a:tint val="50000"/>
+        <a:alpha val="40000"/>
+      </a:schemeClr>
+    </dgm:fillClrLst>
+    <dgm:linClrLst meth="repeat">
+      <a:schemeClr val="accent1"/>
+    </dgm:linClrLst>
+    <dgm:effectClrLst/>
+    <dgm:txLinClrLst/>
+    <dgm:txFillClrLst meth="repeat">
+      <a:schemeClr val="lt1"/>
+    </dgm:txFillClrLst>
+    <dgm:txEffectClrLst/>
+  </dgm:styleLbl>
+  <dgm:styleLbl name="fgShp">
+    <dgm:fillClrLst meth="repeat">
+      <a:schemeClr val="accent1">
+        <a:tint val="60000"/>
+      </a:schemeClr>
+    </dgm:fillClrLst>
+    <dgm:linClrLst meth="repeat">
+      <a:schemeClr val="lt1"/>
+    </dgm:linClrLst>
+    <dgm:effectClrLst/>
+    <dgm:txLinClrLst/>
+    <dgm:txFillClrLst meth="repeat">
+      <a:schemeClr val="dk1"/>
+    </dgm:txFillClrLst>
+    <dgm:txEffectClrLst/>
+  </dgm:styleLbl>
+  <dgm:styleLbl name="revTx">
+    <dgm:fillClrLst meth="repeat">
+      <a:schemeClr val="lt1">
+        <a:alpha val="0"/>
+      </a:schemeClr>
+    </dgm:fillClrLst>
+    <dgm:linClrLst meth="repeat">
+      <a:schemeClr val="dk1">
+        <a:alpha val="0"/>
+      </a:schemeClr>
+    </dgm:linClrLst>
+    <dgm:effectClrLst/>
+    <dgm:txLinClrLst/>
+    <dgm:txFillClrLst meth="repeat">
+      <a:schemeClr val="tx1"/>
+    </dgm:txFillClrLst>
+    <dgm:txEffectClrLst/>
+  </dgm:styleLbl>
+</dgm:colorsDef>
+</file>
+
+<file path=ppt/diagrams/data1.xml><?xml version="1.0" encoding="utf-8"?>
+<dgm:dataModel xmlns:dgm="http://schemas.openxmlformats.org/drawingml/2006/diagram" xmlns:a="http://schemas.openxmlformats.org/drawingml/2006/main">
+  <dgm:ptLst>
+    <dgm:pt modelId="{78DF0853-1E93-4FBD-B9A4-6B84CEDBF13C}" type="doc">
+      <dgm:prSet loTypeId="urn:microsoft.com/office/officeart/2005/8/layout/process2" loCatId="process" qsTypeId="urn:microsoft.com/office/officeart/2005/8/quickstyle/simple1" qsCatId="simple" csTypeId="urn:microsoft.com/office/officeart/2005/8/colors/accent1_2" csCatId="accent1" phldr="1"/>
+      <dgm:spPr/>
+    </dgm:pt>
+    <dgm:pt modelId="{CAC34E20-C952-45A4-81B2-7F4FF57FB1EE}">
+      <dgm:prSet phldrT="[文本]"/>
+      <dgm:spPr>
+        <a:noFill/>
+        <a:ln>
+          <a:solidFill>
+            <a:schemeClr val="accent1"/>
+          </a:solidFill>
+        </a:ln>
+      </dgm:spPr>
+      <dgm:t>
+        <a:bodyPr/>
+        <a:lstStyle/>
+        <a:p>
+          <a:r>
+            <a:rPr lang="en-US" altLang="ja-JP" dirty="0">
+              <a:solidFill>
+                <a:sysClr val="windowText" lastClr="000000"/>
+              </a:solidFill>
+            </a:rPr>
+            <a:t>VM</a:t>
+          </a:r>
+          <a:r>
+            <a:rPr lang="ja-JP" altLang="en-US" dirty="0">
+              <a:solidFill>
+                <a:sysClr val="windowText" lastClr="000000"/>
+              </a:solidFill>
+            </a:rPr>
+            <a:t>を立ち上げ</a:t>
+          </a:r>
+          <a:endParaRPr lang="zh-CN" altLang="en-US" dirty="0">
+            <a:solidFill>
+              <a:sysClr val="windowText" lastClr="000000"/>
+            </a:solidFill>
+          </a:endParaRPr>
+        </a:p>
+      </dgm:t>
+    </dgm:pt>
+    <dgm:pt modelId="{0F415CC4-4AF1-4FDE-82FB-9CBD68B68980}" type="parTrans" cxnId="{87F72240-9C3C-4C35-A45D-F18A376933AE}">
+      <dgm:prSet/>
+      <dgm:spPr/>
+      <dgm:t>
+        <a:bodyPr/>
+        <a:lstStyle/>
+        <a:p>
+          <a:endParaRPr lang="zh-CN" altLang="en-US"/>
+        </a:p>
+      </dgm:t>
+    </dgm:pt>
+    <dgm:pt modelId="{FC5A63B9-7B22-4EC2-85C3-EF1B19D05C0A}" type="sibTrans" cxnId="{87F72240-9C3C-4C35-A45D-F18A376933AE}">
+      <dgm:prSet/>
+      <dgm:spPr>
+        <a:solidFill>
+          <a:schemeClr val="accent1"/>
+        </a:solidFill>
+      </dgm:spPr>
+      <dgm:t>
+        <a:bodyPr/>
+        <a:lstStyle/>
+        <a:p>
+          <a:endParaRPr lang="zh-CN" altLang="en-US"/>
+        </a:p>
+      </dgm:t>
+    </dgm:pt>
+    <dgm:pt modelId="{42A58A11-77DE-4962-9DC7-BDA57BE19DFC}">
+      <dgm:prSet phldrT="[文本]"/>
+      <dgm:spPr>
+        <a:noFill/>
+        <a:ln>
+          <a:solidFill>
+            <a:schemeClr val="accent1"/>
+          </a:solidFill>
+        </a:ln>
+      </dgm:spPr>
+      <dgm:t>
+        <a:bodyPr/>
+        <a:lstStyle/>
+        <a:p>
+          <a:r>
+            <a:rPr lang="en-US" altLang="ja-JP" dirty="0">
+              <a:solidFill>
+                <a:sysClr val="windowText" lastClr="000000"/>
+              </a:solidFill>
+            </a:rPr>
+            <a:t>NTTD</a:t>
+          </a:r>
+          <a:r>
+            <a:rPr lang="ja-JP" altLang="en-US" dirty="0">
+              <a:solidFill>
+                <a:sysClr val="windowText" lastClr="000000"/>
+              </a:solidFill>
+            </a:rPr>
+            <a:t>のストックからモデルをインポート</a:t>
+          </a:r>
+          <a:endParaRPr lang="zh-CN" altLang="en-US" dirty="0">
+            <a:solidFill>
+              <a:sysClr val="windowText" lastClr="000000"/>
+            </a:solidFill>
+          </a:endParaRPr>
+        </a:p>
+      </dgm:t>
+    </dgm:pt>
+    <dgm:pt modelId="{4AA6820C-A156-4E58-8E03-F546661E9652}" type="parTrans" cxnId="{FF35F94C-B156-4B15-AA78-1C6482D49199}">
+      <dgm:prSet/>
+      <dgm:spPr/>
+      <dgm:t>
+        <a:bodyPr/>
+        <a:lstStyle/>
+        <a:p>
+          <a:endParaRPr lang="zh-CN" altLang="en-US"/>
+        </a:p>
+      </dgm:t>
+    </dgm:pt>
+    <dgm:pt modelId="{01F60ED6-E1CB-4B1E-9437-F083F7A0D94D}" type="sibTrans" cxnId="{FF35F94C-B156-4B15-AA78-1C6482D49199}">
+      <dgm:prSet/>
+      <dgm:spPr>
+        <a:solidFill>
+          <a:schemeClr val="accent1"/>
+        </a:solidFill>
+      </dgm:spPr>
+      <dgm:t>
+        <a:bodyPr/>
+        <a:lstStyle/>
+        <a:p>
+          <a:endParaRPr lang="zh-CN" altLang="en-US"/>
+        </a:p>
+      </dgm:t>
+    </dgm:pt>
+    <dgm:pt modelId="{4F5E516E-1973-4F6D-9ABD-24655B26DC7A}">
+      <dgm:prSet phldrT="[文本]"/>
+      <dgm:spPr>
+        <a:noFill/>
+        <a:ln>
+          <a:solidFill>
+            <a:schemeClr val="accent1"/>
+          </a:solidFill>
+        </a:ln>
+      </dgm:spPr>
+      <dgm:t>
+        <a:bodyPr/>
+        <a:lstStyle/>
+        <a:p>
+          <a:r>
+            <a:rPr lang="ja-JP" altLang="en-US" dirty="0">
+              <a:solidFill>
+                <a:sysClr val="windowText" lastClr="000000"/>
+              </a:solidFill>
+            </a:rPr>
+            <a:t>モデルを運用するための</a:t>
+          </a:r>
+          <a:r>
+            <a:rPr lang="en-US" altLang="ja-JP" dirty="0">
+              <a:solidFill>
+                <a:sysClr val="windowText" lastClr="000000"/>
+              </a:solidFill>
+            </a:rPr>
+            <a:t>Python</a:t>
+          </a:r>
+          <a:r>
+            <a:rPr lang="ja-JP" altLang="en-US" dirty="0">
+              <a:solidFill>
+                <a:sysClr val="windowText" lastClr="000000"/>
+              </a:solidFill>
+            </a:rPr>
+            <a:t>スクリプトを構築</a:t>
+          </a:r>
+          <a:endParaRPr lang="zh-CN" altLang="en-US" dirty="0">
+            <a:solidFill>
+              <a:sysClr val="windowText" lastClr="000000"/>
+            </a:solidFill>
+          </a:endParaRPr>
+        </a:p>
+      </dgm:t>
+    </dgm:pt>
+    <dgm:pt modelId="{F72A7717-D6B6-47A8-AB94-0A6411D4A1CD}" type="parTrans" cxnId="{DDED5280-780F-4334-9DE2-DE514AB56942}">
+      <dgm:prSet/>
+      <dgm:spPr/>
+      <dgm:t>
+        <a:bodyPr/>
+        <a:lstStyle/>
+        <a:p>
+          <a:endParaRPr lang="zh-CN" altLang="en-US"/>
+        </a:p>
+      </dgm:t>
+    </dgm:pt>
+    <dgm:pt modelId="{2F00350B-F4C0-4EBB-A717-2A46DA4A8E13}" type="sibTrans" cxnId="{DDED5280-780F-4334-9DE2-DE514AB56942}">
+      <dgm:prSet/>
+      <dgm:spPr>
+        <a:solidFill>
+          <a:schemeClr val="accent1"/>
+        </a:solidFill>
+      </dgm:spPr>
+      <dgm:t>
+        <a:bodyPr/>
+        <a:lstStyle/>
+        <a:p>
+          <a:endParaRPr lang="zh-CN" altLang="en-US"/>
+        </a:p>
+      </dgm:t>
+    </dgm:pt>
+    <dgm:pt modelId="{44BB4CFD-1F4F-4651-B90B-ED21DCD7D262}">
+      <dgm:prSet phldrT="[文本]"/>
+      <dgm:spPr>
+        <a:noFill/>
+        <a:ln>
+          <a:solidFill>
+            <a:schemeClr val="accent1"/>
+          </a:solidFill>
+        </a:ln>
+      </dgm:spPr>
+      <dgm:t>
+        <a:bodyPr/>
+        <a:lstStyle/>
+        <a:p>
+          <a:r>
+            <a:rPr lang="en-US" altLang="ja-JP" dirty="0">
+              <a:solidFill>
+                <a:sysClr val="windowText" lastClr="000000"/>
+              </a:solidFill>
+            </a:rPr>
+            <a:t>Backend Web API</a:t>
+          </a:r>
+          <a:r>
+            <a:rPr lang="ja-JP" altLang="en-US" dirty="0">
+              <a:solidFill>
+                <a:sysClr val="windowText" lastClr="000000"/>
+              </a:solidFill>
+            </a:rPr>
+            <a:t>を構築</a:t>
+          </a:r>
+          <a:endParaRPr lang="zh-CN" altLang="en-US" dirty="0">
+            <a:solidFill>
+              <a:sysClr val="windowText" lastClr="000000"/>
+            </a:solidFill>
+          </a:endParaRPr>
+        </a:p>
+      </dgm:t>
+    </dgm:pt>
+    <dgm:pt modelId="{D28101F7-E1C4-4080-B633-0C9CC5A94B10}" type="parTrans" cxnId="{737F982A-E8CD-4767-A477-B292CBAC320B}">
+      <dgm:prSet/>
+      <dgm:spPr/>
+      <dgm:t>
+        <a:bodyPr/>
+        <a:lstStyle/>
+        <a:p>
+          <a:endParaRPr lang="zh-CN" altLang="en-US"/>
+        </a:p>
+      </dgm:t>
+    </dgm:pt>
+    <dgm:pt modelId="{F9A0CFA8-FFB4-4C49-B26B-BCF058447EA2}" type="sibTrans" cxnId="{737F982A-E8CD-4767-A477-B292CBAC320B}">
+      <dgm:prSet/>
+      <dgm:spPr/>
+      <dgm:t>
+        <a:bodyPr/>
+        <a:lstStyle/>
+        <a:p>
+          <a:endParaRPr lang="zh-CN" altLang="en-US"/>
+        </a:p>
+      </dgm:t>
+    </dgm:pt>
+    <dgm:pt modelId="{D4A7E2D7-3A5A-4D7C-B84E-6022C9A6D031}" type="pres">
+      <dgm:prSet presAssocID="{78DF0853-1E93-4FBD-B9A4-6B84CEDBF13C}" presName="linearFlow" presStyleCnt="0">
+        <dgm:presLayoutVars>
+          <dgm:resizeHandles val="exact"/>
+        </dgm:presLayoutVars>
+      </dgm:prSet>
+      <dgm:spPr/>
+    </dgm:pt>
+    <dgm:pt modelId="{D3837411-41C7-4DE5-97D5-B34C6364E634}" type="pres">
+      <dgm:prSet presAssocID="{CAC34E20-C952-45A4-81B2-7F4FF57FB1EE}" presName="node" presStyleLbl="node1" presStyleIdx="0" presStyleCnt="4" custScaleX="174688">
+        <dgm:presLayoutVars>
+          <dgm:bulletEnabled val="1"/>
+        </dgm:presLayoutVars>
+      </dgm:prSet>
+      <dgm:spPr/>
+    </dgm:pt>
+    <dgm:pt modelId="{626DAB27-9F86-460B-A679-E3B2FA162F97}" type="pres">
+      <dgm:prSet presAssocID="{FC5A63B9-7B22-4EC2-85C3-EF1B19D05C0A}" presName="sibTrans" presStyleLbl="sibTrans2D1" presStyleIdx="0" presStyleCnt="3"/>
+      <dgm:spPr/>
+    </dgm:pt>
+    <dgm:pt modelId="{17E7F6A6-871A-4F3C-856B-FFCB4CC2E196}" type="pres">
+      <dgm:prSet presAssocID="{FC5A63B9-7B22-4EC2-85C3-EF1B19D05C0A}" presName="connectorText" presStyleLbl="sibTrans2D1" presStyleIdx="0" presStyleCnt="3"/>
+      <dgm:spPr/>
+    </dgm:pt>
+    <dgm:pt modelId="{B40D48C8-DA59-4AC0-92EB-312F9FC7D680}" type="pres">
+      <dgm:prSet presAssocID="{42A58A11-77DE-4962-9DC7-BDA57BE19DFC}" presName="node" presStyleLbl="node1" presStyleIdx="1" presStyleCnt="4" custScaleX="171371">
+        <dgm:presLayoutVars>
+          <dgm:bulletEnabled val="1"/>
+        </dgm:presLayoutVars>
+      </dgm:prSet>
+      <dgm:spPr/>
+    </dgm:pt>
+    <dgm:pt modelId="{477D7827-8CDB-4155-A924-BE6A88222EE1}" type="pres">
+      <dgm:prSet presAssocID="{01F60ED6-E1CB-4B1E-9437-F083F7A0D94D}" presName="sibTrans" presStyleLbl="sibTrans2D1" presStyleIdx="1" presStyleCnt="3"/>
+      <dgm:spPr/>
+    </dgm:pt>
+    <dgm:pt modelId="{D0E50F8D-3089-4A53-BD0C-9743E1A0B6D9}" type="pres">
+      <dgm:prSet presAssocID="{01F60ED6-E1CB-4B1E-9437-F083F7A0D94D}" presName="connectorText" presStyleLbl="sibTrans2D1" presStyleIdx="1" presStyleCnt="3"/>
+      <dgm:spPr/>
+    </dgm:pt>
+    <dgm:pt modelId="{5B97AECC-C614-4525-9B79-0D1B8C18594C}" type="pres">
+      <dgm:prSet presAssocID="{4F5E516E-1973-4F6D-9ABD-24655B26DC7A}" presName="node" presStyleLbl="node1" presStyleIdx="2" presStyleCnt="4" custScaleX="172201">
+        <dgm:presLayoutVars>
+          <dgm:bulletEnabled val="1"/>
+        </dgm:presLayoutVars>
+      </dgm:prSet>
+      <dgm:spPr/>
+    </dgm:pt>
+    <dgm:pt modelId="{9E46CF40-DAD8-4225-8652-3209D90093F1}" type="pres">
+      <dgm:prSet presAssocID="{2F00350B-F4C0-4EBB-A717-2A46DA4A8E13}" presName="sibTrans" presStyleLbl="sibTrans2D1" presStyleIdx="2" presStyleCnt="3"/>
+      <dgm:spPr/>
+    </dgm:pt>
+    <dgm:pt modelId="{85343B09-9C8A-4378-B9A2-9D6316ECC336}" type="pres">
+      <dgm:prSet presAssocID="{2F00350B-F4C0-4EBB-A717-2A46DA4A8E13}" presName="connectorText" presStyleLbl="sibTrans2D1" presStyleIdx="2" presStyleCnt="3"/>
+      <dgm:spPr/>
+    </dgm:pt>
+    <dgm:pt modelId="{01229549-49BA-400B-B223-091CA56B2AFA}" type="pres">
+      <dgm:prSet presAssocID="{44BB4CFD-1F4F-4651-B90B-ED21DCD7D262}" presName="node" presStyleLbl="node1" presStyleIdx="3" presStyleCnt="4" custScaleX="170260">
+        <dgm:presLayoutVars>
+          <dgm:bulletEnabled val="1"/>
+        </dgm:presLayoutVars>
+      </dgm:prSet>
+      <dgm:spPr/>
+    </dgm:pt>
+  </dgm:ptLst>
+  <dgm:cxnLst>
+    <dgm:cxn modelId="{41419712-2F5D-46F5-984A-81C4F32BD324}" type="presOf" srcId="{78DF0853-1E93-4FBD-B9A4-6B84CEDBF13C}" destId="{D4A7E2D7-3A5A-4D7C-B84E-6022C9A6D031}" srcOrd="0" destOrd="0" presId="urn:microsoft.com/office/officeart/2005/8/layout/process2"/>
+    <dgm:cxn modelId="{2C433418-8EB2-4A2D-929B-792B1B09C996}" type="presOf" srcId="{2F00350B-F4C0-4EBB-A717-2A46DA4A8E13}" destId="{85343B09-9C8A-4378-B9A2-9D6316ECC336}" srcOrd="1" destOrd="0" presId="urn:microsoft.com/office/officeart/2005/8/layout/process2"/>
+    <dgm:cxn modelId="{737F982A-E8CD-4767-A477-B292CBAC320B}" srcId="{78DF0853-1E93-4FBD-B9A4-6B84CEDBF13C}" destId="{44BB4CFD-1F4F-4651-B90B-ED21DCD7D262}" srcOrd="3" destOrd="0" parTransId="{D28101F7-E1C4-4080-B633-0C9CC5A94B10}" sibTransId="{F9A0CFA8-FFB4-4C49-B26B-BCF058447EA2}"/>
+    <dgm:cxn modelId="{D9523230-A12E-4240-864A-83035EFCABEC}" type="presOf" srcId="{4F5E516E-1973-4F6D-9ABD-24655B26DC7A}" destId="{5B97AECC-C614-4525-9B79-0D1B8C18594C}" srcOrd="0" destOrd="0" presId="urn:microsoft.com/office/officeart/2005/8/layout/process2"/>
+    <dgm:cxn modelId="{87F72240-9C3C-4C35-A45D-F18A376933AE}" srcId="{78DF0853-1E93-4FBD-B9A4-6B84CEDBF13C}" destId="{CAC34E20-C952-45A4-81B2-7F4FF57FB1EE}" srcOrd="0" destOrd="0" parTransId="{0F415CC4-4AF1-4FDE-82FB-9CBD68B68980}" sibTransId="{FC5A63B9-7B22-4EC2-85C3-EF1B19D05C0A}"/>
+    <dgm:cxn modelId="{0ED2E85E-1212-4AD9-90E2-32C0AF5BC309}" type="presOf" srcId="{2F00350B-F4C0-4EBB-A717-2A46DA4A8E13}" destId="{9E46CF40-DAD8-4225-8652-3209D90093F1}" srcOrd="0" destOrd="0" presId="urn:microsoft.com/office/officeart/2005/8/layout/process2"/>
+    <dgm:cxn modelId="{6FD9D260-07EC-44EE-9E54-5D38EFA1DF5C}" type="presOf" srcId="{44BB4CFD-1F4F-4651-B90B-ED21DCD7D262}" destId="{01229549-49BA-400B-B223-091CA56B2AFA}" srcOrd="0" destOrd="0" presId="urn:microsoft.com/office/officeart/2005/8/layout/process2"/>
+    <dgm:cxn modelId="{FF35F94C-B156-4B15-AA78-1C6482D49199}" srcId="{78DF0853-1E93-4FBD-B9A4-6B84CEDBF13C}" destId="{42A58A11-77DE-4962-9DC7-BDA57BE19DFC}" srcOrd="1" destOrd="0" parTransId="{4AA6820C-A156-4E58-8E03-F546661E9652}" sibTransId="{01F60ED6-E1CB-4B1E-9437-F083F7A0D94D}"/>
+    <dgm:cxn modelId="{DDED5280-780F-4334-9DE2-DE514AB56942}" srcId="{78DF0853-1E93-4FBD-B9A4-6B84CEDBF13C}" destId="{4F5E516E-1973-4F6D-9ABD-24655B26DC7A}" srcOrd="2" destOrd="0" parTransId="{F72A7717-D6B6-47A8-AB94-0A6411D4A1CD}" sibTransId="{2F00350B-F4C0-4EBB-A717-2A46DA4A8E13}"/>
+    <dgm:cxn modelId="{1B98D684-1D44-413D-8583-EA84DC378A34}" type="presOf" srcId="{01F60ED6-E1CB-4B1E-9437-F083F7A0D94D}" destId="{477D7827-8CDB-4155-A924-BE6A88222EE1}" srcOrd="0" destOrd="0" presId="urn:microsoft.com/office/officeart/2005/8/layout/process2"/>
+    <dgm:cxn modelId="{32C93F8D-03D5-46F6-99DF-1D6BA5CEAD17}" type="presOf" srcId="{FC5A63B9-7B22-4EC2-85C3-EF1B19D05C0A}" destId="{17E7F6A6-871A-4F3C-856B-FFCB4CC2E196}" srcOrd="1" destOrd="0" presId="urn:microsoft.com/office/officeart/2005/8/layout/process2"/>
+    <dgm:cxn modelId="{E8BB7191-068C-4181-A1F0-2787469F4C25}" type="presOf" srcId="{42A58A11-77DE-4962-9DC7-BDA57BE19DFC}" destId="{B40D48C8-DA59-4AC0-92EB-312F9FC7D680}" srcOrd="0" destOrd="0" presId="urn:microsoft.com/office/officeart/2005/8/layout/process2"/>
+    <dgm:cxn modelId="{09DC849F-459C-414E-82E9-79F6D9CE026F}" type="presOf" srcId="{CAC34E20-C952-45A4-81B2-7F4FF57FB1EE}" destId="{D3837411-41C7-4DE5-97D5-B34C6364E634}" srcOrd="0" destOrd="0" presId="urn:microsoft.com/office/officeart/2005/8/layout/process2"/>
+    <dgm:cxn modelId="{0198E1C5-A68A-4029-AEEE-2D3553F0E15D}" type="presOf" srcId="{01F60ED6-E1CB-4B1E-9437-F083F7A0D94D}" destId="{D0E50F8D-3089-4A53-BD0C-9743E1A0B6D9}" srcOrd="1" destOrd="0" presId="urn:microsoft.com/office/officeart/2005/8/layout/process2"/>
+    <dgm:cxn modelId="{02D59FD6-5119-4F0B-A16C-FD4ED7A97033}" type="presOf" srcId="{FC5A63B9-7B22-4EC2-85C3-EF1B19D05C0A}" destId="{626DAB27-9F86-460B-A679-E3B2FA162F97}" srcOrd="0" destOrd="0" presId="urn:microsoft.com/office/officeart/2005/8/layout/process2"/>
+    <dgm:cxn modelId="{ADBEA92D-E3D1-492C-858D-A8FC85D07414}" type="presParOf" srcId="{D4A7E2D7-3A5A-4D7C-B84E-6022C9A6D031}" destId="{D3837411-41C7-4DE5-97D5-B34C6364E634}" srcOrd="0" destOrd="0" presId="urn:microsoft.com/office/officeart/2005/8/layout/process2"/>
+    <dgm:cxn modelId="{75332F20-8087-42D3-B08E-818C4CE53441}" type="presParOf" srcId="{D4A7E2D7-3A5A-4D7C-B84E-6022C9A6D031}" destId="{626DAB27-9F86-460B-A679-E3B2FA162F97}" srcOrd="1" destOrd="0" presId="urn:microsoft.com/office/officeart/2005/8/layout/process2"/>
+    <dgm:cxn modelId="{0F5EC9AA-3106-40F2-BBEF-9B67F14A51F9}" type="presParOf" srcId="{626DAB27-9F86-460B-A679-E3B2FA162F97}" destId="{17E7F6A6-871A-4F3C-856B-FFCB4CC2E196}" srcOrd="0" destOrd="0" presId="urn:microsoft.com/office/officeart/2005/8/layout/process2"/>
+    <dgm:cxn modelId="{CAEF53D9-6A01-4FD3-BA77-03A6452580C4}" type="presParOf" srcId="{D4A7E2D7-3A5A-4D7C-B84E-6022C9A6D031}" destId="{B40D48C8-DA59-4AC0-92EB-312F9FC7D680}" srcOrd="2" destOrd="0" presId="urn:microsoft.com/office/officeart/2005/8/layout/process2"/>
+    <dgm:cxn modelId="{793616EF-1630-4EB5-AE91-67E76FAADEFB}" type="presParOf" srcId="{D4A7E2D7-3A5A-4D7C-B84E-6022C9A6D031}" destId="{477D7827-8CDB-4155-A924-BE6A88222EE1}" srcOrd="3" destOrd="0" presId="urn:microsoft.com/office/officeart/2005/8/layout/process2"/>
+    <dgm:cxn modelId="{6C3BB5C9-57F8-49FF-B8AF-2DF7DE92C0EA}" type="presParOf" srcId="{477D7827-8CDB-4155-A924-BE6A88222EE1}" destId="{D0E50F8D-3089-4A53-BD0C-9743E1A0B6D9}" srcOrd="0" destOrd="0" presId="urn:microsoft.com/office/officeart/2005/8/layout/process2"/>
+    <dgm:cxn modelId="{B14D6FF6-46AB-4C93-8FDE-3196DFEC08C2}" type="presParOf" srcId="{D4A7E2D7-3A5A-4D7C-B84E-6022C9A6D031}" destId="{5B97AECC-C614-4525-9B79-0D1B8C18594C}" srcOrd="4" destOrd="0" presId="urn:microsoft.com/office/officeart/2005/8/layout/process2"/>
+    <dgm:cxn modelId="{0C1CE81A-0272-4A8D-BA9D-87E7E1E6F3BA}" type="presParOf" srcId="{D4A7E2D7-3A5A-4D7C-B84E-6022C9A6D031}" destId="{9E46CF40-DAD8-4225-8652-3209D90093F1}" srcOrd="5" destOrd="0" presId="urn:microsoft.com/office/officeart/2005/8/layout/process2"/>
+    <dgm:cxn modelId="{A3DAC725-9F22-401E-8C3E-D9300E565B93}" type="presParOf" srcId="{9E46CF40-DAD8-4225-8652-3209D90093F1}" destId="{85343B09-9C8A-4378-B9A2-9D6316ECC336}" srcOrd="0" destOrd="0" presId="urn:microsoft.com/office/officeart/2005/8/layout/process2"/>
+    <dgm:cxn modelId="{777AC690-DF36-48F3-9466-1C97FFEA98E9}" type="presParOf" srcId="{D4A7E2D7-3A5A-4D7C-B84E-6022C9A6D031}" destId="{01229549-49BA-400B-B223-091CA56B2AFA}" srcOrd="6" destOrd="0" presId="urn:microsoft.com/office/officeart/2005/8/layout/process2"/>
+  </dgm:cxnLst>
+  <dgm:bg/>
+  <dgm:whole/>
+  <dgm:extLst>
+    <a:ext uri="http://schemas.microsoft.com/office/drawing/2008/diagram">
+      <dsp:dataModelExt xmlns:dsp="http://schemas.microsoft.com/office/drawing/2008/diagram" relId="rId6" minVer="http://schemas.openxmlformats.org/drawingml/2006/diagram"/>
+    </a:ext>
+  </dgm:extLst>
+</dgm:dataModel>
+</file>
+
+<file path=ppt/diagrams/data2.xml><?xml version="1.0" encoding="utf-8"?>
+<dgm:dataModel xmlns:dgm="http://schemas.openxmlformats.org/drawingml/2006/diagram" xmlns:a="http://schemas.openxmlformats.org/drawingml/2006/main">
+  <dgm:ptLst>
+    <dgm:pt modelId="{78DF0853-1E93-4FBD-B9A4-6B84CEDBF13C}" type="doc">
+      <dgm:prSet loTypeId="urn:microsoft.com/office/officeart/2005/8/layout/process2" loCatId="process" qsTypeId="urn:microsoft.com/office/officeart/2005/8/quickstyle/simple1" qsCatId="simple" csTypeId="urn:microsoft.com/office/officeart/2005/8/colors/accent1_2" csCatId="accent1" phldr="1"/>
+      <dgm:spPr/>
+    </dgm:pt>
+    <dgm:pt modelId="{CAC34E20-C952-45A4-81B2-7F4FF57FB1EE}">
+      <dgm:prSet phldrT="[文本]"/>
+      <dgm:spPr>
+        <a:noFill/>
+        <a:ln>
+          <a:solidFill>
+            <a:schemeClr val="accent1"/>
+          </a:solidFill>
+        </a:ln>
+      </dgm:spPr>
+      <dgm:t>
+        <a:bodyPr/>
+        <a:lstStyle/>
+        <a:p>
+          <a:r>
+            <a:rPr lang="ja-JP" altLang="en-US" dirty="0">
+              <a:solidFill>
+                <a:sysClr val="windowText" lastClr="000000"/>
+              </a:solidFill>
+            </a:rPr>
+            <a:t>モデル</a:t>
+          </a:r>
+          <a:r>
+            <a:rPr lang="en-US" altLang="ja-JP" dirty="0">
+              <a:solidFill>
+                <a:sysClr val="windowText" lastClr="000000"/>
+              </a:solidFill>
+            </a:rPr>
+            <a:t>API</a:t>
+          </a:r>
+          <a:r>
+            <a:rPr lang="ja-JP" altLang="en-US" dirty="0">
+              <a:solidFill>
+                <a:sysClr val="windowText" lastClr="000000"/>
+              </a:solidFill>
+            </a:rPr>
+            <a:t>を呼び出し</a:t>
+          </a:r>
+          <a:endParaRPr lang="zh-CN" altLang="en-US" dirty="0">
+            <a:solidFill>
+              <a:sysClr val="windowText" lastClr="000000"/>
+            </a:solidFill>
+          </a:endParaRPr>
+        </a:p>
+      </dgm:t>
+    </dgm:pt>
+    <dgm:pt modelId="{0F415CC4-4AF1-4FDE-82FB-9CBD68B68980}" type="parTrans" cxnId="{87F72240-9C3C-4C35-A45D-F18A376933AE}">
+      <dgm:prSet/>
+      <dgm:spPr/>
+      <dgm:t>
+        <a:bodyPr/>
+        <a:lstStyle/>
+        <a:p>
+          <a:endParaRPr lang="zh-CN" altLang="en-US">
+            <a:solidFill>
+              <a:sysClr val="windowText" lastClr="000000"/>
+            </a:solidFill>
+          </a:endParaRPr>
+        </a:p>
+      </dgm:t>
+    </dgm:pt>
+    <dgm:pt modelId="{FC5A63B9-7B22-4EC2-85C3-EF1B19D05C0A}" type="sibTrans" cxnId="{87F72240-9C3C-4C35-A45D-F18A376933AE}">
+      <dgm:prSet/>
+      <dgm:spPr>
+        <a:solidFill>
+          <a:schemeClr val="accent1"/>
+        </a:solidFill>
+      </dgm:spPr>
+      <dgm:t>
+        <a:bodyPr/>
+        <a:lstStyle/>
+        <a:p>
+          <a:endParaRPr lang="zh-CN" altLang="en-US">
+            <a:solidFill>
+              <a:sysClr val="windowText" lastClr="000000"/>
+            </a:solidFill>
+          </a:endParaRPr>
+        </a:p>
+      </dgm:t>
+    </dgm:pt>
+    <dgm:pt modelId="{42A58A11-77DE-4962-9DC7-BDA57BE19DFC}">
+      <dgm:prSet phldrT="[文本]"/>
+      <dgm:spPr>
+        <a:noFill/>
+        <a:ln>
+          <a:solidFill>
+            <a:schemeClr val="accent1"/>
+          </a:solidFill>
+        </a:ln>
+      </dgm:spPr>
+      <dgm:t>
+        <a:bodyPr/>
+        <a:lstStyle/>
+        <a:p>
+          <a:r>
+            <a:rPr lang="en-US" altLang="ja-JP" dirty="0">
+              <a:solidFill>
+                <a:sysClr val="windowText" lastClr="000000"/>
+              </a:solidFill>
+            </a:rPr>
+            <a:t>Abstract</a:t>
+          </a:r>
+          <a:r>
+            <a:rPr lang="ja-JP" altLang="en-US" dirty="0">
+              <a:solidFill>
+                <a:sysClr val="windowText" lastClr="000000"/>
+              </a:solidFill>
+            </a:rPr>
+            <a:t>を渡す</a:t>
+          </a:r>
+          <a:endParaRPr lang="zh-CN" altLang="en-US" dirty="0">
+            <a:solidFill>
+              <a:sysClr val="windowText" lastClr="000000"/>
+            </a:solidFill>
+          </a:endParaRPr>
+        </a:p>
+      </dgm:t>
+    </dgm:pt>
+    <dgm:pt modelId="{4AA6820C-A156-4E58-8E03-F546661E9652}" type="parTrans" cxnId="{FF35F94C-B156-4B15-AA78-1C6482D49199}">
+      <dgm:prSet/>
+      <dgm:spPr/>
+      <dgm:t>
+        <a:bodyPr/>
+        <a:lstStyle/>
+        <a:p>
+          <a:endParaRPr lang="zh-CN" altLang="en-US">
+            <a:solidFill>
+              <a:sysClr val="windowText" lastClr="000000"/>
+            </a:solidFill>
+          </a:endParaRPr>
+        </a:p>
+      </dgm:t>
+    </dgm:pt>
+    <dgm:pt modelId="{01F60ED6-E1CB-4B1E-9437-F083F7A0D94D}" type="sibTrans" cxnId="{FF35F94C-B156-4B15-AA78-1C6482D49199}">
+      <dgm:prSet/>
+      <dgm:spPr>
+        <a:solidFill>
+          <a:schemeClr val="accent1"/>
+        </a:solidFill>
+      </dgm:spPr>
+      <dgm:t>
+        <a:bodyPr/>
+        <a:lstStyle/>
+        <a:p>
+          <a:endParaRPr lang="zh-CN" altLang="en-US">
+            <a:solidFill>
+              <a:sysClr val="windowText" lastClr="000000"/>
+            </a:solidFill>
+          </a:endParaRPr>
+        </a:p>
+      </dgm:t>
+    </dgm:pt>
+    <dgm:pt modelId="{4F5E516E-1973-4F6D-9ABD-24655B26DC7A}">
+      <dgm:prSet phldrT="[文本]"/>
+      <dgm:spPr>
+        <a:noFill/>
+        <a:ln>
+          <a:solidFill>
+            <a:schemeClr val="accent1"/>
+          </a:solidFill>
+        </a:ln>
+      </dgm:spPr>
+      <dgm:t>
+        <a:bodyPr/>
+        <a:lstStyle/>
+        <a:p>
+          <a:r>
+            <a:rPr lang="ja-JP" altLang="en-US" dirty="0">
+              <a:solidFill>
+                <a:sysClr val="windowText" lastClr="000000"/>
+              </a:solidFill>
+            </a:rPr>
+            <a:t>入力したテキストを基づいて</a:t>
+          </a:r>
+          <a:r>
+            <a:rPr lang="en-US" altLang="ja-JP" dirty="0">
+              <a:solidFill>
+                <a:sysClr val="windowText" lastClr="000000"/>
+              </a:solidFill>
+            </a:rPr>
+            <a:t>IPC</a:t>
+          </a:r>
+          <a:r>
+            <a:rPr lang="ja-JP" altLang="en-US" dirty="0">
+              <a:solidFill>
+                <a:sysClr val="windowText" lastClr="000000"/>
+              </a:solidFill>
+            </a:rPr>
+            <a:t>コードを推理する</a:t>
+          </a:r>
+          <a:endParaRPr lang="zh-CN" altLang="en-US" dirty="0">
+            <a:solidFill>
+              <a:sysClr val="windowText" lastClr="000000"/>
+            </a:solidFill>
+          </a:endParaRPr>
+        </a:p>
+      </dgm:t>
+    </dgm:pt>
+    <dgm:pt modelId="{F72A7717-D6B6-47A8-AB94-0A6411D4A1CD}" type="parTrans" cxnId="{DDED5280-780F-4334-9DE2-DE514AB56942}">
+      <dgm:prSet/>
+      <dgm:spPr/>
+      <dgm:t>
+        <a:bodyPr/>
+        <a:lstStyle/>
+        <a:p>
+          <a:endParaRPr lang="zh-CN" altLang="en-US">
+            <a:solidFill>
+              <a:sysClr val="windowText" lastClr="000000"/>
+            </a:solidFill>
+          </a:endParaRPr>
+        </a:p>
+      </dgm:t>
+    </dgm:pt>
+    <dgm:pt modelId="{2F00350B-F4C0-4EBB-A717-2A46DA4A8E13}" type="sibTrans" cxnId="{DDED5280-780F-4334-9DE2-DE514AB56942}">
+      <dgm:prSet/>
+      <dgm:spPr>
+        <a:solidFill>
+          <a:schemeClr val="accent1"/>
+        </a:solidFill>
+      </dgm:spPr>
+      <dgm:t>
+        <a:bodyPr/>
+        <a:lstStyle/>
+        <a:p>
+          <a:endParaRPr lang="zh-CN" altLang="en-US">
+            <a:solidFill>
+              <a:sysClr val="windowText" lastClr="000000"/>
+            </a:solidFill>
+          </a:endParaRPr>
+        </a:p>
+      </dgm:t>
+    </dgm:pt>
+    <dgm:pt modelId="{44BB4CFD-1F4F-4651-B90B-ED21DCD7D262}">
+      <dgm:prSet phldrT="[文本]"/>
+      <dgm:spPr>
+        <a:noFill/>
+        <a:ln>
+          <a:solidFill>
+            <a:schemeClr val="accent1"/>
+          </a:solidFill>
+        </a:ln>
+      </dgm:spPr>
+      <dgm:t>
+        <a:bodyPr/>
+        <a:lstStyle/>
+        <a:p>
+          <a:r>
+            <a:rPr lang="ja-JP" altLang="en-US" dirty="0">
+              <a:solidFill>
+                <a:sysClr val="windowText" lastClr="000000"/>
+              </a:solidFill>
+            </a:rPr>
+            <a:t>予測結果を返す</a:t>
+          </a:r>
+          <a:endParaRPr lang="zh-CN" altLang="en-US" dirty="0">
+            <a:solidFill>
+              <a:sysClr val="windowText" lastClr="000000"/>
+            </a:solidFill>
+          </a:endParaRPr>
+        </a:p>
+      </dgm:t>
+    </dgm:pt>
+    <dgm:pt modelId="{D28101F7-E1C4-4080-B633-0C9CC5A94B10}" type="parTrans" cxnId="{737F982A-E8CD-4767-A477-B292CBAC320B}">
+      <dgm:prSet/>
+      <dgm:spPr/>
+      <dgm:t>
+        <a:bodyPr/>
+        <a:lstStyle/>
+        <a:p>
+          <a:endParaRPr lang="zh-CN" altLang="en-US">
+            <a:solidFill>
+              <a:sysClr val="windowText" lastClr="000000"/>
+            </a:solidFill>
+          </a:endParaRPr>
+        </a:p>
+      </dgm:t>
+    </dgm:pt>
+    <dgm:pt modelId="{F9A0CFA8-FFB4-4C49-B26B-BCF058447EA2}" type="sibTrans" cxnId="{737F982A-E8CD-4767-A477-B292CBAC320B}">
+      <dgm:prSet/>
+      <dgm:spPr/>
+      <dgm:t>
+        <a:bodyPr/>
+        <a:lstStyle/>
+        <a:p>
+          <a:endParaRPr lang="zh-CN" altLang="en-US">
+            <a:solidFill>
+              <a:sysClr val="windowText" lastClr="000000"/>
+            </a:solidFill>
+          </a:endParaRPr>
+        </a:p>
+      </dgm:t>
+    </dgm:pt>
+    <dgm:pt modelId="{D4A7E2D7-3A5A-4D7C-B84E-6022C9A6D031}" type="pres">
+      <dgm:prSet presAssocID="{78DF0853-1E93-4FBD-B9A4-6B84CEDBF13C}" presName="linearFlow" presStyleCnt="0">
+        <dgm:presLayoutVars>
+          <dgm:resizeHandles val="exact"/>
+        </dgm:presLayoutVars>
+      </dgm:prSet>
+      <dgm:spPr/>
+    </dgm:pt>
+    <dgm:pt modelId="{D3837411-41C7-4DE5-97D5-B34C6364E634}" type="pres">
+      <dgm:prSet presAssocID="{CAC34E20-C952-45A4-81B2-7F4FF57FB1EE}" presName="node" presStyleLbl="node1" presStyleIdx="0" presStyleCnt="4" custScaleX="174688">
+        <dgm:presLayoutVars>
+          <dgm:bulletEnabled val="1"/>
+        </dgm:presLayoutVars>
+      </dgm:prSet>
+      <dgm:spPr/>
+    </dgm:pt>
+    <dgm:pt modelId="{626DAB27-9F86-460B-A679-E3B2FA162F97}" type="pres">
+      <dgm:prSet presAssocID="{FC5A63B9-7B22-4EC2-85C3-EF1B19D05C0A}" presName="sibTrans" presStyleLbl="sibTrans2D1" presStyleIdx="0" presStyleCnt="3"/>
+      <dgm:spPr/>
+    </dgm:pt>
+    <dgm:pt modelId="{17E7F6A6-871A-4F3C-856B-FFCB4CC2E196}" type="pres">
+      <dgm:prSet presAssocID="{FC5A63B9-7B22-4EC2-85C3-EF1B19D05C0A}" presName="connectorText" presStyleLbl="sibTrans2D1" presStyleIdx="0" presStyleCnt="3"/>
+      <dgm:spPr/>
+    </dgm:pt>
+    <dgm:pt modelId="{B40D48C8-DA59-4AC0-92EB-312F9FC7D680}" type="pres">
+      <dgm:prSet presAssocID="{42A58A11-77DE-4962-9DC7-BDA57BE19DFC}" presName="node" presStyleLbl="node1" presStyleIdx="1" presStyleCnt="4" custScaleX="171371">
+        <dgm:presLayoutVars>
+          <dgm:bulletEnabled val="1"/>
+        </dgm:presLayoutVars>
+      </dgm:prSet>
+      <dgm:spPr/>
+    </dgm:pt>
+    <dgm:pt modelId="{477D7827-8CDB-4155-A924-BE6A88222EE1}" type="pres">
+      <dgm:prSet presAssocID="{01F60ED6-E1CB-4B1E-9437-F083F7A0D94D}" presName="sibTrans" presStyleLbl="sibTrans2D1" presStyleIdx="1" presStyleCnt="3"/>
+      <dgm:spPr/>
+    </dgm:pt>
+    <dgm:pt modelId="{D0E50F8D-3089-4A53-BD0C-9743E1A0B6D9}" type="pres">
+      <dgm:prSet presAssocID="{01F60ED6-E1CB-4B1E-9437-F083F7A0D94D}" presName="connectorText" presStyleLbl="sibTrans2D1" presStyleIdx="1" presStyleCnt="3"/>
+      <dgm:spPr/>
+    </dgm:pt>
+    <dgm:pt modelId="{5B97AECC-C614-4525-9B79-0D1B8C18594C}" type="pres">
+      <dgm:prSet presAssocID="{4F5E516E-1973-4F6D-9ABD-24655B26DC7A}" presName="node" presStyleLbl="node1" presStyleIdx="2" presStyleCnt="4" custScaleX="172201">
+        <dgm:presLayoutVars>
+          <dgm:bulletEnabled val="1"/>
+        </dgm:presLayoutVars>
+      </dgm:prSet>
+      <dgm:spPr/>
+    </dgm:pt>
+    <dgm:pt modelId="{9E46CF40-DAD8-4225-8652-3209D90093F1}" type="pres">
+      <dgm:prSet presAssocID="{2F00350B-F4C0-4EBB-A717-2A46DA4A8E13}" presName="sibTrans" presStyleLbl="sibTrans2D1" presStyleIdx="2" presStyleCnt="3"/>
+      <dgm:spPr/>
+    </dgm:pt>
+    <dgm:pt modelId="{85343B09-9C8A-4378-B9A2-9D6316ECC336}" type="pres">
+      <dgm:prSet presAssocID="{2F00350B-F4C0-4EBB-A717-2A46DA4A8E13}" presName="connectorText" presStyleLbl="sibTrans2D1" presStyleIdx="2" presStyleCnt="3"/>
+      <dgm:spPr/>
+    </dgm:pt>
+    <dgm:pt modelId="{01229549-49BA-400B-B223-091CA56B2AFA}" type="pres">
+      <dgm:prSet presAssocID="{44BB4CFD-1F4F-4651-B90B-ED21DCD7D262}" presName="node" presStyleLbl="node1" presStyleIdx="3" presStyleCnt="4" custScaleX="170260">
+        <dgm:presLayoutVars>
+          <dgm:bulletEnabled val="1"/>
+        </dgm:presLayoutVars>
+      </dgm:prSet>
+      <dgm:spPr/>
+    </dgm:pt>
+  </dgm:ptLst>
+  <dgm:cxnLst>
+    <dgm:cxn modelId="{41419712-2F5D-46F5-984A-81C4F32BD324}" type="presOf" srcId="{78DF0853-1E93-4FBD-B9A4-6B84CEDBF13C}" destId="{D4A7E2D7-3A5A-4D7C-B84E-6022C9A6D031}" srcOrd="0" destOrd="0" presId="urn:microsoft.com/office/officeart/2005/8/layout/process2"/>
+    <dgm:cxn modelId="{2C433418-8EB2-4A2D-929B-792B1B09C996}" type="presOf" srcId="{2F00350B-F4C0-4EBB-A717-2A46DA4A8E13}" destId="{85343B09-9C8A-4378-B9A2-9D6316ECC336}" srcOrd="1" destOrd="0" presId="urn:microsoft.com/office/officeart/2005/8/layout/process2"/>
+    <dgm:cxn modelId="{737F982A-E8CD-4767-A477-B292CBAC320B}" srcId="{78DF0853-1E93-4FBD-B9A4-6B84CEDBF13C}" destId="{44BB4CFD-1F4F-4651-B90B-ED21DCD7D262}" srcOrd="3" destOrd="0" parTransId="{D28101F7-E1C4-4080-B633-0C9CC5A94B10}" sibTransId="{F9A0CFA8-FFB4-4C49-B26B-BCF058447EA2}"/>
+    <dgm:cxn modelId="{D9523230-A12E-4240-864A-83035EFCABEC}" type="presOf" srcId="{4F5E516E-1973-4F6D-9ABD-24655B26DC7A}" destId="{5B97AECC-C614-4525-9B79-0D1B8C18594C}" srcOrd="0" destOrd="0" presId="urn:microsoft.com/office/officeart/2005/8/layout/process2"/>
+    <dgm:cxn modelId="{87F72240-9C3C-4C35-A45D-F18A376933AE}" srcId="{78DF0853-1E93-4FBD-B9A4-6B84CEDBF13C}" destId="{CAC34E20-C952-45A4-81B2-7F4FF57FB1EE}" srcOrd="0" destOrd="0" parTransId="{0F415CC4-4AF1-4FDE-82FB-9CBD68B68980}" sibTransId="{FC5A63B9-7B22-4EC2-85C3-EF1B19D05C0A}"/>
+    <dgm:cxn modelId="{0ED2E85E-1212-4AD9-90E2-32C0AF5BC309}" type="presOf" srcId="{2F00350B-F4C0-4EBB-A717-2A46DA4A8E13}" destId="{9E46CF40-DAD8-4225-8652-3209D90093F1}" srcOrd="0" destOrd="0" presId="urn:microsoft.com/office/officeart/2005/8/layout/process2"/>
+    <dgm:cxn modelId="{6FD9D260-07EC-44EE-9E54-5D38EFA1DF5C}" type="presOf" srcId="{44BB4CFD-1F4F-4651-B90B-ED21DCD7D262}" destId="{01229549-49BA-400B-B223-091CA56B2AFA}" srcOrd="0" destOrd="0" presId="urn:microsoft.com/office/officeart/2005/8/layout/process2"/>
+    <dgm:cxn modelId="{FF35F94C-B156-4B15-AA78-1C6482D49199}" srcId="{78DF0853-1E93-4FBD-B9A4-6B84CEDBF13C}" destId="{42A58A11-77DE-4962-9DC7-BDA57BE19DFC}" srcOrd="1" destOrd="0" parTransId="{4AA6820C-A156-4E58-8E03-F546661E9652}" sibTransId="{01F60ED6-E1CB-4B1E-9437-F083F7A0D94D}"/>
+    <dgm:cxn modelId="{DDED5280-780F-4334-9DE2-DE514AB56942}" srcId="{78DF0853-1E93-4FBD-B9A4-6B84CEDBF13C}" destId="{4F5E516E-1973-4F6D-9ABD-24655B26DC7A}" srcOrd="2" destOrd="0" parTransId="{F72A7717-D6B6-47A8-AB94-0A6411D4A1CD}" sibTransId="{2F00350B-F4C0-4EBB-A717-2A46DA4A8E13}"/>
+    <dgm:cxn modelId="{1B98D684-1D44-413D-8583-EA84DC378A34}" type="presOf" srcId="{01F60ED6-E1CB-4B1E-9437-F083F7A0D94D}" destId="{477D7827-8CDB-4155-A924-BE6A88222EE1}" srcOrd="0" destOrd="0" presId="urn:microsoft.com/office/officeart/2005/8/layout/process2"/>
+    <dgm:cxn modelId="{32C93F8D-03D5-46F6-99DF-1D6BA5CEAD17}" type="presOf" srcId="{FC5A63B9-7B22-4EC2-85C3-EF1B19D05C0A}" destId="{17E7F6A6-871A-4F3C-856B-FFCB4CC2E196}" srcOrd="1" destOrd="0" presId="urn:microsoft.com/office/officeart/2005/8/layout/process2"/>
+    <dgm:cxn modelId="{E8BB7191-068C-4181-A1F0-2787469F4C25}" type="presOf" srcId="{42A58A11-77DE-4962-9DC7-BDA57BE19DFC}" destId="{B40D48C8-DA59-4AC0-92EB-312F9FC7D680}" srcOrd="0" destOrd="0" presId="urn:microsoft.com/office/officeart/2005/8/layout/process2"/>
+    <dgm:cxn modelId="{09DC849F-459C-414E-82E9-79F6D9CE026F}" type="presOf" srcId="{CAC34E20-C952-45A4-81B2-7F4FF57FB1EE}" destId="{D3837411-41C7-4DE5-97D5-B34C6364E634}" srcOrd="0" destOrd="0" presId="urn:microsoft.com/office/officeart/2005/8/layout/process2"/>
+    <dgm:cxn modelId="{0198E1C5-A68A-4029-AEEE-2D3553F0E15D}" type="presOf" srcId="{01F60ED6-E1CB-4B1E-9437-F083F7A0D94D}" destId="{D0E50F8D-3089-4A53-BD0C-9743E1A0B6D9}" srcOrd="1" destOrd="0" presId="urn:microsoft.com/office/officeart/2005/8/layout/process2"/>
+    <dgm:cxn modelId="{02D59FD6-5119-4F0B-A16C-FD4ED7A97033}" type="presOf" srcId="{FC5A63B9-7B22-4EC2-85C3-EF1B19D05C0A}" destId="{626DAB27-9F86-460B-A679-E3B2FA162F97}" srcOrd="0" destOrd="0" presId="urn:microsoft.com/office/officeart/2005/8/layout/process2"/>
+    <dgm:cxn modelId="{ADBEA92D-E3D1-492C-858D-A8FC85D07414}" type="presParOf" srcId="{D4A7E2D7-3A5A-4D7C-B84E-6022C9A6D031}" destId="{D3837411-41C7-4DE5-97D5-B34C6364E634}" srcOrd="0" destOrd="0" presId="urn:microsoft.com/office/officeart/2005/8/layout/process2"/>
+    <dgm:cxn modelId="{75332F20-8087-42D3-B08E-818C4CE53441}" type="presParOf" srcId="{D4A7E2D7-3A5A-4D7C-B84E-6022C9A6D031}" destId="{626DAB27-9F86-460B-A679-E3B2FA162F97}" srcOrd="1" destOrd="0" presId="urn:microsoft.com/office/officeart/2005/8/layout/process2"/>
+    <dgm:cxn modelId="{0F5EC9AA-3106-40F2-BBEF-9B67F14A51F9}" type="presParOf" srcId="{626DAB27-9F86-460B-A679-E3B2FA162F97}" destId="{17E7F6A6-871A-4F3C-856B-FFCB4CC2E196}" srcOrd="0" destOrd="0" presId="urn:microsoft.com/office/officeart/2005/8/layout/process2"/>
+    <dgm:cxn modelId="{CAEF53D9-6A01-4FD3-BA77-03A6452580C4}" type="presParOf" srcId="{D4A7E2D7-3A5A-4D7C-B84E-6022C9A6D031}" destId="{B40D48C8-DA59-4AC0-92EB-312F9FC7D680}" srcOrd="2" destOrd="0" presId="urn:microsoft.com/office/officeart/2005/8/layout/process2"/>
+    <dgm:cxn modelId="{793616EF-1630-4EB5-AE91-67E76FAADEFB}" type="presParOf" srcId="{D4A7E2D7-3A5A-4D7C-B84E-6022C9A6D031}" destId="{477D7827-8CDB-4155-A924-BE6A88222EE1}" srcOrd="3" destOrd="0" presId="urn:microsoft.com/office/officeart/2005/8/layout/process2"/>
+    <dgm:cxn modelId="{6C3BB5C9-57F8-49FF-B8AF-2DF7DE92C0EA}" type="presParOf" srcId="{477D7827-8CDB-4155-A924-BE6A88222EE1}" destId="{D0E50F8D-3089-4A53-BD0C-9743E1A0B6D9}" srcOrd="0" destOrd="0" presId="urn:microsoft.com/office/officeart/2005/8/layout/process2"/>
+    <dgm:cxn modelId="{B14D6FF6-46AB-4C93-8FDE-3196DFEC08C2}" type="presParOf" srcId="{D4A7E2D7-3A5A-4D7C-B84E-6022C9A6D031}" destId="{5B97AECC-C614-4525-9B79-0D1B8C18594C}" srcOrd="4" destOrd="0" presId="urn:microsoft.com/office/officeart/2005/8/layout/process2"/>
+    <dgm:cxn modelId="{0C1CE81A-0272-4A8D-BA9D-87E7E1E6F3BA}" type="presParOf" srcId="{D4A7E2D7-3A5A-4D7C-B84E-6022C9A6D031}" destId="{9E46CF40-DAD8-4225-8652-3209D90093F1}" srcOrd="5" destOrd="0" presId="urn:microsoft.com/office/officeart/2005/8/layout/process2"/>
+    <dgm:cxn modelId="{A3DAC725-9F22-401E-8C3E-D9300E565B93}" type="presParOf" srcId="{9E46CF40-DAD8-4225-8652-3209D90093F1}" destId="{85343B09-9C8A-4378-B9A2-9D6316ECC336}" srcOrd="0" destOrd="0" presId="urn:microsoft.com/office/officeart/2005/8/layout/process2"/>
+    <dgm:cxn modelId="{777AC690-DF36-48F3-9466-1C97FFEA98E9}" type="presParOf" srcId="{D4A7E2D7-3A5A-4D7C-B84E-6022C9A6D031}" destId="{01229549-49BA-400B-B223-091CA56B2AFA}" srcOrd="6" destOrd="0" presId="urn:microsoft.com/office/officeart/2005/8/layout/process2"/>
+  </dgm:cxnLst>
+  <dgm:bg>
+    <a:noFill/>
+  </dgm:bg>
+  <dgm:whole>
+    <a:ln>
+      <a:noFill/>
+    </a:ln>
+  </dgm:whole>
+  <dgm:extLst>
+    <a:ext uri="http://schemas.microsoft.com/office/drawing/2008/diagram">
+      <dsp:dataModelExt xmlns:dsp="http://schemas.microsoft.com/office/drawing/2008/diagram" relId="rId11" minVer="http://schemas.openxmlformats.org/drawingml/2006/diagram"/>
+    </a:ext>
+  </dgm:extLst>
+</dgm:dataModel>
+</file>
+
+<file path=ppt/diagrams/drawing1.xml><?xml version="1.0" encoding="utf-8"?>
+<dsp:drawing xmlns:dgm="http://schemas.openxmlformats.org/drawingml/2006/diagram" xmlns:dsp="http://schemas.microsoft.com/office/drawing/2008/diagram" xmlns:a="http://schemas.openxmlformats.org/drawingml/2006/main">
+  <dsp:spTree>
+    <dsp:nvGrpSpPr>
+      <dsp:cNvPr id="0" name=""/>
+      <dsp:cNvGrpSpPr/>
+    </dsp:nvGrpSpPr>
+    <dsp:grpSpPr/>
+    <dsp:sp modelId="{D3837411-41C7-4DE5-97D5-B34C6364E634}">
+      <dsp:nvSpPr>
+        <dsp:cNvPr id="0" name=""/>
+        <dsp:cNvSpPr/>
+      </dsp:nvSpPr>
+      <dsp:spPr>
+        <a:xfrm>
+          <a:off x="219348" y="1887"/>
+          <a:ext cx="4241187" cy="701980"/>
+        </a:xfrm>
+        <a:prstGeom prst="roundRect">
+          <a:avLst>
+            <a:gd name="adj" fmla="val 10000"/>
+          </a:avLst>
+        </a:prstGeom>
+        <a:noFill/>
+        <a:ln w="15875" cap="flat" cmpd="sng" algn="ctr">
+          <a:solidFill>
+            <a:schemeClr val="accent1"/>
+          </a:solidFill>
+          <a:prstDash val="solid"/>
+        </a:ln>
+        <a:effectLst/>
+      </dsp:spPr>
+      <dsp:style>
+        <a:lnRef idx="2">
+          <a:scrgbClr r="0" g="0" b="0"/>
+        </a:lnRef>
+        <a:fillRef idx="1">
+          <a:scrgbClr r="0" g="0" b="0"/>
+        </a:fillRef>
+        <a:effectRef idx="0">
+          <a:scrgbClr r="0" g="0" b="0"/>
+        </a:effectRef>
+        <a:fontRef idx="minor">
+          <a:schemeClr val="lt1"/>
+        </a:fontRef>
+      </dsp:style>
+      <dsp:txBody>
+        <a:bodyPr spcFirstLastPara="0" vert="horz" wrap="square" lIns="64770" tIns="64770" rIns="64770" bIns="64770" numCol="1" spcCol="1270" anchor="ctr" anchorCtr="0">
+          <a:noAutofit/>
+        </a:bodyPr>
+        <a:lstStyle/>
+        <a:p>
+          <a:pPr marL="0" lvl="0" indent="0" algn="ctr" defTabSz="755650">
+            <a:lnSpc>
+              <a:spcPct val="90000"/>
+            </a:lnSpc>
+            <a:spcBef>
+              <a:spcPct val="0"/>
+            </a:spcBef>
+            <a:spcAft>
+              <a:spcPct val="35000"/>
+            </a:spcAft>
+            <a:buNone/>
+          </a:pPr>
+          <a:r>
+            <a:rPr lang="en-US" altLang="ja-JP" sz="1700" kern="1200" dirty="0">
+              <a:solidFill>
+                <a:sysClr val="windowText" lastClr="000000"/>
+              </a:solidFill>
+            </a:rPr>
+            <a:t>VM</a:t>
+          </a:r>
+          <a:r>
+            <a:rPr lang="ja-JP" altLang="en-US" sz="1700" kern="1200" dirty="0">
+              <a:solidFill>
+                <a:sysClr val="windowText" lastClr="000000"/>
+              </a:solidFill>
+            </a:rPr>
+            <a:t>を立ち上げ</a:t>
+          </a:r>
+          <a:endParaRPr lang="zh-CN" altLang="en-US" sz="1700" kern="1200" dirty="0">
+            <a:solidFill>
+              <a:sysClr val="windowText" lastClr="000000"/>
+            </a:solidFill>
+          </a:endParaRPr>
+        </a:p>
+      </dsp:txBody>
+      <dsp:txXfrm>
+        <a:off x="239908" y="22447"/>
+        <a:ext cx="4200067" cy="660860"/>
+      </dsp:txXfrm>
+    </dsp:sp>
+    <dsp:sp modelId="{626DAB27-9F86-460B-A679-E3B2FA162F97}">
+      <dsp:nvSpPr>
+        <dsp:cNvPr id="0" name=""/>
+        <dsp:cNvSpPr/>
+      </dsp:nvSpPr>
+      <dsp:spPr>
+        <a:xfrm rot="5400000">
+          <a:off x="2208320" y="721416"/>
+          <a:ext cx="263242" cy="315891"/>
+        </a:xfrm>
+        <a:prstGeom prst="rightArrow">
+          <a:avLst>
+            <a:gd name="adj1" fmla="val 60000"/>
+            <a:gd name="adj2" fmla="val 50000"/>
+          </a:avLst>
+        </a:prstGeom>
+        <a:solidFill>
+          <a:schemeClr val="accent1"/>
+        </a:solidFill>
+        <a:ln>
+          <a:noFill/>
+        </a:ln>
+        <a:effectLst/>
+      </dsp:spPr>
+      <dsp:style>
+        <a:lnRef idx="0">
+          <a:scrgbClr r="0" g="0" b="0"/>
+        </a:lnRef>
+        <a:fillRef idx="1">
+          <a:scrgbClr r="0" g="0" b="0"/>
+        </a:fillRef>
+        <a:effectRef idx="0">
+          <a:scrgbClr r="0" g="0" b="0"/>
+        </a:effectRef>
+        <a:fontRef idx="minor">
+          <a:schemeClr val="lt1"/>
+        </a:fontRef>
+      </dsp:style>
+      <dsp:txBody>
+        <a:bodyPr spcFirstLastPara="0" vert="horz" wrap="square" lIns="0" tIns="0" rIns="0" bIns="0" numCol="1" spcCol="1270" anchor="ctr" anchorCtr="0">
+          <a:noAutofit/>
+        </a:bodyPr>
+        <a:lstStyle/>
+        <a:p>
+          <a:pPr marL="0" lvl="0" indent="0" algn="ctr" defTabSz="622300">
+            <a:lnSpc>
+              <a:spcPct val="90000"/>
+            </a:lnSpc>
+            <a:spcBef>
+              <a:spcPct val="0"/>
+            </a:spcBef>
+            <a:spcAft>
+              <a:spcPct val="35000"/>
+            </a:spcAft>
+            <a:buNone/>
+          </a:pPr>
+          <a:endParaRPr lang="zh-CN" altLang="en-US" sz="1400" kern="1200"/>
+        </a:p>
+      </dsp:txBody>
+      <dsp:txXfrm rot="-5400000">
+        <a:off x="2245174" y="747741"/>
+        <a:ext cx="189535" cy="184269"/>
+      </dsp:txXfrm>
+    </dsp:sp>
+    <dsp:sp modelId="{B40D48C8-DA59-4AC0-92EB-312F9FC7D680}">
+      <dsp:nvSpPr>
+        <dsp:cNvPr id="0" name=""/>
+        <dsp:cNvSpPr/>
+      </dsp:nvSpPr>
+      <dsp:spPr>
+        <a:xfrm>
+          <a:off x="259614" y="1054857"/>
+          <a:ext cx="4160655" cy="701980"/>
+        </a:xfrm>
+        <a:prstGeom prst="roundRect">
+          <a:avLst>
+            <a:gd name="adj" fmla="val 10000"/>
+          </a:avLst>
+        </a:prstGeom>
+        <a:noFill/>
+        <a:ln w="15875" cap="flat" cmpd="sng" algn="ctr">
+          <a:solidFill>
+            <a:schemeClr val="accent1"/>
+          </a:solidFill>
+          <a:prstDash val="solid"/>
+        </a:ln>
+        <a:effectLst/>
+      </dsp:spPr>
+      <dsp:style>
+        <a:lnRef idx="2">
+          <a:scrgbClr r="0" g="0" b="0"/>
+        </a:lnRef>
+        <a:fillRef idx="1">
+          <a:scrgbClr r="0" g="0" b="0"/>
+        </a:fillRef>
+        <a:effectRef idx="0">
+          <a:scrgbClr r="0" g="0" b="0"/>
+        </a:effectRef>
+        <a:fontRef idx="minor">
+          <a:schemeClr val="lt1"/>
+        </a:fontRef>
+      </dsp:style>
+      <dsp:txBody>
+        <a:bodyPr spcFirstLastPara="0" vert="horz" wrap="square" lIns="64770" tIns="64770" rIns="64770" bIns="64770" numCol="1" spcCol="1270" anchor="ctr" anchorCtr="0">
+          <a:noAutofit/>
+        </a:bodyPr>
+        <a:lstStyle/>
+        <a:p>
+          <a:pPr marL="0" lvl="0" indent="0" algn="ctr" defTabSz="755650">
+            <a:lnSpc>
+              <a:spcPct val="90000"/>
+            </a:lnSpc>
+            <a:spcBef>
+              <a:spcPct val="0"/>
+            </a:spcBef>
+            <a:spcAft>
+              <a:spcPct val="35000"/>
+            </a:spcAft>
+            <a:buNone/>
+          </a:pPr>
+          <a:r>
+            <a:rPr lang="en-US" altLang="ja-JP" sz="1700" kern="1200" dirty="0">
+              <a:solidFill>
+                <a:sysClr val="windowText" lastClr="000000"/>
+              </a:solidFill>
+            </a:rPr>
+            <a:t>NTTD</a:t>
+          </a:r>
+          <a:r>
+            <a:rPr lang="ja-JP" altLang="en-US" sz="1700" kern="1200" dirty="0">
+              <a:solidFill>
+                <a:sysClr val="windowText" lastClr="000000"/>
+              </a:solidFill>
+            </a:rPr>
+            <a:t>のストックからモデルをインポート</a:t>
+          </a:r>
+          <a:endParaRPr lang="zh-CN" altLang="en-US" sz="1700" kern="1200" dirty="0">
+            <a:solidFill>
+              <a:sysClr val="windowText" lastClr="000000"/>
+            </a:solidFill>
+          </a:endParaRPr>
+        </a:p>
+      </dsp:txBody>
+      <dsp:txXfrm>
+        <a:off x="280174" y="1075417"/>
+        <a:ext cx="4119535" cy="660860"/>
+      </dsp:txXfrm>
+    </dsp:sp>
+    <dsp:sp modelId="{477D7827-8CDB-4155-A924-BE6A88222EE1}">
+      <dsp:nvSpPr>
+        <dsp:cNvPr id="0" name=""/>
+        <dsp:cNvSpPr/>
+      </dsp:nvSpPr>
+      <dsp:spPr>
+        <a:xfrm rot="5400000">
+          <a:off x="2208320" y="1774386"/>
+          <a:ext cx="263242" cy="315891"/>
+        </a:xfrm>
+        <a:prstGeom prst="rightArrow">
+          <a:avLst>
+            <a:gd name="adj1" fmla="val 60000"/>
+            <a:gd name="adj2" fmla="val 50000"/>
+          </a:avLst>
+        </a:prstGeom>
+        <a:solidFill>
+          <a:schemeClr val="accent1"/>
+        </a:solidFill>
+        <a:ln>
+          <a:noFill/>
+        </a:ln>
+        <a:effectLst/>
+      </dsp:spPr>
+      <dsp:style>
+        <a:lnRef idx="0">
+          <a:scrgbClr r="0" g="0" b="0"/>
+        </a:lnRef>
+        <a:fillRef idx="1">
+          <a:scrgbClr r="0" g="0" b="0"/>
+        </a:fillRef>
+        <a:effectRef idx="0">
+          <a:scrgbClr r="0" g="0" b="0"/>
+        </a:effectRef>
+        <a:fontRef idx="minor">
+          <a:schemeClr val="lt1"/>
+        </a:fontRef>
+      </dsp:style>
+      <dsp:txBody>
+        <a:bodyPr spcFirstLastPara="0" vert="horz" wrap="square" lIns="0" tIns="0" rIns="0" bIns="0" numCol="1" spcCol="1270" anchor="ctr" anchorCtr="0">
+          <a:noAutofit/>
+        </a:bodyPr>
+        <a:lstStyle/>
+        <a:p>
+          <a:pPr marL="0" lvl="0" indent="0" algn="ctr" defTabSz="622300">
+            <a:lnSpc>
+              <a:spcPct val="90000"/>
+            </a:lnSpc>
+            <a:spcBef>
+              <a:spcPct val="0"/>
+            </a:spcBef>
+            <a:spcAft>
+              <a:spcPct val="35000"/>
+            </a:spcAft>
+            <a:buNone/>
+          </a:pPr>
+          <a:endParaRPr lang="zh-CN" altLang="en-US" sz="1400" kern="1200"/>
+        </a:p>
+      </dsp:txBody>
+      <dsp:txXfrm rot="-5400000">
+        <a:off x="2245174" y="1800711"/>
+        <a:ext cx="189535" cy="184269"/>
+      </dsp:txXfrm>
+    </dsp:sp>
+    <dsp:sp modelId="{5B97AECC-C614-4525-9B79-0D1B8C18594C}">
+      <dsp:nvSpPr>
+        <dsp:cNvPr id="0" name=""/>
+        <dsp:cNvSpPr/>
+      </dsp:nvSpPr>
+      <dsp:spPr>
+        <a:xfrm>
+          <a:off x="249538" y="2107827"/>
+          <a:ext cx="4180806" cy="701980"/>
+        </a:xfrm>
+        <a:prstGeom prst="roundRect">
+          <a:avLst>
+            <a:gd name="adj" fmla="val 10000"/>
+          </a:avLst>
+        </a:prstGeom>
+        <a:noFill/>
+        <a:ln w="15875" cap="flat" cmpd="sng" algn="ctr">
+          <a:solidFill>
+            <a:schemeClr val="accent1"/>
+          </a:solidFill>
+          <a:prstDash val="solid"/>
+        </a:ln>
+        <a:effectLst/>
+      </dsp:spPr>
+      <dsp:style>
+        <a:lnRef idx="2">
+          <a:scrgbClr r="0" g="0" b="0"/>
+        </a:lnRef>
+        <a:fillRef idx="1">
+          <a:scrgbClr r="0" g="0" b="0"/>
+        </a:fillRef>
+        <a:effectRef idx="0">
+          <a:scrgbClr r="0" g="0" b="0"/>
+        </a:effectRef>
+        <a:fontRef idx="minor">
+          <a:schemeClr val="lt1"/>
+        </a:fontRef>
+      </dsp:style>
+      <dsp:txBody>
+        <a:bodyPr spcFirstLastPara="0" vert="horz" wrap="square" lIns="64770" tIns="64770" rIns="64770" bIns="64770" numCol="1" spcCol="1270" anchor="ctr" anchorCtr="0">
+          <a:noAutofit/>
+        </a:bodyPr>
+        <a:lstStyle/>
+        <a:p>
+          <a:pPr marL="0" lvl="0" indent="0" algn="ctr" defTabSz="755650">
+            <a:lnSpc>
+              <a:spcPct val="90000"/>
+            </a:lnSpc>
+            <a:spcBef>
+              <a:spcPct val="0"/>
+            </a:spcBef>
+            <a:spcAft>
+              <a:spcPct val="35000"/>
+            </a:spcAft>
+            <a:buNone/>
+          </a:pPr>
+          <a:r>
+            <a:rPr lang="ja-JP" altLang="en-US" sz="1700" kern="1200" dirty="0">
+              <a:solidFill>
+                <a:sysClr val="windowText" lastClr="000000"/>
+              </a:solidFill>
+            </a:rPr>
+            <a:t>モデルを運用するための</a:t>
+          </a:r>
+          <a:r>
+            <a:rPr lang="en-US" altLang="ja-JP" sz="1700" kern="1200" dirty="0">
+              <a:solidFill>
+                <a:sysClr val="windowText" lastClr="000000"/>
+              </a:solidFill>
+            </a:rPr>
+            <a:t>Python</a:t>
+          </a:r>
+          <a:r>
+            <a:rPr lang="ja-JP" altLang="en-US" sz="1700" kern="1200" dirty="0">
+              <a:solidFill>
+                <a:sysClr val="windowText" lastClr="000000"/>
+              </a:solidFill>
+            </a:rPr>
+            <a:t>スクリプトを構築</a:t>
+          </a:r>
+          <a:endParaRPr lang="zh-CN" altLang="en-US" sz="1700" kern="1200" dirty="0">
+            <a:solidFill>
+              <a:sysClr val="windowText" lastClr="000000"/>
+            </a:solidFill>
+          </a:endParaRPr>
+        </a:p>
+      </dsp:txBody>
+      <dsp:txXfrm>
+        <a:off x="270098" y="2128387"/>
+        <a:ext cx="4139686" cy="660860"/>
+      </dsp:txXfrm>
+    </dsp:sp>
+    <dsp:sp modelId="{9E46CF40-DAD8-4225-8652-3209D90093F1}">
+      <dsp:nvSpPr>
+        <dsp:cNvPr id="0" name=""/>
+        <dsp:cNvSpPr/>
+      </dsp:nvSpPr>
+      <dsp:spPr>
+        <a:xfrm rot="5400000">
+          <a:off x="2208320" y="2827357"/>
+          <a:ext cx="263242" cy="315891"/>
+        </a:xfrm>
+        <a:prstGeom prst="rightArrow">
+          <a:avLst>
+            <a:gd name="adj1" fmla="val 60000"/>
+            <a:gd name="adj2" fmla="val 50000"/>
+          </a:avLst>
+        </a:prstGeom>
+        <a:solidFill>
+          <a:schemeClr val="accent1"/>
+        </a:solidFill>
+        <a:ln>
+          <a:noFill/>
+        </a:ln>
+        <a:effectLst/>
+      </dsp:spPr>
+      <dsp:style>
+        <a:lnRef idx="0">
+          <a:scrgbClr r="0" g="0" b="0"/>
+        </a:lnRef>
+        <a:fillRef idx="1">
+          <a:scrgbClr r="0" g="0" b="0"/>
+        </a:fillRef>
+        <a:effectRef idx="0">
+          <a:scrgbClr r="0" g="0" b="0"/>
+        </a:effectRef>
+        <a:fontRef idx="minor">
+          <a:schemeClr val="lt1"/>
+        </a:fontRef>
+      </dsp:style>
+      <dsp:txBody>
+        <a:bodyPr spcFirstLastPara="0" vert="horz" wrap="square" lIns="0" tIns="0" rIns="0" bIns="0" numCol="1" spcCol="1270" anchor="ctr" anchorCtr="0">
+          <a:noAutofit/>
+        </a:bodyPr>
+        <a:lstStyle/>
+        <a:p>
+          <a:pPr marL="0" lvl="0" indent="0" algn="ctr" defTabSz="622300">
+            <a:lnSpc>
+              <a:spcPct val="90000"/>
+            </a:lnSpc>
+            <a:spcBef>
+              <a:spcPct val="0"/>
+            </a:spcBef>
+            <a:spcAft>
+              <a:spcPct val="35000"/>
+            </a:spcAft>
+            <a:buNone/>
+          </a:pPr>
+          <a:endParaRPr lang="zh-CN" altLang="en-US" sz="1400" kern="1200"/>
+        </a:p>
+      </dsp:txBody>
+      <dsp:txXfrm rot="-5400000">
+        <a:off x="2245174" y="2853682"/>
+        <a:ext cx="189535" cy="184269"/>
+      </dsp:txXfrm>
+    </dsp:sp>
+    <dsp:sp modelId="{01229549-49BA-400B-B223-091CA56B2AFA}">
+      <dsp:nvSpPr>
+        <dsp:cNvPr id="0" name=""/>
+        <dsp:cNvSpPr/>
+      </dsp:nvSpPr>
+      <dsp:spPr>
+        <a:xfrm>
+          <a:off x="273101" y="3160797"/>
+          <a:ext cx="4133681" cy="701980"/>
+        </a:xfrm>
+        <a:prstGeom prst="roundRect">
+          <a:avLst>
+            <a:gd name="adj" fmla="val 10000"/>
+          </a:avLst>
+        </a:prstGeom>
+        <a:noFill/>
+        <a:ln w="15875" cap="flat" cmpd="sng" algn="ctr">
+          <a:solidFill>
+            <a:schemeClr val="accent1"/>
+          </a:solidFill>
+          <a:prstDash val="solid"/>
+        </a:ln>
+        <a:effectLst/>
+      </dsp:spPr>
+      <dsp:style>
+        <a:lnRef idx="2">
+          <a:scrgbClr r="0" g="0" b="0"/>
+        </a:lnRef>
+        <a:fillRef idx="1">
+          <a:scrgbClr r="0" g="0" b="0"/>
+        </a:fillRef>
+        <a:effectRef idx="0">
+          <a:scrgbClr r="0" g="0" b="0"/>
+        </a:effectRef>
+        <a:fontRef idx="minor">
+          <a:schemeClr val="lt1"/>
+        </a:fontRef>
+      </dsp:style>
+      <dsp:txBody>
+        <a:bodyPr spcFirstLastPara="0" vert="horz" wrap="square" lIns="64770" tIns="64770" rIns="64770" bIns="64770" numCol="1" spcCol="1270" anchor="ctr" anchorCtr="0">
+          <a:noAutofit/>
+        </a:bodyPr>
+        <a:lstStyle/>
+        <a:p>
+          <a:pPr marL="0" lvl="0" indent="0" algn="ctr" defTabSz="755650">
+            <a:lnSpc>
+              <a:spcPct val="90000"/>
+            </a:lnSpc>
+            <a:spcBef>
+              <a:spcPct val="0"/>
+            </a:spcBef>
+            <a:spcAft>
+              <a:spcPct val="35000"/>
+            </a:spcAft>
+            <a:buNone/>
+          </a:pPr>
+          <a:r>
+            <a:rPr lang="en-US" altLang="ja-JP" sz="1700" kern="1200" dirty="0">
+              <a:solidFill>
+                <a:sysClr val="windowText" lastClr="000000"/>
+              </a:solidFill>
+            </a:rPr>
+            <a:t>Backend Web API</a:t>
+          </a:r>
+          <a:r>
+            <a:rPr lang="ja-JP" altLang="en-US" sz="1700" kern="1200" dirty="0">
+              <a:solidFill>
+                <a:sysClr val="windowText" lastClr="000000"/>
+              </a:solidFill>
+            </a:rPr>
+            <a:t>を構築</a:t>
+          </a:r>
+          <a:endParaRPr lang="zh-CN" altLang="en-US" sz="1700" kern="1200" dirty="0">
+            <a:solidFill>
+              <a:sysClr val="windowText" lastClr="000000"/>
+            </a:solidFill>
+          </a:endParaRPr>
+        </a:p>
+      </dsp:txBody>
+      <dsp:txXfrm>
+        <a:off x="293661" y="3181357"/>
+        <a:ext cx="4092561" cy="660860"/>
+      </dsp:txXfrm>
+    </dsp:sp>
+  </dsp:spTree>
+</dsp:drawing>
+</file>
+
+<file path=ppt/diagrams/drawing2.xml><?xml version="1.0" encoding="utf-8"?>
+<dsp:drawing xmlns:dgm="http://schemas.openxmlformats.org/drawingml/2006/diagram" xmlns:dsp="http://schemas.microsoft.com/office/drawing/2008/diagram" xmlns:a="http://schemas.openxmlformats.org/drawingml/2006/main">
+  <dsp:spTree>
+    <dsp:nvGrpSpPr>
+      <dsp:cNvPr id="0" name=""/>
+      <dsp:cNvGrpSpPr/>
+    </dsp:nvGrpSpPr>
+    <dsp:grpSpPr/>
+    <dsp:sp modelId="{D3837411-41C7-4DE5-97D5-B34C6364E634}">
+      <dsp:nvSpPr>
+        <dsp:cNvPr id="0" name=""/>
+        <dsp:cNvSpPr/>
+      </dsp:nvSpPr>
+      <dsp:spPr>
+        <a:xfrm>
+          <a:off x="224617" y="1887"/>
+          <a:ext cx="4230649" cy="701980"/>
+        </a:xfrm>
+        <a:prstGeom prst="roundRect">
+          <a:avLst>
+            <a:gd name="adj" fmla="val 10000"/>
+          </a:avLst>
+        </a:prstGeom>
+        <a:noFill/>
+        <a:ln w="15875" cap="flat" cmpd="sng" algn="ctr">
+          <a:solidFill>
+            <a:schemeClr val="accent1"/>
+          </a:solidFill>
+          <a:prstDash val="solid"/>
+        </a:ln>
+        <a:effectLst/>
+      </dsp:spPr>
+      <dsp:style>
+        <a:lnRef idx="2">
+          <a:scrgbClr r="0" g="0" b="0"/>
+        </a:lnRef>
+        <a:fillRef idx="1">
+          <a:scrgbClr r="0" g="0" b="0"/>
+        </a:fillRef>
+        <a:effectRef idx="0">
+          <a:scrgbClr r="0" g="0" b="0"/>
+        </a:effectRef>
+        <a:fontRef idx="minor">
+          <a:schemeClr val="lt1"/>
+        </a:fontRef>
+      </dsp:style>
+      <dsp:txBody>
+        <a:bodyPr spcFirstLastPara="0" vert="horz" wrap="square" lIns="64770" tIns="64770" rIns="64770" bIns="64770" numCol="1" spcCol="1270" anchor="ctr" anchorCtr="0">
+          <a:noAutofit/>
+        </a:bodyPr>
+        <a:lstStyle/>
+        <a:p>
+          <a:pPr marL="0" lvl="0" indent="0" algn="ctr" defTabSz="755650">
+            <a:lnSpc>
+              <a:spcPct val="90000"/>
+            </a:lnSpc>
+            <a:spcBef>
+              <a:spcPct val="0"/>
+            </a:spcBef>
+            <a:spcAft>
+              <a:spcPct val="35000"/>
+            </a:spcAft>
+            <a:buNone/>
+          </a:pPr>
+          <a:r>
+            <a:rPr lang="ja-JP" altLang="en-US" sz="1700" kern="1200" dirty="0">
+              <a:solidFill>
+                <a:sysClr val="windowText" lastClr="000000"/>
+              </a:solidFill>
+            </a:rPr>
+            <a:t>モデル</a:t>
+          </a:r>
+          <a:r>
+            <a:rPr lang="en-US" altLang="ja-JP" sz="1700" kern="1200" dirty="0">
+              <a:solidFill>
+                <a:sysClr val="windowText" lastClr="000000"/>
+              </a:solidFill>
+            </a:rPr>
+            <a:t>API</a:t>
+          </a:r>
+          <a:r>
+            <a:rPr lang="ja-JP" altLang="en-US" sz="1700" kern="1200" dirty="0">
+              <a:solidFill>
+                <a:sysClr val="windowText" lastClr="000000"/>
+              </a:solidFill>
+            </a:rPr>
+            <a:t>を呼び出し</a:t>
+          </a:r>
+          <a:endParaRPr lang="zh-CN" altLang="en-US" sz="1700" kern="1200" dirty="0">
+            <a:solidFill>
+              <a:sysClr val="windowText" lastClr="000000"/>
+            </a:solidFill>
+          </a:endParaRPr>
+        </a:p>
+      </dsp:txBody>
+      <dsp:txXfrm>
+        <a:off x="245177" y="22447"/>
+        <a:ext cx="4189529" cy="660860"/>
+      </dsp:txXfrm>
+    </dsp:sp>
+    <dsp:sp modelId="{626DAB27-9F86-460B-A679-E3B2FA162F97}">
+      <dsp:nvSpPr>
+        <dsp:cNvPr id="0" name=""/>
+        <dsp:cNvSpPr/>
+      </dsp:nvSpPr>
+      <dsp:spPr>
+        <a:xfrm rot="5400000">
+          <a:off x="2208320" y="721416"/>
+          <a:ext cx="263242" cy="315891"/>
+        </a:xfrm>
+        <a:prstGeom prst="rightArrow">
+          <a:avLst>
+            <a:gd name="adj1" fmla="val 60000"/>
+            <a:gd name="adj2" fmla="val 50000"/>
+          </a:avLst>
+        </a:prstGeom>
+        <a:solidFill>
+          <a:schemeClr val="accent1"/>
+        </a:solidFill>
+        <a:ln>
+          <a:noFill/>
+        </a:ln>
+        <a:effectLst/>
+      </dsp:spPr>
+      <dsp:style>
+        <a:lnRef idx="0">
+          <a:scrgbClr r="0" g="0" b="0"/>
+        </a:lnRef>
+        <a:fillRef idx="1">
+          <a:scrgbClr r="0" g="0" b="0"/>
+        </a:fillRef>
+        <a:effectRef idx="0">
+          <a:scrgbClr r="0" g="0" b="0"/>
+        </a:effectRef>
+        <a:fontRef idx="minor">
+          <a:schemeClr val="lt1"/>
+        </a:fontRef>
+      </dsp:style>
+      <dsp:txBody>
+        <a:bodyPr spcFirstLastPara="0" vert="horz" wrap="square" lIns="0" tIns="0" rIns="0" bIns="0" numCol="1" spcCol="1270" anchor="ctr" anchorCtr="0">
+          <a:noAutofit/>
+        </a:bodyPr>
+        <a:lstStyle/>
+        <a:p>
+          <a:pPr marL="0" lvl="0" indent="0" algn="ctr" defTabSz="622300">
+            <a:lnSpc>
+              <a:spcPct val="90000"/>
+            </a:lnSpc>
+            <a:spcBef>
+              <a:spcPct val="0"/>
+            </a:spcBef>
+            <a:spcAft>
+              <a:spcPct val="35000"/>
+            </a:spcAft>
+            <a:buNone/>
+          </a:pPr>
+          <a:endParaRPr lang="zh-CN" altLang="en-US" sz="1400" kern="1200">
+            <a:solidFill>
+              <a:sysClr val="windowText" lastClr="000000"/>
+            </a:solidFill>
+          </a:endParaRPr>
+        </a:p>
+      </dsp:txBody>
+      <dsp:txXfrm rot="-5400000">
+        <a:off x="2245174" y="747741"/>
+        <a:ext cx="189535" cy="184269"/>
+      </dsp:txXfrm>
+    </dsp:sp>
+    <dsp:sp modelId="{B40D48C8-DA59-4AC0-92EB-312F9FC7D680}">
+      <dsp:nvSpPr>
+        <dsp:cNvPr id="0" name=""/>
+        <dsp:cNvSpPr/>
+      </dsp:nvSpPr>
+      <dsp:spPr>
+        <a:xfrm>
+          <a:off x="264783" y="1054857"/>
+          <a:ext cx="4150316" cy="701980"/>
+        </a:xfrm>
+        <a:prstGeom prst="roundRect">
+          <a:avLst>
+            <a:gd name="adj" fmla="val 10000"/>
+          </a:avLst>
+        </a:prstGeom>
+        <a:noFill/>
+        <a:ln w="15875" cap="flat" cmpd="sng" algn="ctr">
+          <a:solidFill>
+            <a:schemeClr val="accent1"/>
+          </a:solidFill>
+          <a:prstDash val="solid"/>
+        </a:ln>
+        <a:effectLst/>
+      </dsp:spPr>
+      <dsp:style>
+        <a:lnRef idx="2">
+          <a:scrgbClr r="0" g="0" b="0"/>
+        </a:lnRef>
+        <a:fillRef idx="1">
+          <a:scrgbClr r="0" g="0" b="0"/>
+        </a:fillRef>
+        <a:effectRef idx="0">
+          <a:scrgbClr r="0" g="0" b="0"/>
+        </a:effectRef>
+        <a:fontRef idx="minor">
+          <a:schemeClr val="lt1"/>
+        </a:fontRef>
+      </dsp:style>
+      <dsp:txBody>
+        <a:bodyPr spcFirstLastPara="0" vert="horz" wrap="square" lIns="64770" tIns="64770" rIns="64770" bIns="64770" numCol="1" spcCol="1270" anchor="ctr" anchorCtr="0">
+          <a:noAutofit/>
+        </a:bodyPr>
+        <a:lstStyle/>
+        <a:p>
+          <a:pPr marL="0" lvl="0" indent="0" algn="ctr" defTabSz="755650">
+            <a:lnSpc>
+              <a:spcPct val="90000"/>
+            </a:lnSpc>
+            <a:spcBef>
+              <a:spcPct val="0"/>
+            </a:spcBef>
+            <a:spcAft>
+              <a:spcPct val="35000"/>
+            </a:spcAft>
+            <a:buNone/>
+          </a:pPr>
+          <a:r>
+            <a:rPr lang="en-US" altLang="ja-JP" sz="1700" kern="1200" dirty="0">
+              <a:solidFill>
+                <a:sysClr val="windowText" lastClr="000000"/>
+              </a:solidFill>
+            </a:rPr>
+            <a:t>Abstract</a:t>
+          </a:r>
+          <a:r>
+            <a:rPr lang="ja-JP" altLang="en-US" sz="1700" kern="1200" dirty="0">
+              <a:solidFill>
+                <a:sysClr val="windowText" lastClr="000000"/>
+              </a:solidFill>
+            </a:rPr>
+            <a:t>を渡す</a:t>
+          </a:r>
+          <a:endParaRPr lang="zh-CN" altLang="en-US" sz="1700" kern="1200" dirty="0">
+            <a:solidFill>
+              <a:sysClr val="windowText" lastClr="000000"/>
+            </a:solidFill>
+          </a:endParaRPr>
+        </a:p>
+      </dsp:txBody>
+      <dsp:txXfrm>
+        <a:off x="285343" y="1075417"/>
+        <a:ext cx="4109196" cy="660860"/>
+      </dsp:txXfrm>
+    </dsp:sp>
+    <dsp:sp modelId="{477D7827-8CDB-4155-A924-BE6A88222EE1}">
+      <dsp:nvSpPr>
+        <dsp:cNvPr id="0" name=""/>
+        <dsp:cNvSpPr/>
+      </dsp:nvSpPr>
+      <dsp:spPr>
+        <a:xfrm rot="5400000">
+          <a:off x="2208320" y="1774386"/>
+          <a:ext cx="263242" cy="315891"/>
+        </a:xfrm>
+        <a:prstGeom prst="rightArrow">
+          <a:avLst>
+            <a:gd name="adj1" fmla="val 60000"/>
+            <a:gd name="adj2" fmla="val 50000"/>
+          </a:avLst>
+        </a:prstGeom>
+        <a:solidFill>
+          <a:schemeClr val="accent1"/>
+        </a:solidFill>
+        <a:ln>
+          <a:noFill/>
+        </a:ln>
+        <a:effectLst/>
+      </dsp:spPr>
+      <dsp:style>
+        <a:lnRef idx="0">
+          <a:scrgbClr r="0" g="0" b="0"/>
+        </a:lnRef>
+        <a:fillRef idx="1">
+          <a:scrgbClr r="0" g="0" b="0"/>
+        </a:fillRef>
+        <a:effectRef idx="0">
+          <a:scrgbClr r="0" g="0" b="0"/>
+        </a:effectRef>
+        <a:fontRef idx="minor">
+          <a:schemeClr val="lt1"/>
+        </a:fontRef>
+      </dsp:style>
+      <dsp:txBody>
+        <a:bodyPr spcFirstLastPara="0" vert="horz" wrap="square" lIns="0" tIns="0" rIns="0" bIns="0" numCol="1" spcCol="1270" anchor="ctr" anchorCtr="0">
+          <a:noAutofit/>
+        </a:bodyPr>
+        <a:lstStyle/>
+        <a:p>
+          <a:pPr marL="0" lvl="0" indent="0" algn="ctr" defTabSz="622300">
+            <a:lnSpc>
+              <a:spcPct val="90000"/>
+            </a:lnSpc>
+            <a:spcBef>
+              <a:spcPct val="0"/>
+            </a:spcBef>
+            <a:spcAft>
+              <a:spcPct val="35000"/>
+            </a:spcAft>
+            <a:buNone/>
+          </a:pPr>
+          <a:endParaRPr lang="zh-CN" altLang="en-US" sz="1400" kern="1200">
+            <a:solidFill>
+              <a:sysClr val="windowText" lastClr="000000"/>
+            </a:solidFill>
+          </a:endParaRPr>
+        </a:p>
+      </dsp:txBody>
+      <dsp:txXfrm rot="-5400000">
+        <a:off x="2245174" y="1800711"/>
+        <a:ext cx="189535" cy="184269"/>
+      </dsp:txXfrm>
+    </dsp:sp>
+    <dsp:sp modelId="{5B97AECC-C614-4525-9B79-0D1B8C18594C}">
+      <dsp:nvSpPr>
+        <dsp:cNvPr id="0" name=""/>
+        <dsp:cNvSpPr/>
+      </dsp:nvSpPr>
+      <dsp:spPr>
+        <a:xfrm>
+          <a:off x="254732" y="2107827"/>
+          <a:ext cx="4170418" cy="701980"/>
+        </a:xfrm>
+        <a:prstGeom prst="roundRect">
+          <a:avLst>
+            <a:gd name="adj" fmla="val 10000"/>
+          </a:avLst>
+        </a:prstGeom>
+        <a:noFill/>
+        <a:ln w="15875" cap="flat" cmpd="sng" algn="ctr">
+          <a:solidFill>
+            <a:schemeClr val="accent1"/>
+          </a:solidFill>
+          <a:prstDash val="solid"/>
+        </a:ln>
+        <a:effectLst/>
+      </dsp:spPr>
+      <dsp:style>
+        <a:lnRef idx="2">
+          <a:scrgbClr r="0" g="0" b="0"/>
+        </a:lnRef>
+        <a:fillRef idx="1">
+          <a:scrgbClr r="0" g="0" b="0"/>
+        </a:fillRef>
+        <a:effectRef idx="0">
+          <a:scrgbClr r="0" g="0" b="0"/>
+        </a:effectRef>
+        <a:fontRef idx="minor">
+          <a:schemeClr val="lt1"/>
+        </a:fontRef>
+      </dsp:style>
+      <dsp:txBody>
+        <a:bodyPr spcFirstLastPara="0" vert="horz" wrap="square" lIns="64770" tIns="64770" rIns="64770" bIns="64770" numCol="1" spcCol="1270" anchor="ctr" anchorCtr="0">
+          <a:noAutofit/>
+        </a:bodyPr>
+        <a:lstStyle/>
+        <a:p>
+          <a:pPr marL="0" lvl="0" indent="0" algn="ctr" defTabSz="755650">
+            <a:lnSpc>
+              <a:spcPct val="90000"/>
+            </a:lnSpc>
+            <a:spcBef>
+              <a:spcPct val="0"/>
+            </a:spcBef>
+            <a:spcAft>
+              <a:spcPct val="35000"/>
+            </a:spcAft>
+            <a:buNone/>
+          </a:pPr>
+          <a:r>
+            <a:rPr lang="ja-JP" altLang="en-US" sz="1700" kern="1200" dirty="0">
+              <a:solidFill>
+                <a:sysClr val="windowText" lastClr="000000"/>
+              </a:solidFill>
+            </a:rPr>
+            <a:t>入力したテキストを基づいて</a:t>
+          </a:r>
+          <a:r>
+            <a:rPr lang="en-US" altLang="ja-JP" sz="1700" kern="1200" dirty="0">
+              <a:solidFill>
+                <a:sysClr val="windowText" lastClr="000000"/>
+              </a:solidFill>
+            </a:rPr>
+            <a:t>IPC</a:t>
+          </a:r>
+          <a:r>
+            <a:rPr lang="ja-JP" altLang="en-US" sz="1700" kern="1200" dirty="0">
+              <a:solidFill>
+                <a:sysClr val="windowText" lastClr="000000"/>
+              </a:solidFill>
+            </a:rPr>
+            <a:t>コードを推理する</a:t>
+          </a:r>
+          <a:endParaRPr lang="zh-CN" altLang="en-US" sz="1700" kern="1200" dirty="0">
+            <a:solidFill>
+              <a:sysClr val="windowText" lastClr="000000"/>
+            </a:solidFill>
+          </a:endParaRPr>
+        </a:p>
+      </dsp:txBody>
+      <dsp:txXfrm>
+        <a:off x="275292" y="2128387"/>
+        <a:ext cx="4129298" cy="660860"/>
+      </dsp:txXfrm>
+    </dsp:sp>
+    <dsp:sp modelId="{9E46CF40-DAD8-4225-8652-3209D90093F1}">
+      <dsp:nvSpPr>
+        <dsp:cNvPr id="0" name=""/>
+        <dsp:cNvSpPr/>
+      </dsp:nvSpPr>
+      <dsp:spPr>
+        <a:xfrm rot="5400000">
+          <a:off x="2208320" y="2827357"/>
+          <a:ext cx="263242" cy="315891"/>
+        </a:xfrm>
+        <a:prstGeom prst="rightArrow">
+          <a:avLst>
+            <a:gd name="adj1" fmla="val 60000"/>
+            <a:gd name="adj2" fmla="val 50000"/>
+          </a:avLst>
+        </a:prstGeom>
+        <a:solidFill>
+          <a:schemeClr val="accent1"/>
+        </a:solidFill>
+        <a:ln>
+          <a:noFill/>
+        </a:ln>
+        <a:effectLst/>
+      </dsp:spPr>
+      <dsp:style>
+        <a:lnRef idx="0">
+          <a:scrgbClr r="0" g="0" b="0"/>
+        </a:lnRef>
+        <a:fillRef idx="1">
+          <a:scrgbClr r="0" g="0" b="0"/>
+        </a:fillRef>
+        <a:effectRef idx="0">
+          <a:scrgbClr r="0" g="0" b="0"/>
+        </a:effectRef>
+        <a:fontRef idx="minor">
+          <a:schemeClr val="lt1"/>
+        </a:fontRef>
+      </dsp:style>
+      <dsp:txBody>
+        <a:bodyPr spcFirstLastPara="0" vert="horz" wrap="square" lIns="0" tIns="0" rIns="0" bIns="0" numCol="1" spcCol="1270" anchor="ctr" anchorCtr="0">
+          <a:noAutofit/>
+        </a:bodyPr>
+        <a:lstStyle/>
+        <a:p>
+          <a:pPr marL="0" lvl="0" indent="0" algn="ctr" defTabSz="622300">
+            <a:lnSpc>
+              <a:spcPct val="90000"/>
+            </a:lnSpc>
+            <a:spcBef>
+              <a:spcPct val="0"/>
+            </a:spcBef>
+            <a:spcAft>
+              <a:spcPct val="35000"/>
+            </a:spcAft>
+            <a:buNone/>
+          </a:pPr>
+          <a:endParaRPr lang="zh-CN" altLang="en-US" sz="1400" kern="1200">
+            <a:solidFill>
+              <a:sysClr val="windowText" lastClr="000000"/>
+            </a:solidFill>
+          </a:endParaRPr>
+        </a:p>
+      </dsp:txBody>
+      <dsp:txXfrm rot="-5400000">
+        <a:off x="2245174" y="2853682"/>
+        <a:ext cx="189535" cy="184269"/>
+      </dsp:txXfrm>
+    </dsp:sp>
+    <dsp:sp modelId="{01229549-49BA-400B-B223-091CA56B2AFA}">
+      <dsp:nvSpPr>
+        <dsp:cNvPr id="0" name=""/>
+        <dsp:cNvSpPr/>
+      </dsp:nvSpPr>
+      <dsp:spPr>
+        <a:xfrm>
+          <a:off x="278236" y="3160797"/>
+          <a:ext cx="4123410" cy="701980"/>
+        </a:xfrm>
+        <a:prstGeom prst="roundRect">
+          <a:avLst>
+            <a:gd name="adj" fmla="val 10000"/>
+          </a:avLst>
+        </a:prstGeom>
+        <a:noFill/>
+        <a:ln w="15875" cap="flat" cmpd="sng" algn="ctr">
+          <a:solidFill>
+            <a:schemeClr val="accent1"/>
+          </a:solidFill>
+          <a:prstDash val="solid"/>
+        </a:ln>
+        <a:effectLst/>
+      </dsp:spPr>
+      <dsp:style>
+        <a:lnRef idx="2">
+          <a:scrgbClr r="0" g="0" b="0"/>
+        </a:lnRef>
+        <a:fillRef idx="1">
+          <a:scrgbClr r="0" g="0" b="0"/>
+        </a:fillRef>
+        <a:effectRef idx="0">
+          <a:scrgbClr r="0" g="0" b="0"/>
+        </a:effectRef>
+        <a:fontRef idx="minor">
+          <a:schemeClr val="lt1"/>
+        </a:fontRef>
+      </dsp:style>
+      <dsp:txBody>
+        <a:bodyPr spcFirstLastPara="0" vert="horz" wrap="square" lIns="64770" tIns="64770" rIns="64770" bIns="64770" numCol="1" spcCol="1270" anchor="ctr" anchorCtr="0">
+          <a:noAutofit/>
+        </a:bodyPr>
+        <a:lstStyle/>
+        <a:p>
+          <a:pPr marL="0" lvl="0" indent="0" algn="ctr" defTabSz="755650">
+            <a:lnSpc>
+              <a:spcPct val="90000"/>
+            </a:lnSpc>
+            <a:spcBef>
+              <a:spcPct val="0"/>
+            </a:spcBef>
+            <a:spcAft>
+              <a:spcPct val="35000"/>
+            </a:spcAft>
+            <a:buNone/>
+          </a:pPr>
+          <a:r>
+            <a:rPr lang="ja-JP" altLang="en-US" sz="1700" kern="1200" dirty="0">
+              <a:solidFill>
+                <a:sysClr val="windowText" lastClr="000000"/>
+              </a:solidFill>
+            </a:rPr>
+            <a:t>予測結果を返す</a:t>
+          </a:r>
+          <a:endParaRPr lang="zh-CN" altLang="en-US" sz="1700" kern="1200" dirty="0">
+            <a:solidFill>
+              <a:sysClr val="windowText" lastClr="000000"/>
+            </a:solidFill>
+          </a:endParaRPr>
+        </a:p>
+      </dsp:txBody>
+      <dsp:txXfrm>
+        <a:off x="298796" y="3181357"/>
+        <a:ext cx="4082290" cy="660860"/>
+      </dsp:txXfrm>
+    </dsp:sp>
+  </dsp:spTree>
+</dsp:drawing>
+</file>
+
+<file path=ppt/diagrams/layout1.xml><?xml version="1.0" encoding="utf-8"?>
+<dgm:layoutDef xmlns:dgm="http://schemas.openxmlformats.org/drawingml/2006/diagram" xmlns:a="http://schemas.openxmlformats.org/drawingml/2006/main" uniqueId="urn:microsoft.com/office/officeart/2005/8/layout/process2">
+  <dgm:title val=""/>
+  <dgm:desc val=""/>
+  <dgm:catLst>
+    <dgm:cat type="process" pri="13000"/>
+  </dgm:catLst>
+  <dgm:sampData useDef="1">
+    <dgm:dataModel>
+      <dgm:ptLst/>
+      <dgm:bg/>
+      <dgm:whole/>
+    </dgm:dataModel>
+  </dgm:sampData>
+  <dgm:styleData>
+    <dgm:dataModel>
+      <dgm:ptLst>
+        <dgm:pt modelId="0" type="doc"/>
+        <dgm:pt modelId="1"/>
+        <dgm:pt modelId="2"/>
+      </dgm:ptLst>
+      <dgm:cxnLst>
+        <dgm:cxn modelId="3" srcId="0" destId="1" srcOrd="0" destOrd="0"/>
+        <dgm:cxn modelId="4" srcId="0" destId="2" srcOrd="1" destOrd="0"/>
+      </dgm:cxnLst>
+      <dgm:bg/>
+      <dgm:whole/>
+    </dgm:dataModel>
+  </dgm:styleData>
+  <dgm:clrData>
+    <dgm:dataModel>
+      <dgm:ptLst>
+        <dgm:pt modelId="0" type="doc"/>
+        <dgm:pt modelId="1"/>
+        <dgm:pt modelId="2"/>
+        <dgm:pt modelId="3"/>
+        <dgm:pt modelId="4"/>
+      </dgm:ptLst>
+      <dgm:cxnLst>
+        <dgm:cxn modelId="5" srcId="0" destId="1" srcOrd="0" destOrd="0"/>
+        <dgm:cxn modelId="6" srcId="0" destId="2" srcOrd="1" destOrd="0"/>
+        <dgm:cxn modelId="7" srcId="0" destId="3" srcOrd="2" destOrd="0"/>
+        <dgm:cxn modelId="8" srcId="0" destId="4" srcOrd="3" destOrd="0"/>
+      </dgm:cxnLst>
+      <dgm:bg/>
+      <dgm:whole/>
+    </dgm:dataModel>
+  </dgm:clrData>
+  <dgm:layoutNode name="linearFlow">
+    <dgm:varLst>
+      <dgm:resizeHandles val="exact"/>
+    </dgm:varLst>
+    <dgm:alg type="lin">
+      <dgm:param type="linDir" val="fromT"/>
+    </dgm:alg>
+    <dgm:shape xmlns:r="http://schemas.openxmlformats.org/officeDocument/2006/relationships" r:blip="">
+      <dgm:adjLst/>
+    </dgm:shape>
+    <dgm:presOf/>
+    <dgm:constrLst>
+      <dgm:constr type="h" for="ch" ptType="node" refType="h"/>
+      <dgm:constr type="h" for="ch" ptType="sibTrans" refType="h" refFor="ch" refPtType="node" fact="0.5"/>
+      <dgm:constr type="w" for="ch" ptType="node" op="equ"/>
+      <dgm:constr type="primFontSz" for="ch" ptType="node" op="equ" val="65"/>
+      <dgm:constr type="primFontSz" for="des" forName="connectorText" op="equ" val="55"/>
+      <dgm:constr type="primFontSz" for="des" forName="connectorText" refType="primFontSz" refFor="ch" refPtType="node" op="lte" fact="0.8"/>
+    </dgm:constrLst>
+    <dgm:ruleLst/>
+    <dgm:forEach name="nodesForEach" axis="ch" ptType="node">
+      <dgm:layoutNode name="node">
+        <dgm:varLst>
+          <dgm:bulletEnabled val="1"/>
+        </dgm:varLst>
+        <dgm:choose name="Name0">
+          <dgm:if name="Name1" axis="root des" ptType="all node" func="maxDepth" op="gt" val="1">
+            <dgm:alg type="tx">
+              <dgm:param type="parTxLTRAlign" val="l"/>
+              <dgm:param type="parTxRTLAlign" val="r"/>
+              <dgm:param type="txAnchorVertCh" val="mid"/>
+            </dgm:alg>
+          </dgm:if>
+          <dgm:else name="Name2">
+            <dgm:alg type="tx"/>
+          </dgm:else>
+        </dgm:choose>
+        <dgm:shape xmlns:r="http://schemas.openxmlformats.org/officeDocument/2006/relationships" type="roundRect" r:blip="">
+          <dgm:adjLst>
+            <dgm:adj idx="1" val="0.1"/>
+          </dgm:adjLst>
+        </dgm:shape>
+        <dgm:presOf axis="desOrSelf" ptType="node"/>
+        <dgm:constrLst>
+          <dgm:constr type="w" refType="h" fact="1.8"/>
+          <dgm:constr type="tMarg" refType="primFontSz" fact="0.3"/>
+          <dgm:constr type="bMarg" refType="primFontSz" fact="0.3"/>
+          <dgm:constr type="lMarg" refType="primFontSz" fact="0.3"/>
+          <dgm:constr type="rMarg" refType="primFontSz" fact="0.3"/>
+        </dgm:constrLst>
+        <dgm:ruleLst>
+          <dgm:rule type="primFontSz" val="18" fact="NaN" max="NaN"/>
+          <dgm:rule type="w" val="NaN" fact="4" max="NaN"/>
+          <dgm:rule type="primFontSz" val="5" fact="NaN" max="NaN"/>
+        </dgm:ruleLst>
+      </dgm:layoutNode>
+      <dgm:forEach name="sibTransForEach" axis="followSib" ptType="sibTrans" cnt="1">
+        <dgm:layoutNode name="sibTrans">
+          <dgm:alg type="conn">
+            <dgm:param type="begPts" val="auto"/>
+            <dgm:param type="endPts" val="auto"/>
+          </dgm:alg>
+          <dgm:shape xmlns:r="http://schemas.openxmlformats.org/officeDocument/2006/relationships" type="conn" r:blip="">
+            <dgm:adjLst/>
+          </dgm:shape>
+          <dgm:presOf axis="self"/>
+          <dgm:constrLst>
+            <dgm:constr type="w" refType="h" fact="0.9"/>
+            <dgm:constr type="connDist"/>
+            <dgm:constr type="wArH" refType="w" fact="0.5"/>
+            <dgm:constr type="hArH" refType="w"/>
+            <dgm:constr type="stemThick" refType="w" fact="0.6"/>
+            <dgm:constr type="begPad" refType="connDist" fact="0.125"/>
+            <dgm:constr type="endPad" refType="connDist" fact="0.125"/>
+          </dgm:constrLst>
+          <dgm:ruleLst/>
+          <dgm:layoutNode name="connectorText">
+            <dgm:alg type="tx">
+              <dgm:param type="autoTxRot" val="upr"/>
+            </dgm:alg>
+            <dgm:shape xmlns:r="http://schemas.openxmlformats.org/officeDocument/2006/relationships" type="conn" r:blip="" hideGeom="1">
+              <dgm:adjLst/>
+            </dgm:shape>
+            <dgm:presOf axis="self"/>
+            <dgm:constrLst>
+              <dgm:constr type="lMarg"/>
+              <dgm:constr type="rMarg"/>
+              <dgm:constr type="tMarg"/>
+              <dgm:constr type="bMarg"/>
+            </dgm:constrLst>
+            <dgm:ruleLst>
+              <dgm:rule type="primFontSz" val="5" fact="NaN" max="NaN"/>
+            </dgm:ruleLst>
+          </dgm:layoutNode>
+        </dgm:layoutNode>
+      </dgm:forEach>
+    </dgm:forEach>
+  </dgm:layoutNode>
+</dgm:layoutDef>
+</file>
+
+<file path=ppt/diagrams/layout2.xml><?xml version="1.0" encoding="utf-8"?>
+<dgm:layoutDef xmlns:dgm="http://schemas.openxmlformats.org/drawingml/2006/diagram" xmlns:a="http://schemas.openxmlformats.org/drawingml/2006/main" uniqueId="urn:microsoft.com/office/officeart/2005/8/layout/process2">
+  <dgm:title val=""/>
+  <dgm:desc val=""/>
+  <dgm:catLst>
+    <dgm:cat type="process" pri="13000"/>
+  </dgm:catLst>
+  <dgm:sampData useDef="1">
+    <dgm:dataModel>
+      <dgm:ptLst/>
+      <dgm:bg/>
+      <dgm:whole/>
+    </dgm:dataModel>
+  </dgm:sampData>
+  <dgm:styleData>
+    <dgm:dataModel>
+      <dgm:ptLst>
+        <dgm:pt modelId="0" type="doc"/>
+        <dgm:pt modelId="1"/>
+        <dgm:pt modelId="2"/>
+      </dgm:ptLst>
+      <dgm:cxnLst>
+        <dgm:cxn modelId="3" srcId="0" destId="1" srcOrd="0" destOrd="0"/>
+        <dgm:cxn modelId="4" srcId="0" destId="2" srcOrd="1" destOrd="0"/>
+      </dgm:cxnLst>
+      <dgm:bg/>
+      <dgm:whole/>
+    </dgm:dataModel>
+  </dgm:styleData>
+  <dgm:clrData>
+    <dgm:dataModel>
+      <dgm:ptLst>
+        <dgm:pt modelId="0" type="doc"/>
+        <dgm:pt modelId="1"/>
+        <dgm:pt modelId="2"/>
+        <dgm:pt modelId="3"/>
+        <dgm:pt modelId="4"/>
+      </dgm:ptLst>
+      <dgm:cxnLst>
+        <dgm:cxn modelId="5" srcId="0" destId="1" srcOrd="0" destOrd="0"/>
+        <dgm:cxn modelId="6" srcId="0" destId="2" srcOrd="1" destOrd="0"/>
+        <dgm:cxn modelId="7" srcId="0" destId="3" srcOrd="2" destOrd="0"/>
+        <dgm:cxn modelId="8" srcId="0" destId="4" srcOrd="3" destOrd="0"/>
+      </dgm:cxnLst>
+      <dgm:bg/>
+      <dgm:whole/>
+    </dgm:dataModel>
+  </dgm:clrData>
+  <dgm:layoutNode name="linearFlow">
+    <dgm:varLst>
+      <dgm:resizeHandles val="exact"/>
+    </dgm:varLst>
+    <dgm:alg type="lin">
+      <dgm:param type="linDir" val="fromT"/>
+    </dgm:alg>
+    <dgm:shape xmlns:r="http://schemas.openxmlformats.org/officeDocument/2006/relationships" r:blip="">
+      <dgm:adjLst/>
+    </dgm:shape>
+    <dgm:presOf/>
+    <dgm:constrLst>
+      <dgm:constr type="h" for="ch" ptType="node" refType="h"/>
+      <dgm:constr type="h" for="ch" ptType="sibTrans" refType="h" refFor="ch" refPtType="node" fact="0.5"/>
+      <dgm:constr type="w" for="ch" ptType="node" op="equ"/>
+      <dgm:constr type="primFontSz" for="ch" ptType="node" op="equ" val="65"/>
+      <dgm:constr type="primFontSz" for="des" forName="connectorText" op="equ" val="55"/>
+      <dgm:constr type="primFontSz" for="des" forName="connectorText" refType="primFontSz" refFor="ch" refPtType="node" op="lte" fact="0.8"/>
+    </dgm:constrLst>
+    <dgm:ruleLst/>
+    <dgm:forEach name="nodesForEach" axis="ch" ptType="node">
+      <dgm:layoutNode name="node">
+        <dgm:varLst>
+          <dgm:bulletEnabled val="1"/>
+        </dgm:varLst>
+        <dgm:choose name="Name0">
+          <dgm:if name="Name1" axis="root des" ptType="all node" func="maxDepth" op="gt" val="1">
+            <dgm:alg type="tx">
+              <dgm:param type="parTxLTRAlign" val="l"/>
+              <dgm:param type="parTxRTLAlign" val="r"/>
+              <dgm:param type="txAnchorVertCh" val="mid"/>
+            </dgm:alg>
+          </dgm:if>
+          <dgm:else name="Name2">
+            <dgm:alg type="tx"/>
+          </dgm:else>
+        </dgm:choose>
+        <dgm:shape xmlns:r="http://schemas.openxmlformats.org/officeDocument/2006/relationships" type="roundRect" r:blip="">
+          <dgm:adjLst>
+            <dgm:adj idx="1" val="0.1"/>
+          </dgm:adjLst>
+        </dgm:shape>
+        <dgm:presOf axis="desOrSelf" ptType="node"/>
+        <dgm:constrLst>
+          <dgm:constr type="w" refType="h" fact="1.8"/>
+          <dgm:constr type="tMarg" refType="primFontSz" fact="0.3"/>
+          <dgm:constr type="bMarg" refType="primFontSz" fact="0.3"/>
+          <dgm:constr type="lMarg" refType="primFontSz" fact="0.3"/>
+          <dgm:constr type="rMarg" refType="primFontSz" fact="0.3"/>
+        </dgm:constrLst>
+        <dgm:ruleLst>
+          <dgm:rule type="primFontSz" val="18" fact="NaN" max="NaN"/>
+          <dgm:rule type="w" val="NaN" fact="4" max="NaN"/>
+          <dgm:rule type="primFontSz" val="5" fact="NaN" max="NaN"/>
+        </dgm:ruleLst>
+      </dgm:layoutNode>
+      <dgm:forEach name="sibTransForEach" axis="followSib" ptType="sibTrans" cnt="1">
+        <dgm:layoutNode name="sibTrans">
+          <dgm:alg type="conn">
+            <dgm:param type="begPts" val="auto"/>
+            <dgm:param type="endPts" val="auto"/>
+          </dgm:alg>
+          <dgm:shape xmlns:r="http://schemas.openxmlformats.org/officeDocument/2006/relationships" type="conn" r:blip="">
+            <dgm:adjLst/>
+          </dgm:shape>
+          <dgm:presOf axis="self"/>
+          <dgm:constrLst>
+            <dgm:constr type="w" refType="h" fact="0.9"/>
+            <dgm:constr type="connDist"/>
+            <dgm:constr type="wArH" refType="w" fact="0.5"/>
+            <dgm:constr type="hArH" refType="w"/>
+            <dgm:constr type="stemThick" refType="w" fact="0.6"/>
+            <dgm:constr type="begPad" refType="connDist" fact="0.125"/>
+            <dgm:constr type="endPad" refType="connDist" fact="0.125"/>
+          </dgm:constrLst>
+          <dgm:ruleLst/>
+          <dgm:layoutNode name="connectorText">
+            <dgm:alg type="tx">
+              <dgm:param type="autoTxRot" val="upr"/>
+            </dgm:alg>
+            <dgm:shape xmlns:r="http://schemas.openxmlformats.org/officeDocument/2006/relationships" type="conn" r:blip="" hideGeom="1">
+              <dgm:adjLst/>
+            </dgm:shape>
+            <dgm:presOf axis="self"/>
+            <dgm:constrLst>
+              <dgm:constr type="lMarg"/>
+              <dgm:constr type="rMarg"/>
+              <dgm:constr type="tMarg"/>
+              <dgm:constr type="bMarg"/>
+            </dgm:constrLst>
+            <dgm:ruleLst>
+              <dgm:rule type="primFontSz" val="5" fact="NaN" max="NaN"/>
+            </dgm:ruleLst>
+          </dgm:layoutNode>
+        </dgm:layoutNode>
+      </dgm:forEach>
+    </dgm:forEach>
+  </dgm:layoutNode>
+</dgm:layoutDef>
+</file>
+
+<file path=ppt/diagrams/quickStyle1.xml><?xml version="1.0" encoding="utf-8"?>
+<dgm:styleDef xmlns:dgm="http://schemas.openxmlformats.org/drawingml/2006/diagram" xmlns:a="http://schemas.openxmlformats.org/drawingml/2006/main" uniqueId="urn:microsoft.com/office/officeart/2005/8/quickstyle/simple1">
+  <dgm:title val=""/>
+  <dgm:desc val=""/>
+  <dgm:catLst>
+    <dgm:cat type="simple" pri="10100"/>
+  </dgm:catLst>
+  <dgm:scene3d>
+    <a:camera prst="orthographicFront"/>
+    <a:lightRig rig="threePt" dir="t"/>
+  </dgm:scene3d>
+  <dgm:styleLbl name="node0">
+    <dgm:scene3d>
+      <a:camera prst="orthographicFront"/>
+      <a:lightRig rig="threePt" dir="t"/>
+    </dgm:scene3d>
+    <dgm:sp3d/>
+    <dgm:txPr/>
+    <dgm:style>
+      <a:lnRef idx="2">
+        <a:scrgbClr r="0" g="0" b="0"/>
+      </a:lnRef>
+      <a:fillRef idx="1">
+        <a:scrgbClr r="0" g="0" b="0"/>
+      </a:fillRef>
+      <a:effectRef idx="0">
+        <a:scrgbClr r="0" g="0" b="0"/>
+      </a:effectRef>
+      <a:fontRef idx="minor">
+        <a:schemeClr val="lt1"/>
+      </a:fontRef>
+    </dgm:style>
+  </dgm:styleLbl>
+  <dgm:styleLbl name="lnNode1">
+    <dgm:scene3d>
+      <a:camera prst="orthographicFront"/>
+      <a:lightRig rig="threePt" dir="t"/>
+    </dgm:scene3d>
+    <dgm:sp3d/>
+    <dgm:txPr/>
+    <dgm:style>
+      <a:lnRef idx="2">
+        <a:scrgbClr r="0" g="0" b="0"/>
+      </a:lnRef>
+      <a:fillRef idx="1">
+        <a:scrgbClr r="0" g="0" b="0"/>
+      </a:fillRef>
+      <a:effectRef idx="0">
+        <a:scrgbClr r="0" g="0" b="0"/>
+      </a:effectRef>
+      <a:fontRef idx="minor">
+        <a:schemeClr val="lt1"/>
+      </a:fontRef>
+    </dgm:style>
+  </dgm:styleLbl>
+  <dgm:styleLbl name="vennNode1">
+    <dgm:scene3d>
+      <a:camera prst="orthographicFront"/>
+      <a:lightRig rig="threePt" dir="t"/>
+    </dgm:scene3d>
+    <dgm:sp3d/>
+    <dgm:txPr/>
+    <dgm:style>
+      <a:lnRef idx="2">
+        <a:scrgbClr r="0" g="0" b="0"/>
+      </a:lnRef>
+      <a:fillRef idx="1">
+        <a:scrgbClr r="0" g="0" b="0"/>
+      </a:fillRef>
+      <a:effectRef idx="0">
+        <a:scrgbClr r="0" g="0" b="0"/>
+      </a:effectRef>
+      <a:fontRef idx="minor">
+        <a:schemeClr val="tx1"/>
+      </a:fontRef>
+    </dgm:style>
+  </dgm:styleLbl>
+  <dgm:styleLbl name="alignNode1">
+    <dgm:scene3d>
+      <a:camera prst="orthographicFront"/>
+      <a:lightRig rig="threePt" dir="t"/>
+    </dgm:scene3d>
+    <dgm:sp3d/>
+    <dgm:txPr/>
+    <dgm:style>
+      <a:lnRef idx="2">
+        <a:scrgbClr r="0" g="0" b="0"/>
+      </a:lnRef>
+      <a:fillRef idx="1">
+        <a:scrgbClr r="0" g="0" b="0"/>
+      </a:fillRef>
+      <a:effectRef idx="0">
+        <a:scrgbClr r="0" g="0" b="0"/>
+      </a:effectRef>
+      <a:fontRef idx="minor">
+        <a:schemeClr val="lt1"/>
+      </a:fontRef>
+    </dgm:style>
+  </dgm:styleLbl>
+  <dgm:styleLbl name="node1">
+    <dgm:scene3d>
+      <a:camera prst="orthographicFront"/>
+      <a:lightRig rig="threePt" dir="t"/>
+    </dgm:scene3d>
+    <dgm:sp3d/>
+    <dgm:txPr/>
+    <dgm:style>
+      <a:lnRef idx="2">
+        <a:scrgbClr r="0" g="0" b="0"/>
+      </a:lnRef>
+      <a:fillRef idx="1">
+        <a:scrgbClr r="0" g="0" b="0"/>
+      </a:fillRef>
+      <a:effectRef idx="0">
+        <a:scrgbClr r="0" g="0" b="0"/>
+      </a:effectRef>
+      <a:fontRef idx="minor">
+        <a:schemeClr val="lt1"/>
+      </a:fontRef>
+    </dgm:style>
+  </dgm:styleLbl>
+  <dgm:styleLbl name="node2">
+    <dgm:scene3d>
+      <a:camera prst="orthographicFront"/>
+      <a:lightRig rig="threePt" dir="t"/>
+    </dgm:scene3d>
+    <dgm:sp3d/>
+    <dgm:txPr/>
+    <dgm:style>
+      <a:lnRef idx="2">
+        <a:scrgbClr r="0" g="0" b="0"/>
+      </a:lnRef>
+      <a:fillRef idx="1">
+        <a:scrgbClr r="0" g="0" b="0"/>
+      </a:fillRef>
+      <a:effectRef idx="0">
+        <a:scrgbClr r="0" g="0" b="0"/>
+      </a:effectRef>
+      <a:fontRef idx="minor">
+        <a:schemeClr val="lt1"/>
+      </a:fontRef>
+    </dgm:style>
+  </dgm:styleLbl>
+  <dgm:styleLbl name="node3">
+    <dgm:scene3d>
+      <a:camera prst="orthographicFront"/>
+      <a:lightRig rig="threePt" dir="t"/>
+    </dgm:scene3d>
+    <dgm:sp3d/>
+    <dgm:txPr/>
+    <dgm:style>
+      <a:lnRef idx="2">
+        <a:scrgbClr r="0" g="0" b="0"/>
+      </a:lnRef>
+      <a:fillRef idx="1">
+        <a:scrgbClr r="0" g="0" b="0"/>
+      </a:fillRef>
+      <a:effectRef idx="0">
+        <a:scrgbClr r="0" g="0" b="0"/>
+      </a:effectRef>
+      <a:fontRef idx="minor">
+        <a:schemeClr val="lt1"/>
+      </a:fontRef>
+    </dgm:style>
+  </dgm:styleLbl>
+  <dgm:styleLbl name="node4">
+    <dgm:scene3d>
+      <a:camera prst="orthographicFront"/>
+      <a:lightRig rig="threePt" dir="t"/>
+    </dgm:scene3d>
+    <dgm:sp3d/>
+    <dgm:txPr/>
+    <dgm:style>
+      <a:lnRef idx="2">
+        <a:scrgbClr r="0" g="0" b="0"/>
+      </a:lnRef>
+      <a:fillRef idx="1">
+        <a:scrgbClr r="0" g="0" b="0"/>
+      </a:fillRef>
+      <a:effectRef idx="0">
+        <a:scrgbClr r="0" g="0" b="0"/>
+      </a:effectRef>
+      <a:fontRef idx="minor">
+        <a:schemeClr val="lt1"/>
+      </a:fontRef>
+    </dgm:style>
+  </dgm:styleLbl>
+  <dgm:styleLbl name="fgImgPlace1">
+    <dgm:scene3d>
+      <a:camera prst="orthographicFront"/>
+      <a:lightRig rig="threePt" dir="t"/>
+    </dgm:scene3d>
+    <dgm:sp3d/>
+    <dgm:txPr/>
+    <dgm:style>
+      <a:lnRef idx="2">
+        <a:scrgbClr r="0" g="0" b="0"/>
+      </a:lnRef>
+      <a:fillRef idx="1">
+        <a:scrgbClr r="0" g="0" b="0"/>
+      </a:fillRef>
+      <a:effectRef idx="0">
+        <a:scrgbClr r="0" g="0" b="0"/>
+      </a:effectRef>
+      <a:fontRef idx="minor"/>
+    </dgm:style>
+  </dgm:styleLbl>
+  <dgm:styleLbl name="alignImgPlace1">
+    <dgm:scene3d>
+      <a:camera prst="orthographicFront"/>
+      <a:lightRig rig="threePt" dir="t"/>
+    </dgm:scene3d>
+    <dgm:sp3d/>
+    <dgm:txPr/>
+    <dgm:style>
+      <a:lnRef idx="2">
+        <a:scrgbClr r="0" g="0" b="0"/>
+      </a:lnRef>
+      <a:fillRef idx="1">
+        <a:scrgbClr r="0" g="0" b="0"/>
+      </a:fillRef>
+      <a:effectRef idx="0">
+        <a:scrgbClr r="0" g="0" b="0"/>
+      </a:effectRef>
+      <a:fontRef idx="minor"/>
+    </dgm:style>
+  </dgm:styleLbl>
+  <dgm:styleLbl name="bgImgPlace1">
+    <dgm:scene3d>
+      <a:camera prst="orthographicFront"/>
+      <a:lightRig rig="threePt" dir="t"/>
+    </dgm:scene3d>
+    <dgm:sp3d/>
+    <dgm:txPr/>
+    <dgm:style>
+      <a:lnRef idx="2">
+        <a:scrgbClr r="0" g="0" b="0"/>
+      </a:lnRef>
+      <a:fillRef idx="1">
+        <a:scrgbClr r="0" g="0" b="0"/>
+      </a:fillRef>
+      <a:effectRef idx="0">
+        <a:scrgbClr r="0" g="0" b="0"/>
+      </a:effectRef>
+      <a:fontRef idx="minor"/>
+    </dgm:style>
+  </dgm:styleLbl>
+  <dgm:styleLbl name="sibTrans2D1">
+    <dgm:scene3d>
+      <a:camera prst="orthographicFront"/>
+      <a:lightRig rig="threePt" dir="t"/>
+    </dgm:scene3d>
+    <dgm:sp3d/>
+    <dgm:txPr/>
+    <dgm:style>
+      <a:lnRef idx="0">
+        <a:scrgbClr r="0" g="0" b="0"/>
+      </a:lnRef>
+      <a:fillRef idx="1">
+        <a:scrgbClr r="0" g="0" b="0"/>
+      </a:fillRef>
+      <a:effectRef idx="0">
+        <a:scrgbClr r="0" g="0" b="0"/>
+      </a:effectRef>
+      <a:fontRef idx="minor">
+        <a:schemeClr val="lt1"/>
+      </a:fontRef>
+    </dgm:style>
+  </dgm:styleLbl>
+  <dgm:styleLbl name="fgSibTrans2D1">
+    <dgm:scene3d>
+      <a:camera prst="orthographicFront"/>
+      <a:lightRig rig="threePt" dir="t"/>
+    </dgm:scene3d>
+    <dgm:sp3d/>
+    <dgm:txPr/>
+    <dgm:style>
+      <a:lnRef idx="0">
+        <a:scrgbClr r="0" g="0" b="0"/>
+      </a:lnRef>
+      <a:fillRef idx="1">
+        <a:scrgbClr r="0" g="0" b="0"/>
+      </a:fillRef>
+      <a:effectRef idx="0">
+        <a:scrgbClr r="0" g="0" b="0"/>
+      </a:effectRef>
+      <a:fontRef idx="minor">
+        <a:schemeClr val="lt1"/>
+      </a:fontRef>
+    </dgm:style>
+  </dgm:styleLbl>
+  <dgm:styleLbl name="bgSibTrans2D1">
+    <dgm:scene3d>
+      <a:camera prst="orthographicFront"/>
+      <a:lightRig rig="threePt" dir="t"/>
+    </dgm:scene3d>
+    <dgm:sp3d/>
+    <dgm:txPr/>
+    <dgm:style>
+      <a:lnRef idx="0">
+        <a:scrgbClr r="0" g="0" b="0"/>
+      </a:lnRef>
+      <a:fillRef idx="1">
+        <a:scrgbClr r="0" g="0" b="0"/>
+      </a:fillRef>
+      <a:effectRef idx="0">
+        <a:scrgbClr r="0" g="0" b="0"/>
+      </a:effectRef>
+      <a:fontRef idx="minor">
+        <a:schemeClr val="lt1"/>
+      </a:fontRef>
+    </dgm:style>
+  </dgm:styleLbl>
+  <dgm:styleLbl name="sibTrans1D1">
+    <dgm:scene3d>
+      <a:camera prst="orthographicFront"/>
+      <a:lightRig rig="threePt" dir="t"/>
+    </dgm:scene3d>
+    <dgm:sp3d/>
+    <dgm:txPr/>
+    <dgm:style>
+      <a:lnRef idx="1">
+        <a:scrgbClr r="0" g="0" b="0"/>
+      </a:lnRef>
+      <a:fillRef idx="0">
+        <a:scrgbClr r="0" g="0" b="0"/>
+      </a:fillRef>
+      <a:effectRef idx="0">
+        <a:scrgbClr r="0" g="0" b="0"/>
+      </a:effectRef>
+      <a:fontRef idx="minor"/>
+    </dgm:style>
+  </dgm:styleLbl>
+  <dgm:styleLbl name="callout">
+    <dgm:scene3d>
+      <a:camera prst="orthographicFront"/>
+      <a:lightRig rig="threePt" dir="t"/>
+    </dgm:scene3d>
+    <dgm:sp3d/>
+    <dgm:txPr/>
+    <dgm:style>
+      <a:lnRef idx="2">
+        <a:scrgbClr r="0" g="0" b="0"/>
+      </a:lnRef>
+      <a:fillRef idx="1">
+        <a:scrgbClr r="0" g="0" b="0"/>
+      </a:fillRef>
+      <a:effectRef idx="0">
+        <a:scrgbClr r="0" g="0" b="0"/>
+      </a:effectRef>
+      <a:fontRef idx="minor"/>
+    </dgm:style>
+  </dgm:styleLbl>
+  <dgm:styleLbl name="asst0">
+    <dgm:scene3d>
+      <a:camera prst="orthographicFront"/>
+      <a:lightRig rig="threePt" dir="t"/>
+    </dgm:scene3d>
+    <dgm:sp3d/>
+    <dgm:txPr/>
+    <dgm:style>
+      <a:lnRef idx="2">
+        <a:scrgbClr r="0" g="0" b="0"/>
+      </a:lnRef>
+      <a:fillRef idx="1">
+        <a:scrgbClr r="0" g="0" b="0"/>
+      </a:fillRef>
+      <a:effectRef idx="0">
+        <a:scrgbClr r="0" g="0" b="0"/>
+      </a:effectRef>
+      <a:fontRef idx="minor">
+        <a:schemeClr val="lt1"/>
+      </a:fontRef>
+    </dgm:style>
+  </dgm:styleLbl>
+  <dgm:styleLbl name="asst1">
+    <dgm:scene3d>
+      <a:camera prst="orthographicFront"/>
+      <a:lightRig rig="threePt" dir="t"/>
+    </dgm:scene3d>
+    <dgm:sp3d/>
+    <dgm:txPr/>
+    <dgm:style>
+      <a:lnRef idx="2">
+        <a:scrgbClr r="0" g="0" b="0"/>
+      </a:lnRef>
+      <a:fillRef idx="1">
+        <a:scrgbClr r="0" g="0" b="0"/>
+      </a:fillRef>
+      <a:effectRef idx="0">
+        <a:scrgbClr r="0" g="0" b="0"/>
+      </a:effectRef>
+      <a:fontRef idx="minor">
+        <a:schemeClr val="lt1"/>
+      </a:fontRef>
+    </dgm:style>
+  </dgm:styleLbl>
+  <dgm:styleLbl name="asst2">
+    <dgm:scene3d>
+      <a:camera prst="orthographicFront"/>
+      <a:lightRig rig="threePt" dir="t"/>
+    </dgm:scene3d>
+    <dgm:sp3d/>
+    <dgm:txPr/>
+    <dgm:style>
+      <a:lnRef idx="2">
+        <a:scrgbClr r="0" g="0" b="0"/>
+      </a:lnRef>
+      <a:fillRef idx="1">
+        <a:scrgbClr r="0" g="0" b="0"/>
+      </a:fillRef>
+      <a:effectRef idx="0">
+        <a:scrgbClr r="0" g="0" b="0"/>
+      </a:effectRef>
+      <a:fontRef idx="minor">
+        <a:schemeClr val="lt1"/>
+      </a:fontRef>
+    </dgm:style>
+  </dgm:styleLbl>
+  <dgm:styleLbl name="asst3">
+    <dgm:scene3d>
+      <a:camera prst="orthographicFront"/>
+      <a:lightRig rig="threePt" dir="t"/>
+    </dgm:scene3d>
+    <dgm:sp3d/>
+    <dgm:txPr/>
+    <dgm:style>
+      <a:lnRef idx="2">
+        <a:scrgbClr r="0" g="0" b="0"/>
+      </a:lnRef>
+      <a:fillRef idx="1">
+        <a:scrgbClr r="0" g="0" b="0"/>
+      </a:fillRef>
+      <a:effectRef idx="0">
+        <a:scrgbClr r="0" g="0" b="0"/>
+      </a:effectRef>
+      <a:fontRef idx="minor">
+        <a:schemeClr val="lt1"/>
+      </a:fontRef>
+    </dgm:style>
+  </dgm:styleLbl>
+  <dgm:styleLbl name="asst4">
+    <dgm:scene3d>
+      <a:camera prst="orthographicFront"/>
+      <a:lightRig rig="threePt" dir="t"/>
+    </dgm:scene3d>
+    <dgm:sp3d/>
+    <dgm:txPr/>
+    <dgm:style>
+      <a:lnRef idx="2">
+        <a:scrgbClr r="0" g="0" b="0"/>
+      </a:lnRef>
+      <a:fillRef idx="1">
+        <a:scrgbClr r="0" g="0" b="0"/>
+      </a:fillRef>
+      <a:effectRef idx="0">
+        <a:scrgbClr r="0" g="0" b="0"/>
+      </a:effectRef>
+      <a:fontRef idx="minor">
+        <a:schemeClr val="lt1"/>
+      </a:fontRef>
+    </dgm:style>
+  </dgm:styleLbl>
+  <dgm:styleLbl name="parChTrans2D1">
+    <dgm:scene3d>
+      <a:camera prst="orthographicFront"/>
+      <a:lightRig rig="threePt" dir="t"/>
+    </dgm:scene3d>
+    <dgm:sp3d/>
+    <dgm:txPr/>
+    <dgm:style>
+      <a:lnRef idx="2">
+        <a:scrgbClr r="0" g="0" b="0"/>
+      </a:lnRef>
+      <a:fillRef idx="1">
+        <a:scrgbClr r="0" g="0" b="0"/>
+      </a:fillRef>
+      <a:effectRef idx="0">
+        <a:scrgbClr r="0" g="0" b="0"/>
+      </a:effectRef>
+      <a:fontRef idx="minor">
+        <a:schemeClr val="lt1"/>
+      </a:fontRef>
+    </dgm:style>
+  </dgm:styleLbl>
+  <dgm:styleLbl name="parChTrans2D2">
+    <dgm:scene3d>
+      <a:camera prst="orthographicFront"/>
+      <a:lightRig rig="threePt" dir="t"/>
+    </dgm:scene3d>
+    <dgm:sp3d/>
+    <dgm:txPr/>
+    <dgm:style>
+      <a:lnRef idx="2">
+        <a:scrgbClr r="0" g="0" b="0"/>
+      </a:lnRef>
+      <a:fillRef idx="1">
+        <a:scrgbClr r="0" g="0" b="0"/>
+      </a:fillRef>
+      <a:effectRef idx="0">
+        <a:scrgbClr r="0" g="0" b="0"/>
+      </a:effectRef>
+      <a:fontRef idx="minor">
+        <a:schemeClr val="lt1"/>
+      </a:fontRef>
+    </dgm:style>
+  </dgm:styleLbl>
+  <dgm:styleLbl name="parChTrans2D3">
+    <dgm:scene3d>
+      <a:camera prst="orthographicFront"/>
+      <a:lightRig rig="threePt" dir="t"/>
+    </dgm:scene3d>
+    <dgm:sp3d/>
+    <dgm:txPr/>
+    <dgm:style>
+      <a:lnRef idx="2">
+        <a:scrgbClr r="0" g="0" b="0"/>
+      </a:lnRef>
+      <a:fillRef idx="1">
+        <a:scrgbClr r="0" g="0" b="0"/>
+      </a:fillRef>
+      <a:effectRef idx="0">
+        <a:scrgbClr r="0" g="0" b="0"/>
+      </a:effectRef>
+      <a:fontRef idx="minor">
+        <a:schemeClr val="lt1"/>
+      </a:fontRef>
+    </dgm:style>
+  </dgm:styleLbl>
+  <dgm:styleLbl name="parChTrans2D4">
+    <dgm:scene3d>
+      <a:camera prst="orthographicFront"/>
+      <a:lightRig rig="threePt" dir="t"/>
+    </dgm:scene3d>
+    <dgm:sp3d/>
+    <dgm:txPr/>
+    <dgm:style>
+      <a:lnRef idx="2">
+        <a:scrgbClr r="0" g="0" b="0"/>
+      </a:lnRef>
+      <a:fillRef idx="1">
+        <a:scrgbClr r="0" g="0" b="0"/>
+      </a:fillRef>
+      <a:effectRef idx="0">
+        <a:scrgbClr r="0" g="0" b="0"/>
+      </a:effectRef>
+      <a:fontRef idx="minor">
+        <a:schemeClr val="lt1"/>
+      </a:fontRef>
+    </dgm:style>
+  </dgm:styleLbl>
+  <dgm:styleLbl name="parChTrans1D1">
+    <dgm:scene3d>
+      <a:camera prst="orthographicFront"/>
+      <a:lightRig rig="threePt" dir="t"/>
+    </dgm:scene3d>
+    <dgm:sp3d/>
+    <dgm:txPr/>
+    <dgm:style>
+      <a:lnRef idx="2">
+        <a:scrgbClr r="0" g="0" b="0"/>
+      </a:lnRef>
+      <a:fillRef idx="0">
+        <a:scrgbClr r="0" g="0" b="0"/>
+      </a:fillRef>
+      <a:effectRef idx="0">
+        <a:scrgbClr r="0" g="0" b="0"/>
+      </a:effectRef>
+      <a:fontRef idx="minor"/>
+    </dgm:style>
+  </dgm:styleLbl>
+  <dgm:styleLbl name="parChTrans1D2">
+    <dgm:scene3d>
+      <a:camera prst="orthographicFront"/>
+      <a:lightRig rig="threePt" dir="t"/>
+    </dgm:scene3d>
+    <dgm:sp3d/>
+    <dgm:txPr/>
+    <dgm:style>
+      <a:lnRef idx="2">
+        <a:scrgbClr r="0" g="0" b="0"/>
+      </a:lnRef>
+      <a:fillRef idx="0">
+        <a:scrgbClr r="0" g="0" b="0"/>
+      </a:fillRef>
+      <a:effectRef idx="0">
+        <a:scrgbClr r="0" g="0" b="0"/>
+      </a:effectRef>
+      <a:fontRef idx="minor"/>
+    </dgm:style>
+  </dgm:styleLbl>
+  <dgm:styleLbl name="parChTrans1D3">
+    <dgm:scene3d>
+      <a:camera prst="orthographicFront"/>
+      <a:lightRig rig="threePt" dir="t"/>
+    </dgm:scene3d>
+    <dgm:sp3d/>
+    <dgm:txPr/>
+    <dgm:style>
+      <a:lnRef idx="2">
+        <a:scrgbClr r="0" g="0" b="0"/>
+      </a:lnRef>
+      <a:fillRef idx="0">
+        <a:scrgbClr r="0" g="0" b="0"/>
+      </a:fillRef>
+      <a:effectRef idx="0">
+        <a:scrgbClr r="0" g="0" b="0"/>
+      </a:effectRef>
+      <a:fontRef idx="minor"/>
+    </dgm:style>
+  </dgm:styleLbl>
+  <dgm:styleLbl name="parChTrans1D4">
+    <dgm:scene3d>
+      <a:camera prst="orthographicFront"/>
+      <a:lightRig rig="threePt" dir="t"/>
+    </dgm:scene3d>
+    <dgm:sp3d/>
+    <dgm:txPr/>
+    <dgm:style>
+      <a:lnRef idx="2">
+        <a:scrgbClr r="0" g="0" b="0"/>
+      </a:lnRef>
+      <a:fillRef idx="0">
+        <a:scrgbClr r="0" g="0" b="0"/>
+      </a:fillRef>
+      <a:effectRef idx="0">
+        <a:scrgbClr r="0" g="0" b="0"/>
+      </a:effectRef>
+      <a:fontRef idx="minor"/>
+    </dgm:style>
+  </dgm:styleLbl>
+  <dgm:styleLbl name="fgAcc1">
+    <dgm:scene3d>
+      <a:camera prst="orthographicFront"/>
+      <a:lightRig rig="threePt" dir="t"/>
+    </dgm:scene3d>
+    <dgm:sp3d/>
+    <dgm:txPr/>
+    <dgm:style>
+      <a:lnRef idx="2">
+        <a:scrgbClr r="0" g="0" b="0"/>
+      </a:lnRef>
+      <a:fillRef idx="1">
+        <a:scrgbClr r="0" g="0" b="0"/>
+      </a:fillRef>
+      <a:effectRef idx="0">
+        <a:scrgbClr r="0" g="0" b="0"/>
+      </a:effectRef>
+      <a:fontRef idx="minor"/>
+    </dgm:style>
+  </dgm:styleLbl>
+  <dgm:styleLbl name="conFgAcc1">
+    <dgm:scene3d>
+      <a:camera prst="orthographicFront"/>
+      <a:lightRig rig="threePt" dir="t"/>
+    </dgm:scene3d>
+    <dgm:sp3d/>
+    <dgm:txPr/>
+    <dgm:style>
+      <a:lnRef idx="2">
+        <a:scrgbClr r="0" g="0" b="0"/>
+      </a:lnRef>
+      <a:fillRef idx="1">
+        <a:scrgbClr r="0" g="0" b="0"/>
+      </a:fillRef>
+      <a:effectRef idx="0">
+        <a:scrgbClr r="0" g="0" b="0"/>
+      </a:effectRef>
+      <a:fontRef idx="minor"/>
+    </dgm:style>
+  </dgm:styleLbl>
+  <dgm:styleLbl name="alignAcc1">
+    <dgm:scene3d>
+      <a:camera prst="orthographicFront"/>
+      <a:lightRig rig="threePt" dir="t"/>
+    </dgm:scene3d>
+    <dgm:sp3d/>
+    <dgm:txPr/>
+    <dgm:style>
+      <a:lnRef idx="2">
+        <a:scrgbClr r="0" g="0" b="0"/>
+      </a:lnRef>
+      <a:fillRef idx="1">
+        <a:scrgbClr r="0" g="0" b="0"/>
+      </a:fillRef>
+      <a:effectRef idx="0">
+        <a:scrgbClr r="0" g="0" b="0"/>
+      </a:effectRef>
+      <a:fontRef idx="minor"/>
+    </dgm:style>
+  </dgm:styleLbl>
+  <dgm:styleLbl name="trAlignAcc1">
+    <dgm:scene3d>
+      <a:camera prst="orthographicFront"/>
+      <a:lightRig rig="threePt" dir="t"/>
+    </dgm:scene3d>
+    <dgm:sp3d/>
+    <dgm:txPr/>
+    <dgm:style>
+      <a:lnRef idx="1">
+        <a:scrgbClr r="0" g="0" b="0"/>
+      </a:lnRef>
+      <a:fillRef idx="1">
+        <a:scrgbClr r="0" g="0" b="0"/>
+      </a:fillRef>
+      <a:effectRef idx="0">
+        <a:scrgbClr r="0" g="0" b="0"/>
+      </a:effectRef>
+      <a:fontRef idx="minor"/>
+    </dgm:style>
+  </dgm:styleLbl>
+  <dgm:styleLbl name="bgAcc1">
+    <dgm:scene3d>
+      <a:camera prst="orthographicFront"/>
+      <a:lightRig rig="threePt" dir="t"/>
+    </dgm:scene3d>
+    <dgm:sp3d/>
+    <dgm:txPr/>
+    <dgm:style>
+      <a:lnRef idx="2">
+        <a:scrgbClr r="0" g="0" b="0"/>
+      </a:lnRef>
+      <a:fillRef idx="1">
+        <a:scrgbClr r="0" g="0" b="0"/>
+      </a:fillRef>
+      <a:effectRef idx="0">
+        <a:scrgbClr r="0" g="0" b="0"/>
+      </a:effectRef>
+      <a:fontRef idx="minor"/>
+    </dgm:style>
+  </dgm:styleLbl>
+  <dgm:styleLbl name="solidFgAcc1">
+    <dgm:scene3d>
+      <a:camera prst="orthographicFront"/>
+      <a:lightRig rig="threePt" dir="t"/>
+    </dgm:scene3d>
+    <dgm:sp3d/>
+    <dgm:txPr/>
+    <dgm:style>
+      <a:lnRef idx="2">
+        <a:scrgbClr r="0" g="0" b="0"/>
+      </a:lnRef>
+      <a:fillRef idx="1">
+        <a:scrgbClr r="0" g="0" b="0"/>
+      </a:fillRef>
+      <a:effectRef idx="0">
+        <a:scrgbClr r="0" g="0" b="0"/>
+      </a:effectRef>
+      <a:fontRef idx="minor"/>
+    </dgm:style>
+  </dgm:styleLbl>
+  <dgm:styleLbl name="solidAlignAcc1">
+    <dgm:scene3d>
+      <a:camera prst="orthographicFront"/>
+      <a:lightRig rig="threePt" dir="t"/>
+    </dgm:scene3d>
+    <dgm:sp3d/>
+    <dgm:txPr/>
+    <dgm:style>
+      <a:lnRef idx="2">
+        <a:scrgbClr r="0" g="0" b="0"/>
+      </a:lnRef>
+      <a:fillRef idx="1">
+        <a:scrgbClr r="0" g="0" b="0"/>
+      </a:fillRef>
+      <a:effectRef idx="0">
+        <a:scrgbClr r="0" g="0" b="0"/>
+      </a:effectRef>
+      <a:fontRef idx="minor"/>
+    </dgm:style>
+  </dgm:styleLbl>
+  <dgm:styleLbl name="solidBgAcc1">
+    <dgm:scene3d>
+      <a:camera prst="orthographicFront"/>
+      <a:lightRig rig="threePt" dir="t"/>
+    </dgm:scene3d>
+    <dgm:sp3d/>
+    <dgm:txPr/>
+    <dgm:style>
+      <a:lnRef idx="2">
+        <a:scrgbClr r="0" g="0" b="0"/>
+      </a:lnRef>
+      <a:fillRef idx="1">
+        <a:scrgbClr r="0" g="0" b="0"/>
+      </a:fillRef>
+      <a:effectRef idx="0">
+        <a:scrgbClr r="0" g="0" b="0"/>
+      </a:effectRef>
+      <a:fontRef idx="minor"/>
+    </dgm:style>
+  </dgm:styleLbl>
+  <dgm:styleLbl name="fgAccFollowNode1">
+    <dgm:scene3d>
+      <a:camera prst="orthographicFront"/>
+      <a:lightRig rig="threePt" dir="t"/>
+    </dgm:scene3d>
+    <dgm:sp3d/>
+    <dgm:txPr/>
+    <dgm:style>
+      <a:lnRef idx="2">
+        <a:scrgbClr r="0" g="0" b="0"/>
+      </a:lnRef>
+      <a:fillRef idx="1">
+        <a:scrgbClr r="0" g="0" b="0"/>
+      </a:fillRef>
+      <a:effectRef idx="0">
+        <a:scrgbClr r="0" g="0" b="0"/>
+      </a:effectRef>
+      <a:fontRef idx="minor"/>
+    </dgm:style>
+  </dgm:styleLbl>
+  <dgm:styleLbl name="alignAccFollowNode1">
+    <dgm:scene3d>
+      <a:camera prst="orthographicFront"/>
+      <a:lightRig rig="threePt" dir="t"/>
+    </dgm:scene3d>
+    <dgm:sp3d/>
+    <dgm:txPr/>
+    <dgm:style>
+      <a:lnRef idx="2">
+        <a:scrgbClr r="0" g="0" b="0"/>
+      </a:lnRef>
+      <a:fillRef idx="1">
+        <a:scrgbClr r="0" g="0" b="0"/>
+      </a:fillRef>
+      <a:effectRef idx="0">
+        <a:scrgbClr r="0" g="0" b="0"/>
+      </a:effectRef>
+      <a:fontRef idx="minor"/>
+    </dgm:style>
+  </dgm:styleLbl>
+  <dgm:styleLbl name="bgAccFollowNode1">
+    <dgm:scene3d>
+      <a:camera prst="orthographicFront"/>
+      <a:lightRig rig="threePt" dir="t"/>
+    </dgm:scene3d>
+    <dgm:sp3d/>
+    <dgm:txPr/>
+    <dgm:style>
+      <a:lnRef idx="2">
+        <a:scrgbClr r="0" g="0" b="0"/>
+      </a:lnRef>
+      <a:fillRef idx="1">
+        <a:scrgbClr r="0" g="0" b="0"/>
+      </a:fillRef>
+      <a:effectRef idx="0">
+        <a:scrgbClr r="0" g="0" b="0"/>
+      </a:effectRef>
+      <a:fontRef idx="minor"/>
+    </dgm:style>
+  </dgm:styleLbl>
+  <dgm:styleLbl name="fgAcc0">
+    <dgm:scene3d>
+      <a:camera prst="orthographicFront"/>
+      <a:lightRig rig="threePt" dir="t"/>
+    </dgm:scene3d>
+    <dgm:sp3d/>
+    <dgm:txPr/>
+    <dgm:style>
+      <a:lnRef idx="2">
+        <a:scrgbClr r="0" g="0" b="0"/>
+      </a:lnRef>
+      <a:fillRef idx="1">
+        <a:scrgbClr r="0" g="0" b="0"/>
+      </a:fillRef>
+      <a:effectRef idx="0">
+        <a:scrgbClr r="0" g="0" b="0"/>
+      </a:effectRef>
+      <a:fontRef idx="minor"/>
+    </dgm:style>
+  </dgm:styleLbl>
+  <dgm:styleLbl name="fgAcc2">
+    <dgm:scene3d>
+      <a:camera prst="orthographicFront"/>
+      <a:lightRig rig="threePt" dir="t"/>
+    </dgm:scene3d>
+    <dgm:sp3d/>
+    <dgm:txPr/>
+    <dgm:style>
+      <a:lnRef idx="2">
+        <a:scrgbClr r="0" g="0" b="0"/>
+      </a:lnRef>
+      <a:fillRef idx="1">
+        <a:scrgbClr r="0" g="0" b="0"/>
+      </a:fillRef>
+      <a:effectRef idx="0">
+        <a:scrgbClr r="0" g="0" b="0"/>
+      </a:effectRef>
+      <a:fontRef idx="minor"/>
+    </dgm:style>
+  </dgm:styleLbl>
+  <dgm:styleLbl name="fgAcc3">
+    <dgm:scene3d>
+      <a:camera prst="orthographicFront"/>
+      <a:lightRig rig="threePt" dir="t"/>
+    </dgm:scene3d>
+    <dgm:sp3d/>
+    <dgm:txPr/>
+    <dgm:style>
+      <a:lnRef idx="2">
+        <a:scrgbClr r="0" g="0" b="0"/>
+      </a:lnRef>
+      <a:fillRef idx="1">
+        <a:scrgbClr r="0" g="0" b="0"/>
+      </a:fillRef>
+      <a:effectRef idx="0">
+        <a:scrgbClr r="0" g="0" b="0"/>
+      </a:effectRef>
+      <a:fontRef idx="minor"/>
+    </dgm:style>
+  </dgm:styleLbl>
+  <dgm:styleLbl name="fgAcc4">
+    <dgm:scene3d>
+      <a:camera prst="orthographicFront"/>
+      <a:lightRig rig="threePt" dir="t"/>
+    </dgm:scene3d>
+    <dgm:sp3d/>
+    <dgm:txPr/>
+    <dgm:style>
+      <a:lnRef idx="2">
+        <a:scrgbClr r="0" g="0" b="0"/>
+      </a:lnRef>
+      <a:fillRef idx="1">
+        <a:scrgbClr r="0" g="0" b="0"/>
+      </a:fillRef>
+      <a:effectRef idx="0">
+        <a:scrgbClr r="0" g="0" b="0"/>
+      </a:effectRef>
+      <a:fontRef idx="minor"/>
+    </dgm:style>
+  </dgm:styleLbl>
+  <dgm:styleLbl name="bgShp">
+    <dgm:scene3d>
+      <a:camera prst="orthographicFront"/>
+      <a:lightRig rig="threePt" dir="t"/>
+    </dgm:scene3d>
+    <dgm:sp3d/>
+    <dgm:txPr/>
+    <dgm:style>
+      <a:lnRef idx="0">
+        <a:scrgbClr r="0" g="0" b="0"/>
+      </a:lnRef>
+      <a:fillRef idx="1">
+        <a:scrgbClr r="0" g="0" b="0"/>
+      </a:fillRef>
+      <a:effectRef idx="0">
+        <a:scrgbClr r="0" g="0" b="0"/>
+      </a:effectRef>
+      <a:fontRef idx="minor"/>
+    </dgm:style>
+  </dgm:styleLbl>
+  <dgm:styleLbl name="dkBgShp">
+    <dgm:scene3d>
+      <a:camera prst="orthographicFront"/>
+      <a:lightRig rig="threePt" dir="t"/>
+    </dgm:scene3d>
+    <dgm:sp3d/>
+    <dgm:txPr/>
+    <dgm:style>
+      <a:lnRef idx="0">
+        <a:scrgbClr r="0" g="0" b="0"/>
+      </a:lnRef>
+      <a:fillRef idx="1">
+        <a:scrgbClr r="0" g="0" b="0"/>
+      </a:fillRef>
+      <a:effectRef idx="0">
+        <a:scrgbClr r="0" g="0" b="0"/>
+      </a:effectRef>
+      <a:fontRef idx="minor"/>
+    </dgm:style>
+  </dgm:styleLbl>
+  <dgm:styleLbl name="trBgShp">
+    <dgm:scene3d>
+      <a:camera prst="orthographicFront"/>
+      <a:lightRig rig="threePt" dir="t"/>
+    </dgm:scene3d>
+    <dgm:sp3d/>
+    <dgm:txPr/>
+    <dgm:style>
+      <a:lnRef idx="0">
+        <a:scrgbClr r="0" g="0" b="0"/>
+      </a:lnRef>
+      <a:fillRef idx="1">
+        <a:scrgbClr r="0" g="0" b="0"/>
+      </a:fillRef>
+      <a:effectRef idx="0">
+        <a:scrgbClr r="0" g="0" b="0"/>
+      </a:effectRef>
+      <a:fontRef idx="minor"/>
+    </dgm:style>
+  </dgm:styleLbl>
+  <dgm:styleLbl name="fgShp">
+    <dgm:scene3d>
+      <a:camera prst="orthographicFront"/>
+      <a:lightRig rig="threePt" dir="t"/>
+    </dgm:scene3d>
+    <dgm:sp3d/>
+    <dgm:txPr/>
+    <dgm:style>
+      <a:lnRef idx="2">
+        <a:scrgbClr r="0" g="0" b="0"/>
+      </a:lnRef>
+      <a:fillRef idx="1">
+        <a:scrgbClr r="0" g="0" b="0"/>
+      </a:fillRef>
+      <a:effectRef idx="0">
+        <a:scrgbClr r="0" g="0" b="0"/>
+      </a:effectRef>
+      <a:fontRef idx="minor"/>
+    </dgm:style>
+  </dgm:styleLbl>
+  <dgm:styleLbl name="revTx">
+    <dgm:scene3d>
+      <a:camera prst="orthographicFront"/>
+      <a:lightRig rig="threePt" dir="t"/>
+    </dgm:scene3d>
+    <dgm:sp3d/>
+    <dgm:txPr/>
+    <dgm:style>
+      <a:lnRef idx="0">
+        <a:scrgbClr r="0" g="0" b="0"/>
+      </a:lnRef>
+      <a:fillRef idx="0">
+        <a:scrgbClr r="0" g="0" b="0"/>
+      </a:fillRef>
+      <a:effectRef idx="0">
+        <a:scrgbClr r="0" g="0" b="0"/>
+      </a:effectRef>
+      <a:fontRef idx="minor"/>
+    </dgm:style>
+  </dgm:styleLbl>
+</dgm:styleDef>
+</file>
+
+<file path=ppt/diagrams/quickStyle2.xml><?xml version="1.0" encoding="utf-8"?>
+<dgm:styleDef xmlns:dgm="http://schemas.openxmlformats.org/drawingml/2006/diagram" xmlns:a="http://schemas.openxmlformats.org/drawingml/2006/main" uniqueId="urn:microsoft.com/office/officeart/2005/8/quickstyle/simple1">
+  <dgm:title val=""/>
+  <dgm:desc val=""/>
+  <dgm:catLst>
+    <dgm:cat type="simple" pri="10100"/>
+  </dgm:catLst>
+  <dgm:scene3d>
+    <a:camera prst="orthographicFront"/>
+    <a:lightRig rig="threePt" dir="t"/>
+  </dgm:scene3d>
+  <dgm:styleLbl name="node0">
+    <dgm:scene3d>
+      <a:camera prst="orthographicFront"/>
+      <a:lightRig rig="threePt" dir="t"/>
+    </dgm:scene3d>
+    <dgm:sp3d/>
+    <dgm:txPr/>
+    <dgm:style>
+      <a:lnRef idx="2">
+        <a:scrgbClr r="0" g="0" b="0"/>
+      </a:lnRef>
+      <a:fillRef idx="1">
+        <a:scrgbClr r="0" g="0" b="0"/>
+      </a:fillRef>
+      <a:effectRef idx="0">
+        <a:scrgbClr r="0" g="0" b="0"/>
+      </a:effectRef>
+      <a:fontRef idx="minor">
+        <a:schemeClr val="lt1"/>
+      </a:fontRef>
+    </dgm:style>
+  </dgm:styleLbl>
+  <dgm:styleLbl name="lnNode1">
+    <dgm:scene3d>
+      <a:camera prst="orthographicFront"/>
+      <a:lightRig rig="threePt" dir="t"/>
+    </dgm:scene3d>
+    <dgm:sp3d/>
+    <dgm:txPr/>
+    <dgm:style>
+      <a:lnRef idx="2">
+        <a:scrgbClr r="0" g="0" b="0"/>
+      </a:lnRef>
+      <a:fillRef idx="1">
+        <a:scrgbClr r="0" g="0" b="0"/>
+      </a:fillRef>
+      <a:effectRef idx="0">
+        <a:scrgbClr r="0" g="0" b="0"/>
+      </a:effectRef>
+      <a:fontRef idx="minor">
+        <a:schemeClr val="lt1"/>
+      </a:fontRef>
+    </dgm:style>
+  </dgm:styleLbl>
+  <dgm:styleLbl name="vennNode1">
+    <dgm:scene3d>
+      <a:camera prst="orthographicFront"/>
+      <a:lightRig rig="threePt" dir="t"/>
+    </dgm:scene3d>
+    <dgm:sp3d/>
+    <dgm:txPr/>
+    <dgm:style>
+      <a:lnRef idx="2">
+        <a:scrgbClr r="0" g="0" b="0"/>
+      </a:lnRef>
+      <a:fillRef idx="1">
+        <a:scrgbClr r="0" g="0" b="0"/>
+      </a:fillRef>
+      <a:effectRef idx="0">
+        <a:scrgbClr r="0" g="0" b="0"/>
+      </a:effectRef>
+      <a:fontRef idx="minor">
+        <a:schemeClr val="tx1"/>
+      </a:fontRef>
+    </dgm:style>
+  </dgm:styleLbl>
+  <dgm:styleLbl name="alignNode1">
+    <dgm:scene3d>
+      <a:camera prst="orthographicFront"/>
+      <a:lightRig rig="threePt" dir="t"/>
+    </dgm:scene3d>
+    <dgm:sp3d/>
+    <dgm:txPr/>
+    <dgm:style>
+      <a:lnRef idx="2">
+        <a:scrgbClr r="0" g="0" b="0"/>
+      </a:lnRef>
+      <a:fillRef idx="1">
+        <a:scrgbClr r="0" g="0" b="0"/>
+      </a:fillRef>
+      <a:effectRef idx="0">
+        <a:scrgbClr r="0" g="0" b="0"/>
+      </a:effectRef>
+      <a:fontRef idx="minor">
+        <a:schemeClr val="lt1"/>
+      </a:fontRef>
+    </dgm:style>
+  </dgm:styleLbl>
+  <dgm:styleLbl name="node1">
+    <dgm:scene3d>
+      <a:camera prst="orthographicFront"/>
+      <a:lightRig rig="threePt" dir="t"/>
+    </dgm:scene3d>
+    <dgm:sp3d/>
+    <dgm:txPr/>
+    <dgm:style>
+      <a:lnRef idx="2">
+        <a:scrgbClr r="0" g="0" b="0"/>
+      </a:lnRef>
+      <a:fillRef idx="1">
+        <a:scrgbClr r="0" g="0" b="0"/>
+      </a:fillRef>
+      <a:effectRef idx="0">
+        <a:scrgbClr r="0" g="0" b="0"/>
+      </a:effectRef>
+      <a:fontRef idx="minor">
+        <a:schemeClr val="lt1"/>
+      </a:fontRef>
+    </dgm:style>
+  </dgm:styleLbl>
+  <dgm:styleLbl name="node2">
+    <dgm:scene3d>
+      <a:camera prst="orthographicFront"/>
+      <a:lightRig rig="threePt" dir="t"/>
+    </dgm:scene3d>
+    <dgm:sp3d/>
+    <dgm:txPr/>
+    <dgm:style>
+      <a:lnRef idx="2">
+        <a:scrgbClr r="0" g="0" b="0"/>
+      </a:lnRef>
+      <a:fillRef idx="1">
+        <a:scrgbClr r="0" g="0" b="0"/>
+      </a:fillRef>
+      <a:effectRef idx="0">
+        <a:scrgbClr r="0" g="0" b="0"/>
+      </a:effectRef>
+      <a:fontRef idx="minor">
+        <a:schemeClr val="lt1"/>
+      </a:fontRef>
+    </dgm:style>
+  </dgm:styleLbl>
+  <dgm:styleLbl name="node3">
+    <dgm:scene3d>
+      <a:camera prst="orthographicFront"/>
+      <a:lightRig rig="threePt" dir="t"/>
+    </dgm:scene3d>
+    <dgm:sp3d/>
+    <dgm:txPr/>
+    <dgm:style>
+      <a:lnRef idx="2">
+        <a:scrgbClr r="0" g="0" b="0"/>
+      </a:lnRef>
+      <a:fillRef idx="1">
+        <a:scrgbClr r="0" g="0" b="0"/>
+      </a:fillRef>
+      <a:effectRef idx="0">
+        <a:scrgbClr r="0" g="0" b="0"/>
+      </a:effectRef>
+      <a:fontRef idx="minor">
+        <a:schemeClr val="lt1"/>
+      </a:fontRef>
+    </dgm:style>
+  </dgm:styleLbl>
+  <dgm:styleLbl name="node4">
+    <dgm:scene3d>
+      <a:camera prst="orthographicFront"/>
+      <a:lightRig rig="threePt" dir="t"/>
+    </dgm:scene3d>
+    <dgm:sp3d/>
+    <dgm:txPr/>
+    <dgm:style>
+      <a:lnRef idx="2">
+        <a:scrgbClr r="0" g="0" b="0"/>
+      </a:lnRef>
+      <a:fillRef idx="1">
+        <a:scrgbClr r="0" g="0" b="0"/>
+      </a:fillRef>
+      <a:effectRef idx="0">
+        <a:scrgbClr r="0" g="0" b="0"/>
+      </a:effectRef>
+      <a:fontRef idx="minor">
+        <a:schemeClr val="lt1"/>
+      </a:fontRef>
+    </dgm:style>
+  </dgm:styleLbl>
+  <dgm:styleLbl name="fgImgPlace1">
+    <dgm:scene3d>
+      <a:camera prst="orthographicFront"/>
+      <a:lightRig rig="threePt" dir="t"/>
+    </dgm:scene3d>
+    <dgm:sp3d/>
+    <dgm:txPr/>
+    <dgm:style>
+      <a:lnRef idx="2">
+        <a:scrgbClr r="0" g="0" b="0"/>
+      </a:lnRef>
+      <a:fillRef idx="1">
+        <a:scrgbClr r="0" g="0" b="0"/>
+      </a:fillRef>
+      <a:effectRef idx="0">
+        <a:scrgbClr r="0" g="0" b="0"/>
+      </a:effectRef>
+      <a:fontRef idx="minor"/>
+    </dgm:style>
+  </dgm:styleLbl>
+  <dgm:styleLbl name="alignImgPlace1">
+    <dgm:scene3d>
+      <a:camera prst="orthographicFront"/>
+      <a:lightRig rig="threePt" dir="t"/>
+    </dgm:scene3d>
+    <dgm:sp3d/>
+    <dgm:txPr/>
+    <dgm:style>
+      <a:lnRef idx="2">
+        <a:scrgbClr r="0" g="0" b="0"/>
+      </a:lnRef>
+      <a:fillRef idx="1">
+        <a:scrgbClr r="0" g="0" b="0"/>
+      </a:fillRef>
+      <a:effectRef idx="0">
+        <a:scrgbClr r="0" g="0" b="0"/>
+      </a:effectRef>
+      <a:fontRef idx="minor"/>
+    </dgm:style>
+  </dgm:styleLbl>
+  <dgm:styleLbl name="bgImgPlace1">
+    <dgm:scene3d>
+      <a:camera prst="orthographicFront"/>
+      <a:lightRig rig="threePt" dir="t"/>
+    </dgm:scene3d>
+    <dgm:sp3d/>
+    <dgm:txPr/>
+    <dgm:style>
+      <a:lnRef idx="2">
+        <a:scrgbClr r="0" g="0" b="0"/>
+      </a:lnRef>
+      <a:fillRef idx="1">
+        <a:scrgbClr r="0" g="0" b="0"/>
+      </a:fillRef>
+      <a:effectRef idx="0">
+        <a:scrgbClr r="0" g="0" b="0"/>
+      </a:effectRef>
+      <a:fontRef idx="minor"/>
+    </dgm:style>
+  </dgm:styleLbl>
+  <dgm:styleLbl name="sibTrans2D1">
+    <dgm:scene3d>
+      <a:camera prst="orthographicFront"/>
+      <a:lightRig rig="threePt" dir="t"/>
+    </dgm:scene3d>
+    <dgm:sp3d/>
+    <dgm:txPr/>
+    <dgm:style>
+      <a:lnRef idx="0">
+        <a:scrgbClr r="0" g="0" b="0"/>
+      </a:lnRef>
+      <a:fillRef idx="1">
+        <a:scrgbClr r="0" g="0" b="0"/>
+      </a:fillRef>
+      <a:effectRef idx="0">
+        <a:scrgbClr r="0" g="0" b="0"/>
+      </a:effectRef>
+      <a:fontRef idx="minor">
+        <a:schemeClr val="lt1"/>
+      </a:fontRef>
+    </dgm:style>
+  </dgm:styleLbl>
+  <dgm:styleLbl name="fgSibTrans2D1">
+    <dgm:scene3d>
+      <a:camera prst="orthographicFront"/>
+      <a:lightRig rig="threePt" dir="t"/>
+    </dgm:scene3d>
+    <dgm:sp3d/>
+    <dgm:txPr/>
+    <dgm:style>
+      <a:lnRef idx="0">
+        <a:scrgbClr r="0" g="0" b="0"/>
+      </a:lnRef>
+      <a:fillRef idx="1">
+        <a:scrgbClr r="0" g="0" b="0"/>
+      </a:fillRef>
+      <a:effectRef idx="0">
+        <a:scrgbClr r="0" g="0" b="0"/>
+      </a:effectRef>
+      <a:fontRef idx="minor">
+        <a:schemeClr val="lt1"/>
+      </a:fontRef>
+    </dgm:style>
+  </dgm:styleLbl>
+  <dgm:styleLbl name="bgSibTrans2D1">
+    <dgm:scene3d>
+      <a:camera prst="orthographicFront"/>
+      <a:lightRig rig="threePt" dir="t"/>
+    </dgm:scene3d>
+    <dgm:sp3d/>
+    <dgm:txPr/>
+    <dgm:style>
+      <a:lnRef idx="0">
+        <a:scrgbClr r="0" g="0" b="0"/>
+      </a:lnRef>
+      <a:fillRef idx="1">
+        <a:scrgbClr r="0" g="0" b="0"/>
+      </a:fillRef>
+      <a:effectRef idx="0">
+        <a:scrgbClr r="0" g="0" b="0"/>
+      </a:effectRef>
+      <a:fontRef idx="minor">
+        <a:schemeClr val="lt1"/>
+      </a:fontRef>
+    </dgm:style>
+  </dgm:styleLbl>
+  <dgm:styleLbl name="sibTrans1D1">
+    <dgm:scene3d>
+      <a:camera prst="orthographicFront"/>
+      <a:lightRig rig="threePt" dir="t"/>
+    </dgm:scene3d>
+    <dgm:sp3d/>
+    <dgm:txPr/>
+    <dgm:style>
+      <a:lnRef idx="1">
+        <a:scrgbClr r="0" g="0" b="0"/>
+      </a:lnRef>
+      <a:fillRef idx="0">
+        <a:scrgbClr r="0" g="0" b="0"/>
+      </a:fillRef>
+      <a:effectRef idx="0">
+        <a:scrgbClr r="0" g="0" b="0"/>
+      </a:effectRef>
+      <a:fontRef idx="minor"/>
+    </dgm:style>
+  </dgm:styleLbl>
+  <dgm:styleLbl name="callout">
+    <dgm:scene3d>
+      <a:camera prst="orthographicFront"/>
+      <a:lightRig rig="threePt" dir="t"/>
+    </dgm:scene3d>
+    <dgm:sp3d/>
+    <dgm:txPr/>
+    <dgm:style>
+      <a:lnRef idx="2">
+        <a:scrgbClr r="0" g="0" b="0"/>
+      </a:lnRef>
+      <a:fillRef idx="1">
+        <a:scrgbClr r="0" g="0" b="0"/>
+      </a:fillRef>
+      <a:effectRef idx="0">
+        <a:scrgbClr r="0" g="0" b="0"/>
+      </a:effectRef>
+      <a:fontRef idx="minor"/>
+    </dgm:style>
+  </dgm:styleLbl>
+  <dgm:styleLbl name="asst0">
+    <dgm:scene3d>
+      <a:camera prst="orthographicFront"/>
+      <a:lightRig rig="threePt" dir="t"/>
+    </dgm:scene3d>
+    <dgm:sp3d/>
+    <dgm:txPr/>
+    <dgm:style>
+      <a:lnRef idx="2">
+        <a:scrgbClr r="0" g="0" b="0"/>
+      </a:lnRef>
+      <a:fillRef idx="1">
+        <a:scrgbClr r="0" g="0" b="0"/>
+      </a:fillRef>
+      <a:effectRef idx="0">
+        <a:scrgbClr r="0" g="0" b="0"/>
+      </a:effectRef>
+      <a:fontRef idx="minor">
+        <a:schemeClr val="lt1"/>
+      </a:fontRef>
+    </dgm:style>
+  </dgm:styleLbl>
+  <dgm:styleLbl name="asst1">
+    <dgm:scene3d>
+      <a:camera prst="orthographicFront"/>
+      <a:lightRig rig="threePt" dir="t"/>
+    </dgm:scene3d>
+    <dgm:sp3d/>
+    <dgm:txPr/>
+    <dgm:style>
+      <a:lnRef idx="2">
+        <a:scrgbClr r="0" g="0" b="0"/>
+      </a:lnRef>
+      <a:fillRef idx="1">
+        <a:scrgbClr r="0" g="0" b="0"/>
+      </a:fillRef>
+      <a:effectRef idx="0">
+        <a:scrgbClr r="0" g="0" b="0"/>
+      </a:effectRef>
+      <a:fontRef idx="minor">
+        <a:schemeClr val="lt1"/>
+      </a:fontRef>
+    </dgm:style>
+  </dgm:styleLbl>
+  <dgm:styleLbl name="asst2">
+    <dgm:scene3d>
+      <a:camera prst="orthographicFront"/>
+      <a:lightRig rig="threePt" dir="t"/>
+    </dgm:scene3d>
+    <dgm:sp3d/>
+    <dgm:txPr/>
+    <dgm:style>
+      <a:lnRef idx="2">
+        <a:scrgbClr r="0" g="0" b="0"/>
+      </a:lnRef>
+      <a:fillRef idx="1">
+        <a:scrgbClr r="0" g="0" b="0"/>
+      </a:fillRef>
+      <a:effectRef idx="0">
+        <a:scrgbClr r="0" g="0" b="0"/>
+      </a:effectRef>
+      <a:fontRef idx="minor">
+        <a:schemeClr val="lt1"/>
+      </a:fontRef>
+    </dgm:style>
+  </dgm:styleLbl>
+  <dgm:styleLbl name="asst3">
+    <dgm:scene3d>
+      <a:camera prst="orthographicFront"/>
+      <a:lightRig rig="threePt" dir="t"/>
+    </dgm:scene3d>
+    <dgm:sp3d/>
+    <dgm:txPr/>
+    <dgm:style>
+      <a:lnRef idx="2">
+        <a:scrgbClr r="0" g="0" b="0"/>
+      </a:lnRef>
+      <a:fillRef idx="1">
+        <a:scrgbClr r="0" g="0" b="0"/>
+      </a:fillRef>
+      <a:effectRef idx="0">
+        <a:scrgbClr r="0" g="0" b="0"/>
+      </a:effectRef>
+      <a:fontRef idx="minor">
+        <a:schemeClr val="lt1"/>
+      </a:fontRef>
+    </dgm:style>
+  </dgm:styleLbl>
+  <dgm:styleLbl name="asst4">
+    <dgm:scene3d>
+      <a:camera prst="orthographicFront"/>
+      <a:lightRig rig="threePt" dir="t"/>
+    </dgm:scene3d>
+    <dgm:sp3d/>
+    <dgm:txPr/>
+    <dgm:style>
+      <a:lnRef idx="2">
+        <a:scrgbClr r="0" g="0" b="0"/>
+      </a:lnRef>
+      <a:fillRef idx="1">
+        <a:scrgbClr r="0" g="0" b="0"/>
+      </a:fillRef>
+      <a:effectRef idx="0">
+        <a:scrgbClr r="0" g="0" b="0"/>
+      </a:effectRef>
+      <a:fontRef idx="minor">
+        <a:schemeClr val="lt1"/>
+      </a:fontRef>
+    </dgm:style>
+  </dgm:styleLbl>
+  <dgm:styleLbl name="parChTrans2D1">
+    <dgm:scene3d>
+      <a:camera prst="orthographicFront"/>
+      <a:lightRig rig="threePt" dir="t"/>
+    </dgm:scene3d>
+    <dgm:sp3d/>
+    <dgm:txPr/>
+    <dgm:style>
+      <a:lnRef idx="2">
+        <a:scrgbClr r="0" g="0" b="0"/>
+      </a:lnRef>
+      <a:fillRef idx="1">
+        <a:scrgbClr r="0" g="0" b="0"/>
+      </a:fillRef>
+      <a:effectRef idx="0">
+        <a:scrgbClr r="0" g="0" b="0"/>
+      </a:effectRef>
+      <a:fontRef idx="minor">
+        <a:schemeClr val="lt1"/>
+      </a:fontRef>
+    </dgm:style>
+  </dgm:styleLbl>
+  <dgm:styleLbl name="parChTrans2D2">
+    <dgm:scene3d>
+      <a:camera prst="orthographicFront"/>
+      <a:lightRig rig="threePt" dir="t"/>
+    </dgm:scene3d>
+    <dgm:sp3d/>
+    <dgm:txPr/>
+    <dgm:style>
+      <a:lnRef idx="2">
+        <a:scrgbClr r="0" g="0" b="0"/>
+      </a:lnRef>
+      <a:fillRef idx="1">
+        <a:scrgbClr r="0" g="0" b="0"/>
+      </a:fillRef>
+      <a:effectRef idx="0">
+        <a:scrgbClr r="0" g="0" b="0"/>
+      </a:effectRef>
+      <a:fontRef idx="minor">
+        <a:schemeClr val="lt1"/>
+      </a:fontRef>
+    </dgm:style>
+  </dgm:styleLbl>
+  <dgm:styleLbl name="parChTrans2D3">
+    <dgm:scene3d>
+      <a:camera prst="orthographicFront"/>
+      <a:lightRig rig="threePt" dir="t"/>
+    </dgm:scene3d>
+    <dgm:sp3d/>
+    <dgm:txPr/>
+    <dgm:style>
+      <a:lnRef idx="2">
+        <a:scrgbClr r="0" g="0" b="0"/>
+      </a:lnRef>
+      <a:fillRef idx="1">
+        <a:scrgbClr r="0" g="0" b="0"/>
+      </a:fillRef>
+      <a:effectRef idx="0">
+        <a:scrgbClr r="0" g="0" b="0"/>
+      </a:effectRef>
+      <a:fontRef idx="minor">
+        <a:schemeClr val="lt1"/>
+      </a:fontRef>
+    </dgm:style>
+  </dgm:styleLbl>
+  <dgm:styleLbl name="parChTrans2D4">
+    <dgm:scene3d>
+      <a:camera prst="orthographicFront"/>
+      <a:lightRig rig="threePt" dir="t"/>
+    </dgm:scene3d>
+    <dgm:sp3d/>
+    <dgm:txPr/>
+    <dgm:style>
+      <a:lnRef idx="2">
+        <a:scrgbClr r="0" g="0" b="0"/>
+      </a:lnRef>
+      <a:fillRef idx="1">
+        <a:scrgbClr r="0" g="0" b="0"/>
+      </a:fillRef>
+      <a:effectRef idx="0">
+        <a:scrgbClr r="0" g="0" b="0"/>
+      </a:effectRef>
+      <a:fontRef idx="minor">
+        <a:schemeClr val="lt1"/>
+      </a:fontRef>
+    </dgm:style>
+  </dgm:styleLbl>
+  <dgm:styleLbl name="parChTrans1D1">
+    <dgm:scene3d>
+      <a:camera prst="orthographicFront"/>
+      <a:lightRig rig="threePt" dir="t"/>
+    </dgm:scene3d>
+    <dgm:sp3d/>
+    <dgm:txPr/>
+    <dgm:style>
+      <a:lnRef idx="2">
+        <a:scrgbClr r="0" g="0" b="0"/>
+      </a:lnRef>
+      <a:fillRef idx="0">
+        <a:scrgbClr r="0" g="0" b="0"/>
+      </a:fillRef>
+      <a:effectRef idx="0">
+        <a:scrgbClr r="0" g="0" b="0"/>
+      </a:effectRef>
+      <a:fontRef idx="minor"/>
+    </dgm:style>
+  </dgm:styleLbl>
+  <dgm:styleLbl name="parChTrans1D2">
+    <dgm:scene3d>
+      <a:camera prst="orthographicFront"/>
+      <a:lightRig rig="threePt" dir="t"/>
+    </dgm:scene3d>
+    <dgm:sp3d/>
+    <dgm:txPr/>
+    <dgm:style>
+      <a:lnRef idx="2">
+        <a:scrgbClr r="0" g="0" b="0"/>
+      </a:lnRef>
+      <a:fillRef idx="0">
+        <a:scrgbClr r="0" g="0" b="0"/>
+      </a:fillRef>
+      <a:effectRef idx="0">
+        <a:scrgbClr r="0" g="0" b="0"/>
+      </a:effectRef>
+      <a:fontRef idx="minor"/>
+    </dgm:style>
+  </dgm:styleLbl>
+  <dgm:styleLbl name="parChTrans1D3">
+    <dgm:scene3d>
+      <a:camera prst="orthographicFront"/>
+      <a:lightRig rig="threePt" dir="t"/>
+    </dgm:scene3d>
+    <dgm:sp3d/>
+    <dgm:txPr/>
+    <dgm:style>
+      <a:lnRef idx="2">
+        <a:scrgbClr r="0" g="0" b="0"/>
+      </a:lnRef>
+      <a:fillRef idx="0">
+        <a:scrgbClr r="0" g="0" b="0"/>
+      </a:fillRef>
+      <a:effectRef idx="0">
+        <a:scrgbClr r="0" g="0" b="0"/>
+      </a:effectRef>
+      <a:fontRef idx="minor"/>
+    </dgm:style>
+  </dgm:styleLbl>
+  <dgm:styleLbl name="parChTrans1D4">
+    <dgm:scene3d>
+      <a:camera prst="orthographicFront"/>
+      <a:lightRig rig="threePt" dir="t"/>
+    </dgm:scene3d>
+    <dgm:sp3d/>
+    <dgm:txPr/>
+    <dgm:style>
+      <a:lnRef idx="2">
+        <a:scrgbClr r="0" g="0" b="0"/>
+      </a:lnRef>
+      <a:fillRef idx="0">
+        <a:scrgbClr r="0" g="0" b="0"/>
+      </a:fillRef>
+      <a:effectRef idx="0">
+        <a:scrgbClr r="0" g="0" b="0"/>
+      </a:effectRef>
+      <a:fontRef idx="minor"/>
+    </dgm:style>
+  </dgm:styleLbl>
+  <dgm:styleLbl name="fgAcc1">
+    <dgm:scene3d>
+      <a:camera prst="orthographicFront"/>
+      <a:lightRig rig="threePt" dir="t"/>
+    </dgm:scene3d>
+    <dgm:sp3d/>
+    <dgm:txPr/>
+    <dgm:style>
+      <a:lnRef idx="2">
+        <a:scrgbClr r="0" g="0" b="0"/>
+      </a:lnRef>
+      <a:fillRef idx="1">
+        <a:scrgbClr r="0" g="0" b="0"/>
+      </a:fillRef>
+      <a:effectRef idx="0">
+        <a:scrgbClr r="0" g="0" b="0"/>
+      </a:effectRef>
+      <a:fontRef idx="minor"/>
+    </dgm:style>
+  </dgm:styleLbl>
+  <dgm:styleLbl name="conFgAcc1">
+    <dgm:scene3d>
+      <a:camera prst="orthographicFront"/>
+      <a:lightRig rig="threePt" dir="t"/>
+    </dgm:scene3d>
+    <dgm:sp3d/>
+    <dgm:txPr/>
+    <dgm:style>
+      <a:lnRef idx="2">
+        <a:scrgbClr r="0" g="0" b="0"/>
+      </a:lnRef>
+      <a:fillRef idx="1">
+        <a:scrgbClr r="0" g="0" b="0"/>
+      </a:fillRef>
+      <a:effectRef idx="0">
+        <a:scrgbClr r="0" g="0" b="0"/>
+      </a:effectRef>
+      <a:fontRef idx="minor"/>
+    </dgm:style>
+  </dgm:styleLbl>
+  <dgm:styleLbl name="alignAcc1">
+    <dgm:scene3d>
+      <a:camera prst="orthographicFront"/>
+      <a:lightRig rig="threePt" dir="t"/>
+    </dgm:scene3d>
+    <dgm:sp3d/>
+    <dgm:txPr/>
+    <dgm:style>
+      <a:lnRef idx="2">
+        <a:scrgbClr r="0" g="0" b="0"/>
+      </a:lnRef>
+      <a:fillRef idx="1">
+        <a:scrgbClr r="0" g="0" b="0"/>
+      </a:fillRef>
+      <a:effectRef idx="0">
+        <a:scrgbClr r="0" g="0" b="0"/>
+      </a:effectRef>
+      <a:fontRef idx="minor"/>
+    </dgm:style>
+  </dgm:styleLbl>
+  <dgm:styleLbl name="trAlignAcc1">
+    <dgm:scene3d>
+      <a:camera prst="orthographicFront"/>
+      <a:lightRig rig="threePt" dir="t"/>
+    </dgm:scene3d>
+    <dgm:sp3d/>
+    <dgm:txPr/>
+    <dgm:style>
+      <a:lnRef idx="1">
+        <a:scrgbClr r="0" g="0" b="0"/>
+      </a:lnRef>
+      <a:fillRef idx="1">
+        <a:scrgbClr r="0" g="0" b="0"/>
+      </a:fillRef>
+      <a:effectRef idx="0">
+        <a:scrgbClr r="0" g="0" b="0"/>
+      </a:effectRef>
+      <a:fontRef idx="minor"/>
+    </dgm:style>
+  </dgm:styleLbl>
+  <dgm:styleLbl name="bgAcc1">
+    <dgm:scene3d>
+      <a:camera prst="orthographicFront"/>
+      <a:lightRig rig="threePt" dir="t"/>
+    </dgm:scene3d>
+    <dgm:sp3d/>
+    <dgm:txPr/>
+    <dgm:style>
+      <a:lnRef idx="2">
+        <a:scrgbClr r="0" g="0" b="0"/>
+      </a:lnRef>
+      <a:fillRef idx="1">
+        <a:scrgbClr r="0" g="0" b="0"/>
+      </a:fillRef>
+      <a:effectRef idx="0">
+        <a:scrgbClr r="0" g="0" b="0"/>
+      </a:effectRef>
+      <a:fontRef idx="minor"/>
+    </dgm:style>
+  </dgm:styleLbl>
+  <dgm:styleLbl name="solidFgAcc1">
+    <dgm:scene3d>
+      <a:camera prst="orthographicFront"/>
+      <a:lightRig rig="threePt" dir="t"/>
+    </dgm:scene3d>
+    <dgm:sp3d/>
+    <dgm:txPr/>
+    <dgm:style>
+      <a:lnRef idx="2">
+        <a:scrgbClr r="0" g="0" b="0"/>
+      </a:lnRef>
+      <a:fillRef idx="1">
+        <a:scrgbClr r="0" g="0" b="0"/>
+      </a:fillRef>
+      <a:effectRef idx="0">
+        <a:scrgbClr r="0" g="0" b="0"/>
+      </a:effectRef>
+      <a:fontRef idx="minor"/>
+    </dgm:style>
+  </dgm:styleLbl>
+  <dgm:styleLbl name="solidAlignAcc1">
+    <dgm:scene3d>
+      <a:camera prst="orthographicFront"/>
+      <a:lightRig rig="threePt" dir="t"/>
+    </dgm:scene3d>
+    <dgm:sp3d/>
+    <dgm:txPr/>
+    <dgm:style>
+      <a:lnRef idx="2">
+        <a:scrgbClr r="0" g="0" b="0"/>
+      </a:lnRef>
+      <a:fillRef idx="1">
+        <a:scrgbClr r="0" g="0" b="0"/>
+      </a:fillRef>
+      <a:effectRef idx="0">
+        <a:scrgbClr r="0" g="0" b="0"/>
+      </a:effectRef>
+      <a:fontRef idx="minor"/>
+    </dgm:style>
+  </dgm:styleLbl>
+  <dgm:styleLbl name="solidBgAcc1">
+    <dgm:scene3d>
+      <a:camera prst="orthographicFront"/>
+      <a:lightRig rig="threePt" dir="t"/>
+    </dgm:scene3d>
+    <dgm:sp3d/>
+    <dgm:txPr/>
+    <dgm:style>
+      <a:lnRef idx="2">
+        <a:scrgbClr r="0" g="0" b="0"/>
+      </a:lnRef>
+      <a:fillRef idx="1">
+        <a:scrgbClr r="0" g="0" b="0"/>
+      </a:fillRef>
+      <a:effectRef idx="0">
+        <a:scrgbClr r="0" g="0" b="0"/>
+      </a:effectRef>
+      <a:fontRef idx="minor"/>
+    </dgm:style>
+  </dgm:styleLbl>
+  <dgm:styleLbl name="fgAccFollowNode1">
+    <dgm:scene3d>
+      <a:camera prst="orthographicFront"/>
+      <a:lightRig rig="threePt" dir="t"/>
+    </dgm:scene3d>
+    <dgm:sp3d/>
+    <dgm:txPr/>
+    <dgm:style>
+      <a:lnRef idx="2">
+        <a:scrgbClr r="0" g="0" b="0"/>
+      </a:lnRef>
+      <a:fillRef idx="1">
+        <a:scrgbClr r="0" g="0" b="0"/>
+      </a:fillRef>
+      <a:effectRef idx="0">
+        <a:scrgbClr r="0" g="0" b="0"/>
+      </a:effectRef>
+      <a:fontRef idx="minor"/>
+    </dgm:style>
+  </dgm:styleLbl>
+  <dgm:styleLbl name="alignAccFollowNode1">
+    <dgm:scene3d>
+      <a:camera prst="orthographicFront"/>
+      <a:lightRig rig="threePt" dir="t"/>
+    </dgm:scene3d>
+    <dgm:sp3d/>
+    <dgm:txPr/>
+    <dgm:style>
+      <a:lnRef idx="2">
+        <a:scrgbClr r="0" g="0" b="0"/>
+      </a:lnRef>
+      <a:fillRef idx="1">
+        <a:scrgbClr r="0" g="0" b="0"/>
+      </a:fillRef>
+      <a:effectRef idx="0">
+        <a:scrgbClr r="0" g="0" b="0"/>
+      </a:effectRef>
+      <a:fontRef idx="minor"/>
+    </dgm:style>
+  </dgm:styleLbl>
+  <dgm:styleLbl name="bgAccFollowNode1">
+    <dgm:scene3d>
+      <a:camera prst="orthographicFront"/>
+      <a:lightRig rig="threePt" dir="t"/>
+    </dgm:scene3d>
+    <dgm:sp3d/>
+    <dgm:txPr/>
+    <dgm:style>
+      <a:lnRef idx="2">
+        <a:scrgbClr r="0" g="0" b="0"/>
+      </a:lnRef>
+      <a:fillRef idx="1">
+        <a:scrgbClr r="0" g="0" b="0"/>
+      </a:fillRef>
+      <a:effectRef idx="0">
+        <a:scrgbClr r="0" g="0" b="0"/>
+      </a:effectRef>
+      <a:fontRef idx="minor"/>
+    </dgm:style>
+  </dgm:styleLbl>
+  <dgm:styleLbl name="fgAcc0">
+    <dgm:scene3d>
+      <a:camera prst="orthographicFront"/>
+      <a:lightRig rig="threePt" dir="t"/>
+    </dgm:scene3d>
+    <dgm:sp3d/>
+    <dgm:txPr/>
+    <dgm:style>
+      <a:lnRef idx="2">
+        <a:scrgbClr r="0" g="0" b="0"/>
+      </a:lnRef>
+      <a:fillRef idx="1">
+        <a:scrgbClr r="0" g="0" b="0"/>
+      </a:fillRef>
+      <a:effectRef idx="0">
+        <a:scrgbClr r="0" g="0" b="0"/>
+      </a:effectRef>
+      <a:fontRef idx="minor"/>
+    </dgm:style>
+  </dgm:styleLbl>
+  <dgm:styleLbl name="fgAcc2">
+    <dgm:scene3d>
+      <a:camera prst="orthographicFront"/>
+      <a:lightRig rig="threePt" dir="t"/>
+    </dgm:scene3d>
+    <dgm:sp3d/>
+    <dgm:txPr/>
+    <dgm:style>
+      <a:lnRef idx="2">
+        <a:scrgbClr r="0" g="0" b="0"/>
+      </a:lnRef>
+      <a:fillRef idx="1">
+        <a:scrgbClr r="0" g="0" b="0"/>
+      </a:fillRef>
+      <a:effectRef idx="0">
+        <a:scrgbClr r="0" g="0" b="0"/>
+      </a:effectRef>
+      <a:fontRef idx="minor"/>
+    </dgm:style>
+  </dgm:styleLbl>
+  <dgm:styleLbl name="fgAcc3">
+    <dgm:scene3d>
+      <a:camera prst="orthographicFront"/>
+      <a:lightRig rig="threePt" dir="t"/>
+    </dgm:scene3d>
+    <dgm:sp3d/>
+    <dgm:txPr/>
+    <dgm:style>
+      <a:lnRef idx="2">
+        <a:scrgbClr r="0" g="0" b="0"/>
+      </a:lnRef>
+      <a:fillRef idx="1">
+        <a:scrgbClr r="0" g="0" b="0"/>
+      </a:fillRef>
+      <a:effectRef idx="0">
+        <a:scrgbClr r="0" g="0" b="0"/>
+      </a:effectRef>
+      <a:fontRef idx="minor"/>
+    </dgm:style>
+  </dgm:styleLbl>
+  <dgm:styleLbl name="fgAcc4">
+    <dgm:scene3d>
+      <a:camera prst="orthographicFront"/>
+      <a:lightRig rig="threePt" dir="t"/>
+    </dgm:scene3d>
+    <dgm:sp3d/>
+    <dgm:txPr/>
+    <dgm:style>
+      <a:lnRef idx="2">
+        <a:scrgbClr r="0" g="0" b="0"/>
+      </a:lnRef>
+      <a:fillRef idx="1">
+        <a:scrgbClr r="0" g="0" b="0"/>
+      </a:fillRef>
+      <a:effectRef idx="0">
+        <a:scrgbClr r="0" g="0" b="0"/>
+      </a:effectRef>
+      <a:fontRef idx="minor"/>
+    </dgm:style>
+  </dgm:styleLbl>
+  <dgm:styleLbl name="bgShp">
+    <dgm:scene3d>
+      <a:camera prst="orthographicFront"/>
+      <a:lightRig rig="threePt" dir="t"/>
+    </dgm:scene3d>
+    <dgm:sp3d/>
+    <dgm:txPr/>
+    <dgm:style>
+      <a:lnRef idx="0">
+        <a:scrgbClr r="0" g="0" b="0"/>
+      </a:lnRef>
+      <a:fillRef idx="1">
+        <a:scrgbClr r="0" g="0" b="0"/>
+      </a:fillRef>
+      <a:effectRef idx="0">
+        <a:scrgbClr r="0" g="0" b="0"/>
+      </a:effectRef>
+      <a:fontRef idx="minor"/>
+    </dgm:style>
+  </dgm:styleLbl>
+  <dgm:styleLbl name="dkBgShp">
+    <dgm:scene3d>
+      <a:camera prst="orthographicFront"/>
+      <a:lightRig rig="threePt" dir="t"/>
+    </dgm:scene3d>
+    <dgm:sp3d/>
+    <dgm:txPr/>
+    <dgm:style>
+      <a:lnRef idx="0">
+        <a:scrgbClr r="0" g="0" b="0"/>
+      </a:lnRef>
+      <a:fillRef idx="1">
+        <a:scrgbClr r="0" g="0" b="0"/>
+      </a:fillRef>
+      <a:effectRef idx="0">
+        <a:scrgbClr r="0" g="0" b="0"/>
+      </a:effectRef>
+      <a:fontRef idx="minor"/>
+    </dgm:style>
+  </dgm:styleLbl>
+  <dgm:styleLbl name="trBgShp">
+    <dgm:scene3d>
+      <a:camera prst="orthographicFront"/>
+      <a:lightRig rig="threePt" dir="t"/>
+    </dgm:scene3d>
+    <dgm:sp3d/>
+    <dgm:txPr/>
+    <dgm:style>
+      <a:lnRef idx="0">
+        <a:scrgbClr r="0" g="0" b="0"/>
+      </a:lnRef>
+      <a:fillRef idx="1">
+        <a:scrgbClr r="0" g="0" b="0"/>
+      </a:fillRef>
+      <a:effectRef idx="0">
+        <a:scrgbClr r="0" g="0" b="0"/>
+      </a:effectRef>
+      <a:fontRef idx="minor"/>
+    </dgm:style>
+  </dgm:styleLbl>
+  <dgm:styleLbl name="fgShp">
+    <dgm:scene3d>
+      <a:camera prst="orthographicFront"/>
+      <a:lightRig rig="threePt" dir="t"/>
+    </dgm:scene3d>
+    <dgm:sp3d/>
+    <dgm:txPr/>
+    <dgm:style>
+      <a:lnRef idx="2">
+        <a:scrgbClr r="0" g="0" b="0"/>
+      </a:lnRef>
+      <a:fillRef idx="1">
+        <a:scrgbClr r="0" g="0" b="0"/>
+      </a:fillRef>
+      <a:effectRef idx="0">
+        <a:scrgbClr r="0" g="0" b="0"/>
+      </a:effectRef>
+      <a:fontRef idx="minor"/>
+    </dgm:style>
+  </dgm:styleLbl>
+  <dgm:styleLbl name="revTx">
+    <dgm:scene3d>
+      <a:camera prst="orthographicFront"/>
+      <a:lightRig rig="threePt" dir="t"/>
+    </dgm:scene3d>
+    <dgm:sp3d/>
+    <dgm:txPr/>
+    <dgm:style>
+      <a:lnRef idx="0">
+        <a:scrgbClr r="0" g="0" b="0"/>
+      </a:lnRef>
+      <a:fillRef idx="0">
+        <a:scrgbClr r="0" g="0" b="0"/>
+      </a:fillRef>
+      <a:effectRef idx="0">
+        <a:scrgbClr r="0" g="0" b="0"/>
+      </a:effectRef>
+      <a:fontRef idx="minor"/>
+    </dgm:style>
+  </dgm:styleLbl>
+</dgm:styleDef>
+</file>
+
 <file path=ppt/notesMasters/notesMaster1.xml><?xml version="1.0" encoding="utf-8"?>
 <p:notesMaster xmlns:a="http://schemas.openxmlformats.org/drawingml/2006/main" xmlns:r="http://schemas.openxmlformats.org/officeDocument/2006/relationships" xmlns:p="http://schemas.openxmlformats.org/presentationml/2006/main">
   <p:cSld>
@@ -200,7 +5947,7 @@
           <a:p>
             <a:fld id="{CB883E1A-24A0-4B05-AA4C-56243B89A804}" type="datetimeFigureOut">
               <a:rPr lang="zh-CN" altLang="en-US" smtClean="0"/>
-              <a:t>2025/4/3</a:t>
+              <a:t>2025/4/7</a:t>
             </a:fld>
             <a:endParaRPr lang="zh-CN" altLang="en-US"/>
           </a:p>
@@ -638,7 +6385,7 @@
           <a:p>
             <a:fld id="{3800F3C6-200C-4F82-8057-425A24E0A80A}" type="datetimeFigureOut">
               <a:rPr lang="zh-CN" altLang="en-US" smtClean="0"/>
-              <a:t>2025/4/3</a:t>
+              <a:t>2025/4/7</a:t>
             </a:fld>
             <a:endParaRPr lang="zh-CN" altLang="en-US"/>
           </a:p>
@@ -953,7 +6700,7 @@
           <a:p>
             <a:fld id="{3800F3C6-200C-4F82-8057-425A24E0A80A}" type="datetimeFigureOut">
               <a:rPr lang="zh-CN" altLang="en-US" smtClean="0"/>
-              <a:t>2025/4/3</a:t>
+              <a:t>2025/4/7</a:t>
             </a:fld>
             <a:endParaRPr lang="zh-CN" altLang="en-US"/>
           </a:p>
@@ -1175,7 +6922,7 @@
           <a:p>
             <a:fld id="{3800F3C6-200C-4F82-8057-425A24E0A80A}" type="datetimeFigureOut">
               <a:rPr lang="zh-CN" altLang="en-US" smtClean="0"/>
-              <a:t>2025/4/3</a:t>
+              <a:t>2025/4/7</a:t>
             </a:fld>
             <a:endParaRPr lang="zh-CN" altLang="en-US"/>
           </a:p>
@@ -1466,7 +7213,7 @@
           <a:p>
             <a:fld id="{3800F3C6-200C-4F82-8057-425A24E0A80A}" type="datetimeFigureOut">
               <a:rPr lang="zh-CN" altLang="en-US" smtClean="0"/>
-              <a:t>2025/4/3</a:t>
+              <a:t>2025/4/7</a:t>
             </a:fld>
             <a:endParaRPr lang="zh-CN" altLang="en-US"/>
           </a:p>
@@ -1920,7 +7667,7 @@
           <a:p>
             <a:fld id="{3800F3C6-200C-4F82-8057-425A24E0A80A}" type="datetimeFigureOut">
               <a:rPr lang="zh-CN" altLang="en-US" smtClean="0"/>
-              <a:t>2025/4/3</a:t>
+              <a:t>2025/4/7</a:t>
             </a:fld>
             <a:endParaRPr lang="zh-CN" altLang="en-US"/>
           </a:p>
@@ -2496,7 +8243,7 @@
           <a:p>
             <a:fld id="{3800F3C6-200C-4F82-8057-425A24E0A80A}" type="datetimeFigureOut">
               <a:rPr lang="zh-CN" altLang="en-US" smtClean="0"/>
-              <a:t>2025/4/3</a:t>
+              <a:t>2025/4/7</a:t>
             </a:fld>
             <a:endParaRPr lang="zh-CN" altLang="en-US"/>
           </a:p>
@@ -3357,7 +9104,7 @@
           <a:p>
             <a:fld id="{3800F3C6-200C-4F82-8057-425A24E0A80A}" type="datetimeFigureOut">
               <a:rPr lang="zh-CN" altLang="en-US" smtClean="0"/>
-              <a:t>2025/4/3</a:t>
+              <a:t>2025/4/7</a:t>
             </a:fld>
             <a:endParaRPr lang="zh-CN" altLang="en-US"/>
           </a:p>
@@ -3562,7 +9309,7 @@
           <a:p>
             <a:fld id="{3800F3C6-200C-4F82-8057-425A24E0A80A}" type="datetimeFigureOut">
               <a:rPr lang="zh-CN" altLang="en-US" smtClean="0"/>
-              <a:t>2025/4/3</a:t>
+              <a:t>2025/4/7</a:t>
             </a:fld>
             <a:endParaRPr lang="zh-CN" altLang="en-US"/>
           </a:p>
@@ -3776,7 +9523,7 @@
           <a:p>
             <a:fld id="{3800F3C6-200C-4F82-8057-425A24E0A80A}" type="datetimeFigureOut">
               <a:rPr lang="zh-CN" altLang="en-US" smtClean="0"/>
-              <a:t>2025/4/3</a:t>
+              <a:t>2025/4/7</a:t>
             </a:fld>
             <a:endParaRPr lang="zh-CN" altLang="en-US"/>
           </a:p>
@@ -3981,7 +9728,7 @@
           <a:p>
             <a:fld id="{3800F3C6-200C-4F82-8057-425A24E0A80A}" type="datetimeFigureOut">
               <a:rPr lang="zh-CN" altLang="en-US" smtClean="0"/>
-              <a:t>2025/4/3</a:t>
+              <a:t>2025/4/7</a:t>
             </a:fld>
             <a:endParaRPr lang="zh-CN" altLang="en-US"/>
           </a:p>
@@ -4261,7 +10008,7 @@
           <a:p>
             <a:fld id="{3800F3C6-200C-4F82-8057-425A24E0A80A}" type="datetimeFigureOut">
               <a:rPr lang="zh-CN" altLang="en-US" smtClean="0"/>
-              <a:t>2025/4/3</a:t>
+              <a:t>2025/4/7</a:t>
             </a:fld>
             <a:endParaRPr lang="zh-CN" altLang="en-US"/>
           </a:p>
@@ -4528,7 +10275,7 @@
           <a:p>
             <a:fld id="{3800F3C6-200C-4F82-8057-425A24E0A80A}" type="datetimeFigureOut">
               <a:rPr lang="zh-CN" altLang="en-US" smtClean="0"/>
-              <a:t>2025/4/3</a:t>
+              <a:t>2025/4/7</a:t>
             </a:fld>
             <a:endParaRPr lang="zh-CN" altLang="en-US"/>
           </a:p>
@@ -4943,7 +10690,7 @@
           <a:p>
             <a:fld id="{3800F3C6-200C-4F82-8057-425A24E0A80A}" type="datetimeFigureOut">
               <a:rPr lang="zh-CN" altLang="en-US" smtClean="0"/>
-              <a:t>2025/4/3</a:t>
+              <a:t>2025/4/7</a:t>
             </a:fld>
             <a:endParaRPr lang="zh-CN" altLang="en-US"/>
           </a:p>
@@ -5091,7 +10838,7 @@
           <a:p>
             <a:fld id="{3800F3C6-200C-4F82-8057-425A24E0A80A}" type="datetimeFigureOut">
               <a:rPr lang="zh-CN" altLang="en-US" smtClean="0"/>
-              <a:t>2025/4/3</a:t>
+              <a:t>2025/4/7</a:t>
             </a:fld>
             <a:endParaRPr lang="zh-CN" altLang="en-US"/>
           </a:p>
@@ -5216,7 +10963,7 @@
           <a:p>
             <a:fld id="{3800F3C6-200C-4F82-8057-425A24E0A80A}" type="datetimeFigureOut">
               <a:rPr lang="zh-CN" altLang="en-US" smtClean="0"/>
-              <a:t>2025/4/3</a:t>
+              <a:t>2025/4/7</a:t>
             </a:fld>
             <a:endParaRPr lang="zh-CN" altLang="en-US"/>
           </a:p>
@@ -5495,7 +11242,7 @@
           <a:p>
             <a:fld id="{3800F3C6-200C-4F82-8057-425A24E0A80A}" type="datetimeFigureOut">
               <a:rPr lang="zh-CN" altLang="en-US" smtClean="0"/>
-              <a:t>2025/4/3</a:t>
+              <a:t>2025/4/7</a:t>
             </a:fld>
             <a:endParaRPr lang="zh-CN" altLang="en-US"/>
           </a:p>
@@ -5810,7 +11557,7 @@
           <a:p>
             <a:fld id="{3800F3C6-200C-4F82-8057-425A24E0A80A}" type="datetimeFigureOut">
               <a:rPr lang="zh-CN" altLang="en-US" smtClean="0"/>
-              <a:t>2025/4/3</a:t>
+              <a:t>2025/4/7</a:t>
             </a:fld>
             <a:endParaRPr lang="zh-CN" altLang="en-US"/>
           </a:p>
@@ -6063,7 +11810,7 @@
           <a:p>
             <a:fld id="{3800F3C6-200C-4F82-8057-425A24E0A80A}" type="datetimeFigureOut">
               <a:rPr lang="zh-CN" altLang="en-US" smtClean="0"/>
-              <a:t>2025/4/3</a:t>
+              <a:t>2025/4/7</a:t>
             </a:fld>
             <a:endParaRPr lang="zh-CN" altLang="en-US"/>
           </a:p>
@@ -9129,6 +14876,1793 @@
     <p:extLst>
       <p:ext uri="{BB962C8B-B14F-4D97-AF65-F5344CB8AC3E}">
         <p14:creationId xmlns:p14="http://schemas.microsoft.com/office/powerpoint/2010/main" val="255531923"/>
+      </p:ext>
+    </p:extLst>
+  </p:cSld>
+  <p:clrMapOvr>
+    <a:masterClrMapping/>
+  </p:clrMapOvr>
+</p:sld>
+</file>
+
+<file path=ppt/slides/slide5.xml><?xml version="1.0" encoding="utf-8"?>
+<p:sld xmlns:a="http://schemas.openxmlformats.org/drawingml/2006/main" xmlns:r="http://schemas.openxmlformats.org/officeDocument/2006/relationships" xmlns:p="http://schemas.openxmlformats.org/presentationml/2006/main">
+  <p:cSld>
+    <p:spTree>
+      <p:nvGrpSpPr>
+        <p:cNvPr id="1" name="">
+          <a:extLst>
+            <a:ext uri="{FF2B5EF4-FFF2-40B4-BE49-F238E27FC236}">
+              <a16:creationId xmlns:a16="http://schemas.microsoft.com/office/drawing/2014/main" id="{CDBAEB44-32B7-3A8E-D287-E49F6204BB8F}"/>
+            </a:ext>
+          </a:extLst>
+        </p:cNvPr>
+        <p:cNvGrpSpPr/>
+        <p:nvPr/>
+      </p:nvGrpSpPr>
+      <p:grpSpPr>
+        <a:xfrm>
+          <a:off x="0" y="0"/>
+          <a:ext cx="0" cy="0"/>
+          <a:chOff x="0" y="0"/>
+          <a:chExt cx="0" cy="0"/>
+        </a:xfrm>
+      </p:grpSpPr>
+      <p:sp>
+        <p:nvSpPr>
+          <p:cNvPr id="4" name="文本框 3">
+            <a:extLst>
+              <a:ext uri="{FF2B5EF4-FFF2-40B4-BE49-F238E27FC236}">
+                <a16:creationId xmlns:a16="http://schemas.microsoft.com/office/drawing/2014/main" id="{001D84E6-A5BF-32B1-985B-B6CFA6087F51}"/>
+              </a:ext>
+            </a:extLst>
+          </p:cNvPr>
+          <p:cNvSpPr txBox="1"/>
+          <p:nvPr/>
+        </p:nvSpPr>
+        <p:spPr>
+          <a:xfrm>
+            <a:off x="575036" y="707011"/>
+            <a:ext cx="10246936" cy="369332"/>
+          </a:xfrm>
+          <a:prstGeom prst="rect">
+            <a:avLst/>
+          </a:prstGeom>
+          <a:noFill/>
+        </p:spPr>
+        <p:txBody>
+          <a:bodyPr wrap="square" rtlCol="0">
+            <a:spAutoFit/>
+          </a:bodyPr>
+          <a:lstStyle/>
+          <a:p>
+            <a:r>
+              <a:rPr lang="ja-JP" altLang="en-US" dirty="0">
+                <a:latin typeface="Arial" panose="020B0604020202020204" pitchFamily="34" charset="0"/>
+                <a:cs typeface="Arial" panose="020B0604020202020204" pitchFamily="34" charset="0"/>
+              </a:rPr>
+              <a:t>特許版</a:t>
+            </a:r>
+            <a:r>
+              <a:rPr lang="en-US" altLang="ja-JP" dirty="0">
+                <a:latin typeface="Arial" panose="020B0604020202020204" pitchFamily="34" charset="0"/>
+                <a:cs typeface="Arial" panose="020B0604020202020204" pitchFamily="34" charset="0"/>
+              </a:rPr>
+              <a:t>BERT</a:t>
+            </a:r>
+            <a:r>
+              <a:rPr lang="ja-JP" altLang="en-US" dirty="0">
+                <a:latin typeface="Arial" panose="020B0604020202020204" pitchFamily="34" charset="0"/>
+                <a:cs typeface="Arial" panose="020B0604020202020204" pitchFamily="34" charset="0"/>
+              </a:rPr>
+              <a:t>モデルの前提確認</a:t>
+            </a:r>
+            <a:endParaRPr lang="zh-CN" altLang="en-US" dirty="0">
+              <a:latin typeface="Arial" panose="020B0604020202020204" pitchFamily="34" charset="0"/>
+              <a:cs typeface="Arial" panose="020B0604020202020204" pitchFamily="34" charset="0"/>
+            </a:endParaRPr>
+          </a:p>
+        </p:txBody>
+      </p:sp>
+      <p:cxnSp>
+        <p:nvCxnSpPr>
+          <p:cNvPr id="6" name="直接连接符 5">
+            <a:extLst>
+              <a:ext uri="{FF2B5EF4-FFF2-40B4-BE49-F238E27FC236}">
+                <a16:creationId xmlns:a16="http://schemas.microsoft.com/office/drawing/2014/main" id="{8D9E525E-53C8-6C53-76E7-0CE4CBACD513}"/>
+              </a:ext>
+            </a:extLst>
+          </p:cNvPr>
+          <p:cNvCxnSpPr>
+            <a:cxnSpLocks/>
+          </p:cNvCxnSpPr>
+          <p:nvPr/>
+        </p:nvCxnSpPr>
+        <p:spPr>
+          <a:xfrm>
+            <a:off x="480767" y="1216058"/>
+            <a:ext cx="11019934" cy="0"/>
+          </a:xfrm>
+          <a:prstGeom prst="line">
+            <a:avLst/>
+          </a:prstGeom>
+        </p:spPr>
+        <p:style>
+          <a:lnRef idx="1">
+            <a:schemeClr val="accent1"/>
+          </a:lnRef>
+          <a:fillRef idx="0">
+            <a:schemeClr val="accent1"/>
+          </a:fillRef>
+          <a:effectRef idx="0">
+            <a:schemeClr val="accent1"/>
+          </a:effectRef>
+          <a:fontRef idx="minor">
+            <a:schemeClr val="tx1"/>
+          </a:fontRef>
+        </p:style>
+      </p:cxnSp>
+      <p:sp>
+        <p:nvSpPr>
+          <p:cNvPr id="2" name="文本框 1">
+            <a:extLst>
+              <a:ext uri="{FF2B5EF4-FFF2-40B4-BE49-F238E27FC236}">
+                <a16:creationId xmlns:a16="http://schemas.microsoft.com/office/drawing/2014/main" id="{6595801A-49C9-2DD6-77DA-3B3CE8E2BE00}"/>
+              </a:ext>
+            </a:extLst>
+          </p:cNvPr>
+          <p:cNvSpPr txBox="1"/>
+          <p:nvPr/>
+        </p:nvSpPr>
+        <p:spPr>
+          <a:xfrm>
+            <a:off x="575036" y="1459348"/>
+            <a:ext cx="10595728" cy="2062103"/>
+          </a:xfrm>
+          <a:prstGeom prst="rect">
+            <a:avLst/>
+          </a:prstGeom>
+          <a:noFill/>
+        </p:spPr>
+        <p:txBody>
+          <a:bodyPr wrap="square" rtlCol="0">
+            <a:spAutoFit/>
+          </a:bodyPr>
+          <a:lstStyle/>
+          <a:p>
+            <a:r>
+              <a:rPr lang="en-US" altLang="ja-JP" sz="1600" dirty="0">
+                <a:latin typeface="Arial" panose="020B0604020202020204" pitchFamily="34" charset="0"/>
+                <a:cs typeface="Arial" panose="020B0604020202020204" pitchFamily="34" charset="0"/>
+              </a:rPr>
+              <a:t>End</a:t>
+            </a:r>
+            <a:r>
+              <a:rPr lang="ja-JP" altLang="en-US" sz="1600" dirty="0">
+                <a:latin typeface="Arial" panose="020B0604020202020204" pitchFamily="34" charset="0"/>
+                <a:cs typeface="Arial" panose="020B0604020202020204" pitchFamily="34" charset="0"/>
+              </a:rPr>
+              <a:t> </a:t>
+            </a:r>
+            <a:r>
+              <a:rPr lang="en-US" altLang="ja-JP" sz="1600" dirty="0">
+                <a:latin typeface="Arial" panose="020B0604020202020204" pitchFamily="34" charset="0"/>
+                <a:cs typeface="Arial" panose="020B0604020202020204" pitchFamily="34" charset="0"/>
+              </a:rPr>
+              <a:t>User</a:t>
+            </a:r>
+            <a:r>
+              <a:rPr lang="ja-JP" altLang="en-US" sz="1600" dirty="0">
+                <a:latin typeface="Arial" panose="020B0604020202020204" pitchFamily="34" charset="0"/>
+                <a:cs typeface="Arial" panose="020B0604020202020204" pitchFamily="34" charset="0"/>
+              </a:rPr>
+              <a:t>が言及した特許版</a:t>
+            </a:r>
+            <a:r>
+              <a:rPr lang="en-US" altLang="ja-JP" sz="1600" dirty="0">
+                <a:latin typeface="Arial" panose="020B0604020202020204" pitchFamily="34" charset="0"/>
+                <a:cs typeface="Arial" panose="020B0604020202020204" pitchFamily="34" charset="0"/>
+              </a:rPr>
+              <a:t>BERT</a:t>
+            </a:r>
+            <a:r>
+              <a:rPr lang="ja-JP" altLang="en-US" sz="1600" dirty="0">
+                <a:latin typeface="Arial" panose="020B0604020202020204" pitchFamily="34" charset="0"/>
+                <a:cs typeface="Arial" panose="020B0604020202020204" pitchFamily="34" charset="0"/>
+              </a:rPr>
+              <a:t>モデルは通常の</a:t>
+            </a:r>
+            <a:r>
+              <a:rPr lang="en-US" altLang="ja-JP" sz="1600" dirty="0">
+                <a:latin typeface="Arial" panose="020B0604020202020204" pitchFamily="34" charset="0"/>
+                <a:cs typeface="Arial" panose="020B0604020202020204" pitchFamily="34" charset="0"/>
+              </a:rPr>
+              <a:t>Google</a:t>
+            </a:r>
+            <a:r>
+              <a:rPr lang="ja-JP" altLang="en-US" sz="1600" dirty="0">
+                <a:latin typeface="Arial" panose="020B0604020202020204" pitchFamily="34" charset="0"/>
+                <a:cs typeface="Arial" panose="020B0604020202020204" pitchFamily="34" charset="0"/>
+              </a:rPr>
+              <a:t>の</a:t>
+            </a:r>
+            <a:r>
+              <a:rPr lang="en-US" altLang="ja-JP" sz="1600" dirty="0">
+                <a:latin typeface="Arial" panose="020B0604020202020204" pitchFamily="34" charset="0"/>
+                <a:cs typeface="Arial" panose="020B0604020202020204" pitchFamily="34" charset="0"/>
+              </a:rPr>
+              <a:t>Bert-For-Patents</a:t>
+            </a:r>
+            <a:r>
+              <a:rPr lang="ja-JP" altLang="en-US" sz="1600" dirty="0">
+                <a:latin typeface="Arial" panose="020B0604020202020204" pitchFamily="34" charset="0"/>
+                <a:cs typeface="Arial" panose="020B0604020202020204" pitchFamily="34" charset="0"/>
+              </a:rPr>
+              <a:t>ではないことが分かりましたが、特許版</a:t>
+            </a:r>
+            <a:r>
+              <a:rPr lang="en-US" altLang="ja-JP" sz="1600" dirty="0">
+                <a:latin typeface="Arial" panose="020B0604020202020204" pitchFamily="34" charset="0"/>
+                <a:cs typeface="Arial" panose="020B0604020202020204" pitchFamily="34" charset="0"/>
+              </a:rPr>
+              <a:t>BERT</a:t>
+            </a:r>
+            <a:r>
+              <a:rPr lang="ja-JP" altLang="en-US" sz="1600" dirty="0">
+                <a:latin typeface="Arial" panose="020B0604020202020204" pitchFamily="34" charset="0"/>
+                <a:cs typeface="Arial" panose="020B0604020202020204" pitchFamily="34" charset="0"/>
+              </a:rPr>
+              <a:t>モデルの詳細情報はまだ不明なので、以下の仮設を踏まえて特許版</a:t>
+            </a:r>
+            <a:r>
+              <a:rPr lang="en-US" altLang="ja-JP" sz="1600" dirty="0">
+                <a:latin typeface="Arial" panose="020B0604020202020204" pitchFamily="34" charset="0"/>
+                <a:cs typeface="Arial" panose="020B0604020202020204" pitchFamily="34" charset="0"/>
+              </a:rPr>
+              <a:t>BERT</a:t>
+            </a:r>
+            <a:r>
+              <a:rPr lang="ja-JP" altLang="en-US" sz="1600" dirty="0">
+                <a:latin typeface="Arial" panose="020B0604020202020204" pitchFamily="34" charset="0"/>
+                <a:cs typeface="Arial" panose="020B0604020202020204" pitchFamily="34" charset="0"/>
+              </a:rPr>
+              <a:t>モデルのデプロイについて調査します。</a:t>
+            </a:r>
+            <a:endParaRPr lang="en-US" altLang="ja-JP" sz="1600" dirty="0">
+              <a:latin typeface="Arial" panose="020B0604020202020204" pitchFamily="34" charset="0"/>
+              <a:cs typeface="Arial" panose="020B0604020202020204" pitchFamily="34" charset="0"/>
+            </a:endParaRPr>
+          </a:p>
+          <a:p>
+            <a:pPr marL="285750" indent="-285750">
+              <a:buFont typeface="Arial" panose="020B0604020202020204" pitchFamily="34" charset="0"/>
+              <a:buChar char="•"/>
+            </a:pPr>
+            <a:endParaRPr lang="en-US" altLang="ja-JP" sz="1600" dirty="0">
+              <a:latin typeface="Arial" panose="020B0604020202020204" pitchFamily="34" charset="0"/>
+              <a:cs typeface="Arial" panose="020B0604020202020204" pitchFamily="34" charset="0"/>
+            </a:endParaRPr>
+          </a:p>
+          <a:p>
+            <a:pPr marL="285750" indent="-285750">
+              <a:buFont typeface="Arial" panose="020B0604020202020204" pitchFamily="34" charset="0"/>
+              <a:buChar char="•"/>
+            </a:pPr>
+            <a:r>
+              <a:rPr lang="ja-JP" altLang="en-US" sz="1600" dirty="0">
+                <a:latin typeface="Arial" panose="020B0604020202020204" pitchFamily="34" charset="0"/>
+                <a:cs typeface="Arial" panose="020B0604020202020204" pitchFamily="34" charset="0"/>
+              </a:rPr>
+              <a:t>特許版</a:t>
+            </a:r>
+            <a:r>
+              <a:rPr lang="en-US" altLang="ja-JP" sz="1600" dirty="0">
+                <a:latin typeface="Arial" panose="020B0604020202020204" pitchFamily="34" charset="0"/>
+                <a:cs typeface="Arial" panose="020B0604020202020204" pitchFamily="34" charset="0"/>
+              </a:rPr>
+              <a:t>BERT</a:t>
+            </a:r>
+            <a:r>
+              <a:rPr lang="ja-JP" altLang="en-US" sz="1600" dirty="0">
+                <a:latin typeface="Arial" panose="020B0604020202020204" pitchFamily="34" charset="0"/>
+                <a:cs typeface="Arial" panose="020B0604020202020204" pitchFamily="34" charset="0"/>
+              </a:rPr>
+              <a:t>モデルの基本仮設：</a:t>
+            </a:r>
+            <a:endParaRPr lang="en-US" altLang="ja-JP" sz="1600" dirty="0">
+              <a:latin typeface="Arial" panose="020B0604020202020204" pitchFamily="34" charset="0"/>
+              <a:cs typeface="Arial" panose="020B0604020202020204" pitchFamily="34" charset="0"/>
+            </a:endParaRPr>
+          </a:p>
+          <a:p>
+            <a:r>
+              <a:rPr lang="en-US" altLang="ja-JP" sz="1600" dirty="0">
+                <a:latin typeface="Arial" panose="020B0604020202020204" pitchFamily="34" charset="0"/>
+                <a:cs typeface="Arial" panose="020B0604020202020204" pitchFamily="34" charset="0"/>
+              </a:rPr>
+              <a:t>	</a:t>
+            </a:r>
+            <a:r>
+              <a:rPr lang="ja-JP" altLang="en-US" sz="1600" dirty="0">
+                <a:latin typeface="Arial" panose="020B0604020202020204" pitchFamily="34" charset="0"/>
+                <a:cs typeface="Arial" panose="020B0604020202020204" pitchFamily="34" charset="0"/>
+              </a:rPr>
+              <a:t>モデルが訓練済みであり、</a:t>
+            </a:r>
+            <a:r>
+              <a:rPr lang="en-US" altLang="ja-JP" sz="1600" dirty="0">
+                <a:latin typeface="Arial" panose="020B0604020202020204" pitchFamily="34" charset="0"/>
+                <a:cs typeface="Arial" panose="020B0604020202020204" pitchFamily="34" charset="0"/>
+              </a:rPr>
+              <a:t>Docker</a:t>
+            </a:r>
+            <a:r>
+              <a:rPr lang="ja-JP" altLang="en-US" sz="1600" dirty="0">
+                <a:latin typeface="Arial" panose="020B0604020202020204" pitchFamily="34" charset="0"/>
+                <a:cs typeface="Arial" panose="020B0604020202020204" pitchFamily="34" charset="0"/>
+              </a:rPr>
+              <a:t>などのスタックでカプセル化されたパッケージである</a:t>
+            </a:r>
+            <a:endParaRPr lang="en-US" altLang="ja-JP" sz="1600" dirty="0">
+              <a:latin typeface="Arial" panose="020B0604020202020204" pitchFamily="34" charset="0"/>
+              <a:cs typeface="Arial" panose="020B0604020202020204" pitchFamily="34" charset="0"/>
+            </a:endParaRPr>
+          </a:p>
+          <a:p>
+            <a:r>
+              <a:rPr lang="en-US" altLang="ja-JP" sz="1600" dirty="0">
+                <a:latin typeface="Arial" panose="020B0604020202020204" pitchFamily="34" charset="0"/>
+                <a:cs typeface="Arial" panose="020B0604020202020204" pitchFamily="34" charset="0"/>
+              </a:rPr>
+              <a:t>	</a:t>
+            </a:r>
+            <a:r>
+              <a:rPr lang="ja-JP" altLang="en-US" sz="1600" dirty="0">
+                <a:latin typeface="Arial" panose="020B0604020202020204" pitchFamily="34" charset="0"/>
+                <a:cs typeface="Arial" panose="020B0604020202020204" pitchFamily="34" charset="0"/>
+              </a:rPr>
+              <a:t>モデルが</a:t>
+            </a:r>
+            <a:r>
+              <a:rPr lang="en-US" altLang="ja-JP" sz="1600" dirty="0">
+                <a:latin typeface="Arial" panose="020B0604020202020204" pitchFamily="34" charset="0"/>
+                <a:cs typeface="Arial" panose="020B0604020202020204" pitchFamily="34" charset="0"/>
+              </a:rPr>
+              <a:t>API</a:t>
+            </a:r>
+            <a:r>
+              <a:rPr lang="ja-JP" altLang="en-US" sz="1600" dirty="0">
+                <a:latin typeface="Arial" panose="020B0604020202020204" pitchFamily="34" charset="0"/>
+                <a:cs typeface="Arial" panose="020B0604020202020204" pitchFamily="34" charset="0"/>
+              </a:rPr>
+              <a:t>により呼び出され、</a:t>
+            </a:r>
+            <a:r>
+              <a:rPr lang="en-US" altLang="ja-JP" sz="1600" dirty="0">
+                <a:latin typeface="Arial" panose="020B0604020202020204" pitchFamily="34" charset="0"/>
+                <a:cs typeface="Arial" panose="020B0604020202020204" pitchFamily="34" charset="0"/>
+              </a:rPr>
+              <a:t>Abstract</a:t>
+            </a:r>
+            <a:r>
+              <a:rPr lang="ja-JP" altLang="en-US" sz="1600" dirty="0">
+                <a:latin typeface="Arial" panose="020B0604020202020204" pitchFamily="34" charset="0"/>
+                <a:cs typeface="Arial" panose="020B0604020202020204" pitchFamily="34" charset="0"/>
+              </a:rPr>
+              <a:t>などのテキストを渡し、予測</a:t>
+            </a:r>
+            <a:r>
+              <a:rPr lang="en-US" altLang="ja-JP" sz="1600" dirty="0">
+                <a:latin typeface="Arial" panose="020B0604020202020204" pitchFamily="34" charset="0"/>
+                <a:cs typeface="Arial" panose="020B0604020202020204" pitchFamily="34" charset="0"/>
+              </a:rPr>
+              <a:t>IPC</a:t>
+            </a:r>
+            <a:r>
+              <a:rPr lang="ja-JP" altLang="en-US" sz="1600" dirty="0">
+                <a:latin typeface="Arial" panose="020B0604020202020204" pitchFamily="34" charset="0"/>
+                <a:cs typeface="Arial" panose="020B0604020202020204" pitchFamily="34" charset="0"/>
+              </a:rPr>
+              <a:t>コードを返す</a:t>
+            </a:r>
+            <a:endParaRPr lang="en-US" altLang="ja-JP" sz="1600" dirty="0">
+              <a:latin typeface="Arial" panose="020B0604020202020204" pitchFamily="34" charset="0"/>
+              <a:cs typeface="Arial" panose="020B0604020202020204" pitchFamily="34" charset="0"/>
+            </a:endParaRPr>
+          </a:p>
+          <a:p>
+            <a:pPr marL="285750" indent="-285750">
+              <a:buFont typeface="Arial" panose="020B0604020202020204" pitchFamily="34" charset="0"/>
+              <a:buChar char="•"/>
+            </a:pPr>
+            <a:endParaRPr lang="en-US" altLang="ja-JP" sz="1600" dirty="0">
+              <a:latin typeface="Arial" panose="020B0604020202020204" pitchFamily="34" charset="0"/>
+              <a:cs typeface="Arial" panose="020B0604020202020204" pitchFamily="34" charset="0"/>
+            </a:endParaRPr>
+          </a:p>
+          <a:p>
+            <a:pPr marL="285750" indent="-285750">
+              <a:buFont typeface="Arial" panose="020B0604020202020204" pitchFamily="34" charset="0"/>
+              <a:buChar char="•"/>
+            </a:pPr>
+            <a:r>
+              <a:rPr lang="en-US" altLang="ja-JP" sz="1600" dirty="0">
+                <a:latin typeface="Arial" panose="020B0604020202020204" pitchFamily="34" charset="0"/>
+                <a:cs typeface="Arial" panose="020B0604020202020204" pitchFamily="34" charset="0"/>
+              </a:rPr>
+              <a:t>Bert-For-Patents</a:t>
+            </a:r>
+            <a:r>
+              <a:rPr lang="ja-JP" altLang="en-US" sz="1600" dirty="0">
+                <a:latin typeface="Arial" panose="020B0604020202020204" pitchFamily="34" charset="0"/>
+                <a:cs typeface="Arial" panose="020B0604020202020204" pitchFamily="34" charset="0"/>
+              </a:rPr>
+              <a:t>モデルを参考して特許版</a:t>
+            </a:r>
+            <a:r>
+              <a:rPr lang="en-US" altLang="ja-JP" sz="1600" dirty="0">
+                <a:latin typeface="Arial" panose="020B0604020202020204" pitchFamily="34" charset="0"/>
+                <a:cs typeface="Arial" panose="020B0604020202020204" pitchFamily="34" charset="0"/>
+              </a:rPr>
+              <a:t>BERT</a:t>
+            </a:r>
+            <a:r>
+              <a:rPr lang="ja-JP" altLang="en-US" sz="1600" dirty="0">
+                <a:latin typeface="Arial" panose="020B0604020202020204" pitchFamily="34" charset="0"/>
+                <a:cs typeface="Arial" panose="020B0604020202020204" pitchFamily="34" charset="0"/>
+              </a:rPr>
+              <a:t>モデルのハードウェア需要：</a:t>
+            </a:r>
+            <a:endParaRPr lang="en-US" altLang="ja-JP" sz="1600" dirty="0">
+              <a:latin typeface="Arial" panose="020B0604020202020204" pitchFamily="34" charset="0"/>
+              <a:cs typeface="Arial" panose="020B0604020202020204" pitchFamily="34" charset="0"/>
+            </a:endParaRPr>
+          </a:p>
+        </p:txBody>
+      </p:sp>
+      <p:graphicFrame>
+        <p:nvGraphicFramePr>
+          <p:cNvPr id="3" name="表格 2">
+            <a:extLst>
+              <a:ext uri="{FF2B5EF4-FFF2-40B4-BE49-F238E27FC236}">
+                <a16:creationId xmlns:a16="http://schemas.microsoft.com/office/drawing/2014/main" id="{CDCEF8DA-1CA6-B6B1-3DD3-E7FB324ABCDE}"/>
+              </a:ext>
+            </a:extLst>
+          </p:cNvPr>
+          <p:cNvGraphicFramePr>
+            <a:graphicFrameLocks noGrp="1"/>
+          </p:cNvGraphicFramePr>
+          <p:nvPr>
+            <p:extLst>
+              <p:ext uri="{D42A27DB-BD31-4B8C-83A1-F6EECF244321}">
+                <p14:modId xmlns:p14="http://schemas.microsoft.com/office/powerpoint/2010/main" val="2659956083"/>
+              </p:ext>
+            </p:extLst>
+          </p:nvPr>
+        </p:nvGraphicFramePr>
+        <p:xfrm>
+          <a:off x="1808900" y="3698752"/>
+          <a:ext cx="8127999" cy="2771152"/>
+        </p:xfrm>
+        <a:graphic>
+          <a:graphicData uri="http://schemas.openxmlformats.org/drawingml/2006/table">
+            <a:tbl>
+              <a:tblPr firstRow="1" bandRow="1">
+                <a:tableStyleId>{5C22544A-7EE6-4342-B048-85BDC9FD1C3A}</a:tableStyleId>
+              </a:tblPr>
+              <a:tblGrid>
+                <a:gridCol w="2709333">
+                  <a:extLst>
+                    <a:ext uri="{9D8B030D-6E8A-4147-A177-3AD203B41FA5}">
+                      <a16:colId xmlns:a16="http://schemas.microsoft.com/office/drawing/2014/main" val="1946641988"/>
+                    </a:ext>
+                  </a:extLst>
+                </a:gridCol>
+                <a:gridCol w="2709333">
+                  <a:extLst>
+                    <a:ext uri="{9D8B030D-6E8A-4147-A177-3AD203B41FA5}">
+                      <a16:colId xmlns:a16="http://schemas.microsoft.com/office/drawing/2014/main" val="843880977"/>
+                    </a:ext>
+                  </a:extLst>
+                </a:gridCol>
+                <a:gridCol w="2709333">
+                  <a:extLst>
+                    <a:ext uri="{9D8B030D-6E8A-4147-A177-3AD203B41FA5}">
+                      <a16:colId xmlns:a16="http://schemas.microsoft.com/office/drawing/2014/main" val="1402595544"/>
+                    </a:ext>
+                  </a:extLst>
+                </a:gridCol>
+              </a:tblGrid>
+              <a:tr h="384178">
+                <a:tc>
+                  <a:txBody>
+                    <a:bodyPr/>
+                    <a:lstStyle/>
+                    <a:p>
+                      <a:pPr algn="ctr"/>
+                      <a:r>
+                        <a:rPr lang="en-US" altLang="ja-JP" dirty="0"/>
+                        <a:t>Spec</a:t>
+                      </a:r>
+                      <a:endParaRPr lang="zh-CN" altLang="en-US" dirty="0"/>
+                    </a:p>
+                  </a:txBody>
+                  <a:tcPr/>
+                </a:tc>
+                <a:tc>
+                  <a:txBody>
+                    <a:bodyPr/>
+                    <a:lstStyle/>
+                    <a:p>
+                      <a:pPr algn="ctr"/>
+                      <a:r>
+                        <a:rPr lang="ja-JP" altLang="en-US" dirty="0"/>
+                        <a:t>最低</a:t>
+                      </a:r>
+                      <a:endParaRPr lang="zh-CN" altLang="en-US" dirty="0"/>
+                    </a:p>
+                  </a:txBody>
+                  <a:tcPr/>
+                </a:tc>
+                <a:tc>
+                  <a:txBody>
+                    <a:bodyPr/>
+                    <a:lstStyle/>
+                    <a:p>
+                      <a:pPr algn="ctr"/>
+                      <a:r>
+                        <a:rPr lang="ja-JP" altLang="en-US" dirty="0"/>
+                        <a:t>平均</a:t>
+                      </a:r>
+                      <a:endParaRPr lang="zh-CN" altLang="en-US" dirty="0"/>
+                    </a:p>
+                  </a:txBody>
+                  <a:tcPr/>
+                </a:tc>
+                <a:extLst>
+                  <a:ext uri="{0D108BD9-81ED-4DB2-BD59-A6C34878D82A}">
+                    <a16:rowId xmlns:a16="http://schemas.microsoft.com/office/drawing/2014/main" val="836381954"/>
+                  </a:ext>
+                </a:extLst>
+              </a:tr>
+              <a:tr h="384178">
+                <a:tc>
+                  <a:txBody>
+                    <a:bodyPr/>
+                    <a:lstStyle/>
+                    <a:p>
+                      <a:r>
+                        <a:rPr lang="en-US" altLang="zh-CN" dirty="0"/>
+                        <a:t>CPU core</a:t>
+                      </a:r>
+                      <a:r>
+                        <a:rPr lang="ja-JP" altLang="en-US" dirty="0"/>
+                        <a:t>数</a:t>
+                      </a:r>
+                      <a:endParaRPr lang="zh-CN" altLang="en-US" dirty="0"/>
+                    </a:p>
+                  </a:txBody>
+                  <a:tcPr anchor="ctr"/>
+                </a:tc>
+                <a:tc>
+                  <a:txBody>
+                    <a:bodyPr/>
+                    <a:lstStyle/>
+                    <a:p>
+                      <a:r>
+                        <a:rPr lang="en-US" altLang="zh-CN" dirty="0"/>
+                        <a:t>2-4</a:t>
+                      </a:r>
+                      <a:endParaRPr lang="zh-CN" altLang="en-US" dirty="0"/>
+                    </a:p>
+                  </a:txBody>
+                  <a:tcPr/>
+                </a:tc>
+                <a:tc>
+                  <a:txBody>
+                    <a:bodyPr/>
+                    <a:lstStyle/>
+                    <a:p>
+                      <a:r>
+                        <a:rPr lang="en-US" altLang="zh-CN" dirty="0"/>
+                        <a:t>4-8</a:t>
+                      </a:r>
+                      <a:endParaRPr lang="zh-CN" altLang="en-US" dirty="0"/>
+                    </a:p>
+                  </a:txBody>
+                  <a:tcPr/>
+                </a:tc>
+                <a:extLst>
+                  <a:ext uri="{0D108BD9-81ED-4DB2-BD59-A6C34878D82A}">
+                    <a16:rowId xmlns:a16="http://schemas.microsoft.com/office/drawing/2014/main" val="2193355873"/>
+                  </a:ext>
+                </a:extLst>
+              </a:tr>
+              <a:tr h="384178">
+                <a:tc>
+                  <a:txBody>
+                    <a:bodyPr/>
+                    <a:lstStyle/>
+                    <a:p>
+                      <a:r>
+                        <a:rPr lang="en-US" altLang="zh-CN" dirty="0"/>
+                        <a:t>GPU</a:t>
+                      </a:r>
+                      <a:r>
+                        <a:rPr lang="ja-JP" altLang="en-US" dirty="0"/>
+                        <a:t> </a:t>
+                      </a:r>
+                      <a:r>
+                        <a:rPr lang="en-US" altLang="ja-JP" dirty="0"/>
+                        <a:t>VRAM</a:t>
+                      </a:r>
+                      <a:endParaRPr lang="zh-CN" altLang="en-US" dirty="0"/>
+                    </a:p>
+                  </a:txBody>
+                  <a:tcPr anchor="ctr"/>
+                </a:tc>
+                <a:tc>
+                  <a:txBody>
+                    <a:bodyPr/>
+                    <a:lstStyle/>
+                    <a:p>
+                      <a:r>
+                        <a:rPr lang="en-US" altLang="zh-CN" dirty="0"/>
+                        <a:t>8G</a:t>
+                      </a:r>
+                      <a:endParaRPr lang="zh-CN" altLang="en-US" dirty="0"/>
+                    </a:p>
+                  </a:txBody>
+                  <a:tcPr/>
+                </a:tc>
+                <a:tc>
+                  <a:txBody>
+                    <a:bodyPr/>
+                    <a:lstStyle/>
+                    <a:p>
+                      <a:r>
+                        <a:rPr lang="en-US" altLang="zh-CN" dirty="0"/>
+                        <a:t>12-16G</a:t>
+                      </a:r>
+                      <a:endParaRPr lang="zh-CN" altLang="en-US" dirty="0"/>
+                    </a:p>
+                  </a:txBody>
+                  <a:tcPr/>
+                </a:tc>
+                <a:extLst>
+                  <a:ext uri="{0D108BD9-81ED-4DB2-BD59-A6C34878D82A}">
+                    <a16:rowId xmlns:a16="http://schemas.microsoft.com/office/drawing/2014/main" val="3729384620"/>
+                  </a:ext>
+                </a:extLst>
+              </a:tr>
+              <a:tr h="384178">
+                <a:tc>
+                  <a:txBody>
+                    <a:bodyPr/>
+                    <a:lstStyle/>
+                    <a:p>
+                      <a:r>
+                        <a:rPr lang="ja-JP" altLang="en-US" dirty="0"/>
+                        <a:t>メモリ </a:t>
+                      </a:r>
+                      <a:r>
+                        <a:rPr lang="en-US" altLang="ja-JP" dirty="0"/>
+                        <a:t>RAM</a:t>
+                      </a:r>
+                      <a:endParaRPr lang="zh-CN" altLang="en-US" dirty="0"/>
+                    </a:p>
+                  </a:txBody>
+                  <a:tcPr anchor="ctr"/>
+                </a:tc>
+                <a:tc>
+                  <a:txBody>
+                    <a:bodyPr/>
+                    <a:lstStyle/>
+                    <a:p>
+                      <a:r>
+                        <a:rPr lang="en-US" altLang="zh-CN" dirty="0"/>
+                        <a:t>12-16G</a:t>
+                      </a:r>
+                      <a:endParaRPr lang="zh-CN" altLang="en-US" dirty="0"/>
+                    </a:p>
+                  </a:txBody>
+                  <a:tcPr/>
+                </a:tc>
+                <a:tc>
+                  <a:txBody>
+                    <a:bodyPr/>
+                    <a:lstStyle/>
+                    <a:p>
+                      <a:r>
+                        <a:rPr lang="en-US" altLang="zh-CN" dirty="0"/>
+                        <a:t>16-32G</a:t>
+                      </a:r>
+                      <a:endParaRPr lang="zh-CN" altLang="en-US" dirty="0"/>
+                    </a:p>
+                  </a:txBody>
+                  <a:tcPr/>
+                </a:tc>
+                <a:extLst>
+                  <a:ext uri="{0D108BD9-81ED-4DB2-BD59-A6C34878D82A}">
+                    <a16:rowId xmlns:a16="http://schemas.microsoft.com/office/drawing/2014/main" val="3592656556"/>
+                  </a:ext>
+                </a:extLst>
+              </a:tr>
+              <a:tr h="384178">
+                <a:tc>
+                  <a:txBody>
+                    <a:bodyPr/>
+                    <a:lstStyle/>
+                    <a:p>
+                      <a:r>
+                        <a:rPr lang="ja-JP" altLang="en-US" dirty="0"/>
+                        <a:t>コメント</a:t>
+                      </a:r>
+                      <a:endParaRPr lang="zh-CN" altLang="en-US" dirty="0"/>
+                    </a:p>
+                  </a:txBody>
+                  <a:tcPr anchor="ctr"/>
+                </a:tc>
+                <a:tc>
+                  <a:txBody>
+                    <a:bodyPr/>
+                    <a:lstStyle/>
+                    <a:p>
+                      <a:r>
+                        <a:rPr lang="ja-JP" altLang="en-US" sz="1500" dirty="0"/>
+                        <a:t>同時実行性の低いシナリオ、低レイテンシ要件に適しています。大規模なバッチや長いテキストではパフォーマンスが低下する可能性があります。</a:t>
+                      </a:r>
+                      <a:endParaRPr lang="zh-CN" altLang="en-US" sz="1500" dirty="0"/>
+                    </a:p>
+                  </a:txBody>
+                  <a:tcPr/>
+                </a:tc>
+                <a:tc>
+                  <a:txBody>
+                    <a:bodyPr/>
+                    <a:lstStyle/>
+                    <a:p>
+                      <a:r>
+                        <a:rPr lang="ja-JP" altLang="en-US" sz="1500" dirty="0"/>
+                        <a:t>レイテンシにある程度要求される且つ同時実行シナリオに適しています。一般的な特許要約の長さとバッチサイズを適切に処理できます。</a:t>
+                      </a:r>
+                      <a:endParaRPr lang="zh-CN" altLang="en-US" sz="1500" dirty="0"/>
+                    </a:p>
+                  </a:txBody>
+                  <a:tcPr/>
+                </a:tc>
+                <a:extLst>
+                  <a:ext uri="{0D108BD9-81ED-4DB2-BD59-A6C34878D82A}">
+                    <a16:rowId xmlns:a16="http://schemas.microsoft.com/office/drawing/2014/main" val="3165910824"/>
+                  </a:ext>
+                </a:extLst>
+              </a:tr>
+            </a:tbl>
+          </a:graphicData>
+        </a:graphic>
+      </p:graphicFrame>
+    </p:spTree>
+    <p:extLst>
+      <p:ext uri="{BB962C8B-B14F-4D97-AF65-F5344CB8AC3E}">
+        <p14:creationId xmlns:p14="http://schemas.microsoft.com/office/powerpoint/2010/main" val="1153805984"/>
+      </p:ext>
+    </p:extLst>
+  </p:cSld>
+  <p:clrMapOvr>
+    <a:masterClrMapping/>
+  </p:clrMapOvr>
+</p:sld>
+</file>
+
+<file path=ppt/slides/slide6.xml><?xml version="1.0" encoding="utf-8"?>
+<p:sld xmlns:a="http://schemas.openxmlformats.org/drawingml/2006/main" xmlns:r="http://schemas.openxmlformats.org/officeDocument/2006/relationships" xmlns:p="http://schemas.openxmlformats.org/presentationml/2006/main">
+  <p:cSld>
+    <p:spTree>
+      <p:nvGrpSpPr>
+        <p:cNvPr id="1" name="">
+          <a:extLst>
+            <a:ext uri="{FF2B5EF4-FFF2-40B4-BE49-F238E27FC236}">
+              <a16:creationId xmlns:a16="http://schemas.microsoft.com/office/drawing/2014/main" id="{84C17D35-E2F6-3EA6-6FF4-9259784D854B}"/>
+            </a:ext>
+          </a:extLst>
+        </p:cNvPr>
+        <p:cNvGrpSpPr/>
+        <p:nvPr/>
+      </p:nvGrpSpPr>
+      <p:grpSpPr>
+        <a:xfrm>
+          <a:off x="0" y="0"/>
+          <a:ext cx="0" cy="0"/>
+          <a:chOff x="0" y="0"/>
+          <a:chExt cx="0" cy="0"/>
+        </a:xfrm>
+      </p:grpSpPr>
+      <p:sp>
+        <p:nvSpPr>
+          <p:cNvPr id="4" name="文本框 3">
+            <a:extLst>
+              <a:ext uri="{FF2B5EF4-FFF2-40B4-BE49-F238E27FC236}">
+                <a16:creationId xmlns:a16="http://schemas.microsoft.com/office/drawing/2014/main" id="{7E28F0EB-D16A-75CE-8F5B-BAF43295EAE8}"/>
+              </a:ext>
+            </a:extLst>
+          </p:cNvPr>
+          <p:cNvSpPr txBox="1"/>
+          <p:nvPr/>
+        </p:nvSpPr>
+        <p:spPr>
+          <a:xfrm>
+            <a:off x="575036" y="707011"/>
+            <a:ext cx="10246936" cy="369332"/>
+          </a:xfrm>
+          <a:prstGeom prst="rect">
+            <a:avLst/>
+          </a:prstGeom>
+          <a:noFill/>
+        </p:spPr>
+        <p:txBody>
+          <a:bodyPr wrap="square" rtlCol="0">
+            <a:spAutoFit/>
+          </a:bodyPr>
+          <a:lstStyle/>
+          <a:p>
+            <a:r>
+              <a:rPr lang="ja-JP" altLang="en-US" dirty="0">
+                <a:latin typeface="Arial" panose="020B0604020202020204" pitchFamily="34" charset="0"/>
+                <a:cs typeface="Arial" panose="020B0604020202020204" pitchFamily="34" charset="0"/>
+              </a:rPr>
+              <a:t>特許版</a:t>
+            </a:r>
+            <a:r>
+              <a:rPr lang="en-US" altLang="ja-JP" dirty="0">
+                <a:latin typeface="Arial" panose="020B0604020202020204" pitchFamily="34" charset="0"/>
+                <a:cs typeface="Arial" panose="020B0604020202020204" pitchFamily="34" charset="0"/>
+              </a:rPr>
+              <a:t>BERT</a:t>
+            </a:r>
+            <a:r>
+              <a:rPr lang="ja-JP" altLang="en-US" dirty="0">
+                <a:latin typeface="Arial" panose="020B0604020202020204" pitchFamily="34" charset="0"/>
+                <a:cs typeface="Arial" panose="020B0604020202020204" pitchFamily="34" charset="0"/>
+              </a:rPr>
+              <a:t>モデルのデプロイ・運用手間</a:t>
+            </a:r>
+            <a:endParaRPr lang="zh-CN" altLang="en-US" dirty="0">
+              <a:latin typeface="Arial" panose="020B0604020202020204" pitchFamily="34" charset="0"/>
+              <a:cs typeface="Arial" panose="020B0604020202020204" pitchFamily="34" charset="0"/>
+            </a:endParaRPr>
+          </a:p>
+        </p:txBody>
+      </p:sp>
+      <p:cxnSp>
+        <p:nvCxnSpPr>
+          <p:cNvPr id="6" name="直接连接符 5">
+            <a:extLst>
+              <a:ext uri="{FF2B5EF4-FFF2-40B4-BE49-F238E27FC236}">
+                <a16:creationId xmlns:a16="http://schemas.microsoft.com/office/drawing/2014/main" id="{E125C50D-D9CF-F485-B3A3-140F26CB36E5}"/>
+              </a:ext>
+            </a:extLst>
+          </p:cNvPr>
+          <p:cNvCxnSpPr>
+            <a:cxnSpLocks/>
+          </p:cNvCxnSpPr>
+          <p:nvPr/>
+        </p:nvCxnSpPr>
+        <p:spPr>
+          <a:xfrm>
+            <a:off x="480767" y="1216058"/>
+            <a:ext cx="11019934" cy="0"/>
+          </a:xfrm>
+          <a:prstGeom prst="line">
+            <a:avLst/>
+          </a:prstGeom>
+        </p:spPr>
+        <p:style>
+          <a:lnRef idx="1">
+            <a:schemeClr val="accent1"/>
+          </a:lnRef>
+          <a:fillRef idx="0">
+            <a:schemeClr val="accent1"/>
+          </a:fillRef>
+          <a:effectRef idx="0">
+            <a:schemeClr val="accent1"/>
+          </a:effectRef>
+          <a:fontRef idx="minor">
+            <a:schemeClr val="tx1"/>
+          </a:fontRef>
+        </p:style>
+      </p:cxnSp>
+      <p:sp>
+        <p:nvSpPr>
+          <p:cNvPr id="2" name="文本框 1">
+            <a:extLst>
+              <a:ext uri="{FF2B5EF4-FFF2-40B4-BE49-F238E27FC236}">
+                <a16:creationId xmlns:a16="http://schemas.microsoft.com/office/drawing/2014/main" id="{A0DDA2CD-C32B-2036-2F79-E9CD44328AA8}"/>
+              </a:ext>
+            </a:extLst>
+          </p:cNvPr>
+          <p:cNvSpPr txBox="1"/>
+          <p:nvPr/>
+        </p:nvSpPr>
+        <p:spPr>
+          <a:xfrm>
+            <a:off x="575036" y="1459348"/>
+            <a:ext cx="10595728" cy="338554"/>
+          </a:xfrm>
+          <a:prstGeom prst="rect">
+            <a:avLst/>
+          </a:prstGeom>
+          <a:noFill/>
+        </p:spPr>
+        <p:txBody>
+          <a:bodyPr wrap="square" rtlCol="0">
+            <a:spAutoFit/>
+          </a:bodyPr>
+          <a:lstStyle/>
+          <a:p>
+            <a:r>
+              <a:rPr lang="ja-JP" altLang="en-US" sz="1600" dirty="0">
+                <a:latin typeface="Arial" panose="020B0604020202020204" pitchFamily="34" charset="0"/>
+                <a:cs typeface="Arial" panose="020B0604020202020204" pitchFamily="34" charset="0"/>
+              </a:rPr>
+              <a:t>前述した特許版</a:t>
+            </a:r>
+            <a:r>
+              <a:rPr lang="en-US" altLang="ja-JP" sz="1600" dirty="0">
+                <a:latin typeface="Arial" panose="020B0604020202020204" pitchFamily="34" charset="0"/>
+                <a:cs typeface="Arial" panose="020B0604020202020204" pitchFamily="34" charset="0"/>
+              </a:rPr>
+              <a:t>BERT</a:t>
+            </a:r>
+            <a:r>
+              <a:rPr lang="ja-JP" altLang="en-US" sz="1600" dirty="0">
+                <a:latin typeface="Arial" panose="020B0604020202020204" pitchFamily="34" charset="0"/>
+                <a:cs typeface="Arial" panose="020B0604020202020204" pitchFamily="34" charset="0"/>
+              </a:rPr>
+              <a:t>モデルのデプロイ・運用手間は以下のように参考されます。</a:t>
+            </a:r>
+            <a:endParaRPr lang="en-US" altLang="ja-JP" sz="1600" dirty="0">
+              <a:latin typeface="Arial" panose="020B0604020202020204" pitchFamily="34" charset="0"/>
+              <a:cs typeface="Arial" panose="020B0604020202020204" pitchFamily="34" charset="0"/>
+            </a:endParaRPr>
+          </a:p>
+        </p:txBody>
+      </p:sp>
+      <p:graphicFrame>
+        <p:nvGraphicFramePr>
+          <p:cNvPr id="8" name="图示 7">
+            <a:extLst>
+              <a:ext uri="{FF2B5EF4-FFF2-40B4-BE49-F238E27FC236}">
+                <a16:creationId xmlns:a16="http://schemas.microsoft.com/office/drawing/2014/main" id="{435C5D70-06AC-0E2A-E07F-34F62017BA1E}"/>
+              </a:ext>
+            </a:extLst>
+          </p:cNvPr>
+          <p:cNvGraphicFramePr/>
+          <p:nvPr>
+            <p:extLst>
+              <p:ext uri="{D42A27DB-BD31-4B8C-83A1-F6EECF244321}">
+                <p14:modId xmlns:p14="http://schemas.microsoft.com/office/powerpoint/2010/main" val="2562993902"/>
+              </p:ext>
+            </p:extLst>
+          </p:nvPr>
+        </p:nvGraphicFramePr>
+        <p:xfrm>
+          <a:off x="1112887" y="2469822"/>
+          <a:ext cx="4679884" cy="3864665"/>
+        </p:xfrm>
+        <a:graphic>
+          <a:graphicData uri="http://schemas.openxmlformats.org/drawingml/2006/diagram">
+            <dgm:relIds xmlns:dgm="http://schemas.openxmlformats.org/drawingml/2006/diagram" xmlns:r="http://schemas.openxmlformats.org/officeDocument/2006/relationships" r:dm="rId2" r:lo="rId3" r:qs="rId4" r:cs="rId5"/>
+          </a:graphicData>
+        </a:graphic>
+      </p:graphicFrame>
+      <p:sp>
+        <p:nvSpPr>
+          <p:cNvPr id="9" name="矩形 8">
+            <a:extLst>
+              <a:ext uri="{FF2B5EF4-FFF2-40B4-BE49-F238E27FC236}">
+                <a16:creationId xmlns:a16="http://schemas.microsoft.com/office/drawing/2014/main" id="{F5C10F7D-D70C-AEEE-B8A3-67CB8870326F}"/>
+              </a:ext>
+            </a:extLst>
+          </p:cNvPr>
+          <p:cNvSpPr/>
+          <p:nvPr/>
+        </p:nvSpPr>
+        <p:spPr>
+          <a:xfrm>
+            <a:off x="2005814" y="2041191"/>
+            <a:ext cx="2894029" cy="338554"/>
+          </a:xfrm>
+          <a:prstGeom prst="rect">
+            <a:avLst/>
+          </a:prstGeom>
+          <a:noFill/>
+          <a:ln>
+            <a:solidFill>
+              <a:schemeClr val="accent1"/>
+            </a:solidFill>
+          </a:ln>
+        </p:spPr>
+        <p:style>
+          <a:lnRef idx="2">
+            <a:schemeClr val="accent1">
+              <a:shade val="15000"/>
+            </a:schemeClr>
+          </a:lnRef>
+          <a:fillRef idx="1">
+            <a:schemeClr val="accent1"/>
+          </a:fillRef>
+          <a:effectRef idx="0">
+            <a:schemeClr val="accent1"/>
+          </a:effectRef>
+          <a:fontRef idx="minor">
+            <a:schemeClr val="lt1"/>
+          </a:fontRef>
+        </p:style>
+        <p:txBody>
+          <a:bodyPr rtlCol="0" anchor="ctr"/>
+          <a:lstStyle/>
+          <a:p>
+            <a:pPr algn="ctr"/>
+            <a:r>
+              <a:rPr lang="ja-JP" altLang="en-US" dirty="0">
+                <a:solidFill>
+                  <a:sysClr val="windowText" lastClr="000000"/>
+                </a:solidFill>
+              </a:rPr>
+              <a:t>デプロイ</a:t>
+            </a:r>
+            <a:endParaRPr lang="zh-CN" altLang="en-US" dirty="0">
+              <a:solidFill>
+                <a:sysClr val="windowText" lastClr="000000"/>
+              </a:solidFill>
+            </a:endParaRPr>
+          </a:p>
+        </p:txBody>
+      </p:sp>
+      <p:graphicFrame>
+        <p:nvGraphicFramePr>
+          <p:cNvPr id="10" name="图示 9">
+            <a:extLst>
+              <a:ext uri="{FF2B5EF4-FFF2-40B4-BE49-F238E27FC236}">
+                <a16:creationId xmlns:a16="http://schemas.microsoft.com/office/drawing/2014/main" id="{4811E8FD-7B6D-6BDF-FCBF-AEE634F7890C}"/>
+              </a:ext>
+            </a:extLst>
+          </p:cNvPr>
+          <p:cNvGraphicFramePr/>
+          <p:nvPr>
+            <p:extLst>
+              <p:ext uri="{D42A27DB-BD31-4B8C-83A1-F6EECF244321}">
+                <p14:modId xmlns:p14="http://schemas.microsoft.com/office/powerpoint/2010/main" val="1695000118"/>
+              </p:ext>
+            </p:extLst>
+          </p:nvPr>
+        </p:nvGraphicFramePr>
+        <p:xfrm>
+          <a:off x="6299199" y="2469821"/>
+          <a:ext cx="4679884" cy="3864665"/>
+        </p:xfrm>
+        <a:graphic>
+          <a:graphicData uri="http://schemas.openxmlformats.org/drawingml/2006/diagram">
+            <dgm:relIds xmlns:dgm="http://schemas.openxmlformats.org/drawingml/2006/diagram" xmlns:r="http://schemas.openxmlformats.org/officeDocument/2006/relationships" r:dm="rId7" r:lo="rId8" r:qs="rId9" r:cs="rId10"/>
+          </a:graphicData>
+        </a:graphic>
+      </p:graphicFrame>
+      <p:sp>
+        <p:nvSpPr>
+          <p:cNvPr id="11" name="矩形 10">
+            <a:extLst>
+              <a:ext uri="{FF2B5EF4-FFF2-40B4-BE49-F238E27FC236}">
+                <a16:creationId xmlns:a16="http://schemas.microsoft.com/office/drawing/2014/main" id="{9D91A385-8317-1B4C-E16A-8B2383E039CD}"/>
+              </a:ext>
+            </a:extLst>
+          </p:cNvPr>
+          <p:cNvSpPr/>
+          <p:nvPr/>
+        </p:nvSpPr>
+        <p:spPr>
+          <a:xfrm>
+            <a:off x="7192127" y="2036766"/>
+            <a:ext cx="2894029" cy="338554"/>
+          </a:xfrm>
+          <a:prstGeom prst="rect">
+            <a:avLst/>
+          </a:prstGeom>
+          <a:noFill/>
+          <a:ln>
+            <a:solidFill>
+              <a:schemeClr val="accent1"/>
+            </a:solidFill>
+          </a:ln>
+        </p:spPr>
+        <p:style>
+          <a:lnRef idx="2">
+            <a:schemeClr val="accent1">
+              <a:shade val="15000"/>
+            </a:schemeClr>
+          </a:lnRef>
+          <a:fillRef idx="1">
+            <a:schemeClr val="accent1"/>
+          </a:fillRef>
+          <a:effectRef idx="0">
+            <a:schemeClr val="accent1"/>
+          </a:effectRef>
+          <a:fontRef idx="minor">
+            <a:schemeClr val="lt1"/>
+          </a:fontRef>
+        </p:style>
+        <p:txBody>
+          <a:bodyPr rtlCol="0" anchor="ctr"/>
+          <a:lstStyle/>
+          <a:p>
+            <a:pPr algn="ctr"/>
+            <a:r>
+              <a:rPr lang="ja-JP" altLang="en-US" dirty="0">
+                <a:solidFill>
+                  <a:sysClr val="windowText" lastClr="000000"/>
+                </a:solidFill>
+              </a:rPr>
+              <a:t>運用</a:t>
+            </a:r>
+            <a:endParaRPr lang="zh-CN" altLang="en-US" dirty="0">
+              <a:solidFill>
+                <a:sysClr val="windowText" lastClr="000000"/>
+              </a:solidFill>
+            </a:endParaRPr>
+          </a:p>
+        </p:txBody>
+      </p:sp>
+    </p:spTree>
+    <p:extLst>
+      <p:ext uri="{BB962C8B-B14F-4D97-AF65-F5344CB8AC3E}">
+        <p14:creationId xmlns:p14="http://schemas.microsoft.com/office/powerpoint/2010/main" val="666946828"/>
+      </p:ext>
+    </p:extLst>
+  </p:cSld>
+  <p:clrMapOvr>
+    <a:masterClrMapping/>
+  </p:clrMapOvr>
+</p:sld>
+</file>
+
+<file path=ppt/slides/slide7.xml><?xml version="1.0" encoding="utf-8"?>
+<p:sld xmlns:a="http://schemas.openxmlformats.org/drawingml/2006/main" xmlns:r="http://schemas.openxmlformats.org/officeDocument/2006/relationships" xmlns:p="http://schemas.openxmlformats.org/presentationml/2006/main">
+  <p:cSld>
+    <p:spTree>
+      <p:nvGrpSpPr>
+        <p:cNvPr id="1" name="">
+          <a:extLst>
+            <a:ext uri="{FF2B5EF4-FFF2-40B4-BE49-F238E27FC236}">
+              <a16:creationId xmlns:a16="http://schemas.microsoft.com/office/drawing/2014/main" id="{3DAF338D-45B5-765A-F0F3-5E541CBB3FB2}"/>
+            </a:ext>
+          </a:extLst>
+        </p:cNvPr>
+        <p:cNvGrpSpPr/>
+        <p:nvPr/>
+      </p:nvGrpSpPr>
+      <p:grpSpPr>
+        <a:xfrm>
+          <a:off x="0" y="0"/>
+          <a:ext cx="0" cy="0"/>
+          <a:chOff x="0" y="0"/>
+          <a:chExt cx="0" cy="0"/>
+        </a:xfrm>
+      </p:grpSpPr>
+      <p:sp>
+        <p:nvSpPr>
+          <p:cNvPr id="4" name="文本框 3">
+            <a:extLst>
+              <a:ext uri="{FF2B5EF4-FFF2-40B4-BE49-F238E27FC236}">
+                <a16:creationId xmlns:a16="http://schemas.microsoft.com/office/drawing/2014/main" id="{87411DD6-16E4-E544-F06B-2ABA6C5F25B1}"/>
+              </a:ext>
+            </a:extLst>
+          </p:cNvPr>
+          <p:cNvSpPr txBox="1"/>
+          <p:nvPr/>
+        </p:nvSpPr>
+        <p:spPr>
+          <a:xfrm>
+            <a:off x="575036" y="707011"/>
+            <a:ext cx="10246936" cy="369332"/>
+          </a:xfrm>
+          <a:prstGeom prst="rect">
+            <a:avLst/>
+          </a:prstGeom>
+          <a:noFill/>
+        </p:spPr>
+        <p:txBody>
+          <a:bodyPr wrap="square" rtlCol="0">
+            <a:spAutoFit/>
+          </a:bodyPr>
+          <a:lstStyle/>
+          <a:p>
+            <a:r>
+              <a:rPr lang="ja-JP" altLang="en-US" dirty="0">
+                <a:latin typeface="Arial" panose="020B0604020202020204" pitchFamily="34" charset="0"/>
+                <a:cs typeface="Arial" panose="020B0604020202020204" pitchFamily="34" charset="0"/>
+              </a:rPr>
+              <a:t>特許版</a:t>
+            </a:r>
+            <a:r>
+              <a:rPr lang="en-US" altLang="ja-JP" dirty="0">
+                <a:latin typeface="Arial" panose="020B0604020202020204" pitchFamily="34" charset="0"/>
+                <a:cs typeface="Arial" panose="020B0604020202020204" pitchFamily="34" charset="0"/>
+              </a:rPr>
+              <a:t>BERT</a:t>
+            </a:r>
+            <a:r>
+              <a:rPr lang="ja-JP" altLang="en-US" dirty="0">
+                <a:latin typeface="Arial" panose="020B0604020202020204" pitchFamily="34" charset="0"/>
+                <a:cs typeface="Arial" panose="020B0604020202020204" pitchFamily="34" charset="0"/>
+              </a:rPr>
+              <a:t>モデルの所要リソース</a:t>
+            </a:r>
+            <a:endParaRPr lang="zh-CN" altLang="en-US" dirty="0">
+              <a:latin typeface="Arial" panose="020B0604020202020204" pitchFamily="34" charset="0"/>
+              <a:cs typeface="Arial" panose="020B0604020202020204" pitchFamily="34" charset="0"/>
+            </a:endParaRPr>
+          </a:p>
+        </p:txBody>
+      </p:sp>
+      <p:cxnSp>
+        <p:nvCxnSpPr>
+          <p:cNvPr id="6" name="直接连接符 5">
+            <a:extLst>
+              <a:ext uri="{FF2B5EF4-FFF2-40B4-BE49-F238E27FC236}">
+                <a16:creationId xmlns:a16="http://schemas.microsoft.com/office/drawing/2014/main" id="{88CD6F7A-7C0A-9ED3-F627-926EE5B82EF9}"/>
+              </a:ext>
+            </a:extLst>
+          </p:cNvPr>
+          <p:cNvCxnSpPr>
+            <a:cxnSpLocks/>
+          </p:cNvCxnSpPr>
+          <p:nvPr/>
+        </p:nvCxnSpPr>
+        <p:spPr>
+          <a:xfrm>
+            <a:off x="480767" y="1216058"/>
+            <a:ext cx="11019934" cy="0"/>
+          </a:xfrm>
+          <a:prstGeom prst="line">
+            <a:avLst/>
+          </a:prstGeom>
+        </p:spPr>
+        <p:style>
+          <a:lnRef idx="1">
+            <a:schemeClr val="accent1"/>
+          </a:lnRef>
+          <a:fillRef idx="0">
+            <a:schemeClr val="accent1"/>
+          </a:fillRef>
+          <a:effectRef idx="0">
+            <a:schemeClr val="accent1"/>
+          </a:effectRef>
+          <a:fontRef idx="minor">
+            <a:schemeClr val="tx1"/>
+          </a:fontRef>
+        </p:style>
+      </p:cxnSp>
+      <p:sp>
+        <p:nvSpPr>
+          <p:cNvPr id="2" name="文本框 1">
+            <a:extLst>
+              <a:ext uri="{FF2B5EF4-FFF2-40B4-BE49-F238E27FC236}">
+                <a16:creationId xmlns:a16="http://schemas.microsoft.com/office/drawing/2014/main" id="{9675D52E-6B26-65C8-C230-F3AC9BA2D864}"/>
+              </a:ext>
+            </a:extLst>
+          </p:cNvPr>
+          <p:cNvSpPr txBox="1"/>
+          <p:nvPr/>
+        </p:nvSpPr>
+        <p:spPr>
+          <a:xfrm>
+            <a:off x="575036" y="1459348"/>
+            <a:ext cx="10595728" cy="584775"/>
+          </a:xfrm>
+          <a:prstGeom prst="rect">
+            <a:avLst/>
+          </a:prstGeom>
+          <a:noFill/>
+        </p:spPr>
+        <p:txBody>
+          <a:bodyPr wrap="square" rtlCol="0">
+            <a:spAutoFit/>
+          </a:bodyPr>
+          <a:lstStyle/>
+          <a:p>
+            <a:r>
+              <a:rPr lang="ja-JP" altLang="en-US" sz="1600" dirty="0">
+                <a:latin typeface="Arial" panose="020B0604020202020204" pitchFamily="34" charset="0"/>
+                <a:cs typeface="Arial" panose="020B0604020202020204" pitchFamily="34" charset="0"/>
+              </a:rPr>
+              <a:t>特許版</a:t>
+            </a:r>
+            <a:r>
+              <a:rPr lang="en-US" altLang="ja-JP" sz="1600" dirty="0">
+                <a:latin typeface="Arial" panose="020B0604020202020204" pitchFamily="34" charset="0"/>
+                <a:cs typeface="Arial" panose="020B0604020202020204" pitchFamily="34" charset="0"/>
+              </a:rPr>
+              <a:t>BERT</a:t>
+            </a:r>
+            <a:r>
+              <a:rPr lang="ja-JP" altLang="en-US" sz="1600" dirty="0">
+                <a:latin typeface="Arial" panose="020B0604020202020204" pitchFamily="34" charset="0"/>
+                <a:cs typeface="Arial" panose="020B0604020202020204" pitchFamily="34" charset="0"/>
+              </a:rPr>
+              <a:t>モデルをデプロイするため、</a:t>
+            </a:r>
+            <a:r>
+              <a:rPr lang="en-US" altLang="ja-JP" sz="1600" dirty="0">
+                <a:latin typeface="Arial" panose="020B0604020202020204" pitchFamily="34" charset="0"/>
+                <a:cs typeface="Arial" panose="020B0604020202020204" pitchFamily="34" charset="0"/>
+              </a:rPr>
+              <a:t>Azure</a:t>
+            </a:r>
+            <a:r>
+              <a:rPr lang="ja-JP" altLang="en-US" sz="1600" dirty="0">
+                <a:latin typeface="Arial" panose="020B0604020202020204" pitchFamily="34" charset="0"/>
+                <a:cs typeface="Arial" panose="020B0604020202020204" pitchFamily="34" charset="0"/>
+              </a:rPr>
+              <a:t>、</a:t>
+            </a:r>
+            <a:r>
+              <a:rPr lang="en-US" altLang="ja-JP" sz="1600" dirty="0">
+                <a:latin typeface="Arial" panose="020B0604020202020204" pitchFamily="34" charset="0"/>
+                <a:cs typeface="Arial" panose="020B0604020202020204" pitchFamily="34" charset="0"/>
+              </a:rPr>
+              <a:t>AWS</a:t>
+            </a:r>
+            <a:r>
+              <a:rPr lang="ja-JP" altLang="en-US" sz="1600" dirty="0">
+                <a:latin typeface="Arial" panose="020B0604020202020204" pitchFamily="34" charset="0"/>
+                <a:cs typeface="Arial" panose="020B0604020202020204" pitchFamily="34" charset="0"/>
+              </a:rPr>
+              <a:t>、</a:t>
+            </a:r>
+            <a:r>
+              <a:rPr lang="en-US" altLang="ja-JP" sz="1600" dirty="0">
+                <a:latin typeface="Arial" panose="020B0604020202020204" pitchFamily="34" charset="0"/>
+                <a:cs typeface="Arial" panose="020B0604020202020204" pitchFamily="34" charset="0"/>
+              </a:rPr>
+              <a:t>GCP</a:t>
+            </a:r>
+            <a:r>
+              <a:rPr lang="ja-JP" altLang="en-US" sz="1600" dirty="0">
+                <a:latin typeface="Arial" panose="020B0604020202020204" pitchFamily="34" charset="0"/>
+                <a:cs typeface="Arial" panose="020B0604020202020204" pitchFamily="34" charset="0"/>
+              </a:rPr>
+              <a:t>それぞれ所要なリソースは下表に参考されます。</a:t>
+            </a:r>
+            <a:r>
+              <a:rPr lang="en-US" altLang="ja-JP" sz="1600" dirty="0">
+                <a:latin typeface="Arial" panose="020B0604020202020204" pitchFamily="34" charset="0"/>
+                <a:cs typeface="Arial" panose="020B0604020202020204" pitchFamily="34" charset="0"/>
+              </a:rPr>
+              <a:t>(</a:t>
+            </a:r>
+            <a:r>
+              <a:rPr lang="ja-JP" altLang="en-US" sz="1600" dirty="0">
+                <a:latin typeface="Arial" panose="020B0604020202020204" pitchFamily="34" charset="0"/>
+                <a:cs typeface="Arial" panose="020B0604020202020204" pitchFamily="34" charset="0"/>
+              </a:rPr>
+              <a:t>地域は全部</a:t>
+            </a:r>
+            <a:r>
+              <a:rPr lang="en-US" altLang="ja-JP" sz="1600" dirty="0">
+                <a:latin typeface="Arial" panose="020B0604020202020204" pitchFamily="34" charset="0"/>
+                <a:cs typeface="Arial" panose="020B0604020202020204" pitchFamily="34" charset="0"/>
+              </a:rPr>
+              <a:t>Tokyo</a:t>
+            </a:r>
+            <a:r>
+              <a:rPr lang="ja-JP" altLang="en-US" sz="1600" dirty="0">
+                <a:latin typeface="Arial" panose="020B0604020202020204" pitchFamily="34" charset="0"/>
+                <a:cs typeface="Arial" panose="020B0604020202020204" pitchFamily="34" charset="0"/>
+              </a:rPr>
+              <a:t>を設定します）</a:t>
+            </a:r>
+            <a:endParaRPr lang="en-US" altLang="ja-JP" sz="1600" dirty="0">
+              <a:latin typeface="Arial" panose="020B0604020202020204" pitchFamily="34" charset="0"/>
+              <a:cs typeface="Arial" panose="020B0604020202020204" pitchFamily="34" charset="0"/>
+            </a:endParaRPr>
+          </a:p>
+        </p:txBody>
+      </p:sp>
+      <p:graphicFrame>
+        <p:nvGraphicFramePr>
+          <p:cNvPr id="3" name="表格 2">
+            <a:extLst>
+              <a:ext uri="{FF2B5EF4-FFF2-40B4-BE49-F238E27FC236}">
+                <a16:creationId xmlns:a16="http://schemas.microsoft.com/office/drawing/2014/main" id="{F9B708F1-A93E-6FA0-EAA8-F335802FFD46}"/>
+              </a:ext>
+            </a:extLst>
+          </p:cNvPr>
+          <p:cNvGraphicFramePr>
+            <a:graphicFrameLocks noGrp="1"/>
+          </p:cNvGraphicFramePr>
+          <p:nvPr>
+            <p:extLst>
+              <p:ext uri="{D42A27DB-BD31-4B8C-83A1-F6EECF244321}">
+                <p14:modId xmlns:p14="http://schemas.microsoft.com/office/powerpoint/2010/main" val="4066083287"/>
+              </p:ext>
+            </p:extLst>
+          </p:nvPr>
+        </p:nvGraphicFramePr>
+        <p:xfrm>
+          <a:off x="952106" y="2595599"/>
+          <a:ext cx="10077256" cy="3166215"/>
+        </p:xfrm>
+        <a:graphic>
+          <a:graphicData uri="http://schemas.openxmlformats.org/drawingml/2006/table">
+            <a:tbl>
+              <a:tblPr firstRow="1" bandRow="1">
+                <a:tableStyleId>{5C22544A-7EE6-4342-B048-85BDC9FD1C3A}</a:tableStyleId>
+              </a:tblPr>
+              <a:tblGrid>
+                <a:gridCol w="2519314">
+                  <a:extLst>
+                    <a:ext uri="{9D8B030D-6E8A-4147-A177-3AD203B41FA5}">
+                      <a16:colId xmlns:a16="http://schemas.microsoft.com/office/drawing/2014/main" val="1034333737"/>
+                    </a:ext>
+                  </a:extLst>
+                </a:gridCol>
+                <a:gridCol w="2519314">
+                  <a:extLst>
+                    <a:ext uri="{9D8B030D-6E8A-4147-A177-3AD203B41FA5}">
+                      <a16:colId xmlns:a16="http://schemas.microsoft.com/office/drawing/2014/main" val="3348019054"/>
+                    </a:ext>
+                  </a:extLst>
+                </a:gridCol>
+                <a:gridCol w="2519314">
+                  <a:extLst>
+                    <a:ext uri="{9D8B030D-6E8A-4147-A177-3AD203B41FA5}">
+                      <a16:colId xmlns:a16="http://schemas.microsoft.com/office/drawing/2014/main" val="4232210452"/>
+                    </a:ext>
+                  </a:extLst>
+                </a:gridCol>
+                <a:gridCol w="2519314">
+                  <a:extLst>
+                    <a:ext uri="{9D8B030D-6E8A-4147-A177-3AD203B41FA5}">
+                      <a16:colId xmlns:a16="http://schemas.microsoft.com/office/drawing/2014/main" val="1114257456"/>
+                    </a:ext>
+                  </a:extLst>
+                </a:gridCol>
+              </a:tblGrid>
+              <a:tr h="392698">
+                <a:tc>
+                  <a:txBody>
+                    <a:bodyPr/>
+                    <a:lstStyle/>
+                    <a:p>
+                      <a:pPr algn="ctr"/>
+                      <a:r>
+                        <a:rPr lang="en-US" altLang="ja-JP" dirty="0"/>
+                        <a:t>Category</a:t>
+                      </a:r>
+                      <a:endParaRPr lang="zh-CN" altLang="en-US" dirty="0"/>
+                    </a:p>
+                  </a:txBody>
+                  <a:tcPr/>
+                </a:tc>
+                <a:tc>
+                  <a:txBody>
+                    <a:bodyPr/>
+                    <a:lstStyle/>
+                    <a:p>
+                      <a:pPr algn="ctr"/>
+                      <a:r>
+                        <a:rPr lang="en-US" altLang="ja-JP" u="none" dirty="0">
+                          <a:solidFill>
+                            <a:schemeClr val="bg1"/>
+                          </a:solidFill>
+                          <a:hlinkClick r:id="rId2">
+                            <a:extLst>
+                              <a:ext uri="{A12FA001-AC4F-418D-AE19-62706E023703}">
+                                <ahyp:hlinkClr xmlns:ahyp="http://schemas.microsoft.com/office/drawing/2018/hyperlinkcolor" val="tx"/>
+                              </a:ext>
+                            </a:extLst>
+                          </a:hlinkClick>
+                        </a:rPr>
+                        <a:t>Azure</a:t>
+                      </a:r>
+                      <a:endParaRPr lang="zh-CN" altLang="en-US" u="none" dirty="0">
+                        <a:solidFill>
+                          <a:schemeClr val="bg1"/>
+                        </a:solidFill>
+                      </a:endParaRPr>
+                    </a:p>
+                  </a:txBody>
+                  <a:tcPr/>
+                </a:tc>
+                <a:tc>
+                  <a:txBody>
+                    <a:bodyPr/>
+                    <a:lstStyle/>
+                    <a:p>
+                      <a:pPr algn="ctr"/>
+                      <a:r>
+                        <a:rPr lang="en-US" altLang="ja-JP" dirty="0">
+                          <a:solidFill>
+                            <a:schemeClr val="bg1"/>
+                          </a:solidFill>
+                          <a:hlinkClick r:id="rId3">
+                            <a:extLst>
+                              <a:ext uri="{A12FA001-AC4F-418D-AE19-62706E023703}">
+                                <ahyp:hlinkClr xmlns:ahyp="http://schemas.microsoft.com/office/drawing/2018/hyperlinkcolor" val="tx"/>
+                              </a:ext>
+                            </a:extLst>
+                          </a:hlinkClick>
+                        </a:rPr>
+                        <a:t>AWS</a:t>
+                      </a:r>
+                      <a:endParaRPr lang="zh-CN" altLang="en-US" dirty="0">
+                        <a:solidFill>
+                          <a:schemeClr val="bg1"/>
+                        </a:solidFill>
+                      </a:endParaRPr>
+                    </a:p>
+                  </a:txBody>
+                  <a:tcPr/>
+                </a:tc>
+                <a:tc>
+                  <a:txBody>
+                    <a:bodyPr/>
+                    <a:lstStyle/>
+                    <a:p>
+                      <a:pPr algn="ctr"/>
+                      <a:r>
+                        <a:rPr lang="en-US" altLang="ja-JP" dirty="0">
+                          <a:solidFill>
+                            <a:schemeClr val="bg1"/>
+                          </a:solidFill>
+                          <a:hlinkClick r:id="rId4">
+                            <a:extLst>
+                              <a:ext uri="{A12FA001-AC4F-418D-AE19-62706E023703}">
+                                <ahyp:hlinkClr xmlns:ahyp="http://schemas.microsoft.com/office/drawing/2018/hyperlinkcolor" val="tx"/>
+                              </a:ext>
+                            </a:extLst>
+                          </a:hlinkClick>
+                        </a:rPr>
+                        <a:t>GCP</a:t>
+                      </a:r>
+                      <a:endParaRPr lang="zh-CN" altLang="en-US" dirty="0">
+                        <a:solidFill>
+                          <a:schemeClr val="bg1"/>
+                        </a:solidFill>
+                      </a:endParaRPr>
+                    </a:p>
+                  </a:txBody>
+                  <a:tcPr/>
+                </a:tc>
+                <a:extLst>
+                  <a:ext uri="{0D108BD9-81ED-4DB2-BD59-A6C34878D82A}">
+                    <a16:rowId xmlns:a16="http://schemas.microsoft.com/office/drawing/2014/main" val="460455147"/>
+                  </a:ext>
+                </a:extLst>
+              </a:tr>
+              <a:tr h="1310477">
+                <a:tc>
+                  <a:txBody>
+                    <a:bodyPr/>
+                    <a:lstStyle/>
+                    <a:p>
+                      <a:r>
+                        <a:rPr lang="en-US" altLang="ja-JP" dirty="0"/>
+                        <a:t>VM</a:t>
+                      </a:r>
+                      <a:r>
+                        <a:rPr lang="ja-JP" altLang="en-US" dirty="0"/>
+                        <a:t>配置</a:t>
+                      </a:r>
+                      <a:endParaRPr lang="zh-CN" altLang="en-US" dirty="0"/>
+                    </a:p>
+                  </a:txBody>
+                  <a:tcPr anchor="ctr"/>
+                </a:tc>
+                <a:tc>
+                  <a:txBody>
+                    <a:bodyPr/>
+                    <a:lstStyle/>
+                    <a:p>
+                      <a:r>
+                        <a:rPr lang="en-US" altLang="zh-CN" dirty="0"/>
+                        <a:t>NC4as T4 v3</a:t>
+                      </a:r>
+                    </a:p>
+                    <a:p>
+                      <a:r>
+                        <a:rPr lang="en-US" altLang="zh-CN" dirty="0"/>
+                        <a:t>CPU: 4 core</a:t>
+                      </a:r>
+                    </a:p>
+                    <a:p>
+                      <a:r>
+                        <a:rPr lang="en-US" altLang="zh-CN" dirty="0"/>
+                        <a:t>RAM: 28GB</a:t>
+                      </a:r>
+                    </a:p>
+                    <a:p>
+                      <a:r>
+                        <a:rPr lang="en-US" altLang="zh-CN" dirty="0"/>
+                        <a:t>GPU:1xT4</a:t>
+                      </a:r>
+                    </a:p>
+                    <a:p>
+                      <a:r>
+                        <a:rPr lang="en-US" altLang="zh-CN" dirty="0"/>
+                        <a:t>VRAM: 16GB</a:t>
+                      </a:r>
+                      <a:endParaRPr lang="zh-CN" altLang="en-US" dirty="0"/>
+                    </a:p>
+                  </a:txBody>
+                  <a:tcPr anchor="ctr"/>
+                </a:tc>
+                <a:tc>
+                  <a:txBody>
+                    <a:bodyPr/>
+                    <a:lstStyle/>
+                    <a:p>
+                      <a:r>
+                        <a:rPr lang="en-US" altLang="zh-CN" dirty="0"/>
+                        <a:t>g4dn.xlarge</a:t>
+                      </a:r>
+                    </a:p>
+                    <a:p>
+                      <a:r>
+                        <a:rPr lang="en-US" altLang="zh-CN" dirty="0"/>
+                        <a:t>CPU: 4 core</a:t>
+                      </a:r>
+                    </a:p>
+                    <a:p>
+                      <a:r>
+                        <a:rPr lang="en-US" altLang="zh-CN" dirty="0"/>
+                        <a:t>RAM: 16GB</a:t>
+                      </a:r>
+                    </a:p>
+                    <a:p>
+                      <a:r>
+                        <a:rPr lang="en-US" altLang="zh-CN" dirty="0"/>
+                        <a:t>GPU:1xT4</a:t>
+                      </a:r>
+                    </a:p>
+                    <a:p>
+                      <a:r>
+                        <a:rPr lang="en-US" altLang="zh-CN" dirty="0"/>
+                        <a:t>VRAM: 16GB</a:t>
+                      </a:r>
+                      <a:endParaRPr lang="zh-CN" altLang="en-US" dirty="0"/>
+                    </a:p>
+                  </a:txBody>
+                  <a:tcPr anchor="ctr"/>
+                </a:tc>
+                <a:tc>
+                  <a:txBody>
+                    <a:bodyPr/>
+                    <a:lstStyle/>
+                    <a:p>
+                      <a:r>
+                        <a:rPr lang="en-US" altLang="zh-CN" dirty="0"/>
+                        <a:t>g2-standard-4</a:t>
+                      </a:r>
+                    </a:p>
+                    <a:p>
+                      <a:r>
+                        <a:rPr lang="en-US" altLang="zh-CN" dirty="0"/>
+                        <a:t>CPU: 4 core</a:t>
+                      </a:r>
+                    </a:p>
+                    <a:p>
+                      <a:r>
+                        <a:rPr lang="en-US" altLang="zh-CN" dirty="0"/>
+                        <a:t>RAM: 16GB</a:t>
+                      </a:r>
+                    </a:p>
+                    <a:p>
+                      <a:r>
+                        <a:rPr lang="en-US" altLang="zh-CN" dirty="0"/>
+                        <a:t>GPU:1xL4</a:t>
+                      </a:r>
+                    </a:p>
+                    <a:p>
+                      <a:r>
+                        <a:rPr lang="en-US" altLang="zh-CN" dirty="0"/>
+                        <a:t>VRAM: 24GB</a:t>
+                      </a:r>
+                      <a:endParaRPr lang="zh-CN" altLang="en-US" dirty="0"/>
+                    </a:p>
+                  </a:txBody>
+                  <a:tcPr anchor="ctr"/>
+                </a:tc>
+                <a:extLst>
+                  <a:ext uri="{0D108BD9-81ED-4DB2-BD59-A6C34878D82A}">
+                    <a16:rowId xmlns:a16="http://schemas.microsoft.com/office/drawing/2014/main" val="3356126220"/>
+                  </a:ext>
+                </a:extLst>
+              </a:tr>
+              <a:tr h="1310477">
+                <a:tc>
+                  <a:txBody>
+                    <a:bodyPr/>
+                    <a:lstStyle/>
+                    <a:p>
+                      <a:r>
+                        <a:rPr lang="en-US" altLang="ja-JP" dirty="0"/>
+                        <a:t>VM</a:t>
+                      </a:r>
+                      <a:r>
+                        <a:rPr lang="ja-JP" altLang="en-US" dirty="0"/>
+                        <a:t>価格</a:t>
+                      </a:r>
+                      <a:endParaRPr lang="zh-CN" altLang="en-US" dirty="0"/>
+                    </a:p>
+                  </a:txBody>
+                  <a:tcPr anchor="ctr"/>
+                </a:tc>
+                <a:tc>
+                  <a:txBody>
+                    <a:bodyPr/>
+                    <a:lstStyle/>
+                    <a:p>
+                      <a:r>
+                        <a:rPr lang="en-US" altLang="zh-CN" dirty="0"/>
+                        <a:t>¥78,258.1166/month</a:t>
+                      </a:r>
+                      <a:endParaRPr lang="zh-CN" altLang="en-US" dirty="0"/>
+                    </a:p>
+                  </a:txBody>
+                  <a:tcPr anchor="ctr"/>
+                </a:tc>
+                <a:tc>
+                  <a:txBody>
+                    <a:bodyPr/>
+                    <a:lstStyle/>
+                    <a:p>
+                      <a:r>
+                        <a:rPr lang="en-US" altLang="zh-CN" dirty="0"/>
+                        <a:t>USD 0.71/hour</a:t>
+                      </a:r>
+                    </a:p>
+                    <a:p>
+                      <a:r>
+                        <a:rPr lang="en-US" altLang="zh-CN" dirty="0"/>
+                        <a:t>~¥76,680/month</a:t>
+                      </a:r>
+                    </a:p>
+                  </a:txBody>
+                  <a:tcPr anchor="ctr"/>
+                </a:tc>
+                <a:tc>
+                  <a:txBody>
+                    <a:bodyPr/>
+                    <a:lstStyle/>
+                    <a:p>
+                      <a:r>
+                        <a:rPr lang="en-US" altLang="zh-CN" dirty="0"/>
+                        <a:t>US$662.6312 /month</a:t>
+                      </a:r>
+                    </a:p>
+                    <a:p>
+                      <a:r>
+                        <a:rPr lang="en-US" altLang="zh-CN" dirty="0"/>
+                        <a:t>~¥99,394/month</a:t>
+                      </a:r>
+                    </a:p>
+                  </a:txBody>
+                  <a:tcPr anchor="ctr"/>
+                </a:tc>
+                <a:extLst>
+                  <a:ext uri="{0D108BD9-81ED-4DB2-BD59-A6C34878D82A}">
+                    <a16:rowId xmlns:a16="http://schemas.microsoft.com/office/drawing/2014/main" val="56370049"/>
+                  </a:ext>
+                </a:extLst>
+              </a:tr>
+            </a:tbl>
+          </a:graphicData>
+        </a:graphic>
+      </p:graphicFrame>
+    </p:spTree>
+    <p:extLst>
+      <p:ext uri="{BB962C8B-B14F-4D97-AF65-F5344CB8AC3E}">
+        <p14:creationId xmlns:p14="http://schemas.microsoft.com/office/powerpoint/2010/main" val="3658594149"/>
       </p:ext>
     </p:extLst>
   </p:cSld>

--- a/Research2.pptx
+++ b/Research2.pptx
@@ -5,7 +5,7 @@
     <p:sldMasterId id="2147483714" r:id="rId1"/>
   </p:sldMasterIdLst>
   <p:notesMasterIdLst>
-    <p:notesMasterId r:id="rId9"/>
+    <p:notesMasterId r:id="rId12"/>
   </p:notesMasterIdLst>
   <p:sldIdLst>
     <p:sldId id="257" r:id="rId2"/>
@@ -15,6 +15,9 @@
     <p:sldId id="261" r:id="rId6"/>
     <p:sldId id="262" r:id="rId7"/>
     <p:sldId id="263" r:id="rId8"/>
+    <p:sldId id="265" r:id="rId9"/>
+    <p:sldId id="266" r:id="rId10"/>
+    <p:sldId id="264" r:id="rId11"/>
   </p:sldIdLst>
   <p:sldSz cx="12192000" cy="6858000"/>
   <p:notesSz cx="6858000" cy="9144000"/>
@@ -5947,7 +5950,7 @@
           <a:p>
             <a:fld id="{CB883E1A-24A0-4B05-AA4C-56243B89A804}" type="datetimeFigureOut">
               <a:rPr lang="zh-CN" altLang="en-US" smtClean="0"/>
-              <a:t>2025/4/7</a:t>
+              <a:t>2025/4/17</a:t>
             </a:fld>
             <a:endParaRPr lang="zh-CN" altLang="en-US"/>
           </a:p>
@@ -6385,7 +6388,7 @@
           <a:p>
             <a:fld id="{3800F3C6-200C-4F82-8057-425A24E0A80A}" type="datetimeFigureOut">
               <a:rPr lang="zh-CN" altLang="en-US" smtClean="0"/>
-              <a:t>2025/4/7</a:t>
+              <a:t>2025/4/17</a:t>
             </a:fld>
             <a:endParaRPr lang="zh-CN" altLang="en-US"/>
           </a:p>
@@ -6700,7 +6703,7 @@
           <a:p>
             <a:fld id="{3800F3C6-200C-4F82-8057-425A24E0A80A}" type="datetimeFigureOut">
               <a:rPr lang="zh-CN" altLang="en-US" smtClean="0"/>
-              <a:t>2025/4/7</a:t>
+              <a:t>2025/4/17</a:t>
             </a:fld>
             <a:endParaRPr lang="zh-CN" altLang="en-US"/>
           </a:p>
@@ -6922,7 +6925,7 @@
           <a:p>
             <a:fld id="{3800F3C6-200C-4F82-8057-425A24E0A80A}" type="datetimeFigureOut">
               <a:rPr lang="zh-CN" altLang="en-US" smtClean="0"/>
-              <a:t>2025/4/7</a:t>
+              <a:t>2025/4/17</a:t>
             </a:fld>
             <a:endParaRPr lang="zh-CN" altLang="en-US"/>
           </a:p>
@@ -7213,7 +7216,7 @@
           <a:p>
             <a:fld id="{3800F3C6-200C-4F82-8057-425A24E0A80A}" type="datetimeFigureOut">
               <a:rPr lang="zh-CN" altLang="en-US" smtClean="0"/>
-              <a:t>2025/4/7</a:t>
+              <a:t>2025/4/17</a:t>
             </a:fld>
             <a:endParaRPr lang="zh-CN" altLang="en-US"/>
           </a:p>
@@ -7667,7 +7670,7 @@
           <a:p>
             <a:fld id="{3800F3C6-200C-4F82-8057-425A24E0A80A}" type="datetimeFigureOut">
               <a:rPr lang="zh-CN" altLang="en-US" smtClean="0"/>
-              <a:t>2025/4/7</a:t>
+              <a:t>2025/4/17</a:t>
             </a:fld>
             <a:endParaRPr lang="zh-CN" altLang="en-US"/>
           </a:p>
@@ -8243,7 +8246,7 @@
           <a:p>
             <a:fld id="{3800F3C6-200C-4F82-8057-425A24E0A80A}" type="datetimeFigureOut">
               <a:rPr lang="zh-CN" altLang="en-US" smtClean="0"/>
-              <a:t>2025/4/7</a:t>
+              <a:t>2025/4/17</a:t>
             </a:fld>
             <a:endParaRPr lang="zh-CN" altLang="en-US"/>
           </a:p>
@@ -9104,7 +9107,7 @@
           <a:p>
             <a:fld id="{3800F3C6-200C-4F82-8057-425A24E0A80A}" type="datetimeFigureOut">
               <a:rPr lang="zh-CN" altLang="en-US" smtClean="0"/>
-              <a:t>2025/4/7</a:t>
+              <a:t>2025/4/17</a:t>
             </a:fld>
             <a:endParaRPr lang="zh-CN" altLang="en-US"/>
           </a:p>
@@ -9309,7 +9312,7 @@
           <a:p>
             <a:fld id="{3800F3C6-200C-4F82-8057-425A24E0A80A}" type="datetimeFigureOut">
               <a:rPr lang="zh-CN" altLang="en-US" smtClean="0"/>
-              <a:t>2025/4/7</a:t>
+              <a:t>2025/4/17</a:t>
             </a:fld>
             <a:endParaRPr lang="zh-CN" altLang="en-US"/>
           </a:p>
@@ -9523,7 +9526,7 @@
           <a:p>
             <a:fld id="{3800F3C6-200C-4F82-8057-425A24E0A80A}" type="datetimeFigureOut">
               <a:rPr lang="zh-CN" altLang="en-US" smtClean="0"/>
-              <a:t>2025/4/7</a:t>
+              <a:t>2025/4/17</a:t>
             </a:fld>
             <a:endParaRPr lang="zh-CN" altLang="en-US"/>
           </a:p>
@@ -9728,7 +9731,7 @@
           <a:p>
             <a:fld id="{3800F3C6-200C-4F82-8057-425A24E0A80A}" type="datetimeFigureOut">
               <a:rPr lang="zh-CN" altLang="en-US" smtClean="0"/>
-              <a:t>2025/4/7</a:t>
+              <a:t>2025/4/17</a:t>
             </a:fld>
             <a:endParaRPr lang="zh-CN" altLang="en-US"/>
           </a:p>
@@ -10008,7 +10011,7 @@
           <a:p>
             <a:fld id="{3800F3C6-200C-4F82-8057-425A24E0A80A}" type="datetimeFigureOut">
               <a:rPr lang="zh-CN" altLang="en-US" smtClean="0"/>
-              <a:t>2025/4/7</a:t>
+              <a:t>2025/4/17</a:t>
             </a:fld>
             <a:endParaRPr lang="zh-CN" altLang="en-US"/>
           </a:p>
@@ -10275,7 +10278,7 @@
           <a:p>
             <a:fld id="{3800F3C6-200C-4F82-8057-425A24E0A80A}" type="datetimeFigureOut">
               <a:rPr lang="zh-CN" altLang="en-US" smtClean="0"/>
-              <a:t>2025/4/7</a:t>
+              <a:t>2025/4/17</a:t>
             </a:fld>
             <a:endParaRPr lang="zh-CN" altLang="en-US"/>
           </a:p>
@@ -10690,7 +10693,7 @@
           <a:p>
             <a:fld id="{3800F3C6-200C-4F82-8057-425A24E0A80A}" type="datetimeFigureOut">
               <a:rPr lang="zh-CN" altLang="en-US" smtClean="0"/>
-              <a:t>2025/4/7</a:t>
+              <a:t>2025/4/17</a:t>
             </a:fld>
             <a:endParaRPr lang="zh-CN" altLang="en-US"/>
           </a:p>
@@ -10838,7 +10841,7 @@
           <a:p>
             <a:fld id="{3800F3C6-200C-4F82-8057-425A24E0A80A}" type="datetimeFigureOut">
               <a:rPr lang="zh-CN" altLang="en-US" smtClean="0"/>
-              <a:t>2025/4/7</a:t>
+              <a:t>2025/4/17</a:t>
             </a:fld>
             <a:endParaRPr lang="zh-CN" altLang="en-US"/>
           </a:p>
@@ -10963,7 +10966,7 @@
           <a:p>
             <a:fld id="{3800F3C6-200C-4F82-8057-425A24E0A80A}" type="datetimeFigureOut">
               <a:rPr lang="zh-CN" altLang="en-US" smtClean="0"/>
-              <a:t>2025/4/7</a:t>
+              <a:t>2025/4/17</a:t>
             </a:fld>
             <a:endParaRPr lang="zh-CN" altLang="en-US"/>
           </a:p>
@@ -11242,7 +11245,7 @@
           <a:p>
             <a:fld id="{3800F3C6-200C-4F82-8057-425A24E0A80A}" type="datetimeFigureOut">
               <a:rPr lang="zh-CN" altLang="en-US" smtClean="0"/>
-              <a:t>2025/4/7</a:t>
+              <a:t>2025/4/17</a:t>
             </a:fld>
             <a:endParaRPr lang="zh-CN" altLang="en-US"/>
           </a:p>
@@ -11557,7 +11560,7 @@
           <a:p>
             <a:fld id="{3800F3C6-200C-4F82-8057-425A24E0A80A}" type="datetimeFigureOut">
               <a:rPr lang="zh-CN" altLang="en-US" smtClean="0"/>
-              <a:t>2025/4/7</a:t>
+              <a:t>2025/4/17</a:t>
             </a:fld>
             <a:endParaRPr lang="zh-CN" altLang="en-US"/>
           </a:p>
@@ -11810,7 +11813,7 @@
           <a:p>
             <a:fld id="{3800F3C6-200C-4F82-8057-425A24E0A80A}" type="datetimeFigureOut">
               <a:rPr lang="zh-CN" altLang="en-US" smtClean="0"/>
-              <a:t>2025/4/7</a:t>
+              <a:t>2025/4/17</a:t>
             </a:fld>
             <a:endParaRPr lang="zh-CN" altLang="en-US"/>
           </a:p>
@@ -12766,6 +12769,737 @@
 </p:sld>
 </file>
 
+<file path=ppt/slides/slide10.xml><?xml version="1.0" encoding="utf-8"?>
+<p:sld xmlns:a="http://schemas.openxmlformats.org/drawingml/2006/main" xmlns:r="http://schemas.openxmlformats.org/officeDocument/2006/relationships" xmlns:p="http://schemas.openxmlformats.org/presentationml/2006/main">
+  <p:cSld>
+    <p:spTree>
+      <p:nvGrpSpPr>
+        <p:cNvPr id="1" name="">
+          <a:extLst>
+            <a:ext uri="{FF2B5EF4-FFF2-40B4-BE49-F238E27FC236}">
+              <a16:creationId xmlns:a16="http://schemas.microsoft.com/office/drawing/2014/main" id="{16B26405-811A-CEFF-C3D0-D7708E7075AC}"/>
+            </a:ext>
+          </a:extLst>
+        </p:cNvPr>
+        <p:cNvGrpSpPr/>
+        <p:nvPr/>
+      </p:nvGrpSpPr>
+      <p:grpSpPr>
+        <a:xfrm>
+          <a:off x="0" y="0"/>
+          <a:ext cx="0" cy="0"/>
+          <a:chOff x="0" y="0"/>
+          <a:chExt cx="0" cy="0"/>
+        </a:xfrm>
+      </p:grpSpPr>
+      <p:sp>
+        <p:nvSpPr>
+          <p:cNvPr id="4" name="文本框 3">
+            <a:extLst>
+              <a:ext uri="{FF2B5EF4-FFF2-40B4-BE49-F238E27FC236}">
+                <a16:creationId xmlns:a16="http://schemas.microsoft.com/office/drawing/2014/main" id="{67C7CDA9-B709-3C37-9D47-E67F27B9C535}"/>
+              </a:ext>
+            </a:extLst>
+          </p:cNvPr>
+          <p:cNvSpPr txBox="1"/>
+          <p:nvPr/>
+        </p:nvSpPr>
+        <p:spPr>
+          <a:xfrm>
+            <a:off x="575036" y="707011"/>
+            <a:ext cx="10246936" cy="369332"/>
+          </a:xfrm>
+          <a:prstGeom prst="rect">
+            <a:avLst/>
+          </a:prstGeom>
+          <a:noFill/>
+        </p:spPr>
+        <p:txBody>
+          <a:bodyPr wrap="square" rtlCol="0">
+            <a:spAutoFit/>
+          </a:bodyPr>
+          <a:lstStyle/>
+          <a:p>
+            <a:r>
+              <a:rPr lang="en-US" altLang="ja-JP" dirty="0">
+                <a:latin typeface="Arial" panose="020B0604020202020204" pitchFamily="34" charset="0"/>
+                <a:cs typeface="Arial" panose="020B0604020202020204" pitchFamily="34" charset="0"/>
+              </a:rPr>
+              <a:t>OSS</a:t>
+            </a:r>
+            <a:r>
+              <a:rPr lang="ja-JP" altLang="en-US" dirty="0">
+                <a:latin typeface="Arial" panose="020B0604020202020204" pitchFamily="34" charset="0"/>
+                <a:cs typeface="Arial" panose="020B0604020202020204" pitchFamily="34" charset="0"/>
+              </a:rPr>
+              <a:t>版の商用環境の利用について</a:t>
+            </a:r>
+            <a:endParaRPr lang="zh-CN" altLang="en-US" dirty="0">
+              <a:latin typeface="Arial" panose="020B0604020202020204" pitchFamily="34" charset="0"/>
+              <a:cs typeface="Arial" panose="020B0604020202020204" pitchFamily="34" charset="0"/>
+            </a:endParaRPr>
+          </a:p>
+        </p:txBody>
+      </p:sp>
+      <p:cxnSp>
+        <p:nvCxnSpPr>
+          <p:cNvPr id="6" name="直接连接符 5">
+            <a:extLst>
+              <a:ext uri="{FF2B5EF4-FFF2-40B4-BE49-F238E27FC236}">
+                <a16:creationId xmlns:a16="http://schemas.microsoft.com/office/drawing/2014/main" id="{ED443524-CE50-0FE5-7FA6-D3A4BA3804BF}"/>
+              </a:ext>
+            </a:extLst>
+          </p:cNvPr>
+          <p:cNvCxnSpPr>
+            <a:cxnSpLocks/>
+          </p:cNvCxnSpPr>
+          <p:nvPr/>
+        </p:nvCxnSpPr>
+        <p:spPr>
+          <a:xfrm>
+            <a:off x="480767" y="1216058"/>
+            <a:ext cx="11019934" cy="0"/>
+          </a:xfrm>
+          <a:prstGeom prst="line">
+            <a:avLst/>
+          </a:prstGeom>
+        </p:spPr>
+        <p:style>
+          <a:lnRef idx="1">
+            <a:schemeClr val="accent1"/>
+          </a:lnRef>
+          <a:fillRef idx="0">
+            <a:schemeClr val="accent1"/>
+          </a:fillRef>
+          <a:effectRef idx="0">
+            <a:schemeClr val="accent1"/>
+          </a:effectRef>
+          <a:fontRef idx="minor">
+            <a:schemeClr val="tx1"/>
+          </a:fontRef>
+        </p:style>
+      </p:cxnSp>
+      <p:sp>
+        <p:nvSpPr>
+          <p:cNvPr id="2" name="文本框 1">
+            <a:extLst>
+              <a:ext uri="{FF2B5EF4-FFF2-40B4-BE49-F238E27FC236}">
+                <a16:creationId xmlns:a16="http://schemas.microsoft.com/office/drawing/2014/main" id="{81517CD7-4A18-FB2F-1728-0CA28107BAC2}"/>
+              </a:ext>
+            </a:extLst>
+          </p:cNvPr>
+          <p:cNvSpPr txBox="1"/>
+          <p:nvPr/>
+        </p:nvSpPr>
+        <p:spPr>
+          <a:xfrm>
+            <a:off x="575036" y="1459348"/>
+            <a:ext cx="10595728" cy="4578176"/>
+          </a:xfrm>
+          <a:prstGeom prst="rect">
+            <a:avLst/>
+          </a:prstGeom>
+          <a:noFill/>
+        </p:spPr>
+        <p:txBody>
+          <a:bodyPr wrap="square" rtlCol="0">
+            <a:spAutoFit/>
+          </a:bodyPr>
+          <a:lstStyle/>
+          <a:p>
+            <a:pPr marL="285750" indent="-285750">
+              <a:buFont typeface="Arial" panose="020B0604020202020204" pitchFamily="34" charset="0"/>
+              <a:buChar char="•"/>
+            </a:pPr>
+            <a:r>
+              <a:rPr lang="en-US" altLang="ja-JP" sz="1600" dirty="0">
+                <a:latin typeface="Arial" panose="020B0604020202020204" pitchFamily="34" charset="0"/>
+                <a:cs typeface="Arial" panose="020B0604020202020204" pitchFamily="34" charset="0"/>
+              </a:rPr>
+              <a:t>Dify</a:t>
+            </a:r>
+            <a:r>
+              <a:rPr lang="ja-JP" altLang="en-US" sz="1600" dirty="0">
+                <a:latin typeface="Arial" panose="020B0604020202020204" pitchFamily="34" charset="0"/>
+                <a:cs typeface="Arial" panose="020B0604020202020204" pitchFamily="34" charset="0"/>
+              </a:rPr>
+              <a:t>の</a:t>
+            </a:r>
+            <a:r>
+              <a:rPr lang="en-US" altLang="ja-JP" sz="1600" dirty="0">
+                <a:latin typeface="Arial" panose="020B0604020202020204" pitchFamily="34" charset="0"/>
+                <a:cs typeface="Arial" panose="020B0604020202020204" pitchFamily="34" charset="0"/>
+              </a:rPr>
+              <a:t>OSS</a:t>
+            </a:r>
+            <a:r>
+              <a:rPr lang="ja-JP" altLang="en-US" sz="1600" dirty="0">
+                <a:latin typeface="Arial" panose="020B0604020202020204" pitchFamily="34" charset="0"/>
+                <a:cs typeface="Arial" panose="020B0604020202020204" pitchFamily="34" charset="0"/>
+              </a:rPr>
+              <a:t>版は、「</a:t>
+            </a:r>
+            <a:r>
+              <a:rPr lang="en-US" altLang="ja-JP" sz="1600" dirty="0">
+                <a:latin typeface="Arial" panose="020B0604020202020204" pitchFamily="34" charset="0"/>
+                <a:cs typeface="Arial" panose="020B0604020202020204" pitchFamily="34" charset="0"/>
+              </a:rPr>
+              <a:t>Apache License 2.0</a:t>
+            </a:r>
+            <a:r>
+              <a:rPr lang="ja-JP" altLang="en-US" sz="1600" dirty="0">
+                <a:latin typeface="Arial" panose="020B0604020202020204" pitchFamily="34" charset="0"/>
+                <a:cs typeface="Arial" panose="020B0604020202020204" pitchFamily="34" charset="0"/>
+              </a:rPr>
+              <a:t>」をベースにした修正版ライセンスの下で提供されています。</a:t>
+            </a:r>
+            <a:endParaRPr lang="en-US" altLang="ja-JP" sz="1600" dirty="0">
+              <a:latin typeface="Arial" panose="020B0604020202020204" pitchFamily="34" charset="0"/>
+              <a:cs typeface="Arial" panose="020B0604020202020204" pitchFamily="34" charset="0"/>
+            </a:endParaRPr>
+          </a:p>
+          <a:p>
+            <a:pPr marL="285750" indent="-285750">
+              <a:buFont typeface="Arial" panose="020B0604020202020204" pitchFamily="34" charset="0"/>
+              <a:buChar char="•"/>
+            </a:pPr>
+            <a:endParaRPr lang="en-US" altLang="ja-JP" sz="1600" dirty="0">
+              <a:latin typeface="Arial" panose="020B0604020202020204" pitchFamily="34" charset="0"/>
+              <a:cs typeface="Arial" panose="020B0604020202020204" pitchFamily="34" charset="0"/>
+            </a:endParaRPr>
+          </a:p>
+          <a:p>
+            <a:pPr marL="285750" indent="-285750">
+              <a:buFont typeface="Arial" panose="020B0604020202020204" pitchFamily="34" charset="0"/>
+              <a:buChar char="•"/>
+            </a:pPr>
+            <a:r>
+              <a:rPr lang="en-US" altLang="ja-JP" sz="1600" dirty="0">
+                <a:latin typeface="Arial" panose="020B0604020202020204" pitchFamily="34" charset="0"/>
+                <a:cs typeface="Arial" panose="020B0604020202020204" pitchFamily="34" charset="0"/>
+              </a:rPr>
+              <a:t>OSS</a:t>
+            </a:r>
+            <a:r>
+              <a:rPr lang="ja-JP" altLang="en-US" sz="1600" dirty="0">
+                <a:latin typeface="Arial" panose="020B0604020202020204" pitchFamily="34" charset="0"/>
+                <a:cs typeface="Arial" panose="020B0604020202020204" pitchFamily="34" charset="0"/>
+              </a:rPr>
+              <a:t>版は、自社内での利用や、自社サービスのバックエンドとしての利用など、多くの商用目的で無料で利用できます。しかし、</a:t>
+            </a:r>
+            <a:r>
+              <a:rPr lang="en-US" altLang="ja-JP" sz="1600" dirty="0">
+                <a:latin typeface="Arial" panose="020B0604020202020204" pitchFamily="34" charset="0"/>
+                <a:cs typeface="Arial" panose="020B0604020202020204" pitchFamily="34" charset="0"/>
+              </a:rPr>
+              <a:t>Dify</a:t>
+            </a:r>
+            <a:r>
+              <a:rPr lang="ja-JP" altLang="en-US" sz="1600" dirty="0">
+                <a:latin typeface="Arial" panose="020B0604020202020204" pitchFamily="34" charset="0"/>
+                <a:cs typeface="Arial" panose="020B0604020202020204" pitchFamily="34" charset="0"/>
+              </a:rPr>
+              <a:t>自体を</a:t>
+            </a:r>
+            <a:r>
+              <a:rPr lang="en-US" altLang="ja-JP" sz="1600" dirty="0">
+                <a:latin typeface="Arial" panose="020B0604020202020204" pitchFamily="34" charset="0"/>
+                <a:cs typeface="Arial" panose="020B0604020202020204" pitchFamily="34" charset="0"/>
+              </a:rPr>
+              <a:t>SaaS</a:t>
+            </a:r>
+            <a:r>
+              <a:rPr lang="ja-JP" altLang="en-US" sz="1600" dirty="0">
+                <a:latin typeface="Arial" panose="020B0604020202020204" pitchFamily="34" charset="0"/>
+                <a:cs typeface="Arial" panose="020B0604020202020204" pitchFamily="34" charset="0"/>
+              </a:rPr>
+              <a:t>のようなマルチテナントサービスとして他者に提供する場合や、</a:t>
+            </a:r>
+            <a:r>
+              <a:rPr lang="en-US" altLang="ja-JP" sz="1600" dirty="0">
+                <a:latin typeface="Arial" panose="020B0604020202020204" pitchFamily="34" charset="0"/>
+                <a:cs typeface="Arial" panose="020B0604020202020204" pitchFamily="34" charset="0"/>
+              </a:rPr>
+              <a:t>Web</a:t>
+            </a:r>
+            <a:r>
+              <a:rPr lang="ja-JP" altLang="en-US" sz="1600" dirty="0">
+                <a:latin typeface="Arial" panose="020B0604020202020204" pitchFamily="34" charset="0"/>
+                <a:cs typeface="Arial" panose="020B0604020202020204" pitchFamily="34" charset="0"/>
+              </a:rPr>
+              <a:t>インターフェースのロゴ・著作権表示を変更・削除する場合には、別途</a:t>
+            </a:r>
+            <a:r>
+              <a:rPr lang="en-US" altLang="ja-JP" sz="1600" dirty="0">
+                <a:latin typeface="Arial" panose="020B0604020202020204" pitchFamily="34" charset="0"/>
+                <a:cs typeface="Arial" panose="020B0604020202020204" pitchFamily="34" charset="0"/>
+              </a:rPr>
+              <a:t>Dify</a:t>
+            </a:r>
+            <a:r>
+              <a:rPr lang="ja-JP" altLang="en-US" sz="1600" dirty="0">
+                <a:latin typeface="Arial" panose="020B0604020202020204" pitchFamily="34" charset="0"/>
+                <a:cs typeface="Arial" panose="020B0604020202020204" pitchFamily="34" charset="0"/>
+              </a:rPr>
+              <a:t>との間で商用ライセンス契約が必要になります。</a:t>
+            </a:r>
+            <a:endParaRPr lang="en-US" altLang="ja-JP" sz="1600" dirty="0">
+              <a:latin typeface="Arial" panose="020B0604020202020204" pitchFamily="34" charset="0"/>
+              <a:cs typeface="Arial" panose="020B0604020202020204" pitchFamily="34" charset="0"/>
+            </a:endParaRPr>
+          </a:p>
+          <a:p>
+            <a:pPr marL="285750" indent="-285750">
+              <a:buFont typeface="Arial" panose="020B0604020202020204" pitchFamily="34" charset="0"/>
+              <a:buChar char="•"/>
+            </a:pPr>
+            <a:endParaRPr lang="en-US" altLang="ja-JP" sz="1600" b="1" i="0" dirty="0">
+              <a:solidFill>
+                <a:srgbClr val="1A1C1E"/>
+              </a:solidFill>
+              <a:effectLst/>
+              <a:latin typeface="Arial" panose="020B0604020202020204" pitchFamily="34" charset="0"/>
+              <a:ea typeface="+mj-ea"/>
+              <a:cs typeface="Arial" panose="020B0604020202020204" pitchFamily="34" charset="0"/>
+            </a:endParaRPr>
+          </a:p>
+          <a:p>
+            <a:pPr marL="285750" indent="-285750">
+              <a:buFont typeface="Arial" panose="020B0604020202020204" pitchFamily="34" charset="0"/>
+              <a:buChar char="•"/>
+            </a:pPr>
+            <a:r>
+              <a:rPr lang="ja-JP" altLang="en-US" sz="1600" b="1" i="0" dirty="0">
+                <a:solidFill>
+                  <a:srgbClr val="1A1C1E"/>
+                </a:solidFill>
+                <a:effectLst/>
+                <a:latin typeface="+mj-ea"/>
+                <a:ea typeface="+mj-ea"/>
+              </a:rPr>
+              <a:t>マルチテナントサービスとしての提供</a:t>
+            </a:r>
+            <a:r>
+              <a:rPr lang="en-US" altLang="ja-JP" sz="1600" b="1" i="0" dirty="0">
+                <a:solidFill>
+                  <a:srgbClr val="1A1C1E"/>
+                </a:solidFill>
+                <a:effectLst/>
+                <a:latin typeface="+mj-ea"/>
+                <a:ea typeface="+mj-ea"/>
+              </a:rPr>
+              <a:t>:</a:t>
+            </a:r>
+          </a:p>
+          <a:p>
+            <a:pPr marL="742950" lvl="1" indent="-285750">
+              <a:buFont typeface="Wingdings" panose="05000000000000000000" pitchFamily="2" charset="2"/>
+              <a:buChar char="ü"/>
+            </a:pPr>
+            <a:r>
+              <a:rPr lang="en-US" altLang="ja-JP" sz="1600" b="0" i="0" dirty="0">
+                <a:solidFill>
+                  <a:srgbClr val="1A1C1E"/>
+                </a:solidFill>
+                <a:effectLst/>
+                <a:latin typeface="+mj-ea"/>
+                <a:ea typeface="+mj-ea"/>
+              </a:rPr>
+              <a:t>Dify</a:t>
+            </a:r>
+            <a:r>
+              <a:rPr lang="ja-JP" altLang="en-US" sz="1600" b="0" i="0" dirty="0">
+                <a:solidFill>
+                  <a:srgbClr val="1A1C1E"/>
+                </a:solidFill>
+                <a:effectLst/>
+                <a:latin typeface="+mj-ea"/>
+                <a:ea typeface="+mj-ea"/>
+              </a:rPr>
+              <a:t>からの書面による明示的な許可がない限り、</a:t>
+            </a:r>
+            <a:r>
+              <a:rPr lang="en-US" altLang="ja-JP" sz="1600" b="0" i="0" dirty="0">
+                <a:solidFill>
+                  <a:srgbClr val="1A1C1E"/>
+                </a:solidFill>
+                <a:effectLst/>
+                <a:latin typeface="+mj-ea"/>
+                <a:ea typeface="+mj-ea"/>
+              </a:rPr>
+              <a:t>Dify</a:t>
+            </a:r>
+            <a:r>
+              <a:rPr lang="ja-JP" altLang="en-US" sz="1600" b="0" i="0" dirty="0">
+                <a:solidFill>
+                  <a:srgbClr val="1A1C1E"/>
+                </a:solidFill>
+                <a:effectLst/>
+                <a:latin typeface="+mj-ea"/>
+                <a:ea typeface="+mj-ea"/>
+              </a:rPr>
+              <a:t>のソースコードを使用</a:t>
+            </a:r>
+            <a:r>
+              <a:rPr lang="ja-JP" altLang="en-US" sz="1600" i="0" dirty="0">
+                <a:solidFill>
+                  <a:srgbClr val="1A1C1E"/>
+                </a:solidFill>
+                <a:effectLst/>
+                <a:latin typeface="+mj-ea"/>
+                <a:ea typeface="+mj-ea"/>
+              </a:rPr>
+              <a:t>してマルチテナント環境を構築し、サービスとして提供することはできません。</a:t>
+            </a:r>
+            <a:endParaRPr lang="en-US" altLang="ja-JP" sz="1600" dirty="0">
+              <a:solidFill>
+                <a:srgbClr val="1A1C1E"/>
+              </a:solidFill>
+              <a:latin typeface="+mj-ea"/>
+              <a:ea typeface="+mj-ea"/>
+            </a:endParaRPr>
+          </a:p>
+          <a:p>
+            <a:pPr marL="742950" lvl="1" indent="-285750">
+              <a:buFont typeface="Wingdings" panose="05000000000000000000" pitchFamily="2" charset="2"/>
+              <a:buChar char="ü"/>
+            </a:pPr>
+            <a:r>
+              <a:rPr lang="ja-JP" altLang="en-US" sz="1600" b="0" i="0" dirty="0">
+                <a:solidFill>
+                  <a:srgbClr val="1A1C1E"/>
+                </a:solidFill>
+                <a:effectLst/>
+                <a:latin typeface="+mj-ea"/>
+                <a:ea typeface="+mj-ea"/>
+              </a:rPr>
+              <a:t>ここで言う「テナント」とは、</a:t>
+            </a:r>
+            <a:r>
+              <a:rPr lang="en-US" altLang="ja-JP" sz="1600" b="0" i="0" dirty="0">
+                <a:solidFill>
+                  <a:srgbClr val="1A1C1E"/>
+                </a:solidFill>
+                <a:effectLst/>
+                <a:latin typeface="+mj-ea"/>
+                <a:ea typeface="+mj-ea"/>
+              </a:rPr>
+              <a:t>Dify</a:t>
+            </a:r>
+            <a:r>
+              <a:rPr lang="ja-JP" altLang="en-US" sz="1600" b="0" i="0" dirty="0">
+                <a:solidFill>
+                  <a:srgbClr val="1A1C1E"/>
+                </a:solidFill>
+                <a:effectLst/>
+                <a:latin typeface="+mj-ea"/>
+                <a:ea typeface="+mj-ea"/>
+              </a:rPr>
+              <a:t>における「</a:t>
+            </a:r>
+            <a:r>
+              <a:rPr lang="en-US" altLang="ja-JP" sz="1600" b="0" i="0" dirty="0">
+                <a:solidFill>
+                  <a:srgbClr val="1A1C1E"/>
+                </a:solidFill>
+                <a:effectLst/>
+                <a:latin typeface="+mj-ea"/>
+                <a:ea typeface="+mj-ea"/>
+              </a:rPr>
+              <a:t>Workspace</a:t>
+            </a:r>
+            <a:r>
+              <a:rPr lang="ja-JP" altLang="en-US" sz="1600" b="0" i="0" dirty="0">
+                <a:solidFill>
+                  <a:srgbClr val="1A1C1E"/>
+                </a:solidFill>
+                <a:effectLst/>
+                <a:latin typeface="+mj-ea"/>
+                <a:ea typeface="+mj-ea"/>
+              </a:rPr>
+              <a:t>」に相当します。つまり、複数の顧客や組織に対して、それぞれ独立したワークスペースを提供するような</a:t>
+            </a:r>
+            <a:r>
+              <a:rPr lang="en-US" altLang="ja-JP" sz="1600" b="0" i="0" dirty="0">
+                <a:solidFill>
+                  <a:srgbClr val="1A1C1E"/>
+                </a:solidFill>
+                <a:effectLst/>
+                <a:latin typeface="+mj-ea"/>
+                <a:ea typeface="+mj-ea"/>
+              </a:rPr>
+              <a:t>SaaS</a:t>
+            </a:r>
+            <a:r>
+              <a:rPr lang="ja-JP" altLang="en-US" sz="1600" b="0" i="0" dirty="0">
+                <a:solidFill>
+                  <a:srgbClr val="1A1C1E"/>
+                </a:solidFill>
+                <a:effectLst/>
+                <a:latin typeface="+mj-ea"/>
+                <a:ea typeface="+mj-ea"/>
+              </a:rPr>
+              <a:t>形態での利用は、標準の</a:t>
+            </a:r>
+            <a:r>
+              <a:rPr lang="en-US" altLang="ja-JP" sz="1600" b="0" i="0" dirty="0">
+                <a:solidFill>
+                  <a:srgbClr val="1A1C1E"/>
+                </a:solidFill>
+                <a:effectLst/>
+                <a:latin typeface="+mj-ea"/>
+                <a:ea typeface="+mj-ea"/>
+              </a:rPr>
+              <a:t>OSS</a:t>
+            </a:r>
+            <a:r>
+              <a:rPr lang="ja-JP" altLang="en-US" sz="1600" b="0" i="0" dirty="0">
+                <a:solidFill>
+                  <a:srgbClr val="1A1C1E"/>
+                </a:solidFill>
+                <a:effectLst/>
+                <a:latin typeface="+mj-ea"/>
+                <a:ea typeface="+mj-ea"/>
+              </a:rPr>
+              <a:t>ライセンスでは許可されておらず、商用ライセンスが必要となります。</a:t>
+            </a:r>
+            <a:endParaRPr lang="en-US" altLang="ja-JP" sz="1600" b="0" i="0" dirty="0">
+              <a:solidFill>
+                <a:srgbClr val="1A1C1E"/>
+              </a:solidFill>
+              <a:effectLst/>
+              <a:latin typeface="+mj-ea"/>
+              <a:ea typeface="+mj-ea"/>
+            </a:endParaRPr>
+          </a:p>
+          <a:p>
+            <a:pPr marL="742950" lvl="1" indent="-285750">
+              <a:buFont typeface="Wingdings" panose="05000000000000000000" pitchFamily="2" charset="2"/>
+              <a:buChar char="ü"/>
+            </a:pPr>
+            <a:endParaRPr lang="ja-JP" altLang="en-US" sz="1600" b="0" i="0" dirty="0">
+              <a:solidFill>
+                <a:srgbClr val="1A1C1E"/>
+              </a:solidFill>
+              <a:effectLst/>
+              <a:latin typeface="+mj-ea"/>
+              <a:ea typeface="+mj-ea"/>
+            </a:endParaRPr>
+          </a:p>
+          <a:p>
+            <a:pPr marL="285750" indent="-285750" algn="l">
+              <a:lnSpc>
+                <a:spcPts val="1500"/>
+              </a:lnSpc>
+              <a:spcAft>
+                <a:spcPts val="225"/>
+              </a:spcAft>
+              <a:buFont typeface="Arial" panose="020B0604020202020204" pitchFamily="34" charset="0"/>
+              <a:buChar char="•"/>
+            </a:pPr>
+            <a:r>
+              <a:rPr lang="ja-JP" altLang="en-US" sz="1600" b="1" i="0" dirty="0">
+                <a:solidFill>
+                  <a:srgbClr val="1A1C1E"/>
+                </a:solidFill>
+                <a:effectLst/>
+                <a:latin typeface="+mj-ea"/>
+                <a:ea typeface="+mj-ea"/>
+              </a:rPr>
+              <a:t>ロゴおよび著作権情報の変更・削除</a:t>
+            </a:r>
+            <a:r>
+              <a:rPr lang="en-US" altLang="ja-JP" sz="1600" b="1" i="0" dirty="0">
+                <a:solidFill>
+                  <a:srgbClr val="1A1C1E"/>
+                </a:solidFill>
+                <a:effectLst/>
+                <a:latin typeface="+mj-ea"/>
+                <a:ea typeface="+mj-ea"/>
+              </a:rPr>
+              <a:t>:</a:t>
+            </a:r>
+            <a:endParaRPr lang="ja-JP" altLang="en-US" sz="1600" b="0" i="0" dirty="0">
+              <a:solidFill>
+                <a:srgbClr val="1A1C1E"/>
+              </a:solidFill>
+              <a:effectLst/>
+              <a:latin typeface="+mj-ea"/>
+              <a:ea typeface="+mj-ea"/>
+            </a:endParaRPr>
+          </a:p>
+          <a:p>
+            <a:pPr marL="742950" lvl="1" indent="-285750">
+              <a:lnSpc>
+                <a:spcPts val="1500"/>
+              </a:lnSpc>
+              <a:spcAft>
+                <a:spcPts val="225"/>
+              </a:spcAft>
+              <a:buFont typeface="Wingdings" panose="05000000000000000000" pitchFamily="2" charset="2"/>
+              <a:buChar char="ü"/>
+            </a:pPr>
+            <a:r>
+              <a:rPr lang="en-US" altLang="ja-JP" sz="1600" dirty="0">
+                <a:solidFill>
+                  <a:srgbClr val="1A1C1E"/>
+                </a:solidFill>
+                <a:latin typeface="+mj-ea"/>
+                <a:ea typeface="+mj-ea"/>
+              </a:rPr>
+              <a:t>Dify</a:t>
+            </a:r>
+            <a:r>
+              <a:rPr lang="ja-JP" altLang="en-US" sz="1600" dirty="0">
+                <a:solidFill>
+                  <a:srgbClr val="1A1C1E"/>
+                </a:solidFill>
+                <a:latin typeface="+mj-ea"/>
+                <a:ea typeface="+mj-ea"/>
+              </a:rPr>
+              <a:t>のフロントエンド（</a:t>
+            </a:r>
+            <a:r>
+              <a:rPr lang="en-US" altLang="ja-JP" sz="1600" dirty="0">
+                <a:solidFill>
+                  <a:srgbClr val="1A1C1E"/>
+                </a:solidFill>
+                <a:latin typeface="+mj-ea"/>
+                <a:ea typeface="+mj-ea"/>
+              </a:rPr>
+              <a:t>UI</a:t>
+            </a:r>
+            <a:r>
+              <a:rPr lang="ja-JP" altLang="en-US" sz="1600" dirty="0">
+                <a:solidFill>
+                  <a:srgbClr val="1A1C1E"/>
+                </a:solidFill>
+                <a:latin typeface="+mj-ea"/>
+                <a:ea typeface="+mj-ea"/>
+              </a:rPr>
+              <a:t>部分）を利用する過程で、</a:t>
+            </a:r>
+            <a:r>
+              <a:rPr lang="en-US" altLang="ja-JP" sz="1600" dirty="0">
+                <a:solidFill>
+                  <a:srgbClr val="1A1C1E"/>
+                </a:solidFill>
+                <a:latin typeface="+mj-ea"/>
+                <a:ea typeface="+mj-ea"/>
+              </a:rPr>
+              <a:t>Dify</a:t>
+            </a:r>
+            <a:r>
+              <a:rPr lang="ja-JP" altLang="en-US" sz="1600" dirty="0">
+                <a:solidFill>
+                  <a:srgbClr val="1A1C1E"/>
+                </a:solidFill>
+                <a:latin typeface="+mj-ea"/>
+                <a:ea typeface="+mj-ea"/>
+              </a:rPr>
+              <a:t>のコンソール画面やアプリケーション内に表示される</a:t>
+            </a:r>
+            <a:r>
+              <a:rPr lang="en-US" altLang="ja-JP" sz="1600" dirty="0">
+                <a:solidFill>
+                  <a:srgbClr val="1A1C1E"/>
+                </a:solidFill>
+                <a:latin typeface="+mj-ea"/>
+                <a:ea typeface="+mj-ea"/>
+              </a:rPr>
+              <a:t>Dify</a:t>
+            </a:r>
+            <a:r>
+              <a:rPr lang="ja-JP" altLang="en-US" sz="1600" dirty="0">
+                <a:solidFill>
+                  <a:srgbClr val="1A1C1E"/>
+                </a:solidFill>
+                <a:latin typeface="+mj-ea"/>
+                <a:ea typeface="+mj-ea"/>
+              </a:rPr>
+              <a:t>のロゴや著作権情報を削除したり、変更したりすることは許可されていません。</a:t>
+            </a:r>
+            <a:endParaRPr lang="en-US" altLang="ja-JP" sz="1600" dirty="0">
+              <a:solidFill>
+                <a:srgbClr val="1A1C1E"/>
+              </a:solidFill>
+              <a:latin typeface="+mj-ea"/>
+              <a:ea typeface="+mj-ea"/>
+            </a:endParaRPr>
+          </a:p>
+          <a:p>
+            <a:pPr marL="742950" lvl="1" indent="-285750">
+              <a:lnSpc>
+                <a:spcPts val="1500"/>
+              </a:lnSpc>
+              <a:spcAft>
+                <a:spcPts val="225"/>
+              </a:spcAft>
+              <a:buFont typeface="Wingdings" panose="05000000000000000000" pitchFamily="2" charset="2"/>
+              <a:buChar char="ü"/>
+            </a:pPr>
+            <a:r>
+              <a:rPr lang="en-US" altLang="ja-JP" sz="1600" dirty="0">
+                <a:solidFill>
+                  <a:srgbClr val="1A1C1E"/>
+                </a:solidFill>
+                <a:latin typeface="+mj-ea"/>
+                <a:ea typeface="+mj-ea"/>
+              </a:rPr>
+              <a:t>Dify</a:t>
+            </a:r>
+            <a:r>
+              <a:rPr lang="ja-JP" altLang="en-US" sz="1600" dirty="0">
+                <a:solidFill>
+                  <a:srgbClr val="1A1C1E"/>
+                </a:solidFill>
+                <a:latin typeface="+mj-ea"/>
+                <a:ea typeface="+mj-ea"/>
+              </a:rPr>
+              <a:t>の</a:t>
+            </a:r>
+            <a:r>
+              <a:rPr lang="en-US" altLang="ja-JP" sz="1600" dirty="0">
+                <a:solidFill>
+                  <a:srgbClr val="1A1C1E"/>
+                </a:solidFill>
+                <a:latin typeface="+mj-ea"/>
+                <a:ea typeface="+mj-ea"/>
+              </a:rPr>
+              <a:t>API</a:t>
+            </a:r>
+            <a:r>
+              <a:rPr lang="ja-JP" altLang="en-US" sz="1600" dirty="0">
+                <a:solidFill>
+                  <a:srgbClr val="1A1C1E"/>
+                </a:solidFill>
+                <a:latin typeface="+mj-ea"/>
+                <a:ea typeface="+mj-ea"/>
+              </a:rPr>
+              <a:t>のみを利用するなど、フロントエンド部分を含まない利用方法には適用されません。バックエンドとしてのみ利用する場合は、ロゴ等の表示義務はありません。</a:t>
+            </a:r>
+          </a:p>
+          <a:p>
+            <a:endParaRPr lang="en-US" altLang="ja-JP" sz="1600" dirty="0">
+              <a:latin typeface="Arial" panose="020B0604020202020204" pitchFamily="34" charset="0"/>
+              <a:cs typeface="Arial" panose="020B0604020202020204" pitchFamily="34" charset="0"/>
+            </a:endParaRPr>
+          </a:p>
+        </p:txBody>
+      </p:sp>
+    </p:spTree>
+    <p:extLst>
+      <p:ext uri="{BB962C8B-B14F-4D97-AF65-F5344CB8AC3E}">
+        <p14:creationId xmlns:p14="http://schemas.microsoft.com/office/powerpoint/2010/main" val="1030372261"/>
+      </p:ext>
+    </p:extLst>
+  </p:cSld>
+  <p:clrMapOvr>
+    <a:masterClrMapping/>
+  </p:clrMapOvr>
+</p:sld>
+</file>
+
 <file path=ppt/slides/slide2.xml><?xml version="1.0" encoding="utf-8"?>
 <p:sld xmlns:a="http://schemas.openxmlformats.org/drawingml/2006/main" xmlns:r="http://schemas.openxmlformats.org/officeDocument/2006/relationships" xmlns:p="http://schemas.openxmlformats.org/presentationml/2006/main">
   <p:cSld>
@@ -16663,6 +17397,2330 @@
     <p:extLst>
       <p:ext uri="{BB962C8B-B14F-4D97-AF65-F5344CB8AC3E}">
         <p14:creationId xmlns:p14="http://schemas.microsoft.com/office/powerpoint/2010/main" val="3658594149"/>
+      </p:ext>
+    </p:extLst>
+  </p:cSld>
+  <p:clrMapOvr>
+    <a:masterClrMapping/>
+  </p:clrMapOvr>
+</p:sld>
+</file>
+
+<file path=ppt/slides/slide8.xml><?xml version="1.0" encoding="utf-8"?>
+<p:sld xmlns:a="http://schemas.openxmlformats.org/drawingml/2006/main" xmlns:r="http://schemas.openxmlformats.org/officeDocument/2006/relationships" xmlns:p="http://schemas.openxmlformats.org/presentationml/2006/main">
+  <p:cSld>
+    <p:spTree>
+      <p:nvGrpSpPr>
+        <p:cNvPr id="1" name="">
+          <a:extLst>
+            <a:ext uri="{FF2B5EF4-FFF2-40B4-BE49-F238E27FC236}">
+              <a16:creationId xmlns:a16="http://schemas.microsoft.com/office/drawing/2014/main" id="{5FCA9F51-0731-EAEA-8F68-16182328F80D}"/>
+            </a:ext>
+          </a:extLst>
+        </p:cNvPr>
+        <p:cNvGrpSpPr/>
+        <p:nvPr/>
+      </p:nvGrpSpPr>
+      <p:grpSpPr>
+        <a:xfrm>
+          <a:off x="0" y="0"/>
+          <a:ext cx="0" cy="0"/>
+          <a:chOff x="0" y="0"/>
+          <a:chExt cx="0" cy="0"/>
+        </a:xfrm>
+      </p:grpSpPr>
+      <p:sp>
+        <p:nvSpPr>
+          <p:cNvPr id="4" name="文本框 3">
+            <a:extLst>
+              <a:ext uri="{FF2B5EF4-FFF2-40B4-BE49-F238E27FC236}">
+                <a16:creationId xmlns:a16="http://schemas.microsoft.com/office/drawing/2014/main" id="{8C33FAB2-58D7-F917-6678-BFAECA093158}"/>
+              </a:ext>
+            </a:extLst>
+          </p:cNvPr>
+          <p:cNvSpPr txBox="1"/>
+          <p:nvPr/>
+        </p:nvSpPr>
+        <p:spPr>
+          <a:xfrm>
+            <a:off x="575036" y="707011"/>
+            <a:ext cx="10246936" cy="369332"/>
+          </a:xfrm>
+          <a:prstGeom prst="rect">
+            <a:avLst/>
+          </a:prstGeom>
+          <a:noFill/>
+        </p:spPr>
+        <p:txBody>
+          <a:bodyPr wrap="square" rtlCol="0">
+            <a:spAutoFit/>
+          </a:bodyPr>
+          <a:lstStyle/>
+          <a:p>
+            <a:r>
+              <a:rPr lang="en-US" altLang="zh-CN" dirty="0">
+                <a:latin typeface="Arial" panose="020B0604020202020204" pitchFamily="34" charset="0"/>
+                <a:cs typeface="Arial" panose="020B0604020202020204" pitchFamily="34" charset="0"/>
+              </a:rPr>
+              <a:t>SaaS</a:t>
+            </a:r>
+            <a:r>
+              <a:rPr lang="ja-JP" altLang="en-US" dirty="0">
+                <a:latin typeface="Arial" panose="020B0604020202020204" pitchFamily="34" charset="0"/>
+                <a:cs typeface="Arial" panose="020B0604020202020204" pitchFamily="34" charset="0"/>
+              </a:rPr>
+              <a:t>版紹介</a:t>
+            </a:r>
+            <a:endParaRPr lang="zh-CN" altLang="en-US" dirty="0">
+              <a:latin typeface="Arial" panose="020B0604020202020204" pitchFamily="34" charset="0"/>
+              <a:cs typeface="Arial" panose="020B0604020202020204" pitchFamily="34" charset="0"/>
+            </a:endParaRPr>
+          </a:p>
+        </p:txBody>
+      </p:sp>
+      <p:cxnSp>
+        <p:nvCxnSpPr>
+          <p:cNvPr id="6" name="直接连接符 5">
+            <a:extLst>
+              <a:ext uri="{FF2B5EF4-FFF2-40B4-BE49-F238E27FC236}">
+                <a16:creationId xmlns:a16="http://schemas.microsoft.com/office/drawing/2014/main" id="{A96C5284-D1FD-3649-6072-4A30B2FFC021}"/>
+              </a:ext>
+            </a:extLst>
+          </p:cNvPr>
+          <p:cNvCxnSpPr>
+            <a:cxnSpLocks/>
+          </p:cNvCxnSpPr>
+          <p:nvPr/>
+        </p:nvCxnSpPr>
+        <p:spPr>
+          <a:xfrm>
+            <a:off x="480767" y="1216058"/>
+            <a:ext cx="11019934" cy="0"/>
+          </a:xfrm>
+          <a:prstGeom prst="line">
+            <a:avLst/>
+          </a:prstGeom>
+        </p:spPr>
+        <p:style>
+          <a:lnRef idx="1">
+            <a:schemeClr val="accent1"/>
+          </a:lnRef>
+          <a:fillRef idx="0">
+            <a:schemeClr val="accent1"/>
+          </a:fillRef>
+          <a:effectRef idx="0">
+            <a:schemeClr val="accent1"/>
+          </a:effectRef>
+          <a:fontRef idx="minor">
+            <a:schemeClr val="tx1"/>
+          </a:fontRef>
+        </p:style>
+      </p:cxnSp>
+      <p:sp>
+        <p:nvSpPr>
+          <p:cNvPr id="2" name="文本框 1">
+            <a:extLst>
+              <a:ext uri="{FF2B5EF4-FFF2-40B4-BE49-F238E27FC236}">
+                <a16:creationId xmlns:a16="http://schemas.microsoft.com/office/drawing/2014/main" id="{099FE217-8B2E-DAC5-AFDF-753940506E6C}"/>
+              </a:ext>
+            </a:extLst>
+          </p:cNvPr>
+          <p:cNvSpPr txBox="1"/>
+          <p:nvPr/>
+        </p:nvSpPr>
+        <p:spPr>
+          <a:xfrm>
+            <a:off x="575036" y="1459348"/>
+            <a:ext cx="10595728" cy="1323439"/>
+          </a:xfrm>
+          <a:prstGeom prst="rect">
+            <a:avLst/>
+          </a:prstGeom>
+          <a:noFill/>
+        </p:spPr>
+        <p:txBody>
+          <a:bodyPr wrap="square" rtlCol="0">
+            <a:spAutoFit/>
+          </a:bodyPr>
+          <a:lstStyle/>
+          <a:p>
+            <a:pPr marL="285750" indent="-285750">
+              <a:buFont typeface="Arial" panose="020B0604020202020204" pitchFamily="34" charset="0"/>
+              <a:buChar char="•"/>
+            </a:pPr>
+            <a:r>
+              <a:rPr lang="en-US" altLang="ja-JP" sz="1600" dirty="0">
+                <a:latin typeface="Arial" panose="020B0604020202020204" pitchFamily="34" charset="0"/>
+                <a:cs typeface="Arial" panose="020B0604020202020204" pitchFamily="34" charset="0"/>
+              </a:rPr>
+              <a:t>SaaS</a:t>
+            </a:r>
+            <a:r>
+              <a:rPr lang="ja-JP" altLang="en-US" sz="1600" dirty="0">
+                <a:latin typeface="Arial" panose="020B0604020202020204" pitchFamily="34" charset="0"/>
+                <a:cs typeface="Arial" panose="020B0604020202020204" pitchFamily="34" charset="0"/>
+              </a:rPr>
+              <a:t>版は、</a:t>
+            </a:r>
+            <a:r>
+              <a:rPr lang="en-US" altLang="ja-JP" sz="1600" dirty="0">
+                <a:latin typeface="Arial" panose="020B0604020202020204" pitchFamily="34" charset="0"/>
+                <a:cs typeface="Arial" panose="020B0604020202020204" pitchFamily="34" charset="0"/>
+              </a:rPr>
+              <a:t>Dify</a:t>
+            </a:r>
+            <a:r>
+              <a:rPr lang="ja-JP" altLang="en-US" sz="1600" dirty="0">
+                <a:latin typeface="Arial" panose="020B0604020202020204" pitchFamily="34" charset="0"/>
+                <a:cs typeface="Arial" panose="020B0604020202020204" pitchFamily="34" charset="0"/>
+              </a:rPr>
+              <a:t>がクラウド上でサービスを提供・管理する形態です。ユーザーは自分でサーバーを用意したり、ソフトウェアをインストールしたりする必要がなく、アカウントを作成すればすぐに利用を開始できます。インフラの保守やアップデートも</a:t>
+            </a:r>
+            <a:r>
+              <a:rPr lang="en-US" altLang="ja-JP" sz="1600" dirty="0">
+                <a:latin typeface="Arial" panose="020B0604020202020204" pitchFamily="34" charset="0"/>
+                <a:cs typeface="Arial" panose="020B0604020202020204" pitchFamily="34" charset="0"/>
+              </a:rPr>
+              <a:t>Dify</a:t>
+            </a:r>
+            <a:r>
+              <a:rPr lang="ja-JP" altLang="en-US" sz="1600" dirty="0">
+                <a:latin typeface="Arial" panose="020B0604020202020204" pitchFamily="34" charset="0"/>
+                <a:cs typeface="Arial" panose="020B0604020202020204" pitchFamily="34" charset="0"/>
+              </a:rPr>
+              <a:t>側が行うため、開発者はアプリケーションの構築と運用に集中できます。主に個人開発者や小規模チームから、本格的なビジネス利用まで対応する複数のプランが用意されています。</a:t>
+            </a:r>
+            <a:endParaRPr lang="en-US" altLang="ja-JP" sz="1600" dirty="0">
+              <a:latin typeface="Arial" panose="020B0604020202020204" pitchFamily="34" charset="0"/>
+              <a:cs typeface="Arial" panose="020B0604020202020204" pitchFamily="34" charset="0"/>
+            </a:endParaRPr>
+          </a:p>
+          <a:p>
+            <a:pPr marL="285750" indent="-285750">
+              <a:buFont typeface="Arial" panose="020B0604020202020204" pitchFamily="34" charset="0"/>
+              <a:buChar char="•"/>
+            </a:pPr>
+            <a:r>
+              <a:rPr lang="ja-JP" altLang="en-US" sz="1600" dirty="0">
+                <a:latin typeface="Arial" panose="020B0604020202020204" pitchFamily="34" charset="0"/>
+                <a:cs typeface="Arial" panose="020B0604020202020204" pitchFamily="34" charset="0"/>
+              </a:rPr>
+              <a:t>以下は、</a:t>
+            </a:r>
+            <a:r>
+              <a:rPr lang="en-US" altLang="ja-JP" sz="1600" dirty="0">
+                <a:latin typeface="Arial" panose="020B0604020202020204" pitchFamily="34" charset="0"/>
+                <a:cs typeface="Arial" panose="020B0604020202020204" pitchFamily="34" charset="0"/>
+              </a:rPr>
+              <a:t>Dify SaaS</a:t>
+            </a:r>
+            <a:r>
+              <a:rPr lang="ja-JP" altLang="en-US" sz="1600" dirty="0">
+                <a:latin typeface="Arial" panose="020B0604020202020204" pitchFamily="34" charset="0"/>
+                <a:cs typeface="Arial" panose="020B0604020202020204" pitchFamily="34" charset="0"/>
+              </a:rPr>
+              <a:t>版の主要な</a:t>
+            </a:r>
+            <a:r>
+              <a:rPr lang="en-US" altLang="ja-JP" sz="1600" dirty="0">
+                <a:latin typeface="Arial" panose="020B0604020202020204" pitchFamily="34" charset="0"/>
+                <a:cs typeface="Arial" panose="020B0604020202020204" pitchFamily="34" charset="0"/>
+              </a:rPr>
+              <a:t>3</a:t>
+            </a:r>
+            <a:r>
+              <a:rPr lang="ja-JP" altLang="en-US" sz="1600" dirty="0">
+                <a:latin typeface="Arial" panose="020B0604020202020204" pitchFamily="34" charset="0"/>
+                <a:cs typeface="Arial" panose="020B0604020202020204" pitchFamily="34" charset="0"/>
+              </a:rPr>
+              <a:t>つのプラン</a:t>
+            </a:r>
+            <a:r>
+              <a:rPr lang="en-US" altLang="ja-JP" sz="1600" dirty="0">
+                <a:latin typeface="Arial" panose="020B0604020202020204" pitchFamily="34" charset="0"/>
+                <a:cs typeface="Arial" panose="020B0604020202020204" pitchFamily="34" charset="0"/>
+              </a:rPr>
+              <a:t>Sandbox</a:t>
+            </a:r>
+            <a:r>
+              <a:rPr lang="ja-JP" altLang="en-US" sz="1600" dirty="0">
+                <a:latin typeface="Arial" panose="020B0604020202020204" pitchFamily="34" charset="0"/>
+                <a:cs typeface="Arial" panose="020B0604020202020204" pitchFamily="34" charset="0"/>
+              </a:rPr>
+              <a:t>、</a:t>
+            </a:r>
+            <a:r>
+              <a:rPr lang="en-US" altLang="ja-JP" sz="1600" dirty="0">
+                <a:latin typeface="Arial" panose="020B0604020202020204" pitchFamily="34" charset="0"/>
+                <a:cs typeface="Arial" panose="020B0604020202020204" pitchFamily="34" charset="0"/>
+              </a:rPr>
+              <a:t>Professional</a:t>
+            </a:r>
+            <a:r>
+              <a:rPr lang="ja-JP" altLang="en-US" sz="1600" dirty="0">
+                <a:latin typeface="Arial" panose="020B0604020202020204" pitchFamily="34" charset="0"/>
+                <a:cs typeface="Arial" panose="020B0604020202020204" pitchFamily="34" charset="0"/>
+              </a:rPr>
+              <a:t> 、 </a:t>
+            </a:r>
+            <a:r>
+              <a:rPr lang="en-US" altLang="ja-JP" sz="1600" dirty="0">
+                <a:latin typeface="Arial" panose="020B0604020202020204" pitchFamily="34" charset="0"/>
+                <a:cs typeface="Arial" panose="020B0604020202020204" pitchFamily="34" charset="0"/>
+              </a:rPr>
+              <a:t>Team</a:t>
+            </a:r>
+            <a:r>
+              <a:rPr lang="ja-JP" altLang="en-US" sz="1600" dirty="0">
+                <a:latin typeface="Arial" panose="020B0604020202020204" pitchFamily="34" charset="0"/>
+                <a:cs typeface="Arial" panose="020B0604020202020204" pitchFamily="34" charset="0"/>
+              </a:rPr>
+              <a:t>の主な違いをまとめた比較表です。</a:t>
+            </a:r>
+            <a:endParaRPr lang="en-US" altLang="ja-JP" sz="1600" dirty="0">
+              <a:latin typeface="Arial" panose="020B0604020202020204" pitchFamily="34" charset="0"/>
+              <a:cs typeface="Arial" panose="020B0604020202020204" pitchFamily="34" charset="0"/>
+            </a:endParaRPr>
+          </a:p>
+        </p:txBody>
+      </p:sp>
+      <p:graphicFrame>
+        <p:nvGraphicFramePr>
+          <p:cNvPr id="3" name="表格 2">
+            <a:extLst>
+              <a:ext uri="{FF2B5EF4-FFF2-40B4-BE49-F238E27FC236}">
+                <a16:creationId xmlns:a16="http://schemas.microsoft.com/office/drawing/2014/main" id="{7486AAEB-2D32-F4A2-7B3F-F0483B68F465}"/>
+              </a:ext>
+            </a:extLst>
+          </p:cNvPr>
+          <p:cNvGraphicFramePr>
+            <a:graphicFrameLocks noGrp="1"/>
+          </p:cNvGraphicFramePr>
+          <p:nvPr>
+            <p:extLst>
+              <p:ext uri="{D42A27DB-BD31-4B8C-83A1-F6EECF244321}">
+                <p14:modId xmlns:p14="http://schemas.microsoft.com/office/powerpoint/2010/main" val="2511928133"/>
+              </p:ext>
+            </p:extLst>
+          </p:nvPr>
+        </p:nvGraphicFramePr>
+        <p:xfrm>
+          <a:off x="754143" y="2909361"/>
+          <a:ext cx="10275220" cy="3570816"/>
+        </p:xfrm>
+        <a:graphic>
+          <a:graphicData uri="http://schemas.openxmlformats.org/drawingml/2006/table">
+            <a:tbl>
+              <a:tblPr firstRow="1" bandRow="1">
+                <a:tableStyleId>{5C22544A-7EE6-4342-B048-85BDC9FD1C3A}</a:tableStyleId>
+              </a:tblPr>
+              <a:tblGrid>
+                <a:gridCol w="2187019">
+                  <a:extLst>
+                    <a:ext uri="{9D8B030D-6E8A-4147-A177-3AD203B41FA5}">
+                      <a16:colId xmlns:a16="http://schemas.microsoft.com/office/drawing/2014/main" val="1034333737"/>
+                    </a:ext>
+                  </a:extLst>
+                </a:gridCol>
+                <a:gridCol w="2696067">
+                  <a:extLst>
+                    <a:ext uri="{9D8B030D-6E8A-4147-A177-3AD203B41FA5}">
+                      <a16:colId xmlns:a16="http://schemas.microsoft.com/office/drawing/2014/main" val="3549990795"/>
+                    </a:ext>
+                  </a:extLst>
+                </a:gridCol>
+                <a:gridCol w="2696067">
+                  <a:extLst>
+                    <a:ext uri="{9D8B030D-6E8A-4147-A177-3AD203B41FA5}">
+                      <a16:colId xmlns:a16="http://schemas.microsoft.com/office/drawing/2014/main" val="3348019054"/>
+                    </a:ext>
+                  </a:extLst>
+                </a:gridCol>
+                <a:gridCol w="2696067">
+                  <a:extLst>
+                    <a:ext uri="{9D8B030D-6E8A-4147-A177-3AD203B41FA5}">
+                      <a16:colId xmlns:a16="http://schemas.microsoft.com/office/drawing/2014/main" val="4232210452"/>
+                    </a:ext>
+                  </a:extLst>
+                </a:gridCol>
+              </a:tblGrid>
+              <a:tr h="328787">
+                <a:tc>
+                  <a:txBody>
+                    <a:bodyPr/>
+                    <a:lstStyle/>
+                    <a:p>
+                      <a:pPr algn="ctr"/>
+                      <a:r>
+                        <a:rPr lang="en-US" altLang="ja-JP" dirty="0"/>
+                        <a:t>Category</a:t>
+                      </a:r>
+                      <a:endParaRPr lang="zh-CN" altLang="en-US" dirty="0"/>
+                    </a:p>
+                  </a:txBody>
+                  <a:tcPr/>
+                </a:tc>
+                <a:tc>
+                  <a:txBody>
+                    <a:bodyPr/>
+                    <a:lstStyle/>
+                    <a:p>
+                      <a:pPr algn="ctr"/>
+                      <a:r>
+                        <a:rPr lang="en-US" altLang="zh-CN" u="none" dirty="0">
+                          <a:solidFill>
+                            <a:schemeClr val="bg1"/>
+                          </a:solidFill>
+                        </a:rPr>
+                        <a:t>Sandbox</a:t>
+                      </a:r>
+                      <a:endParaRPr lang="zh-CN" altLang="en-US" u="none" dirty="0">
+                        <a:solidFill>
+                          <a:schemeClr val="bg1"/>
+                        </a:solidFill>
+                      </a:endParaRPr>
+                    </a:p>
+                  </a:txBody>
+                  <a:tcPr/>
+                </a:tc>
+                <a:tc>
+                  <a:txBody>
+                    <a:bodyPr/>
+                    <a:lstStyle/>
+                    <a:p>
+                      <a:pPr algn="ctr"/>
+                      <a:r>
+                        <a:rPr lang="en-US" altLang="ja-JP" u="none" dirty="0">
+                          <a:solidFill>
+                            <a:schemeClr val="bg1"/>
+                          </a:solidFill>
+                        </a:rPr>
+                        <a:t>Professional</a:t>
+                      </a:r>
+                      <a:endParaRPr lang="zh-CN" altLang="en-US" u="none" dirty="0">
+                        <a:solidFill>
+                          <a:schemeClr val="bg1"/>
+                        </a:solidFill>
+                      </a:endParaRPr>
+                    </a:p>
+                  </a:txBody>
+                  <a:tcPr/>
+                </a:tc>
+                <a:tc>
+                  <a:txBody>
+                    <a:bodyPr/>
+                    <a:lstStyle/>
+                    <a:p>
+                      <a:pPr algn="ctr"/>
+                      <a:r>
+                        <a:rPr lang="en-US" altLang="zh-CN" dirty="0"/>
+                        <a:t>Team</a:t>
+                      </a:r>
+                      <a:endParaRPr lang="zh-CN" altLang="en-US" dirty="0">
+                        <a:solidFill>
+                          <a:schemeClr val="bg1"/>
+                        </a:solidFill>
+                      </a:endParaRPr>
+                    </a:p>
+                  </a:txBody>
+                  <a:tcPr/>
+                </a:tc>
+                <a:extLst>
+                  <a:ext uri="{0D108BD9-81ED-4DB2-BD59-A6C34878D82A}">
+                    <a16:rowId xmlns:a16="http://schemas.microsoft.com/office/drawing/2014/main" val="460455147"/>
+                  </a:ext>
+                </a:extLst>
+              </a:tr>
+              <a:tr h="400632">
+                <a:tc>
+                  <a:txBody>
+                    <a:bodyPr/>
+                    <a:lstStyle/>
+                    <a:p>
+                      <a:r>
+                        <a:rPr lang="zh-CN" altLang="en-US" sz="1600" dirty="0">
+                          <a:latin typeface="MS PGothic" panose="020B0600070205080204" pitchFamily="34" charset="-128"/>
+                          <a:ea typeface="MS PGothic" panose="020B0600070205080204" pitchFamily="34" charset="-128"/>
+                        </a:rPr>
+                        <a:t>価格</a:t>
+                      </a:r>
+                    </a:p>
+                  </a:txBody>
+                  <a:tcPr anchor="ctr"/>
+                </a:tc>
+                <a:tc>
+                  <a:txBody>
+                    <a:bodyPr/>
+                    <a:lstStyle/>
+                    <a:p>
+                      <a:r>
+                        <a:rPr lang="en-US" altLang="zh-CN" sz="1600" dirty="0">
+                          <a:latin typeface="MS PGothic" panose="020B0600070205080204" pitchFamily="34" charset="-128"/>
+                          <a:ea typeface="MS PGothic" panose="020B0600070205080204" pitchFamily="34" charset="-128"/>
+                        </a:rPr>
+                        <a:t>$0</a:t>
+                      </a:r>
+                      <a:endParaRPr lang="zh-CN" altLang="en-US" sz="1600" dirty="0">
+                        <a:latin typeface="MS PGothic" panose="020B0600070205080204" pitchFamily="34" charset="-128"/>
+                        <a:ea typeface="MS PGothic" panose="020B0600070205080204" pitchFamily="34" charset="-128"/>
+                      </a:endParaRPr>
+                    </a:p>
+                  </a:txBody>
+                  <a:tcPr anchor="ctr"/>
+                </a:tc>
+                <a:tc>
+                  <a:txBody>
+                    <a:bodyPr/>
+                    <a:lstStyle/>
+                    <a:p>
+                      <a:r>
+                        <a:rPr lang="en-US" altLang="zh-CN" sz="1600" dirty="0">
+                          <a:latin typeface="MS PGothic" panose="020B0600070205080204" pitchFamily="34" charset="-128"/>
+                          <a:ea typeface="MS PGothic" panose="020B0600070205080204" pitchFamily="34" charset="-128"/>
+                        </a:rPr>
+                        <a:t>$59/month</a:t>
+                      </a:r>
+                      <a:endParaRPr lang="zh-CN" altLang="en-US" sz="1600" dirty="0">
+                        <a:latin typeface="MS PGothic" panose="020B0600070205080204" pitchFamily="34" charset="-128"/>
+                        <a:ea typeface="MS PGothic" panose="020B0600070205080204" pitchFamily="34" charset="-128"/>
+                      </a:endParaRPr>
+                    </a:p>
+                  </a:txBody>
+                  <a:tcPr anchor="ctr"/>
+                </a:tc>
+                <a:tc>
+                  <a:txBody>
+                    <a:bodyPr/>
+                    <a:lstStyle/>
+                    <a:p>
+                      <a:r>
+                        <a:rPr lang="en-US" altLang="zh-CN" sz="1600">
+                          <a:latin typeface="MS PGothic" panose="020B0600070205080204" pitchFamily="34" charset="-128"/>
+                          <a:ea typeface="MS PGothic" panose="020B0600070205080204" pitchFamily="34" charset="-128"/>
+                        </a:rPr>
+                        <a:t>$159/month</a:t>
+                      </a:r>
+                      <a:endParaRPr lang="zh-CN" altLang="en-US" sz="1600" dirty="0">
+                        <a:latin typeface="MS PGothic" panose="020B0600070205080204" pitchFamily="34" charset="-128"/>
+                        <a:ea typeface="MS PGothic" panose="020B0600070205080204" pitchFamily="34" charset="-128"/>
+                      </a:endParaRPr>
+                    </a:p>
+                  </a:txBody>
+                  <a:tcPr anchor="ctr"/>
+                </a:tc>
+                <a:extLst>
+                  <a:ext uri="{0D108BD9-81ED-4DB2-BD59-A6C34878D82A}">
+                    <a16:rowId xmlns:a16="http://schemas.microsoft.com/office/drawing/2014/main" val="3356126220"/>
+                  </a:ext>
+                </a:extLst>
+              </a:tr>
+              <a:tr h="400632">
+                <a:tc>
+                  <a:txBody>
+                    <a:bodyPr/>
+                    <a:lstStyle/>
+                    <a:p>
+                      <a:r>
+                        <a:rPr lang="ja-JP" altLang="en-US" sz="1600" dirty="0">
+                          <a:latin typeface="MS PGothic" panose="020B0600070205080204" pitchFamily="34" charset="-128"/>
+                          <a:ea typeface="MS PGothic" panose="020B0600070205080204" pitchFamily="34" charset="-128"/>
+                        </a:rPr>
+                        <a:t>チームメンバー</a:t>
+                      </a:r>
+                      <a:endParaRPr lang="zh-CN" altLang="en-US" sz="1600" dirty="0">
+                        <a:latin typeface="MS PGothic" panose="020B0600070205080204" pitchFamily="34" charset="-128"/>
+                        <a:ea typeface="MS PGothic" panose="020B0600070205080204" pitchFamily="34" charset="-128"/>
+                      </a:endParaRPr>
+                    </a:p>
+                  </a:txBody>
+                  <a:tcPr anchor="ctr"/>
+                </a:tc>
+                <a:tc>
+                  <a:txBody>
+                    <a:bodyPr/>
+                    <a:lstStyle/>
+                    <a:p>
+                      <a:r>
+                        <a:rPr lang="en-US" altLang="zh-CN" sz="1600" dirty="0">
+                          <a:latin typeface="MS PGothic" panose="020B0600070205080204" pitchFamily="34" charset="-128"/>
+                          <a:ea typeface="MS PGothic" panose="020B0600070205080204" pitchFamily="34" charset="-128"/>
+                        </a:rPr>
+                        <a:t>1</a:t>
+                      </a:r>
+                      <a:endParaRPr lang="zh-CN" altLang="en-US" sz="1600" dirty="0">
+                        <a:latin typeface="MS PGothic" panose="020B0600070205080204" pitchFamily="34" charset="-128"/>
+                        <a:ea typeface="MS PGothic" panose="020B0600070205080204" pitchFamily="34" charset="-128"/>
+                      </a:endParaRPr>
+                    </a:p>
+                  </a:txBody>
+                  <a:tcPr anchor="ctr"/>
+                </a:tc>
+                <a:tc>
+                  <a:txBody>
+                    <a:bodyPr/>
+                    <a:lstStyle/>
+                    <a:p>
+                      <a:r>
+                        <a:rPr lang="en-US" altLang="zh-CN" sz="1600" dirty="0">
+                          <a:latin typeface="MS PGothic" panose="020B0600070205080204" pitchFamily="34" charset="-128"/>
+                          <a:ea typeface="MS PGothic" panose="020B0600070205080204" pitchFamily="34" charset="-128"/>
+                        </a:rPr>
+                        <a:t>3</a:t>
+                      </a:r>
+                      <a:endParaRPr lang="zh-CN" altLang="en-US" sz="1600" dirty="0">
+                        <a:latin typeface="MS PGothic" panose="020B0600070205080204" pitchFamily="34" charset="-128"/>
+                        <a:ea typeface="MS PGothic" panose="020B0600070205080204" pitchFamily="34" charset="-128"/>
+                      </a:endParaRPr>
+                    </a:p>
+                  </a:txBody>
+                  <a:tcPr anchor="ctr"/>
+                </a:tc>
+                <a:tc>
+                  <a:txBody>
+                    <a:bodyPr/>
+                    <a:lstStyle/>
+                    <a:p>
+                      <a:r>
+                        <a:rPr lang="en-US" altLang="zh-CN" sz="1600">
+                          <a:latin typeface="MS PGothic" panose="020B0600070205080204" pitchFamily="34" charset="-128"/>
+                          <a:ea typeface="MS PGothic" panose="020B0600070205080204" pitchFamily="34" charset="-128"/>
+                        </a:rPr>
+                        <a:t>50</a:t>
+                      </a:r>
+                      <a:endParaRPr lang="en-US" altLang="zh-CN" sz="1600" dirty="0">
+                        <a:latin typeface="MS PGothic" panose="020B0600070205080204" pitchFamily="34" charset="-128"/>
+                        <a:ea typeface="MS PGothic" panose="020B0600070205080204" pitchFamily="34" charset="-128"/>
+                      </a:endParaRPr>
+                    </a:p>
+                  </a:txBody>
+                  <a:tcPr anchor="ctr"/>
+                </a:tc>
+                <a:extLst>
+                  <a:ext uri="{0D108BD9-81ED-4DB2-BD59-A6C34878D82A}">
+                    <a16:rowId xmlns:a16="http://schemas.microsoft.com/office/drawing/2014/main" val="56370049"/>
+                  </a:ext>
+                </a:extLst>
+              </a:tr>
+              <a:tr h="400632">
+                <a:tc>
+                  <a:txBody>
+                    <a:bodyPr/>
+                    <a:lstStyle/>
+                    <a:p>
+                      <a:r>
+                        <a:rPr lang="ja-JP" altLang="en-US" sz="1600" dirty="0">
+                          <a:latin typeface="MS PGothic" panose="020B0600070205080204" pitchFamily="34" charset="-128"/>
+                          <a:ea typeface="MS PGothic" panose="020B0600070205080204" pitchFamily="34" charset="-128"/>
+                        </a:rPr>
+                        <a:t>作成可能なアプリ数</a:t>
+                      </a:r>
+                      <a:endParaRPr lang="zh-CN" altLang="en-US" sz="1600" dirty="0">
+                        <a:latin typeface="MS PGothic" panose="020B0600070205080204" pitchFamily="34" charset="-128"/>
+                        <a:ea typeface="MS PGothic" panose="020B0600070205080204" pitchFamily="34" charset="-128"/>
+                      </a:endParaRPr>
+                    </a:p>
+                  </a:txBody>
+                  <a:tcPr anchor="ctr"/>
+                </a:tc>
+                <a:tc>
+                  <a:txBody>
+                    <a:bodyPr/>
+                    <a:lstStyle/>
+                    <a:p>
+                      <a:r>
+                        <a:rPr lang="en-US" altLang="zh-CN" sz="1600" dirty="0">
+                          <a:latin typeface="MS PGothic" panose="020B0600070205080204" pitchFamily="34" charset="-128"/>
+                          <a:ea typeface="MS PGothic" panose="020B0600070205080204" pitchFamily="34" charset="-128"/>
+                        </a:rPr>
+                        <a:t>5</a:t>
+                      </a:r>
+                      <a:endParaRPr lang="zh-CN" altLang="en-US" sz="1600" dirty="0">
+                        <a:latin typeface="MS PGothic" panose="020B0600070205080204" pitchFamily="34" charset="-128"/>
+                        <a:ea typeface="MS PGothic" panose="020B0600070205080204" pitchFamily="34" charset="-128"/>
+                      </a:endParaRPr>
+                    </a:p>
+                  </a:txBody>
+                  <a:tcPr anchor="ctr"/>
+                </a:tc>
+                <a:tc>
+                  <a:txBody>
+                    <a:bodyPr/>
+                    <a:lstStyle/>
+                    <a:p>
+                      <a:r>
+                        <a:rPr lang="en-US" altLang="zh-CN" sz="1600" dirty="0">
+                          <a:latin typeface="MS PGothic" panose="020B0600070205080204" pitchFamily="34" charset="-128"/>
+                          <a:ea typeface="MS PGothic" panose="020B0600070205080204" pitchFamily="34" charset="-128"/>
+                        </a:rPr>
+                        <a:t>50</a:t>
+                      </a:r>
+                      <a:endParaRPr lang="zh-CN" altLang="en-US" sz="1600" dirty="0">
+                        <a:latin typeface="MS PGothic" panose="020B0600070205080204" pitchFamily="34" charset="-128"/>
+                        <a:ea typeface="MS PGothic" panose="020B0600070205080204" pitchFamily="34" charset="-128"/>
+                      </a:endParaRPr>
+                    </a:p>
+                  </a:txBody>
+                  <a:tcPr anchor="ctr"/>
+                </a:tc>
+                <a:tc>
+                  <a:txBody>
+                    <a:bodyPr/>
+                    <a:lstStyle/>
+                    <a:p>
+                      <a:r>
+                        <a:rPr lang="en-US" altLang="zh-CN" sz="1600" dirty="0">
+                          <a:latin typeface="MS PGothic" panose="020B0600070205080204" pitchFamily="34" charset="-128"/>
+                          <a:ea typeface="MS PGothic" panose="020B0600070205080204" pitchFamily="34" charset="-128"/>
+                        </a:rPr>
+                        <a:t>200</a:t>
+                      </a:r>
+                    </a:p>
+                  </a:txBody>
+                  <a:tcPr anchor="ctr"/>
+                </a:tc>
+                <a:extLst>
+                  <a:ext uri="{0D108BD9-81ED-4DB2-BD59-A6C34878D82A}">
+                    <a16:rowId xmlns:a16="http://schemas.microsoft.com/office/drawing/2014/main" val="390922883"/>
+                  </a:ext>
+                </a:extLst>
+              </a:tr>
+              <a:tr h="400632">
+                <a:tc>
+                  <a:txBody>
+                    <a:bodyPr/>
+                    <a:lstStyle/>
+                    <a:p>
+                      <a:r>
+                        <a:rPr lang="en-US" altLang="zh-CN" sz="1600" dirty="0">
+                          <a:latin typeface="MS PGothic" panose="020B0600070205080204" pitchFamily="34" charset="-128"/>
+                          <a:ea typeface="MS PGothic" panose="020B0600070205080204" pitchFamily="34" charset="-128"/>
+                        </a:rPr>
+                        <a:t>RAG</a:t>
+                      </a:r>
+                      <a:r>
+                        <a:rPr lang="ja-JP" altLang="en-US" sz="1600" dirty="0">
+                          <a:latin typeface="MS PGothic" panose="020B0600070205080204" pitchFamily="34" charset="-128"/>
+                          <a:ea typeface="MS PGothic" panose="020B0600070205080204" pitchFamily="34" charset="-128"/>
+                        </a:rPr>
+                        <a:t>ドキュメント数</a:t>
+                      </a:r>
+                      <a:endParaRPr lang="zh-CN" altLang="en-US" sz="1600" dirty="0">
+                        <a:latin typeface="MS PGothic" panose="020B0600070205080204" pitchFamily="34" charset="-128"/>
+                        <a:ea typeface="MS PGothic" panose="020B0600070205080204" pitchFamily="34" charset="-128"/>
+                      </a:endParaRPr>
+                    </a:p>
+                  </a:txBody>
+                  <a:tcPr anchor="ctr"/>
+                </a:tc>
+                <a:tc>
+                  <a:txBody>
+                    <a:bodyPr/>
+                    <a:lstStyle/>
+                    <a:p>
+                      <a:r>
+                        <a:rPr lang="en-US" altLang="zh-CN" sz="1600" dirty="0">
+                          <a:latin typeface="MS PGothic" panose="020B0600070205080204" pitchFamily="34" charset="-128"/>
+                          <a:ea typeface="MS PGothic" panose="020B0600070205080204" pitchFamily="34" charset="-128"/>
+                        </a:rPr>
+                        <a:t>50</a:t>
+                      </a:r>
+                      <a:endParaRPr lang="zh-CN" altLang="en-US" sz="1600" dirty="0">
+                        <a:latin typeface="MS PGothic" panose="020B0600070205080204" pitchFamily="34" charset="-128"/>
+                        <a:ea typeface="MS PGothic" panose="020B0600070205080204" pitchFamily="34" charset="-128"/>
+                      </a:endParaRPr>
+                    </a:p>
+                  </a:txBody>
+                  <a:tcPr anchor="ctr"/>
+                </a:tc>
+                <a:tc>
+                  <a:txBody>
+                    <a:bodyPr/>
+                    <a:lstStyle/>
+                    <a:p>
+                      <a:r>
+                        <a:rPr lang="en-US" altLang="zh-CN" sz="1600" dirty="0">
+                          <a:latin typeface="MS PGothic" panose="020B0600070205080204" pitchFamily="34" charset="-128"/>
+                          <a:ea typeface="MS PGothic" panose="020B0600070205080204" pitchFamily="34" charset="-128"/>
+                        </a:rPr>
+                        <a:t>500</a:t>
+                      </a:r>
+                      <a:endParaRPr lang="zh-CN" altLang="en-US" sz="1600" dirty="0">
+                        <a:latin typeface="MS PGothic" panose="020B0600070205080204" pitchFamily="34" charset="-128"/>
+                        <a:ea typeface="MS PGothic" panose="020B0600070205080204" pitchFamily="34" charset="-128"/>
+                      </a:endParaRPr>
+                    </a:p>
+                  </a:txBody>
+                  <a:tcPr anchor="ctr"/>
+                </a:tc>
+                <a:tc>
+                  <a:txBody>
+                    <a:bodyPr/>
+                    <a:lstStyle/>
+                    <a:p>
+                      <a:r>
+                        <a:rPr lang="en-US" altLang="zh-CN" sz="1600" dirty="0">
+                          <a:latin typeface="MS PGothic" panose="020B0600070205080204" pitchFamily="34" charset="-128"/>
+                          <a:ea typeface="MS PGothic" panose="020B0600070205080204" pitchFamily="34" charset="-128"/>
+                        </a:rPr>
+                        <a:t>1000</a:t>
+                      </a:r>
+                    </a:p>
+                  </a:txBody>
+                  <a:tcPr anchor="ctr"/>
+                </a:tc>
+                <a:extLst>
+                  <a:ext uri="{0D108BD9-81ED-4DB2-BD59-A6C34878D82A}">
+                    <a16:rowId xmlns:a16="http://schemas.microsoft.com/office/drawing/2014/main" val="3599334861"/>
+                  </a:ext>
+                </a:extLst>
+              </a:tr>
+              <a:tr h="400632">
+                <a:tc>
+                  <a:txBody>
+                    <a:bodyPr/>
+                    <a:lstStyle/>
+                    <a:p>
+                      <a:r>
+                        <a:rPr lang="en-US" altLang="zh-CN" sz="1600" dirty="0">
+                          <a:latin typeface="MS PGothic" panose="020B0600070205080204" pitchFamily="34" charset="-128"/>
+                          <a:ea typeface="MS PGothic" panose="020B0600070205080204" pitchFamily="34" charset="-128"/>
+                        </a:rPr>
+                        <a:t>DB</a:t>
+                      </a:r>
+                      <a:r>
+                        <a:rPr lang="ja-JP" altLang="en-US" sz="1600" dirty="0">
+                          <a:latin typeface="MS PGothic" panose="020B0600070205080204" pitchFamily="34" charset="-128"/>
+                          <a:ea typeface="MS PGothic" panose="020B0600070205080204" pitchFamily="34" charset="-128"/>
+                        </a:rPr>
+                        <a:t>サイズ</a:t>
+                      </a:r>
+                      <a:endParaRPr lang="zh-CN" altLang="en-US" sz="1600" dirty="0">
+                        <a:latin typeface="MS PGothic" panose="020B0600070205080204" pitchFamily="34" charset="-128"/>
+                        <a:ea typeface="MS PGothic" panose="020B0600070205080204" pitchFamily="34" charset="-128"/>
+                      </a:endParaRPr>
+                    </a:p>
+                  </a:txBody>
+                  <a:tcPr anchor="ctr"/>
+                </a:tc>
+                <a:tc>
+                  <a:txBody>
+                    <a:bodyPr/>
+                    <a:lstStyle/>
+                    <a:p>
+                      <a:r>
+                        <a:rPr lang="en-US" altLang="zh-CN" sz="1600" dirty="0">
+                          <a:latin typeface="MS PGothic" panose="020B0600070205080204" pitchFamily="34" charset="-128"/>
+                          <a:ea typeface="MS PGothic" panose="020B0600070205080204" pitchFamily="34" charset="-128"/>
+                        </a:rPr>
+                        <a:t>50MB</a:t>
+                      </a:r>
+                      <a:endParaRPr lang="zh-CN" altLang="en-US" sz="1600" dirty="0">
+                        <a:latin typeface="MS PGothic" panose="020B0600070205080204" pitchFamily="34" charset="-128"/>
+                        <a:ea typeface="MS PGothic" panose="020B0600070205080204" pitchFamily="34" charset="-128"/>
+                      </a:endParaRPr>
+                    </a:p>
+                  </a:txBody>
+                  <a:tcPr anchor="ctr"/>
+                </a:tc>
+                <a:tc>
+                  <a:txBody>
+                    <a:bodyPr/>
+                    <a:lstStyle/>
+                    <a:p>
+                      <a:r>
+                        <a:rPr lang="en-US" altLang="zh-CN" sz="1600" dirty="0">
+                          <a:latin typeface="MS PGothic" panose="020B0600070205080204" pitchFamily="34" charset="-128"/>
+                          <a:ea typeface="MS PGothic" panose="020B0600070205080204" pitchFamily="34" charset="-128"/>
+                        </a:rPr>
+                        <a:t>5GB</a:t>
+                      </a:r>
+                      <a:endParaRPr lang="zh-CN" altLang="en-US" sz="1600" dirty="0">
+                        <a:latin typeface="MS PGothic" panose="020B0600070205080204" pitchFamily="34" charset="-128"/>
+                        <a:ea typeface="MS PGothic" panose="020B0600070205080204" pitchFamily="34" charset="-128"/>
+                      </a:endParaRPr>
+                    </a:p>
+                  </a:txBody>
+                  <a:tcPr anchor="ctr"/>
+                </a:tc>
+                <a:tc>
+                  <a:txBody>
+                    <a:bodyPr/>
+                    <a:lstStyle/>
+                    <a:p>
+                      <a:r>
+                        <a:rPr lang="en-US" altLang="zh-CN" sz="1600" dirty="0">
+                          <a:latin typeface="MS PGothic" panose="020B0600070205080204" pitchFamily="34" charset="-128"/>
+                          <a:ea typeface="MS PGothic" panose="020B0600070205080204" pitchFamily="34" charset="-128"/>
+                        </a:rPr>
+                        <a:t>20GB</a:t>
+                      </a:r>
+                    </a:p>
+                  </a:txBody>
+                  <a:tcPr anchor="ctr"/>
+                </a:tc>
+                <a:extLst>
+                  <a:ext uri="{0D108BD9-81ED-4DB2-BD59-A6C34878D82A}">
+                    <a16:rowId xmlns:a16="http://schemas.microsoft.com/office/drawing/2014/main" val="563866541"/>
+                  </a:ext>
+                </a:extLst>
+              </a:tr>
+              <a:tr h="400632">
+                <a:tc>
+                  <a:txBody>
+                    <a:bodyPr/>
+                    <a:lstStyle/>
+                    <a:p>
+                      <a:r>
+                        <a:rPr lang="en-US" altLang="zh-CN" sz="1600" dirty="0">
+                          <a:latin typeface="MS PGothic" panose="020B0600070205080204" pitchFamily="34" charset="-128"/>
+                          <a:ea typeface="MS PGothic" panose="020B0600070205080204" pitchFamily="34" charset="-128"/>
+                        </a:rPr>
+                        <a:t>Request Rate Limit</a:t>
+                      </a:r>
+                      <a:endParaRPr lang="zh-CN" altLang="en-US" sz="1600" dirty="0">
+                        <a:latin typeface="MS PGothic" panose="020B0600070205080204" pitchFamily="34" charset="-128"/>
+                        <a:ea typeface="MS PGothic" panose="020B0600070205080204" pitchFamily="34" charset="-128"/>
+                      </a:endParaRPr>
+                    </a:p>
+                  </a:txBody>
+                  <a:tcPr anchor="ctr"/>
+                </a:tc>
+                <a:tc>
+                  <a:txBody>
+                    <a:bodyPr/>
+                    <a:lstStyle/>
+                    <a:p>
+                      <a:r>
+                        <a:rPr lang="en-US" altLang="zh-CN" sz="1600" dirty="0">
+                          <a:latin typeface="MS PGothic" panose="020B0600070205080204" pitchFamily="34" charset="-128"/>
+                          <a:ea typeface="MS PGothic" panose="020B0600070205080204" pitchFamily="34" charset="-128"/>
+                        </a:rPr>
+                        <a:t>10/minute</a:t>
+                      </a:r>
+                      <a:endParaRPr lang="zh-CN" altLang="en-US" sz="1600" dirty="0">
+                        <a:latin typeface="MS PGothic" panose="020B0600070205080204" pitchFamily="34" charset="-128"/>
+                        <a:ea typeface="MS PGothic" panose="020B0600070205080204" pitchFamily="34" charset="-128"/>
+                      </a:endParaRPr>
+                    </a:p>
+                  </a:txBody>
+                  <a:tcPr anchor="ctr"/>
+                </a:tc>
+                <a:tc>
+                  <a:txBody>
+                    <a:bodyPr/>
+                    <a:lstStyle/>
+                    <a:p>
+                      <a:r>
+                        <a:rPr lang="en-US" altLang="zh-CN" sz="1600" dirty="0">
+                          <a:latin typeface="MS PGothic" panose="020B0600070205080204" pitchFamily="34" charset="-128"/>
+                          <a:ea typeface="MS PGothic" panose="020B0600070205080204" pitchFamily="34" charset="-128"/>
+                        </a:rPr>
+                        <a:t>100/minute</a:t>
+                      </a:r>
+                      <a:endParaRPr lang="zh-CN" altLang="en-US" sz="1600" dirty="0">
+                        <a:latin typeface="MS PGothic" panose="020B0600070205080204" pitchFamily="34" charset="-128"/>
+                        <a:ea typeface="MS PGothic" panose="020B0600070205080204" pitchFamily="34" charset="-128"/>
+                      </a:endParaRPr>
+                    </a:p>
+                  </a:txBody>
+                  <a:tcPr anchor="ctr"/>
+                </a:tc>
+                <a:tc>
+                  <a:txBody>
+                    <a:bodyPr/>
+                    <a:lstStyle/>
+                    <a:p>
+                      <a:r>
+                        <a:rPr lang="en-US" altLang="zh-CN" sz="1600" dirty="0">
+                          <a:latin typeface="MS PGothic" panose="020B0600070205080204" pitchFamily="34" charset="-128"/>
+                          <a:ea typeface="MS PGothic" panose="020B0600070205080204" pitchFamily="34" charset="-128"/>
+                        </a:rPr>
+                        <a:t>1000/minute</a:t>
+                      </a:r>
+                    </a:p>
+                  </a:txBody>
+                  <a:tcPr anchor="ctr"/>
+                </a:tc>
+                <a:extLst>
+                  <a:ext uri="{0D108BD9-81ED-4DB2-BD59-A6C34878D82A}">
+                    <a16:rowId xmlns:a16="http://schemas.microsoft.com/office/drawing/2014/main" val="366382685"/>
+                  </a:ext>
+                </a:extLst>
+              </a:tr>
+              <a:tr h="400632">
+                <a:tc>
+                  <a:txBody>
+                    <a:bodyPr/>
+                    <a:lstStyle/>
+                    <a:p>
+                      <a:r>
+                        <a:rPr lang="en-US" altLang="zh-CN" sz="1600" dirty="0">
+                          <a:latin typeface="MS PGothic" panose="020B0600070205080204" pitchFamily="34" charset="-128"/>
+                          <a:ea typeface="MS PGothic" panose="020B0600070205080204" pitchFamily="34" charset="-128"/>
+                        </a:rPr>
+                        <a:t>Log</a:t>
+                      </a:r>
+                      <a:r>
+                        <a:rPr lang="ja-JP" altLang="en-US" sz="1600" dirty="0">
+                          <a:latin typeface="MS PGothic" panose="020B0600070205080204" pitchFamily="34" charset="-128"/>
+                          <a:ea typeface="MS PGothic" panose="020B0600070205080204" pitchFamily="34" charset="-128"/>
+                        </a:rPr>
+                        <a:t>保存期間</a:t>
+                      </a:r>
+                      <a:endParaRPr lang="zh-CN" altLang="en-US" sz="1600" dirty="0">
+                        <a:latin typeface="MS PGothic" panose="020B0600070205080204" pitchFamily="34" charset="-128"/>
+                        <a:ea typeface="MS PGothic" panose="020B0600070205080204" pitchFamily="34" charset="-128"/>
+                      </a:endParaRPr>
+                    </a:p>
+                  </a:txBody>
+                  <a:tcPr anchor="ctr"/>
+                </a:tc>
+                <a:tc>
+                  <a:txBody>
+                    <a:bodyPr/>
+                    <a:lstStyle/>
+                    <a:p>
+                      <a:r>
+                        <a:rPr lang="en-US" altLang="zh-CN" sz="1600" dirty="0">
+                          <a:latin typeface="MS PGothic" panose="020B0600070205080204" pitchFamily="34" charset="-128"/>
+                          <a:ea typeface="MS PGothic" panose="020B0600070205080204" pitchFamily="34" charset="-128"/>
+                        </a:rPr>
+                        <a:t>30 Days</a:t>
+                      </a:r>
+                      <a:endParaRPr lang="zh-CN" altLang="en-US" sz="1600" dirty="0">
+                        <a:latin typeface="MS PGothic" panose="020B0600070205080204" pitchFamily="34" charset="-128"/>
+                        <a:ea typeface="MS PGothic" panose="020B0600070205080204" pitchFamily="34" charset="-128"/>
+                      </a:endParaRPr>
+                    </a:p>
+                  </a:txBody>
+                  <a:tcPr anchor="ctr"/>
+                </a:tc>
+                <a:tc>
+                  <a:txBody>
+                    <a:bodyPr/>
+                    <a:lstStyle/>
+                    <a:p>
+                      <a:r>
+                        <a:rPr lang="en-US" altLang="zh-CN" sz="1600" dirty="0">
+                          <a:latin typeface="MS PGothic" panose="020B0600070205080204" pitchFamily="34" charset="-128"/>
+                          <a:ea typeface="MS PGothic" panose="020B0600070205080204" pitchFamily="34" charset="-128"/>
+                        </a:rPr>
+                        <a:t>Unlimited</a:t>
+                      </a:r>
+                      <a:endParaRPr lang="zh-CN" altLang="en-US" sz="1600" dirty="0">
+                        <a:latin typeface="MS PGothic" panose="020B0600070205080204" pitchFamily="34" charset="-128"/>
+                        <a:ea typeface="MS PGothic" panose="020B0600070205080204" pitchFamily="34" charset="-128"/>
+                      </a:endParaRPr>
+                    </a:p>
+                  </a:txBody>
+                  <a:tcPr anchor="ctr"/>
+                </a:tc>
+                <a:tc>
+                  <a:txBody>
+                    <a:bodyPr/>
+                    <a:lstStyle/>
+                    <a:p>
+                      <a:r>
+                        <a:rPr lang="en-US" altLang="zh-CN" sz="1600" dirty="0">
+                          <a:latin typeface="MS PGothic" panose="020B0600070205080204" pitchFamily="34" charset="-128"/>
+                          <a:ea typeface="MS PGothic" panose="020B0600070205080204" pitchFamily="34" charset="-128"/>
+                        </a:rPr>
+                        <a:t>Unlimited</a:t>
+                      </a:r>
+                    </a:p>
+                  </a:txBody>
+                  <a:tcPr anchor="ctr"/>
+                </a:tc>
+                <a:extLst>
+                  <a:ext uri="{0D108BD9-81ED-4DB2-BD59-A6C34878D82A}">
+                    <a16:rowId xmlns:a16="http://schemas.microsoft.com/office/drawing/2014/main" val="923681105"/>
+                  </a:ext>
+                </a:extLst>
+              </a:tr>
+              <a:tr h="400632">
+                <a:tc>
+                  <a:txBody>
+                    <a:bodyPr/>
+                    <a:lstStyle/>
+                    <a:p>
+                      <a:r>
+                        <a:rPr lang="ja-JP" altLang="en-US" sz="1600" dirty="0">
+                          <a:latin typeface="MS PGothic" panose="020B0600070205080204" pitchFamily="34" charset="-128"/>
+                          <a:ea typeface="MS PGothic" panose="020B0600070205080204" pitchFamily="34" charset="-128"/>
+                        </a:rPr>
+                        <a:t>サポート</a:t>
+                      </a:r>
+                      <a:endParaRPr lang="zh-CN" altLang="en-US" sz="1600" dirty="0">
+                        <a:latin typeface="MS PGothic" panose="020B0600070205080204" pitchFamily="34" charset="-128"/>
+                        <a:ea typeface="MS PGothic" panose="020B0600070205080204" pitchFamily="34" charset="-128"/>
+                      </a:endParaRPr>
+                    </a:p>
+                  </a:txBody>
+                  <a:tcPr anchor="ctr"/>
+                </a:tc>
+                <a:tc>
+                  <a:txBody>
+                    <a:bodyPr/>
+                    <a:lstStyle/>
+                    <a:p>
+                      <a:r>
+                        <a:rPr lang="en-US" altLang="zh-CN" sz="1600" dirty="0">
+                          <a:latin typeface="MS PGothic" panose="020B0600070205080204" pitchFamily="34" charset="-128"/>
+                          <a:ea typeface="MS PGothic" panose="020B0600070205080204" pitchFamily="34" charset="-128"/>
+                        </a:rPr>
+                        <a:t>Community, Help docs</a:t>
+                      </a:r>
+                      <a:endParaRPr lang="zh-CN" altLang="en-US" sz="1600" dirty="0">
+                        <a:latin typeface="MS PGothic" panose="020B0600070205080204" pitchFamily="34" charset="-128"/>
+                        <a:ea typeface="MS PGothic" panose="020B0600070205080204" pitchFamily="34" charset="-128"/>
+                      </a:endParaRPr>
+                    </a:p>
+                  </a:txBody>
+                  <a:tcPr anchor="ctr"/>
+                </a:tc>
+                <a:tc>
+                  <a:txBody>
+                    <a:bodyPr/>
+                    <a:lstStyle/>
+                    <a:p>
+                      <a:r>
+                        <a:rPr lang="en-US" altLang="zh-CN" sz="1600" dirty="0">
+                          <a:latin typeface="MS PGothic" panose="020B0600070205080204" pitchFamily="34" charset="-128"/>
+                          <a:ea typeface="MS PGothic" panose="020B0600070205080204" pitchFamily="34" charset="-128"/>
+                        </a:rPr>
+                        <a:t>E-mail</a:t>
+                      </a:r>
+                      <a:endParaRPr lang="zh-CN" altLang="en-US" sz="1600" dirty="0">
+                        <a:latin typeface="MS PGothic" panose="020B0600070205080204" pitchFamily="34" charset="-128"/>
+                        <a:ea typeface="MS PGothic" panose="020B0600070205080204" pitchFamily="34" charset="-128"/>
+                      </a:endParaRPr>
+                    </a:p>
+                  </a:txBody>
+                  <a:tcPr anchor="ctr"/>
+                </a:tc>
+                <a:tc>
+                  <a:txBody>
+                    <a:bodyPr/>
+                    <a:lstStyle/>
+                    <a:p>
+                      <a:r>
+                        <a:rPr lang="en-US" altLang="zh-CN" sz="1600" dirty="0">
+                          <a:latin typeface="MS PGothic" panose="020B0600070205080204" pitchFamily="34" charset="-128"/>
+                          <a:ea typeface="MS PGothic" panose="020B0600070205080204" pitchFamily="34" charset="-128"/>
+                        </a:rPr>
+                        <a:t>E-mail &amp; Slack Chat</a:t>
+                      </a:r>
+                    </a:p>
+                  </a:txBody>
+                  <a:tcPr anchor="ctr"/>
+                </a:tc>
+                <a:extLst>
+                  <a:ext uri="{0D108BD9-81ED-4DB2-BD59-A6C34878D82A}">
+                    <a16:rowId xmlns:a16="http://schemas.microsoft.com/office/drawing/2014/main" val="529055000"/>
+                  </a:ext>
+                </a:extLst>
+              </a:tr>
+            </a:tbl>
+          </a:graphicData>
+        </a:graphic>
+      </p:graphicFrame>
+    </p:spTree>
+    <p:extLst>
+      <p:ext uri="{BB962C8B-B14F-4D97-AF65-F5344CB8AC3E}">
+        <p14:creationId xmlns:p14="http://schemas.microsoft.com/office/powerpoint/2010/main" val="4058521279"/>
+      </p:ext>
+    </p:extLst>
+  </p:cSld>
+  <p:clrMapOvr>
+    <a:masterClrMapping/>
+  </p:clrMapOvr>
+</p:sld>
+</file>
+
+<file path=ppt/slides/slide9.xml><?xml version="1.0" encoding="utf-8"?>
+<p:sld xmlns:a="http://schemas.openxmlformats.org/drawingml/2006/main" xmlns:r="http://schemas.openxmlformats.org/officeDocument/2006/relationships" xmlns:p="http://schemas.openxmlformats.org/presentationml/2006/main">
+  <p:cSld>
+    <p:spTree>
+      <p:nvGrpSpPr>
+        <p:cNvPr id="1" name="">
+          <a:extLst>
+            <a:ext uri="{FF2B5EF4-FFF2-40B4-BE49-F238E27FC236}">
+              <a16:creationId xmlns:a16="http://schemas.microsoft.com/office/drawing/2014/main" id="{A9104E15-B404-50CA-9C9D-43FBB84FF583}"/>
+            </a:ext>
+          </a:extLst>
+        </p:cNvPr>
+        <p:cNvGrpSpPr/>
+        <p:nvPr/>
+      </p:nvGrpSpPr>
+      <p:grpSpPr>
+        <a:xfrm>
+          <a:off x="0" y="0"/>
+          <a:ext cx="0" cy="0"/>
+          <a:chOff x="0" y="0"/>
+          <a:chExt cx="0" cy="0"/>
+        </a:xfrm>
+      </p:grpSpPr>
+      <p:sp>
+        <p:nvSpPr>
+          <p:cNvPr id="4" name="文本框 3">
+            <a:extLst>
+              <a:ext uri="{FF2B5EF4-FFF2-40B4-BE49-F238E27FC236}">
+                <a16:creationId xmlns:a16="http://schemas.microsoft.com/office/drawing/2014/main" id="{90938384-B94C-1E16-D5B0-F060214E081E}"/>
+              </a:ext>
+            </a:extLst>
+          </p:cNvPr>
+          <p:cNvSpPr txBox="1"/>
+          <p:nvPr/>
+        </p:nvSpPr>
+        <p:spPr>
+          <a:xfrm>
+            <a:off x="575036" y="707011"/>
+            <a:ext cx="10246936" cy="369332"/>
+          </a:xfrm>
+          <a:prstGeom prst="rect">
+            <a:avLst/>
+          </a:prstGeom>
+          <a:noFill/>
+        </p:spPr>
+        <p:txBody>
+          <a:bodyPr wrap="square" rtlCol="0">
+            <a:spAutoFit/>
+          </a:bodyPr>
+          <a:lstStyle/>
+          <a:p>
+            <a:r>
+              <a:rPr lang="en-US" altLang="ja-JP" dirty="0">
+                <a:latin typeface="Arial" panose="020B0604020202020204" pitchFamily="34" charset="0"/>
+                <a:cs typeface="Arial" panose="020B0604020202020204" pitchFamily="34" charset="0"/>
+              </a:rPr>
+              <a:t>Self-Hosted</a:t>
+            </a:r>
+            <a:r>
+              <a:rPr lang="ja-JP" altLang="en-US" dirty="0">
+                <a:latin typeface="Arial" panose="020B0604020202020204" pitchFamily="34" charset="0"/>
+                <a:cs typeface="Arial" panose="020B0604020202020204" pitchFamily="34" charset="0"/>
+              </a:rPr>
+              <a:t>版紹介</a:t>
+            </a:r>
+            <a:endParaRPr lang="zh-CN" altLang="en-US" dirty="0">
+              <a:latin typeface="Arial" panose="020B0604020202020204" pitchFamily="34" charset="0"/>
+              <a:cs typeface="Arial" panose="020B0604020202020204" pitchFamily="34" charset="0"/>
+            </a:endParaRPr>
+          </a:p>
+        </p:txBody>
+      </p:sp>
+      <p:cxnSp>
+        <p:nvCxnSpPr>
+          <p:cNvPr id="6" name="直接连接符 5">
+            <a:extLst>
+              <a:ext uri="{FF2B5EF4-FFF2-40B4-BE49-F238E27FC236}">
+                <a16:creationId xmlns:a16="http://schemas.microsoft.com/office/drawing/2014/main" id="{E71D65FB-0B06-0922-19F4-033CF464789F}"/>
+              </a:ext>
+            </a:extLst>
+          </p:cNvPr>
+          <p:cNvCxnSpPr>
+            <a:cxnSpLocks/>
+          </p:cNvCxnSpPr>
+          <p:nvPr/>
+        </p:nvCxnSpPr>
+        <p:spPr>
+          <a:xfrm>
+            <a:off x="480767" y="1216058"/>
+            <a:ext cx="11019934" cy="0"/>
+          </a:xfrm>
+          <a:prstGeom prst="line">
+            <a:avLst/>
+          </a:prstGeom>
+        </p:spPr>
+        <p:style>
+          <a:lnRef idx="1">
+            <a:schemeClr val="accent1"/>
+          </a:lnRef>
+          <a:fillRef idx="0">
+            <a:schemeClr val="accent1"/>
+          </a:fillRef>
+          <a:effectRef idx="0">
+            <a:schemeClr val="accent1"/>
+          </a:effectRef>
+          <a:fontRef idx="minor">
+            <a:schemeClr val="tx1"/>
+          </a:fontRef>
+        </p:style>
+      </p:cxnSp>
+      <p:sp>
+        <p:nvSpPr>
+          <p:cNvPr id="2" name="文本框 1">
+            <a:extLst>
+              <a:ext uri="{FF2B5EF4-FFF2-40B4-BE49-F238E27FC236}">
+                <a16:creationId xmlns:a16="http://schemas.microsoft.com/office/drawing/2014/main" id="{F50CE5A7-F317-A9CF-14B5-0503B43D0382}"/>
+              </a:ext>
+            </a:extLst>
+          </p:cNvPr>
+          <p:cNvSpPr txBox="1"/>
+          <p:nvPr/>
+        </p:nvSpPr>
+        <p:spPr>
+          <a:xfrm>
+            <a:off x="575036" y="1459348"/>
+            <a:ext cx="10595728" cy="1323439"/>
+          </a:xfrm>
+          <a:prstGeom prst="rect">
+            <a:avLst/>
+          </a:prstGeom>
+          <a:noFill/>
+        </p:spPr>
+        <p:txBody>
+          <a:bodyPr wrap="square" rtlCol="0">
+            <a:spAutoFit/>
+          </a:bodyPr>
+          <a:lstStyle/>
+          <a:p>
+            <a:pPr marL="285750" indent="-285750">
+              <a:buFont typeface="Arial" panose="020B0604020202020204" pitchFamily="34" charset="0"/>
+              <a:buChar char="•"/>
+            </a:pPr>
+            <a:r>
+              <a:rPr lang="en-US" altLang="ja-JP" sz="1600" dirty="0">
+                <a:latin typeface="Arial" panose="020B0604020202020204" pitchFamily="34" charset="0"/>
+                <a:cs typeface="Arial" panose="020B0604020202020204" pitchFamily="34" charset="0"/>
+              </a:rPr>
+              <a:t>Self-Hosted</a:t>
+            </a:r>
+            <a:r>
+              <a:rPr lang="ja-JP" altLang="en-US" sz="1600" dirty="0">
+                <a:latin typeface="Arial" panose="020B0604020202020204" pitchFamily="34" charset="0"/>
+                <a:cs typeface="Arial" panose="020B0604020202020204" pitchFamily="34" charset="0"/>
+              </a:rPr>
+              <a:t>版は、</a:t>
+            </a:r>
+            <a:r>
+              <a:rPr lang="en-US" altLang="ja-JP" sz="1600" dirty="0">
+                <a:latin typeface="Arial" panose="020B0604020202020204" pitchFamily="34" charset="0"/>
+                <a:cs typeface="Arial" panose="020B0604020202020204" pitchFamily="34" charset="0"/>
+              </a:rPr>
+              <a:t>Dify</a:t>
+            </a:r>
+            <a:r>
+              <a:rPr lang="ja-JP" altLang="en-US" sz="1600" dirty="0">
+                <a:latin typeface="Arial" panose="020B0604020202020204" pitchFamily="34" charset="0"/>
+                <a:cs typeface="Arial" panose="020B0604020202020204" pitchFamily="34" charset="0"/>
+              </a:rPr>
+              <a:t>を自分自身のサーバーやクラウド環境にインストールして利用できるバージョンです。ソースコードが公開</a:t>
+            </a:r>
+            <a:r>
+              <a:rPr lang="en-US" altLang="ja-JP" sz="1600" dirty="0">
+                <a:latin typeface="Arial" panose="020B0604020202020204" pitchFamily="34" charset="0"/>
+                <a:cs typeface="Arial" panose="020B0604020202020204" pitchFamily="34" charset="0"/>
+              </a:rPr>
+              <a:t>OSS</a:t>
+            </a:r>
+            <a:r>
+              <a:rPr lang="ja-JP" altLang="en-US" sz="1600" dirty="0">
+                <a:latin typeface="Arial" panose="020B0604020202020204" pitchFamily="34" charset="0"/>
+                <a:cs typeface="Arial" panose="020B0604020202020204" pitchFamily="34" charset="0"/>
+              </a:rPr>
+              <a:t>としても提供されています。セルフホスト版はデータ管理の自由度、カスタマイズ性、利用制限の緩和などの利点があり、それに対して導入・運用の手間、インフラコストがかかります。</a:t>
+            </a:r>
+            <a:endParaRPr lang="en-US" altLang="ja-JP" sz="1600" dirty="0">
+              <a:latin typeface="Arial" panose="020B0604020202020204" pitchFamily="34" charset="0"/>
+              <a:cs typeface="Arial" panose="020B0604020202020204" pitchFamily="34" charset="0"/>
+            </a:endParaRPr>
+          </a:p>
+          <a:p>
+            <a:pPr marL="285750" indent="-285750">
+              <a:buFont typeface="Arial" panose="020B0604020202020204" pitchFamily="34" charset="0"/>
+              <a:buChar char="•"/>
+            </a:pPr>
+            <a:r>
+              <a:rPr lang="ja-JP" altLang="en-US" sz="1600" dirty="0">
+                <a:latin typeface="Arial" panose="020B0604020202020204" pitchFamily="34" charset="0"/>
+                <a:cs typeface="Arial" panose="020B0604020202020204" pitchFamily="34" charset="0"/>
+              </a:rPr>
+              <a:t>以下は、</a:t>
+            </a:r>
+            <a:r>
+              <a:rPr lang="en-US" altLang="ja-JP" sz="1600" dirty="0">
+                <a:latin typeface="Arial" panose="020B0604020202020204" pitchFamily="34" charset="0"/>
+                <a:cs typeface="Arial" panose="020B0604020202020204" pitchFamily="34" charset="0"/>
+              </a:rPr>
+              <a:t>Dify Self-Hosted</a:t>
+            </a:r>
+            <a:r>
+              <a:rPr lang="ja-JP" altLang="en-US" sz="1600" dirty="0">
+                <a:latin typeface="Arial" panose="020B0604020202020204" pitchFamily="34" charset="0"/>
+                <a:cs typeface="Arial" panose="020B0604020202020204" pitchFamily="34" charset="0"/>
+              </a:rPr>
+              <a:t>版の主要な</a:t>
+            </a:r>
+            <a:r>
+              <a:rPr lang="en-US" altLang="ja-JP" sz="1600" dirty="0">
+                <a:latin typeface="Arial" panose="020B0604020202020204" pitchFamily="34" charset="0"/>
+                <a:cs typeface="Arial" panose="020B0604020202020204" pitchFamily="34" charset="0"/>
+              </a:rPr>
+              <a:t>3</a:t>
+            </a:r>
+            <a:r>
+              <a:rPr lang="ja-JP" altLang="en-US" sz="1600" dirty="0">
+                <a:latin typeface="Arial" panose="020B0604020202020204" pitchFamily="34" charset="0"/>
+                <a:cs typeface="Arial" panose="020B0604020202020204" pitchFamily="34" charset="0"/>
+              </a:rPr>
+              <a:t>つのプラン</a:t>
+            </a:r>
+            <a:r>
+              <a:rPr lang="en-US" altLang="ja-JP" sz="1600" dirty="0">
+                <a:latin typeface="Arial" panose="020B0604020202020204" pitchFamily="34" charset="0"/>
+                <a:cs typeface="Arial" panose="020B0604020202020204" pitchFamily="34" charset="0"/>
+              </a:rPr>
+              <a:t>Community</a:t>
+            </a:r>
+            <a:r>
+              <a:rPr lang="ja-JP" altLang="en-US" sz="1600" dirty="0">
+                <a:latin typeface="Arial" panose="020B0604020202020204" pitchFamily="34" charset="0"/>
+                <a:cs typeface="Arial" panose="020B0604020202020204" pitchFamily="34" charset="0"/>
+              </a:rPr>
+              <a:t>、</a:t>
+            </a:r>
+            <a:r>
+              <a:rPr lang="en-US" altLang="ja-JP" sz="1600" dirty="0">
+                <a:latin typeface="Arial" panose="020B0604020202020204" pitchFamily="34" charset="0"/>
+                <a:cs typeface="Arial" panose="020B0604020202020204" pitchFamily="34" charset="0"/>
+              </a:rPr>
+              <a:t>Premium</a:t>
+            </a:r>
+            <a:r>
+              <a:rPr lang="ja-JP" altLang="en-US" sz="1600" dirty="0">
+                <a:latin typeface="Arial" panose="020B0604020202020204" pitchFamily="34" charset="0"/>
+                <a:cs typeface="Arial" panose="020B0604020202020204" pitchFamily="34" charset="0"/>
+              </a:rPr>
+              <a:t>、</a:t>
+            </a:r>
+            <a:r>
+              <a:rPr lang="en-US" altLang="ja-JP" sz="1600" dirty="0">
+                <a:latin typeface="Arial" panose="020B0604020202020204" pitchFamily="34" charset="0"/>
+                <a:cs typeface="Arial" panose="020B0604020202020204" pitchFamily="34" charset="0"/>
+              </a:rPr>
+              <a:t>Enterprise</a:t>
+            </a:r>
+            <a:r>
+              <a:rPr lang="ja-JP" altLang="en-US" sz="1600" dirty="0">
+                <a:latin typeface="Arial" panose="020B0604020202020204" pitchFamily="34" charset="0"/>
+                <a:cs typeface="Arial" panose="020B0604020202020204" pitchFamily="34" charset="0"/>
+              </a:rPr>
+              <a:t>の主な違いをまとめた比較表です。</a:t>
+            </a:r>
+            <a:endParaRPr lang="en-US" altLang="ja-JP" sz="1600" dirty="0">
+              <a:latin typeface="Arial" panose="020B0604020202020204" pitchFamily="34" charset="0"/>
+              <a:cs typeface="Arial" panose="020B0604020202020204" pitchFamily="34" charset="0"/>
+            </a:endParaRPr>
+          </a:p>
+        </p:txBody>
+      </p:sp>
+      <p:graphicFrame>
+        <p:nvGraphicFramePr>
+          <p:cNvPr id="3" name="表格 2">
+            <a:extLst>
+              <a:ext uri="{FF2B5EF4-FFF2-40B4-BE49-F238E27FC236}">
+                <a16:creationId xmlns:a16="http://schemas.microsoft.com/office/drawing/2014/main" id="{81FEA408-1857-D57F-9C2B-F25C5697106E}"/>
+              </a:ext>
+            </a:extLst>
+          </p:cNvPr>
+          <p:cNvGraphicFramePr>
+            <a:graphicFrameLocks noGrp="1"/>
+          </p:cNvGraphicFramePr>
+          <p:nvPr>
+            <p:extLst>
+              <p:ext uri="{D42A27DB-BD31-4B8C-83A1-F6EECF244321}">
+                <p14:modId xmlns:p14="http://schemas.microsoft.com/office/powerpoint/2010/main" val="1068388394"/>
+              </p:ext>
+            </p:extLst>
+          </p:nvPr>
+        </p:nvGraphicFramePr>
+        <p:xfrm>
+          <a:off x="655163" y="2320874"/>
+          <a:ext cx="10881674" cy="4219416"/>
+        </p:xfrm>
+        <a:graphic>
+          <a:graphicData uri="http://schemas.openxmlformats.org/drawingml/2006/table">
+            <a:tbl>
+              <a:tblPr firstRow="1" bandRow="1">
+                <a:tableStyleId>{5C22544A-7EE6-4342-B048-85BDC9FD1C3A}</a:tableStyleId>
+              </a:tblPr>
+              <a:tblGrid>
+                <a:gridCol w="1828801">
+                  <a:extLst>
+                    <a:ext uri="{9D8B030D-6E8A-4147-A177-3AD203B41FA5}">
+                      <a16:colId xmlns:a16="http://schemas.microsoft.com/office/drawing/2014/main" val="1034333737"/>
+                    </a:ext>
+                  </a:extLst>
+                </a:gridCol>
+                <a:gridCol w="2535810">
+                  <a:extLst>
+                    <a:ext uri="{9D8B030D-6E8A-4147-A177-3AD203B41FA5}">
+                      <a16:colId xmlns:a16="http://schemas.microsoft.com/office/drawing/2014/main" val="3549990795"/>
+                    </a:ext>
+                  </a:extLst>
+                </a:gridCol>
+                <a:gridCol w="2752627">
+                  <a:extLst>
+                    <a:ext uri="{9D8B030D-6E8A-4147-A177-3AD203B41FA5}">
+                      <a16:colId xmlns:a16="http://schemas.microsoft.com/office/drawing/2014/main" val="3348019054"/>
+                    </a:ext>
+                  </a:extLst>
+                </a:gridCol>
+                <a:gridCol w="3764436">
+                  <a:extLst>
+                    <a:ext uri="{9D8B030D-6E8A-4147-A177-3AD203B41FA5}">
+                      <a16:colId xmlns:a16="http://schemas.microsoft.com/office/drawing/2014/main" val="4232210452"/>
+                    </a:ext>
+                  </a:extLst>
+                </a:gridCol>
+              </a:tblGrid>
+              <a:tr h="328787">
+                <a:tc>
+                  <a:txBody>
+                    <a:bodyPr/>
+                    <a:lstStyle/>
+                    <a:p>
+                      <a:pPr algn="ctr"/>
+                      <a:r>
+                        <a:rPr lang="en-US" altLang="ja-JP" dirty="0"/>
+                        <a:t>Category</a:t>
+                      </a:r>
+                      <a:endParaRPr lang="zh-CN" altLang="en-US" dirty="0"/>
+                    </a:p>
+                  </a:txBody>
+                  <a:tcPr/>
+                </a:tc>
+                <a:tc>
+                  <a:txBody>
+                    <a:bodyPr/>
+                    <a:lstStyle/>
+                    <a:p>
+                      <a:pPr algn="ctr"/>
+                      <a:r>
+                        <a:rPr lang="en-US" altLang="zh-CN" u="none" dirty="0">
+                          <a:solidFill>
+                            <a:schemeClr val="bg1"/>
+                          </a:solidFill>
+                        </a:rPr>
+                        <a:t>Community</a:t>
+                      </a:r>
+                      <a:endParaRPr lang="zh-CN" altLang="en-US" u="none" dirty="0">
+                        <a:solidFill>
+                          <a:schemeClr val="bg1"/>
+                        </a:solidFill>
+                      </a:endParaRPr>
+                    </a:p>
+                  </a:txBody>
+                  <a:tcPr/>
+                </a:tc>
+                <a:tc>
+                  <a:txBody>
+                    <a:bodyPr/>
+                    <a:lstStyle/>
+                    <a:p>
+                      <a:pPr algn="ctr"/>
+                      <a:r>
+                        <a:rPr lang="en-US" altLang="ja-JP" u="none" dirty="0">
+                          <a:solidFill>
+                            <a:schemeClr val="bg1"/>
+                          </a:solidFill>
+                        </a:rPr>
+                        <a:t>Premium</a:t>
+                      </a:r>
+                      <a:endParaRPr lang="zh-CN" altLang="en-US" u="none" dirty="0">
+                        <a:solidFill>
+                          <a:schemeClr val="bg1"/>
+                        </a:solidFill>
+                      </a:endParaRPr>
+                    </a:p>
+                  </a:txBody>
+                  <a:tcPr/>
+                </a:tc>
+                <a:tc>
+                  <a:txBody>
+                    <a:bodyPr/>
+                    <a:lstStyle/>
+                    <a:p>
+                      <a:pPr algn="ctr"/>
+                      <a:r>
+                        <a:rPr lang="en-US" altLang="zh-CN" dirty="0"/>
+                        <a:t>Enterprise</a:t>
+                      </a:r>
+                      <a:endParaRPr lang="zh-CN" altLang="en-US" dirty="0">
+                        <a:solidFill>
+                          <a:schemeClr val="bg1"/>
+                        </a:solidFill>
+                      </a:endParaRPr>
+                    </a:p>
+                  </a:txBody>
+                  <a:tcPr/>
+                </a:tc>
+                <a:extLst>
+                  <a:ext uri="{0D108BD9-81ED-4DB2-BD59-A6C34878D82A}">
+                    <a16:rowId xmlns:a16="http://schemas.microsoft.com/office/drawing/2014/main" val="460455147"/>
+                  </a:ext>
+                </a:extLst>
+              </a:tr>
+              <a:tr h="400632">
+                <a:tc>
+                  <a:txBody>
+                    <a:bodyPr/>
+                    <a:lstStyle/>
+                    <a:p>
+                      <a:r>
+                        <a:rPr lang="zh-CN" altLang="en-US" sz="1500" dirty="0">
+                          <a:latin typeface="MS PGothic" panose="020B0600070205080204" pitchFamily="34" charset="-128"/>
+                          <a:ea typeface="MS PGothic" panose="020B0600070205080204" pitchFamily="34" charset="-128"/>
+                        </a:rPr>
+                        <a:t>価格</a:t>
+                      </a:r>
+                    </a:p>
+                  </a:txBody>
+                  <a:tcPr anchor="ctr"/>
+                </a:tc>
+                <a:tc>
+                  <a:txBody>
+                    <a:bodyPr/>
+                    <a:lstStyle/>
+                    <a:p>
+                      <a:r>
+                        <a:rPr lang="en-US" altLang="zh-CN" sz="1500" dirty="0">
+                          <a:latin typeface="MS PGothic" panose="020B0600070205080204" pitchFamily="34" charset="-128"/>
+                          <a:ea typeface="MS PGothic" panose="020B0600070205080204" pitchFamily="34" charset="-128"/>
+                        </a:rPr>
+                        <a:t>$0</a:t>
+                      </a:r>
+                      <a:endParaRPr lang="zh-CN" altLang="en-US" sz="1500" dirty="0">
+                        <a:latin typeface="MS PGothic" panose="020B0600070205080204" pitchFamily="34" charset="-128"/>
+                        <a:ea typeface="MS PGothic" panose="020B0600070205080204" pitchFamily="34" charset="-128"/>
+                      </a:endParaRPr>
+                    </a:p>
+                  </a:txBody>
+                  <a:tcPr anchor="ctr"/>
+                </a:tc>
+                <a:tc>
+                  <a:txBody>
+                    <a:bodyPr/>
+                    <a:lstStyle/>
+                    <a:p>
+                      <a:r>
+                        <a:rPr lang="ja-JP" altLang="en-US" sz="1500" dirty="0">
+                          <a:latin typeface="MS PGothic" panose="020B0600070205080204" pitchFamily="34" charset="-128"/>
+                          <a:ea typeface="MS PGothic" panose="020B0600070205080204" pitchFamily="34" charset="-128"/>
+                        </a:rPr>
+                        <a:t>要相談</a:t>
+                      </a:r>
+                      <a:endParaRPr lang="zh-CN" altLang="en-US" sz="1500" dirty="0">
+                        <a:latin typeface="MS PGothic" panose="020B0600070205080204" pitchFamily="34" charset="-128"/>
+                        <a:ea typeface="MS PGothic" panose="020B0600070205080204" pitchFamily="34" charset="-128"/>
+                      </a:endParaRPr>
+                    </a:p>
+                  </a:txBody>
+                  <a:tcPr anchor="ctr"/>
+                </a:tc>
+                <a:tc>
+                  <a:txBody>
+                    <a:bodyPr/>
+                    <a:lstStyle/>
+                    <a:p>
+                      <a:r>
+                        <a:rPr lang="zh-CN" altLang="en-US" sz="1500" dirty="0">
+                          <a:latin typeface="MS PGothic" panose="020B0600070205080204" pitchFamily="34" charset="-128"/>
+                          <a:ea typeface="MS PGothic" panose="020B0600070205080204" pitchFamily="34" charset="-128"/>
+                        </a:rPr>
+                        <a:t>要相談</a:t>
+                      </a:r>
+                    </a:p>
+                  </a:txBody>
+                  <a:tcPr anchor="ctr"/>
+                </a:tc>
+                <a:extLst>
+                  <a:ext uri="{0D108BD9-81ED-4DB2-BD59-A6C34878D82A}">
+                    <a16:rowId xmlns:a16="http://schemas.microsoft.com/office/drawing/2014/main" val="3356126220"/>
+                  </a:ext>
+                </a:extLst>
+              </a:tr>
+              <a:tr h="400632">
+                <a:tc>
+                  <a:txBody>
+                    <a:bodyPr/>
+                    <a:lstStyle/>
+                    <a:p>
+                      <a:r>
+                        <a:rPr lang="ja-JP" altLang="en-US" sz="1500" dirty="0">
+                          <a:latin typeface="MS PGothic" panose="020B0600070205080204" pitchFamily="34" charset="-128"/>
+                          <a:ea typeface="MS PGothic" panose="020B0600070205080204" pitchFamily="34" charset="-128"/>
+                        </a:rPr>
+                        <a:t>デプロイ方法</a:t>
+                      </a:r>
+                      <a:endParaRPr lang="zh-CN" altLang="en-US" sz="1500" dirty="0">
+                        <a:latin typeface="MS PGothic" panose="020B0600070205080204" pitchFamily="34" charset="-128"/>
+                        <a:ea typeface="MS PGothic" panose="020B0600070205080204" pitchFamily="34" charset="-128"/>
+                      </a:endParaRPr>
+                    </a:p>
+                  </a:txBody>
+                  <a:tcPr anchor="ctr"/>
+                </a:tc>
+                <a:tc>
+                  <a:txBody>
+                    <a:bodyPr/>
+                    <a:lstStyle/>
+                    <a:p>
+                      <a:r>
+                        <a:rPr lang="en-US" altLang="ja-JP" sz="1500" dirty="0">
+                          <a:latin typeface="MS PGothic" panose="020B0600070205080204" pitchFamily="34" charset="-128"/>
+                          <a:ea typeface="MS PGothic" panose="020B0600070205080204" pitchFamily="34" charset="-128"/>
+                        </a:rPr>
+                        <a:t>Self-service</a:t>
+                      </a:r>
+                      <a:endParaRPr lang="zh-CN" altLang="en-US" sz="1500" dirty="0">
+                        <a:latin typeface="MS PGothic" panose="020B0600070205080204" pitchFamily="34" charset="-128"/>
+                        <a:ea typeface="MS PGothic" panose="020B0600070205080204" pitchFamily="34" charset="-128"/>
+                      </a:endParaRPr>
+                    </a:p>
+                  </a:txBody>
+                  <a:tcPr anchor="ctr"/>
+                </a:tc>
+                <a:tc>
+                  <a:txBody>
+                    <a:bodyPr/>
+                    <a:lstStyle/>
+                    <a:p>
+                      <a:r>
+                        <a:rPr lang="en-US" altLang="ja-JP" sz="1500" dirty="0">
+                          <a:latin typeface="MS PGothic" panose="020B0600070205080204" pitchFamily="34" charset="-128"/>
+                          <a:ea typeface="MS PGothic" panose="020B0600070205080204" pitchFamily="34" charset="-128"/>
+                        </a:rPr>
+                        <a:t>AWS Marketplace</a:t>
+                      </a:r>
+                      <a:r>
+                        <a:rPr lang="ja-JP" altLang="en-US" sz="1500" dirty="0">
+                          <a:latin typeface="MS PGothic" panose="020B0600070205080204" pitchFamily="34" charset="-128"/>
+                          <a:ea typeface="MS PGothic" panose="020B0600070205080204" pitchFamily="34" charset="-128"/>
+                        </a:rPr>
+                        <a:t>から</a:t>
+                      </a:r>
+                      <a:r>
+                        <a:rPr lang="en-US" altLang="ja-JP" sz="1500" dirty="0">
+                          <a:latin typeface="MS PGothic" panose="020B0600070205080204" pitchFamily="34" charset="-128"/>
+                          <a:ea typeface="MS PGothic" panose="020B0600070205080204" pitchFamily="34" charset="-128"/>
+                        </a:rPr>
+                        <a:t>EC2</a:t>
+                      </a:r>
+                      <a:r>
+                        <a:rPr lang="ja-JP" altLang="en-US" sz="1500" dirty="0">
+                          <a:latin typeface="MS PGothic" panose="020B0600070205080204" pitchFamily="34" charset="-128"/>
+                          <a:ea typeface="MS PGothic" panose="020B0600070205080204" pitchFamily="34" charset="-128"/>
+                        </a:rPr>
+                        <a:t>へのデプロイ（</a:t>
+                      </a:r>
+                      <a:r>
+                        <a:rPr lang="en-US" altLang="ja-JP" sz="1500" dirty="0">
+                          <a:latin typeface="MS PGothic" panose="020B0600070205080204" pitchFamily="34" charset="-128"/>
+                          <a:ea typeface="MS PGothic" panose="020B0600070205080204" pitchFamily="34" charset="-128"/>
+                        </a:rPr>
+                        <a:t>Azure</a:t>
+                      </a:r>
+                      <a:r>
+                        <a:rPr lang="ja-JP" altLang="en-US" sz="1500" dirty="0">
+                          <a:latin typeface="MS PGothic" panose="020B0600070205080204" pitchFamily="34" charset="-128"/>
+                          <a:ea typeface="MS PGothic" panose="020B0600070205080204" pitchFamily="34" charset="-128"/>
+                        </a:rPr>
+                        <a:t>も開発中）</a:t>
+                      </a:r>
+                      <a:endParaRPr lang="zh-CN" altLang="en-US" sz="1500" dirty="0">
+                        <a:latin typeface="MS PGothic" panose="020B0600070205080204" pitchFamily="34" charset="-128"/>
+                        <a:ea typeface="MS PGothic" panose="020B0600070205080204" pitchFamily="34" charset="-128"/>
+                      </a:endParaRPr>
+                    </a:p>
+                  </a:txBody>
+                  <a:tcPr anchor="ctr"/>
+                </a:tc>
+                <a:tc>
+                  <a:txBody>
+                    <a:bodyPr/>
+                    <a:lstStyle/>
+                    <a:p>
+                      <a:r>
+                        <a:rPr lang="en-US" altLang="ja-JP" sz="1500" dirty="0">
+                          <a:latin typeface="MS PGothic" panose="020B0600070205080204" pitchFamily="34" charset="-128"/>
+                          <a:ea typeface="MS PGothic" panose="020B0600070205080204" pitchFamily="34" charset="-128"/>
+                        </a:rPr>
+                        <a:t>Dify</a:t>
+                      </a:r>
+                      <a:r>
+                        <a:rPr lang="ja-JP" altLang="en-US" sz="1500" dirty="0">
+                          <a:latin typeface="MS PGothic" panose="020B0600070205080204" pitchFamily="34" charset="-128"/>
+                          <a:ea typeface="MS PGothic" panose="020B0600070205080204" pitchFamily="34" charset="-128"/>
+                        </a:rPr>
+                        <a:t>が提供するクラウドサービスを利用</a:t>
+                      </a:r>
+                      <a:endParaRPr lang="en-US" altLang="zh-CN" sz="1500" dirty="0">
+                        <a:latin typeface="MS PGothic" panose="020B0600070205080204" pitchFamily="34" charset="-128"/>
+                        <a:ea typeface="MS PGothic" panose="020B0600070205080204" pitchFamily="34" charset="-128"/>
+                      </a:endParaRPr>
+                    </a:p>
+                  </a:txBody>
+                  <a:tcPr anchor="ctr"/>
+                </a:tc>
+                <a:extLst>
+                  <a:ext uri="{0D108BD9-81ED-4DB2-BD59-A6C34878D82A}">
+                    <a16:rowId xmlns:a16="http://schemas.microsoft.com/office/drawing/2014/main" val="56370049"/>
+                  </a:ext>
+                </a:extLst>
+              </a:tr>
+              <a:tr h="400632">
+                <a:tc>
+                  <a:txBody>
+                    <a:bodyPr/>
+                    <a:lstStyle/>
+                    <a:p>
+                      <a:r>
+                        <a:rPr lang="ja-JP" altLang="en-US" sz="1500" dirty="0">
+                          <a:latin typeface="MS PGothic" panose="020B0600070205080204" pitchFamily="34" charset="-128"/>
+                          <a:ea typeface="MS PGothic" panose="020B0600070205080204" pitchFamily="34" charset="-128"/>
+                        </a:rPr>
+                        <a:t>機能</a:t>
+                      </a:r>
+                      <a:endParaRPr lang="zh-CN" altLang="en-US" sz="1500" dirty="0">
+                        <a:latin typeface="MS PGothic" panose="020B0600070205080204" pitchFamily="34" charset="-128"/>
+                        <a:ea typeface="MS PGothic" panose="020B0600070205080204" pitchFamily="34" charset="-128"/>
+                      </a:endParaRPr>
+                    </a:p>
+                  </a:txBody>
+                  <a:tcPr anchor="ctr"/>
+                </a:tc>
+                <a:tc>
+                  <a:txBody>
+                    <a:bodyPr/>
+                    <a:lstStyle/>
+                    <a:p>
+                      <a:r>
+                        <a:rPr lang="en-US" altLang="ja-JP" sz="1500" dirty="0">
+                          <a:latin typeface="MS PGothic" panose="020B0600070205080204" pitchFamily="34" charset="-128"/>
+                          <a:ea typeface="MS PGothic" panose="020B0600070205080204" pitchFamily="34" charset="-128"/>
+                        </a:rPr>
+                        <a:t>Dify</a:t>
+                      </a:r>
+                      <a:r>
+                        <a:rPr lang="ja-JP" altLang="en-US" sz="1500" dirty="0">
+                          <a:latin typeface="MS PGothic" panose="020B0600070205080204" pitchFamily="34" charset="-128"/>
+                          <a:ea typeface="MS PGothic" panose="020B0600070205080204" pitchFamily="34" charset="-128"/>
+                        </a:rPr>
+                        <a:t>の基本的な機能全般 </a:t>
+                      </a:r>
+                      <a:endParaRPr lang="zh-CN" altLang="en-US" sz="1500" dirty="0">
+                        <a:latin typeface="MS PGothic" panose="020B0600070205080204" pitchFamily="34" charset="-128"/>
+                        <a:ea typeface="MS PGothic" panose="020B0600070205080204" pitchFamily="34" charset="-128"/>
+                      </a:endParaRPr>
+                    </a:p>
+                  </a:txBody>
+                  <a:tcPr anchor="ctr"/>
+                </a:tc>
+                <a:tc>
+                  <a:txBody>
+                    <a:bodyPr/>
+                    <a:lstStyle/>
+                    <a:p>
+                      <a:r>
+                        <a:rPr lang="ja-JP" altLang="en-US" sz="1500" dirty="0">
+                          <a:latin typeface="MS PGothic" panose="020B0600070205080204" pitchFamily="34" charset="-128"/>
+                          <a:ea typeface="MS PGothic" panose="020B0600070205080204" pitchFamily="34" charset="-128"/>
+                        </a:rPr>
+                        <a:t>基本機能に加え、</a:t>
+                      </a:r>
+                      <a:r>
+                        <a:rPr lang="en-US" altLang="ja-JP" sz="1500" dirty="0">
+                          <a:latin typeface="MS PGothic" panose="020B0600070205080204" pitchFamily="34" charset="-128"/>
+                          <a:ea typeface="MS PGothic" panose="020B0600070205080204" pitchFamily="34" charset="-128"/>
+                        </a:rPr>
+                        <a:t>AWS</a:t>
+                      </a:r>
+                      <a:r>
+                        <a:rPr lang="ja-JP" altLang="en-US" sz="1500" dirty="0">
+                          <a:latin typeface="MS PGothic" panose="020B0600070205080204" pitchFamily="34" charset="-128"/>
+                          <a:ea typeface="MS PGothic" panose="020B0600070205080204" pitchFamily="34" charset="-128"/>
+                        </a:rPr>
+                        <a:t>でのセキュアなデータ管理、商標と</a:t>
+                      </a:r>
+                      <a:r>
+                        <a:rPr lang="en-US" altLang="ja-JP" sz="1500" dirty="0">
+                          <a:latin typeface="MS PGothic" panose="020B0600070205080204" pitchFamily="34" charset="-128"/>
+                          <a:ea typeface="MS PGothic" panose="020B0600070205080204" pitchFamily="34" charset="-128"/>
+                        </a:rPr>
+                        <a:t>Logo</a:t>
+                      </a:r>
+                      <a:r>
+                        <a:rPr lang="ja-JP" altLang="en-US" sz="1500" dirty="0">
+                          <a:latin typeface="MS PGothic" panose="020B0600070205080204" pitchFamily="34" charset="-128"/>
+                          <a:ea typeface="MS PGothic" panose="020B0600070205080204" pitchFamily="34" charset="-128"/>
+                        </a:rPr>
+                        <a:t>等のカスタマイズオプション</a:t>
+                      </a:r>
+                      <a:endParaRPr lang="zh-CN" altLang="en-US" sz="1500" dirty="0">
+                        <a:latin typeface="MS PGothic" panose="020B0600070205080204" pitchFamily="34" charset="-128"/>
+                        <a:ea typeface="MS PGothic" panose="020B0600070205080204" pitchFamily="34" charset="-128"/>
+                      </a:endParaRPr>
+                    </a:p>
+                  </a:txBody>
+                  <a:tcPr anchor="ctr"/>
+                </a:tc>
+                <a:tc>
+                  <a:txBody>
+                    <a:bodyPr/>
+                    <a:lstStyle/>
+                    <a:p>
+                      <a:r>
+                        <a:rPr lang="en-US" altLang="ja-JP" sz="1500" dirty="0">
+                          <a:latin typeface="MS PGothic" panose="020B0600070205080204" pitchFamily="34" charset="-128"/>
+                          <a:ea typeface="MS PGothic" panose="020B0600070205080204" pitchFamily="34" charset="-128"/>
+                        </a:rPr>
+                        <a:t>Premium</a:t>
+                      </a:r>
+                      <a:r>
+                        <a:rPr lang="ja-JP" altLang="en-US" sz="1500" dirty="0">
+                          <a:latin typeface="MS PGothic" panose="020B0600070205080204" pitchFamily="34" charset="-128"/>
+                          <a:ea typeface="MS PGothic" panose="020B0600070205080204" pitchFamily="34" charset="-128"/>
+                        </a:rPr>
+                        <a:t>機能に加え、</a:t>
+                      </a:r>
+                      <a:r>
+                        <a:rPr lang="en-US" altLang="ja-JP" sz="1500" dirty="0">
+                          <a:latin typeface="MS PGothic" panose="020B0600070205080204" pitchFamily="34" charset="-128"/>
+                          <a:ea typeface="MS PGothic" panose="020B0600070205080204" pitchFamily="34" charset="-128"/>
+                        </a:rPr>
+                        <a:t>SSO</a:t>
+                      </a:r>
+                      <a:r>
+                        <a:rPr lang="ja-JP" altLang="en-US" sz="1500" dirty="0">
+                          <a:latin typeface="MS PGothic" panose="020B0600070205080204" pitchFamily="34" charset="-128"/>
+                          <a:ea typeface="MS PGothic" panose="020B0600070205080204" pitchFamily="34" charset="-128"/>
+                        </a:rPr>
+                        <a:t>による統合認証、複数ワークスペース管理、アプリケーション作成数無制限、高度なアクセス制御、大規模データ処理対応など、大企業向けの機能</a:t>
+                      </a:r>
+                      <a:endParaRPr lang="en-US" altLang="zh-CN" sz="1500" dirty="0">
+                        <a:latin typeface="MS PGothic" panose="020B0600070205080204" pitchFamily="34" charset="-128"/>
+                        <a:ea typeface="MS PGothic" panose="020B0600070205080204" pitchFamily="34" charset="-128"/>
+                      </a:endParaRPr>
+                    </a:p>
+                  </a:txBody>
+                  <a:tcPr anchor="ctr"/>
+                </a:tc>
+                <a:extLst>
+                  <a:ext uri="{0D108BD9-81ED-4DB2-BD59-A6C34878D82A}">
+                    <a16:rowId xmlns:a16="http://schemas.microsoft.com/office/drawing/2014/main" val="390922883"/>
+                  </a:ext>
+                </a:extLst>
+              </a:tr>
+              <a:tr h="400632">
+                <a:tc>
+                  <a:txBody>
+                    <a:bodyPr/>
+                    <a:lstStyle/>
+                    <a:p>
+                      <a:r>
+                        <a:rPr lang="ja-JP" altLang="en-US" sz="1500" dirty="0">
+                          <a:latin typeface="MS PGothic" panose="020B0600070205080204" pitchFamily="34" charset="-128"/>
+                          <a:ea typeface="MS PGothic" panose="020B0600070205080204" pitchFamily="34" charset="-128"/>
+                        </a:rPr>
+                        <a:t>データ管理</a:t>
+                      </a:r>
+                      <a:endParaRPr lang="zh-CN" altLang="en-US" sz="1500" dirty="0">
+                        <a:latin typeface="MS PGothic" panose="020B0600070205080204" pitchFamily="34" charset="-128"/>
+                        <a:ea typeface="MS PGothic" panose="020B0600070205080204" pitchFamily="34" charset="-128"/>
+                      </a:endParaRPr>
+                    </a:p>
+                  </a:txBody>
+                  <a:tcPr anchor="ctr"/>
+                </a:tc>
+                <a:tc>
+                  <a:txBody>
+                    <a:bodyPr/>
+                    <a:lstStyle/>
+                    <a:p>
+                      <a:r>
+                        <a:rPr lang="en-US" altLang="ja-JP" sz="1500" dirty="0">
+                          <a:latin typeface="MS PGothic" panose="020B0600070205080204" pitchFamily="34" charset="-128"/>
+                          <a:ea typeface="MS PGothic" panose="020B0600070205080204" pitchFamily="34" charset="-128"/>
+                        </a:rPr>
+                        <a:t>Self-service</a:t>
+                      </a:r>
+                      <a:endParaRPr lang="zh-CN" altLang="en-US" sz="1500" dirty="0">
+                        <a:latin typeface="MS PGothic" panose="020B0600070205080204" pitchFamily="34" charset="-128"/>
+                        <a:ea typeface="MS PGothic" panose="020B0600070205080204" pitchFamily="34" charset="-128"/>
+                      </a:endParaRPr>
+                    </a:p>
+                  </a:txBody>
+                  <a:tcPr anchor="ctr"/>
+                </a:tc>
+                <a:tc>
+                  <a:txBody>
+                    <a:bodyPr/>
+                    <a:lstStyle/>
+                    <a:p>
+                      <a:r>
+                        <a:rPr lang="en-US" altLang="zh-CN" sz="1500" dirty="0">
+                          <a:latin typeface="MS PGothic" panose="020B0600070205080204" pitchFamily="34" charset="-128"/>
+                          <a:ea typeface="MS PGothic" panose="020B0600070205080204" pitchFamily="34" charset="-128"/>
+                        </a:rPr>
+                        <a:t>AWS</a:t>
+                      </a:r>
+                      <a:r>
+                        <a:rPr lang="ja-JP" altLang="en-US" sz="1500" dirty="0">
+                          <a:latin typeface="MS PGothic" panose="020B0600070205080204" pitchFamily="34" charset="-128"/>
+                          <a:ea typeface="MS PGothic" panose="020B0600070205080204" pitchFamily="34" charset="-128"/>
+                        </a:rPr>
+                        <a:t>上で</a:t>
+                      </a:r>
+                      <a:r>
+                        <a:rPr lang="zh-CN" altLang="en-US" sz="1500" dirty="0">
+                          <a:latin typeface="MS PGothic" panose="020B0600070205080204" pitchFamily="34" charset="-128"/>
+                          <a:ea typeface="MS PGothic" panose="020B0600070205080204" pitchFamily="34" charset="-128"/>
+                        </a:rPr>
+                        <a:t>自社管理</a:t>
+                      </a:r>
+                    </a:p>
+                  </a:txBody>
+                  <a:tcPr anchor="ctr"/>
+                </a:tc>
+                <a:tc>
+                  <a:txBody>
+                    <a:bodyPr/>
+                    <a:lstStyle/>
+                    <a:p>
+                      <a:r>
+                        <a:rPr lang="en-US" altLang="ja-JP" sz="1500" dirty="0">
+                          <a:latin typeface="MS PGothic" panose="020B0600070205080204" pitchFamily="34" charset="-128"/>
+                          <a:ea typeface="MS PGothic" panose="020B0600070205080204" pitchFamily="34" charset="-128"/>
+                        </a:rPr>
+                        <a:t>Dify Cloud</a:t>
+                      </a:r>
+                      <a:r>
+                        <a:rPr lang="ja-JP" altLang="en-US" sz="1500" dirty="0">
+                          <a:latin typeface="MS PGothic" panose="020B0600070205080204" pitchFamily="34" charset="-128"/>
+                          <a:ea typeface="MS PGothic" panose="020B0600070205080204" pitchFamily="34" charset="-128"/>
+                        </a:rPr>
+                        <a:t>上で管理される</a:t>
+                      </a:r>
+                      <a:endParaRPr lang="en-US" altLang="zh-CN" sz="1500" dirty="0">
+                        <a:latin typeface="MS PGothic" panose="020B0600070205080204" pitchFamily="34" charset="-128"/>
+                        <a:ea typeface="MS PGothic" panose="020B0600070205080204" pitchFamily="34" charset="-128"/>
+                      </a:endParaRPr>
+                    </a:p>
+                  </a:txBody>
+                  <a:tcPr anchor="ctr"/>
+                </a:tc>
+                <a:extLst>
+                  <a:ext uri="{0D108BD9-81ED-4DB2-BD59-A6C34878D82A}">
+                    <a16:rowId xmlns:a16="http://schemas.microsoft.com/office/drawing/2014/main" val="3599334861"/>
+                  </a:ext>
+                </a:extLst>
+              </a:tr>
+              <a:tr h="400632">
+                <a:tc>
+                  <a:txBody>
+                    <a:bodyPr/>
+                    <a:lstStyle/>
+                    <a:p>
+                      <a:r>
+                        <a:rPr lang="ja-JP" altLang="en-US" sz="1500" dirty="0">
+                          <a:latin typeface="MS PGothic" panose="020B0600070205080204" pitchFamily="34" charset="-128"/>
+                          <a:ea typeface="MS PGothic" panose="020B0600070205080204" pitchFamily="34" charset="-128"/>
+                        </a:rPr>
+                        <a:t>カスタマイズ</a:t>
+                      </a:r>
+                      <a:endParaRPr lang="zh-CN" altLang="en-US" sz="1500" dirty="0">
+                        <a:latin typeface="MS PGothic" panose="020B0600070205080204" pitchFamily="34" charset="-128"/>
+                        <a:ea typeface="MS PGothic" panose="020B0600070205080204" pitchFamily="34" charset="-128"/>
+                      </a:endParaRPr>
+                    </a:p>
+                  </a:txBody>
+                  <a:tcPr anchor="ctr"/>
+                </a:tc>
+                <a:tc>
+                  <a:txBody>
+                    <a:bodyPr/>
+                    <a:lstStyle/>
+                    <a:p>
+                      <a:r>
+                        <a:rPr lang="ja-JP" altLang="en-US" sz="1500" dirty="0">
+                          <a:latin typeface="MS PGothic" panose="020B0600070205080204" pitchFamily="34" charset="-128"/>
+                          <a:ea typeface="MS PGothic" panose="020B0600070205080204" pitchFamily="34" charset="-128"/>
+                        </a:rPr>
+                        <a:t>ソースコードレベルで可能</a:t>
+                      </a:r>
+                      <a:endParaRPr lang="zh-CN" altLang="en-US" sz="1500" dirty="0">
+                        <a:latin typeface="MS PGothic" panose="020B0600070205080204" pitchFamily="34" charset="-128"/>
+                        <a:ea typeface="MS PGothic" panose="020B0600070205080204" pitchFamily="34" charset="-128"/>
+                      </a:endParaRPr>
+                    </a:p>
+                  </a:txBody>
+                  <a:tcPr anchor="ctr"/>
+                </a:tc>
+                <a:tc>
+                  <a:txBody>
+                    <a:bodyPr/>
+                    <a:lstStyle/>
+                    <a:p>
+                      <a:r>
+                        <a:rPr lang="ja-JP" altLang="en-US" sz="1500" dirty="0">
+                          <a:latin typeface="MS PGothic" panose="020B0600070205080204" pitchFamily="34" charset="-128"/>
+                          <a:ea typeface="MS PGothic" panose="020B0600070205080204" pitchFamily="34" charset="-128"/>
+                        </a:rPr>
+                        <a:t>商標と</a:t>
+                      </a:r>
+                      <a:r>
+                        <a:rPr lang="en-US" altLang="ja-JP" sz="1500" dirty="0">
+                          <a:latin typeface="MS PGothic" panose="020B0600070205080204" pitchFamily="34" charset="-128"/>
+                          <a:ea typeface="MS PGothic" panose="020B0600070205080204" pitchFamily="34" charset="-128"/>
+                        </a:rPr>
+                        <a:t>Logo</a:t>
+                      </a:r>
+                      <a:r>
+                        <a:rPr lang="ja-JP" altLang="en-US" sz="1500" dirty="0">
+                          <a:latin typeface="MS PGothic" panose="020B0600070205080204" pitchFamily="34" charset="-128"/>
+                          <a:ea typeface="MS PGothic" panose="020B0600070205080204" pitchFamily="34" charset="-128"/>
+                        </a:rPr>
+                        <a:t>等のカスタマイズ可能</a:t>
+                      </a:r>
+                      <a:endParaRPr lang="zh-CN" altLang="en-US" sz="1500" dirty="0">
+                        <a:latin typeface="MS PGothic" panose="020B0600070205080204" pitchFamily="34" charset="-128"/>
+                        <a:ea typeface="MS PGothic" panose="020B0600070205080204" pitchFamily="34" charset="-128"/>
+                      </a:endParaRPr>
+                    </a:p>
+                  </a:txBody>
+                  <a:tcPr anchor="ctr"/>
+                </a:tc>
+                <a:tc>
+                  <a:txBody>
+                    <a:bodyPr/>
+                    <a:lstStyle/>
+                    <a:p>
+                      <a:r>
+                        <a:rPr lang="ja-JP" altLang="en-US" sz="1500" dirty="0">
+                          <a:latin typeface="MS PGothic" panose="020B0600070205080204" pitchFamily="34" charset="-128"/>
+                          <a:ea typeface="MS PGothic" panose="020B0600070205080204" pitchFamily="34" charset="-128"/>
+                        </a:rPr>
+                        <a:t>要相談</a:t>
+                      </a:r>
+                      <a:endParaRPr lang="en-US" altLang="zh-CN" sz="1500" dirty="0">
+                        <a:latin typeface="MS PGothic" panose="020B0600070205080204" pitchFamily="34" charset="-128"/>
+                        <a:ea typeface="MS PGothic" panose="020B0600070205080204" pitchFamily="34" charset="-128"/>
+                      </a:endParaRPr>
+                    </a:p>
+                  </a:txBody>
+                  <a:tcPr anchor="ctr"/>
+                </a:tc>
+                <a:extLst>
+                  <a:ext uri="{0D108BD9-81ED-4DB2-BD59-A6C34878D82A}">
+                    <a16:rowId xmlns:a16="http://schemas.microsoft.com/office/drawing/2014/main" val="563866541"/>
+                  </a:ext>
+                </a:extLst>
+              </a:tr>
+              <a:tr h="400632">
+                <a:tc>
+                  <a:txBody>
+                    <a:bodyPr/>
+                    <a:lstStyle/>
+                    <a:p>
+                      <a:r>
+                        <a:rPr lang="ja-JP" altLang="en-US" sz="1500" dirty="0">
+                          <a:latin typeface="MS PGothic" panose="020B0600070205080204" pitchFamily="34" charset="-128"/>
+                          <a:ea typeface="MS PGothic" panose="020B0600070205080204" pitchFamily="34" charset="-128"/>
+                        </a:rPr>
+                        <a:t>サポート</a:t>
+                      </a:r>
+                      <a:endParaRPr lang="zh-CN" altLang="en-US" sz="1500" dirty="0">
+                        <a:latin typeface="MS PGothic" panose="020B0600070205080204" pitchFamily="34" charset="-128"/>
+                        <a:ea typeface="MS PGothic" panose="020B0600070205080204" pitchFamily="34" charset="-128"/>
+                      </a:endParaRPr>
+                    </a:p>
+                  </a:txBody>
+                  <a:tcPr anchor="ctr"/>
+                </a:tc>
+                <a:tc>
+                  <a:txBody>
+                    <a:bodyPr/>
+                    <a:lstStyle/>
+                    <a:p>
+                      <a:r>
+                        <a:rPr lang="en-US" altLang="zh-CN" sz="1500" dirty="0">
+                          <a:latin typeface="MS PGothic" panose="020B0600070205080204" pitchFamily="34" charset="-128"/>
+                          <a:ea typeface="MS PGothic" panose="020B0600070205080204" pitchFamily="34" charset="-128"/>
+                        </a:rPr>
+                        <a:t>Community, Help docs</a:t>
+                      </a:r>
+                      <a:endParaRPr lang="zh-CN" altLang="en-US" sz="1500" dirty="0">
+                        <a:latin typeface="MS PGothic" panose="020B0600070205080204" pitchFamily="34" charset="-128"/>
+                        <a:ea typeface="MS PGothic" panose="020B0600070205080204" pitchFamily="34" charset="-128"/>
+                      </a:endParaRPr>
+                    </a:p>
+                  </a:txBody>
+                  <a:tcPr anchor="ctr"/>
+                </a:tc>
+                <a:tc>
+                  <a:txBody>
+                    <a:bodyPr/>
+                    <a:lstStyle/>
+                    <a:p>
+                      <a:r>
+                        <a:rPr lang="en-US" altLang="zh-CN" sz="1500" dirty="0">
+                          <a:latin typeface="MS PGothic" panose="020B0600070205080204" pitchFamily="34" charset="-128"/>
+                          <a:ea typeface="MS PGothic" panose="020B0600070205080204" pitchFamily="34" charset="-128"/>
+                        </a:rPr>
+                        <a:t>E-mail</a:t>
+                      </a:r>
+                      <a:endParaRPr lang="zh-CN" altLang="en-US" sz="1500" dirty="0">
+                        <a:latin typeface="MS PGothic" panose="020B0600070205080204" pitchFamily="34" charset="-128"/>
+                        <a:ea typeface="MS PGothic" panose="020B0600070205080204" pitchFamily="34" charset="-128"/>
+                      </a:endParaRPr>
+                    </a:p>
+                  </a:txBody>
+                  <a:tcPr anchor="ctr"/>
+                </a:tc>
+                <a:tc>
+                  <a:txBody>
+                    <a:bodyPr/>
+                    <a:lstStyle/>
+                    <a:p>
+                      <a:r>
+                        <a:rPr lang="en-US" altLang="zh-CN" sz="1500" dirty="0">
+                          <a:latin typeface="MS PGothic" panose="020B0600070205080204" pitchFamily="34" charset="-128"/>
+                          <a:ea typeface="MS PGothic" panose="020B0600070205080204" pitchFamily="34" charset="-128"/>
+                        </a:rPr>
+                        <a:t>E-mail &amp; 7x24</a:t>
+                      </a:r>
+                      <a:r>
+                        <a:rPr lang="ja-JP" altLang="en-US" sz="1500" dirty="0">
+                          <a:latin typeface="MS PGothic" panose="020B0600070205080204" pitchFamily="34" charset="-128"/>
+                          <a:ea typeface="MS PGothic" panose="020B0600070205080204" pitchFamily="34" charset="-128"/>
+                        </a:rPr>
+                        <a:t> </a:t>
+                      </a:r>
+                      <a:r>
+                        <a:rPr lang="en-US" altLang="ja-JP" sz="1500" dirty="0">
+                          <a:latin typeface="MS PGothic" panose="020B0600070205080204" pitchFamily="34" charset="-128"/>
+                          <a:ea typeface="MS PGothic" panose="020B0600070205080204" pitchFamily="34" charset="-128"/>
+                        </a:rPr>
+                        <a:t>CSR</a:t>
+                      </a:r>
+                      <a:endParaRPr lang="en-US" altLang="zh-CN" sz="1500" dirty="0">
+                        <a:latin typeface="MS PGothic" panose="020B0600070205080204" pitchFamily="34" charset="-128"/>
+                        <a:ea typeface="MS PGothic" panose="020B0600070205080204" pitchFamily="34" charset="-128"/>
+                      </a:endParaRPr>
+                    </a:p>
+                  </a:txBody>
+                  <a:tcPr anchor="ctr"/>
+                </a:tc>
+                <a:extLst>
+                  <a:ext uri="{0D108BD9-81ED-4DB2-BD59-A6C34878D82A}">
+                    <a16:rowId xmlns:a16="http://schemas.microsoft.com/office/drawing/2014/main" val="366382685"/>
+                  </a:ext>
+                </a:extLst>
+              </a:tr>
+              <a:tr h="400632">
+                <a:tc>
+                  <a:txBody>
+                    <a:bodyPr/>
+                    <a:lstStyle/>
+                    <a:p>
+                      <a:r>
+                        <a:rPr lang="ja-JP" altLang="en-US" sz="1500" dirty="0">
+                          <a:latin typeface="MS PGothic" panose="020B0600070205080204" pitchFamily="34" charset="-128"/>
+                          <a:ea typeface="MS PGothic" panose="020B0600070205080204" pitchFamily="34" charset="-128"/>
+                        </a:rPr>
+                        <a:t>対象ユーザー</a:t>
+                      </a:r>
+                      <a:endParaRPr lang="zh-CN" altLang="en-US" sz="1500" dirty="0">
+                        <a:latin typeface="MS PGothic" panose="020B0600070205080204" pitchFamily="34" charset="-128"/>
+                        <a:ea typeface="MS PGothic" panose="020B0600070205080204" pitchFamily="34" charset="-128"/>
+                      </a:endParaRPr>
+                    </a:p>
+                  </a:txBody>
+                  <a:tcPr anchor="ctr"/>
+                </a:tc>
+                <a:tc>
+                  <a:txBody>
+                    <a:bodyPr/>
+                    <a:lstStyle/>
+                    <a:p>
+                      <a:r>
+                        <a:rPr lang="ja-JP" altLang="en-US" sz="1500" dirty="0">
+                          <a:latin typeface="MS PGothic" panose="020B0600070205080204" pitchFamily="34" charset="-128"/>
+                          <a:ea typeface="MS PGothic" panose="020B0600070205080204" pitchFamily="34" charset="-128"/>
+                        </a:rPr>
+                        <a:t>データ管理やカスタマイズをできるチーム</a:t>
+                      </a:r>
+                      <a:endParaRPr lang="zh-CN" altLang="en-US" sz="1500" dirty="0">
+                        <a:latin typeface="MS PGothic" panose="020B0600070205080204" pitchFamily="34" charset="-128"/>
+                        <a:ea typeface="MS PGothic" panose="020B0600070205080204" pitchFamily="34" charset="-128"/>
+                      </a:endParaRPr>
+                    </a:p>
+                  </a:txBody>
+                  <a:tcPr anchor="ctr"/>
+                </a:tc>
+                <a:tc>
+                  <a:txBody>
+                    <a:bodyPr/>
+                    <a:lstStyle/>
+                    <a:p>
+                      <a:r>
+                        <a:rPr lang="en-US" altLang="ja-JP" sz="1500" dirty="0">
+                          <a:latin typeface="MS PGothic" panose="020B0600070205080204" pitchFamily="34" charset="-128"/>
+                          <a:ea typeface="MS PGothic" panose="020B0600070205080204" pitchFamily="34" charset="-128"/>
+                        </a:rPr>
+                        <a:t>AWS</a:t>
+                      </a:r>
+                      <a:r>
+                        <a:rPr lang="ja-JP" altLang="en-US" sz="1500" dirty="0">
+                          <a:latin typeface="MS PGothic" panose="020B0600070205080204" pitchFamily="34" charset="-128"/>
+                          <a:ea typeface="MS PGothic" panose="020B0600070205080204" pitchFamily="34" charset="-128"/>
+                        </a:rPr>
+                        <a:t>環境でセキュアかつ柔軟に運用したい中小組織</a:t>
+                      </a:r>
+                      <a:endParaRPr lang="zh-CN" altLang="en-US" sz="1500" dirty="0">
+                        <a:latin typeface="MS PGothic" panose="020B0600070205080204" pitchFamily="34" charset="-128"/>
+                        <a:ea typeface="MS PGothic" panose="020B0600070205080204" pitchFamily="34" charset="-128"/>
+                      </a:endParaRPr>
+                    </a:p>
+                  </a:txBody>
+                  <a:tcPr anchor="ctr"/>
+                </a:tc>
+                <a:tc>
+                  <a:txBody>
+                    <a:bodyPr/>
+                    <a:lstStyle/>
+                    <a:p>
+                      <a:r>
+                        <a:rPr lang="ja-JP" altLang="en-US" sz="1500" dirty="0">
+                          <a:latin typeface="MS PGothic" panose="020B0600070205080204" pitchFamily="34" charset="-128"/>
+                          <a:ea typeface="MS PGothic" panose="020B0600070205080204" pitchFamily="34" charset="-128"/>
+                        </a:rPr>
+                        <a:t>高度なセキュリティ、管理機能、手厚いサポートを必要とする大規模組織</a:t>
+                      </a:r>
+                      <a:endParaRPr lang="en-US" altLang="zh-CN" sz="1500" dirty="0">
+                        <a:latin typeface="MS PGothic" panose="020B0600070205080204" pitchFamily="34" charset="-128"/>
+                        <a:ea typeface="MS PGothic" panose="020B0600070205080204" pitchFamily="34" charset="-128"/>
+                      </a:endParaRPr>
+                    </a:p>
+                  </a:txBody>
+                  <a:tcPr anchor="ctr"/>
+                </a:tc>
+                <a:extLst>
+                  <a:ext uri="{0D108BD9-81ED-4DB2-BD59-A6C34878D82A}">
+                    <a16:rowId xmlns:a16="http://schemas.microsoft.com/office/drawing/2014/main" val="923681105"/>
+                  </a:ext>
+                </a:extLst>
+              </a:tr>
+            </a:tbl>
+          </a:graphicData>
+        </a:graphic>
+      </p:graphicFrame>
+    </p:spTree>
+    <p:extLst>
+      <p:ext uri="{BB962C8B-B14F-4D97-AF65-F5344CB8AC3E}">
+        <p14:creationId xmlns:p14="http://schemas.microsoft.com/office/powerpoint/2010/main" val="4046599671"/>
       </p:ext>
     </p:extLst>
   </p:cSld>
